--- a/구독채널_관심도_분석기_발표.pptx
+++ b/구독채널_관심도_분석기_발표.pptx
@@ -17,8 +17,9 @@
     <p:sldId id="265" r:id="rId11"/>
     <p:sldId id="266" r:id="rId12"/>
     <p:sldId id="267" r:id="rId13"/>
-    <p:sldId id="268" r:id="rId14"/>
-    <p:sldId id="269" r:id="rId15"/>
+    <p:sldId id="270" r:id="rId14"/>
+    <p:sldId id="268" r:id="rId15"/>
+    <p:sldId id="269" r:id="rId16"/>
   </p:sldIdLst>
   <p:sldSz cx="12192000" cy="6858000"/>
   <p:notesSz cx="6858000" cy="9144000"/>
@@ -149,7 +150,7 @@
   <pc:docChgLst>
     <pc:chgData name="명준 송" userId="7e48128a0c33bc37" providerId="LiveId" clId="{A62D5C53-2774-4FE3-8307-3525D25D70A4}"/>
     <pc:docChg chg="undo custSel delSld modSld">
-      <pc:chgData name="명준 송" userId="7e48128a0c33bc37" providerId="LiveId" clId="{A62D5C53-2774-4FE3-8307-3525D25D70A4}" dt="2026-06-02T01:25:19.829" v="360" actId="1038"/>
+      <pc:chgData name="명준 송" userId="7e48128a0c33bc37" providerId="LiveId" clId="{A62D5C53-2774-4FE3-8307-3525D25D70A4}" dt="2026-06-02T03:59:07.988" v="367" actId="207"/>
       <pc:docMkLst>
         <pc:docMk/>
       </pc:docMkLst>
@@ -545,12 +546,36 @@
           </ac:spMkLst>
         </pc:spChg>
       </pc:sldChg>
-      <pc:sldChg chg="del">
-        <pc:chgData name="명준 송" userId="7e48128a0c33bc37" providerId="LiveId" clId="{A62D5C53-2774-4FE3-8307-3525D25D70A4}" dt="2026-06-02T01:19:17.976" v="170" actId="47"/>
+      <pc:sldChg chg="modSp del mod">
+        <pc:chgData name="명준 송" userId="7e48128a0c33bc37" providerId="LiveId" clId="{A62D5C53-2774-4FE3-8307-3525D25D70A4}" dt="2026-06-02T03:59:07.988" v="367" actId="207"/>
         <pc:sldMkLst>
           <pc:docMk/>
           <pc:sldMk cId="0" sldId="270"/>
         </pc:sldMkLst>
+        <pc:spChg chg="mod">
+          <ac:chgData name="명준 송" userId="7e48128a0c33bc37" providerId="LiveId" clId="{A62D5C53-2774-4FE3-8307-3525D25D70A4}" dt="2026-06-02T03:58:17.132" v="365" actId="20577"/>
+          <ac:spMkLst>
+            <pc:docMk/>
+            <pc:sldMk cId="0" sldId="270"/>
+            <ac:spMk id="7" creationId="{00000000-0000-0000-0000-000000000000}"/>
+          </ac:spMkLst>
+        </pc:spChg>
+        <pc:spChg chg="mod">
+          <ac:chgData name="명준 송" userId="7e48128a0c33bc37" providerId="LiveId" clId="{A62D5C53-2774-4FE3-8307-3525D25D70A4}" dt="2026-06-02T03:58:53.253" v="366" actId="207"/>
+          <ac:spMkLst>
+            <pc:docMk/>
+            <pc:sldMk cId="0" sldId="270"/>
+            <ac:spMk id="10" creationId="{00000000-0000-0000-0000-000000000000}"/>
+          </ac:spMkLst>
+        </pc:spChg>
+        <pc:spChg chg="mod">
+          <ac:chgData name="명준 송" userId="7e48128a0c33bc37" providerId="LiveId" clId="{A62D5C53-2774-4FE3-8307-3525D25D70A4}" dt="2026-06-02T03:59:07.988" v="367" actId="207"/>
+          <ac:spMkLst>
+            <pc:docMk/>
+            <pc:sldMk cId="0" sldId="270"/>
+            <ac:spMk id="13" creationId="{00000000-0000-0000-0000-000000000000}"/>
+          </ac:spMkLst>
+        </pc:spChg>
       </pc:sldChg>
     </pc:docChg>
   </pc:docChgLst>
@@ -7461,7 +7486,7 @@
         <p:spPr>
           <a:xfrm>
             <a:off x="0" y="0"/>
-            <a:ext cx="12191695" cy="6858000"/>
+            <a:ext cx="12192000" cy="6858000"/>
           </a:xfrm>
           <a:prstGeom prst="rect">
             <a:avLst/>
@@ -7582,7 +7607,7 @@
                 </a:solidFill>
                 <a:latin typeface="Consolas"/>
               </a:rPr>
-              <a:t>11 · DATA STRATEGY</a:t>
+              <a:t>10 · AI TOOL</a:t>
             </a:r>
           </a:p>
         </p:txBody>
@@ -7621,13 +7646,13 @@
               </a:spcAft>
             </a:pPr>
             <a:r>
-              <a:rPr sz="3000" b="1">
+              <a:rPr sz="2800" b="1">
                 <a:solidFill>
                   <a:srgbClr val="F2F2F2"/>
                 </a:solidFill>
                 <a:latin typeface="Malgun Gothic"/>
               </a:rPr>
-              <a:t>Takeout 하이브리드 — 비용 vs 정확도</a:t>
+              <a:t>새 채널 추천 고도화 — 시청기록 · 카테고리 다양성</a:t>
             </a:r>
           </a:p>
         </p:txBody>
@@ -7686,7 +7711,7 @@
         <p:spPr>
           <a:xfrm>
             <a:off x="502920" y="1371600"/>
-            <a:ext cx="11155680" cy="457200"/>
+            <a:ext cx="11155680" cy="266740"/>
           </a:xfrm>
           <a:prstGeom prst="rect">
             <a:avLst/>
@@ -7711,42 +7736,1632 @@
               </a:spcAft>
             </a:pPr>
             <a:r>
-              <a:rPr sz="1400" b="0">
+              <a:rPr sz="1400" b="0" dirty="0" err="1">
                 <a:solidFill>
                   <a:srgbClr val="9A9AA2"/>
                 </a:solidFill>
                 <a:latin typeface="Malgun Gothic"/>
               </a:rPr>
-              <a:t>YouTube API엔 "내 댓글·시청 기록 전체" 조회가 없다 → </a:t>
-            </a:r>
-            <a:r>
-              <a:rPr sz="1400" b="1">
+              <a:t>구독</a:t>
+            </a:r>
+            <a:r>
+              <a:rPr sz="1400" b="0" dirty="0">
+                <a:solidFill>
+                  <a:srgbClr val="9A9AA2"/>
+                </a:solidFill>
+                <a:latin typeface="Malgun Gothic"/>
+              </a:rPr>
+              <a:t> </a:t>
+            </a:r>
+            <a:r>
+              <a:rPr sz="1400" b="0" dirty="0" err="1">
+                <a:solidFill>
+                  <a:srgbClr val="9A9AA2"/>
+                </a:solidFill>
+                <a:latin typeface="Malgun Gothic"/>
+              </a:rPr>
+              <a:t>목록만이</a:t>
+            </a:r>
+            <a:r>
+              <a:rPr sz="1400" b="0" dirty="0">
+                <a:solidFill>
+                  <a:srgbClr val="9A9AA2"/>
+                </a:solidFill>
+                <a:latin typeface="Malgun Gothic"/>
+              </a:rPr>
+              <a:t> </a:t>
+            </a:r>
+            <a:r>
+              <a:rPr sz="1400" b="0" dirty="0" err="1">
+                <a:solidFill>
+                  <a:srgbClr val="9A9AA2"/>
+                </a:solidFill>
+                <a:latin typeface="Malgun Gothic"/>
+              </a:rPr>
+              <a:t>아니라</a:t>
+            </a:r>
+            <a:r>
+              <a:rPr sz="1400" b="0" dirty="0">
+                <a:solidFill>
+                  <a:srgbClr val="9A9AA2"/>
+                </a:solidFill>
+                <a:latin typeface="Malgun Gothic"/>
+              </a:rPr>
+              <a:t> </a:t>
+            </a:r>
+            <a:r>
+              <a:rPr sz="1400" b="1" dirty="0" err="1">
                 <a:solidFill>
                   <a:srgbClr val="F2F2F2"/>
                 </a:solidFill>
                 <a:latin typeface="Malgun Gothic"/>
               </a:rPr>
-              <a:t>Google Takeout 파일을 보조 입력으로 받아 보강</a:t>
-            </a:r>
-          </a:p>
-        </p:txBody>
-      </p:sp>
-      <p:sp>
-        <p:nvSpPr>
-          <p:cNvPr id="8" name="Rectangle 7"/>
+              <a:t>최근</a:t>
+            </a:r>
+            <a:r>
+              <a:rPr sz="1400" b="1" dirty="0">
+                <a:solidFill>
+                  <a:srgbClr val="F2F2F2"/>
+                </a:solidFill>
+                <a:latin typeface="Malgun Gothic"/>
+              </a:rPr>
+              <a:t> </a:t>
+            </a:r>
+            <a:r>
+              <a:rPr sz="1400" b="1" dirty="0" err="1">
+                <a:solidFill>
+                  <a:srgbClr val="F2F2F2"/>
+                </a:solidFill>
+                <a:latin typeface="Malgun Gothic"/>
+              </a:rPr>
+              <a:t>시청</a:t>
+            </a:r>
+            <a:r>
+              <a:rPr sz="1400" b="1" dirty="0">
+                <a:solidFill>
+                  <a:srgbClr val="F2F2F2"/>
+                </a:solidFill>
+                <a:latin typeface="Malgun Gothic"/>
+              </a:rPr>
+              <a:t> 기</a:t>
+            </a:r>
+            <a:r>
+              <a:rPr lang="ko-KR" altLang="en-US" sz="1400" b="1" dirty="0">
+                <a:solidFill>
+                  <a:srgbClr val="F2F2F2"/>
+                </a:solidFill>
+                <a:latin typeface="Malgun Gothic"/>
+              </a:rPr>
+              <a:t>록</a:t>
+            </a:r>
+            <a:r>
+              <a:rPr sz="1400" b="0" dirty="0" err="1">
+                <a:solidFill>
+                  <a:srgbClr val="9A9AA2"/>
+                </a:solidFill>
+                <a:latin typeface="Malgun Gothic"/>
+              </a:rPr>
+              <a:t>까지</a:t>
+            </a:r>
+            <a:r>
+              <a:rPr sz="1400" b="0" dirty="0">
+                <a:solidFill>
+                  <a:srgbClr val="9A9AA2"/>
+                </a:solidFill>
+                <a:latin typeface="Malgun Gothic"/>
+              </a:rPr>
+              <a:t> </a:t>
+            </a:r>
+            <a:r>
+              <a:rPr sz="1400" b="0" dirty="0" err="1">
+                <a:solidFill>
+                  <a:srgbClr val="9A9AA2"/>
+                </a:solidFill>
+                <a:latin typeface="Malgun Gothic"/>
+              </a:rPr>
+              <a:t>반영하고</a:t>
+            </a:r>
+            <a:r>
+              <a:rPr sz="1400" b="0" dirty="0">
+                <a:solidFill>
+                  <a:srgbClr val="9A9AA2"/>
+                </a:solidFill>
+                <a:latin typeface="Malgun Gothic"/>
+              </a:rPr>
+              <a:t>, 한 </a:t>
+            </a:r>
+            <a:r>
+              <a:rPr sz="1400" b="0" dirty="0" err="1">
+                <a:solidFill>
+                  <a:srgbClr val="9A9AA2"/>
+                </a:solidFill>
+                <a:latin typeface="Malgun Gothic"/>
+              </a:rPr>
+              <a:t>카테고리</a:t>
+            </a:r>
+            <a:r>
+              <a:rPr sz="1400" b="0" dirty="0">
+                <a:solidFill>
+                  <a:srgbClr val="9A9AA2"/>
+                </a:solidFill>
+                <a:latin typeface="Malgun Gothic"/>
+              </a:rPr>
+              <a:t> </a:t>
+            </a:r>
+            <a:r>
+              <a:rPr sz="1400" b="0" dirty="0" err="1">
+                <a:solidFill>
+                  <a:srgbClr val="9A9AA2"/>
+                </a:solidFill>
+                <a:latin typeface="Malgun Gothic"/>
+              </a:rPr>
+              <a:t>쏠림을</a:t>
+            </a:r>
+            <a:r>
+              <a:rPr sz="1400" b="0" dirty="0">
+                <a:solidFill>
+                  <a:srgbClr val="9A9AA2"/>
+                </a:solidFill>
+                <a:latin typeface="Malgun Gothic"/>
+              </a:rPr>
+              <a:t> </a:t>
+            </a:r>
+            <a:r>
+              <a:rPr sz="1400" b="1" dirty="0" err="1">
+                <a:solidFill>
+                  <a:srgbClr val="F2F2F2"/>
+                </a:solidFill>
+                <a:latin typeface="Malgun Gothic"/>
+              </a:rPr>
+              <a:t>관심사별로</a:t>
+            </a:r>
+            <a:r>
+              <a:rPr sz="1400" b="1" dirty="0">
+                <a:solidFill>
+                  <a:srgbClr val="F2F2F2"/>
+                </a:solidFill>
+                <a:latin typeface="Malgun Gothic"/>
+              </a:rPr>
+              <a:t> </a:t>
+            </a:r>
+            <a:r>
+              <a:rPr sz="1400" b="1" dirty="0" err="1">
+                <a:solidFill>
+                  <a:srgbClr val="F2F2F2"/>
+                </a:solidFill>
+                <a:latin typeface="Malgun Gothic"/>
+              </a:rPr>
+              <a:t>고르게</a:t>
+            </a:r>
+            <a:r>
+              <a:rPr sz="1400" b="0" dirty="0">
+                <a:solidFill>
+                  <a:srgbClr val="9A9AA2"/>
+                </a:solidFill>
+                <a:latin typeface="Malgun Gothic"/>
+              </a:rPr>
+              <a:t> </a:t>
+            </a:r>
+            <a:r>
+              <a:rPr sz="1400" b="0" dirty="0" err="1">
+                <a:solidFill>
+                  <a:srgbClr val="9A9AA2"/>
+                </a:solidFill>
+                <a:latin typeface="Malgun Gothic"/>
+              </a:rPr>
+              <a:t>추천하도록</a:t>
+            </a:r>
+            <a:r>
+              <a:rPr sz="1400" b="0" dirty="0">
+                <a:solidFill>
+                  <a:srgbClr val="9A9AA2"/>
+                </a:solidFill>
+                <a:latin typeface="Malgun Gothic"/>
+              </a:rPr>
+              <a:t> </a:t>
+            </a:r>
+            <a:r>
+              <a:rPr sz="1400" b="0" dirty="0" err="1">
+                <a:solidFill>
+                  <a:srgbClr val="9A9AA2"/>
+                </a:solidFill>
+                <a:latin typeface="Malgun Gothic"/>
+              </a:rPr>
+              <a:t>개선</a:t>
+            </a:r>
+            <a:endParaRPr sz="1400" b="0" dirty="0">
+              <a:solidFill>
+                <a:srgbClr val="9A9AA2"/>
+              </a:solidFill>
+              <a:latin typeface="Malgun Gothic"/>
+            </a:endParaRPr>
+          </a:p>
+        </p:txBody>
+      </p:sp>
+      <p:sp>
+        <p:nvSpPr>
+          <p:cNvPr id="8" name="Rounded Rectangle 7"/>
           <p:cNvSpPr/>
           <p:nvPr/>
         </p:nvSpPr>
         <p:spPr>
           <a:xfrm>
-            <a:off x="502920" y="2011680"/>
-            <a:ext cx="11183112" cy="502920"/>
-          </a:xfrm>
-          <a:prstGeom prst="rect">
+            <a:off x="502920" y="1920240"/>
+            <a:ext cx="3611880" cy="3246120"/>
+          </a:xfrm>
+          <a:prstGeom prst="roundRect">
             <a:avLst/>
           </a:prstGeom>
           <a:solidFill>
-            <a:srgbClr val="24242A"/>
+            <a:srgbClr val="161619"/>
+          </a:solidFill>
+          <a:ln w="12700">
+            <a:solidFill>
+              <a:srgbClr val="2A2A30"/>
+            </a:solidFill>
+          </a:ln>
+          <a:effectLst/>
+        </p:spPr>
+        <p:style>
+          <a:lnRef idx="1">
+            <a:schemeClr val="accent1"/>
+          </a:lnRef>
+          <a:fillRef idx="3">
+            <a:schemeClr val="accent1"/>
+          </a:fillRef>
+          <a:effectRef idx="2">
+            <a:schemeClr val="accent1"/>
+          </a:effectRef>
+          <a:fontRef idx="minor">
+            <a:schemeClr val="lt1"/>
+          </a:fontRef>
+        </p:style>
+        <p:txBody>
+          <a:bodyPr rtlCol="0" anchor="ctr"/>
+          <a:lstStyle/>
+          <a:p>
+            <a:pPr algn="ctr"/>
+            <a:endParaRPr/>
+          </a:p>
+        </p:txBody>
+      </p:sp>
+      <p:sp>
+        <p:nvSpPr>
+          <p:cNvPr id="9" name="TextBox 8"/>
+          <p:cNvSpPr txBox="1"/>
+          <p:nvPr/>
+        </p:nvSpPr>
+        <p:spPr>
+          <a:xfrm>
+            <a:off x="731520" y="2121408"/>
+            <a:ext cx="3200400" cy="502920"/>
+          </a:xfrm>
+          <a:prstGeom prst="rect">
+            <a:avLst/>
+          </a:prstGeom>
+          <a:noFill/>
+        </p:spPr>
+        <p:txBody>
+          <a:bodyPr wrap="square" lIns="25400" tIns="25400" rIns="25400" bIns="25400" anchor="t">
+            <a:spAutoFit/>
+          </a:bodyPr>
+          <a:lstStyle/>
+          <a:p>
+            <a:pPr algn="l">
+              <a:lnSpc>
+                <a:spcPct val="100000"/>
+              </a:lnSpc>
+              <a:spcBef>
+                <a:spcPts val="0"/>
+              </a:spcBef>
+              <a:spcAft>
+                <a:spcPts val="600"/>
+              </a:spcAft>
+            </a:pPr>
+            <a:r>
+              <a:rPr sz="2000" b="0">
+                <a:solidFill>
+                  <a:srgbClr val="F2F2F2"/>
+                </a:solidFill>
+                <a:latin typeface="Malgun Gothic"/>
+              </a:rPr>
+              <a:t>📺  </a:t>
+            </a:r>
+            <a:r>
+              <a:rPr sz="1600" b="1">
+                <a:solidFill>
+                  <a:srgbClr val="2ECC71"/>
+                </a:solidFill>
+                <a:latin typeface="Malgun Gothic"/>
+              </a:rPr>
+              <a:t>비구독·최근 시청 반영</a:t>
+            </a:r>
+          </a:p>
+        </p:txBody>
+      </p:sp>
+      <p:sp>
+        <p:nvSpPr>
+          <p:cNvPr id="10" name="TextBox 9"/>
+          <p:cNvSpPr txBox="1"/>
+          <p:nvPr/>
+        </p:nvSpPr>
+        <p:spPr>
+          <a:xfrm>
+            <a:off x="731520" y="2743200"/>
+            <a:ext cx="3200400" cy="1368131"/>
+          </a:xfrm>
+          <a:prstGeom prst="rect">
+            <a:avLst/>
+          </a:prstGeom>
+          <a:noFill/>
+        </p:spPr>
+        <p:txBody>
+          <a:bodyPr wrap="square" lIns="25400" tIns="25400" rIns="25400" bIns="25400" anchor="t">
+            <a:spAutoFit/>
+          </a:bodyPr>
+          <a:lstStyle/>
+          <a:p>
+            <a:pPr algn="l">
+              <a:lnSpc>
+                <a:spcPct val="118000"/>
+              </a:lnSpc>
+              <a:spcBef>
+                <a:spcPts val="0"/>
+              </a:spcBef>
+              <a:spcAft>
+                <a:spcPts val="500"/>
+              </a:spcAft>
+            </a:pPr>
+            <a:r>
+              <a:rPr sz="1200" b="0" dirty="0">
+                <a:solidFill>
+                  <a:srgbClr val="F2F2F2"/>
+                </a:solidFill>
+                <a:latin typeface="Malgun Gothic"/>
+              </a:rPr>
+              <a:t>• watch-</a:t>
+            </a:r>
+            <a:r>
+              <a:rPr sz="1200" b="0" dirty="0" err="1">
+                <a:solidFill>
+                  <a:srgbClr val="F2F2F2"/>
+                </a:solidFill>
+                <a:latin typeface="Malgun Gothic"/>
+              </a:rPr>
+              <a:t>history의</a:t>
+            </a:r>
+            <a:r>
+              <a:rPr sz="1200" b="0" dirty="0">
+                <a:solidFill>
+                  <a:srgbClr val="F2F2F2"/>
+                </a:solidFill>
+                <a:latin typeface="Malgun Gothic"/>
+              </a:rPr>
+              <a:t> “</a:t>
+            </a:r>
+            <a:r>
+              <a:rPr sz="1200" b="0" dirty="0" err="1">
+                <a:solidFill>
+                  <a:srgbClr val="F2F2F2"/>
+                </a:solidFill>
+                <a:latin typeface="Malgun Gothic"/>
+              </a:rPr>
+              <a:t>최근</a:t>
+            </a:r>
+            <a:r>
+              <a:rPr sz="1200" b="0" dirty="0">
+                <a:solidFill>
+                  <a:srgbClr val="F2F2F2"/>
+                </a:solidFill>
+                <a:latin typeface="Malgun Gothic"/>
+              </a:rPr>
+              <a:t> </a:t>
+            </a:r>
+            <a:r>
+              <a:rPr sz="1200" b="0" dirty="0" err="1">
+                <a:solidFill>
+                  <a:srgbClr val="F2F2F2"/>
+                </a:solidFill>
+                <a:latin typeface="Malgun Gothic"/>
+              </a:rPr>
+              <a:t>봤지만</a:t>
+            </a:r>
+            <a:endParaRPr sz="1200" b="0" dirty="0">
+              <a:solidFill>
+                <a:srgbClr val="F2F2F2"/>
+              </a:solidFill>
+              <a:latin typeface="Malgun Gothic"/>
+            </a:endParaRPr>
+          </a:p>
+          <a:p>
+            <a:pPr algn="l">
+              <a:lnSpc>
+                <a:spcPct val="118000"/>
+              </a:lnSpc>
+              <a:spcBef>
+                <a:spcPts val="0"/>
+              </a:spcBef>
+              <a:spcAft>
+                <a:spcPts val="500"/>
+              </a:spcAft>
+            </a:pPr>
+            <a:r>
+              <a:rPr sz="1200" b="0" dirty="0">
+                <a:solidFill>
+                  <a:schemeClr val="bg1"/>
+                </a:solidFill>
+                <a:latin typeface="Malgun Gothic"/>
+              </a:rPr>
+              <a:t>  </a:t>
+            </a:r>
+            <a:r>
+              <a:rPr sz="1200" b="0" dirty="0" err="1">
+                <a:solidFill>
+                  <a:schemeClr val="bg1"/>
+                </a:solidFill>
+                <a:latin typeface="Malgun Gothic"/>
+              </a:rPr>
+              <a:t>구독</a:t>
+            </a:r>
+            <a:r>
+              <a:rPr sz="1200" b="0" dirty="0">
+                <a:solidFill>
+                  <a:schemeClr val="bg1"/>
+                </a:solidFill>
+                <a:latin typeface="Malgun Gothic"/>
+              </a:rPr>
+              <a:t> 안 한 </a:t>
+            </a:r>
+            <a:r>
+              <a:rPr sz="1200" b="0" dirty="0" err="1">
+                <a:solidFill>
+                  <a:schemeClr val="bg1"/>
+                </a:solidFill>
+                <a:latin typeface="Malgun Gothic"/>
+              </a:rPr>
+              <a:t>채널”</a:t>
+            </a:r>
+            <a:r>
+              <a:rPr sz="1200" b="0" dirty="0" err="1">
+                <a:solidFill>
+                  <a:srgbClr val="9A9AA2"/>
+                </a:solidFill>
+                <a:latin typeface="Malgun Gothic"/>
+              </a:rPr>
+              <a:t>을</a:t>
+            </a:r>
+            <a:r>
+              <a:rPr sz="1200" b="0" dirty="0">
+                <a:solidFill>
+                  <a:srgbClr val="9A9AA2"/>
+                </a:solidFill>
+                <a:latin typeface="Malgun Gothic"/>
+              </a:rPr>
+              <a:t> </a:t>
+            </a:r>
+            <a:r>
+              <a:rPr sz="1200" b="0" dirty="0" err="1">
+                <a:solidFill>
+                  <a:srgbClr val="9A9AA2"/>
+                </a:solidFill>
+                <a:latin typeface="Malgun Gothic"/>
+              </a:rPr>
+              <a:t>별도</a:t>
+            </a:r>
+            <a:r>
+              <a:rPr sz="1200" b="0" dirty="0">
+                <a:solidFill>
+                  <a:srgbClr val="9A9AA2"/>
+                </a:solidFill>
+                <a:latin typeface="Malgun Gothic"/>
+              </a:rPr>
+              <a:t> </a:t>
+            </a:r>
+            <a:r>
+              <a:rPr sz="1200" b="0" dirty="0" err="1">
+                <a:solidFill>
+                  <a:srgbClr val="9A9AA2"/>
+                </a:solidFill>
+                <a:latin typeface="Malgun Gothic"/>
+              </a:rPr>
+              <a:t>섹션</a:t>
+            </a:r>
+            <a:r>
+              <a:rPr sz="1200" b="0" dirty="0">
+                <a:solidFill>
+                  <a:srgbClr val="9A9AA2"/>
+                </a:solidFill>
+                <a:latin typeface="Malgun Gothic"/>
+              </a:rPr>
+              <a:t> </a:t>
+            </a:r>
+            <a:r>
+              <a:rPr sz="1200" b="0" dirty="0" err="1">
+                <a:solidFill>
+                  <a:srgbClr val="9A9AA2"/>
+                </a:solidFill>
+                <a:latin typeface="Malgun Gothic"/>
+              </a:rPr>
+              <a:t>추천</a:t>
+            </a:r>
+            <a:endParaRPr sz="1200" b="0" dirty="0">
+              <a:solidFill>
+                <a:srgbClr val="9A9AA2"/>
+              </a:solidFill>
+              <a:latin typeface="Malgun Gothic"/>
+            </a:endParaRPr>
+          </a:p>
+          <a:p>
+            <a:pPr algn="l">
+              <a:lnSpc>
+                <a:spcPct val="118000"/>
+              </a:lnSpc>
+              <a:spcBef>
+                <a:spcPts val="0"/>
+              </a:spcBef>
+              <a:spcAft>
+                <a:spcPts val="500"/>
+              </a:spcAft>
+            </a:pPr>
+            <a:r>
+              <a:rPr sz="1200" b="0" dirty="0">
+                <a:solidFill>
+                  <a:srgbClr val="F2F2F2"/>
+                </a:solidFill>
+                <a:latin typeface="Malgun Gothic"/>
+              </a:rPr>
+              <a:t>• </a:t>
+            </a:r>
+            <a:r>
+              <a:rPr sz="1200" b="0" dirty="0" err="1">
+                <a:solidFill>
+                  <a:srgbClr val="F2F2F2"/>
+                </a:solidFill>
+                <a:latin typeface="Malgun Gothic"/>
+              </a:rPr>
+              <a:t>노이즈</a:t>
+            </a:r>
+            <a:r>
+              <a:rPr sz="1200" b="0" dirty="0">
+                <a:solidFill>
+                  <a:srgbClr val="F2F2F2"/>
+                </a:solidFill>
+                <a:latin typeface="Malgun Gothic"/>
+              </a:rPr>
+              <a:t> 컷: </a:t>
+            </a:r>
+            <a:r>
+              <a:rPr sz="1200" b="0" dirty="0" err="1">
+                <a:solidFill>
+                  <a:srgbClr val="F2F2F2"/>
+                </a:solidFill>
+                <a:latin typeface="Malgun Gothic"/>
+              </a:rPr>
+              <a:t>최근</a:t>
+            </a:r>
+            <a:r>
+              <a:rPr sz="1200" b="0" dirty="0">
+                <a:solidFill>
+                  <a:srgbClr val="F2F2F2"/>
+                </a:solidFill>
+                <a:latin typeface="Malgun Gothic"/>
+              </a:rPr>
+              <a:t> 90일 내 2회 </a:t>
+            </a:r>
+            <a:r>
+              <a:rPr sz="1200" b="0" dirty="0" err="1">
+                <a:solidFill>
+                  <a:srgbClr val="F2F2F2"/>
+                </a:solidFill>
+                <a:latin typeface="Malgun Gothic"/>
+              </a:rPr>
+              <a:t>이상</a:t>
+            </a:r>
+            <a:endParaRPr sz="1200" b="0" dirty="0">
+              <a:solidFill>
+                <a:srgbClr val="F2F2F2"/>
+              </a:solidFill>
+              <a:latin typeface="Malgun Gothic"/>
+            </a:endParaRPr>
+          </a:p>
+          <a:p>
+            <a:pPr algn="l">
+              <a:lnSpc>
+                <a:spcPct val="118000"/>
+              </a:lnSpc>
+              <a:spcBef>
+                <a:spcPts val="0"/>
+              </a:spcBef>
+              <a:spcAft>
+                <a:spcPts val="500"/>
+              </a:spcAft>
+            </a:pPr>
+            <a:r>
+              <a:rPr sz="1200" b="0" dirty="0">
+                <a:solidFill>
+                  <a:srgbClr val="F2F2F2"/>
+                </a:solidFill>
+                <a:latin typeface="Malgun Gothic"/>
+              </a:rPr>
+              <a:t>• </a:t>
+            </a:r>
+            <a:r>
+              <a:rPr sz="1200" b="0" dirty="0" err="1">
+                <a:solidFill>
+                  <a:srgbClr val="F2F2F2"/>
+                </a:solidFill>
+                <a:latin typeface="Malgun Gothic"/>
+              </a:rPr>
+              <a:t>빈도</a:t>
+            </a:r>
+            <a:r>
+              <a:rPr sz="1200" b="0" dirty="0">
+                <a:solidFill>
+                  <a:srgbClr val="F2F2F2"/>
+                </a:solidFill>
+                <a:latin typeface="Malgun Gothic"/>
+              </a:rPr>
+              <a:t> × </a:t>
+            </a:r>
+            <a:r>
+              <a:rPr sz="1200" b="0" dirty="0" err="1">
+                <a:solidFill>
+                  <a:srgbClr val="F2F2F2"/>
+                </a:solidFill>
+                <a:latin typeface="Malgun Gothic"/>
+              </a:rPr>
+              <a:t>최근성으로</a:t>
+            </a:r>
+            <a:r>
+              <a:rPr sz="1200" b="0" dirty="0">
+                <a:solidFill>
+                  <a:srgbClr val="F2F2F2"/>
+                </a:solidFill>
+                <a:latin typeface="Malgun Gothic"/>
+              </a:rPr>
+              <a:t> </a:t>
+            </a:r>
+            <a:r>
+              <a:rPr sz="1200" b="0" dirty="0" err="1">
+                <a:solidFill>
+                  <a:srgbClr val="F2F2F2"/>
+                </a:solidFill>
+                <a:latin typeface="Malgun Gothic"/>
+              </a:rPr>
+              <a:t>순위</a:t>
+            </a:r>
+            <a:endParaRPr sz="1200" b="0" dirty="0">
+              <a:solidFill>
+                <a:srgbClr val="F2F2F2"/>
+              </a:solidFill>
+              <a:latin typeface="Malgun Gothic"/>
+            </a:endParaRPr>
+          </a:p>
+          <a:p>
+            <a:pPr algn="l">
+              <a:lnSpc>
+                <a:spcPct val="118000"/>
+              </a:lnSpc>
+              <a:spcBef>
+                <a:spcPts val="0"/>
+              </a:spcBef>
+              <a:spcAft>
+                <a:spcPts val="500"/>
+              </a:spcAft>
+            </a:pPr>
+            <a:r>
+              <a:rPr sz="1150" b="0" dirty="0">
+                <a:solidFill>
+                  <a:srgbClr val="6A6A72"/>
+                </a:solidFill>
+                <a:latin typeface="Malgun Gothic"/>
+              </a:rPr>
+              <a:t>→ </a:t>
+            </a:r>
+            <a:r>
+              <a:rPr sz="1150" b="0" dirty="0" err="1">
+                <a:solidFill>
+                  <a:srgbClr val="6A6A72"/>
+                </a:solidFill>
+                <a:latin typeface="Malgun Gothic"/>
+              </a:rPr>
+              <a:t>항상</a:t>
+            </a:r>
+            <a:r>
+              <a:rPr sz="1150" b="0" dirty="0">
+                <a:solidFill>
+                  <a:srgbClr val="6A6A72"/>
+                </a:solidFill>
+                <a:latin typeface="Malgun Gothic"/>
+              </a:rPr>
+              <a:t> ‘</a:t>
+            </a:r>
+            <a:r>
+              <a:rPr sz="1150" b="0" dirty="0" err="1">
+                <a:solidFill>
+                  <a:srgbClr val="6A6A72"/>
+                </a:solidFill>
+                <a:latin typeface="Malgun Gothic"/>
+              </a:rPr>
+              <a:t>대체’가</a:t>
+            </a:r>
+            <a:r>
+              <a:rPr sz="1150" b="0" dirty="0">
+                <a:solidFill>
+                  <a:srgbClr val="6A6A72"/>
+                </a:solidFill>
+                <a:latin typeface="Malgun Gothic"/>
+              </a:rPr>
+              <a:t> </a:t>
+            </a:r>
+            <a:r>
+              <a:rPr sz="1150" b="0" dirty="0" err="1">
+                <a:solidFill>
+                  <a:srgbClr val="6A6A72"/>
+                </a:solidFill>
+                <a:latin typeface="Malgun Gothic"/>
+              </a:rPr>
+              <a:t>아니라</a:t>
+            </a:r>
+            <a:r>
+              <a:rPr sz="1150" b="0" dirty="0">
+                <a:solidFill>
+                  <a:srgbClr val="6A6A72"/>
+                </a:solidFill>
+                <a:latin typeface="Malgun Gothic"/>
+              </a:rPr>
+              <a:t> ‘</a:t>
+            </a:r>
+            <a:r>
+              <a:rPr sz="1150" b="0" dirty="0" err="1">
+                <a:solidFill>
+                  <a:srgbClr val="6A6A72"/>
+                </a:solidFill>
+                <a:latin typeface="Malgun Gothic"/>
+              </a:rPr>
+              <a:t>추가’로</a:t>
+            </a:r>
+            <a:r>
+              <a:rPr sz="1150" b="0" dirty="0">
+                <a:solidFill>
+                  <a:srgbClr val="6A6A72"/>
+                </a:solidFill>
+                <a:latin typeface="Malgun Gothic"/>
+              </a:rPr>
+              <a:t> </a:t>
+            </a:r>
+            <a:r>
+              <a:rPr sz="1150" b="0" dirty="0" err="1">
+                <a:solidFill>
+                  <a:srgbClr val="6A6A72"/>
+                </a:solidFill>
+                <a:latin typeface="Malgun Gothic"/>
+              </a:rPr>
+              <a:t>노출</a:t>
+            </a:r>
+            <a:endParaRPr sz="1150" b="0" dirty="0">
+              <a:solidFill>
+                <a:srgbClr val="6A6A72"/>
+              </a:solidFill>
+              <a:latin typeface="Malgun Gothic"/>
+            </a:endParaRPr>
+          </a:p>
+        </p:txBody>
+      </p:sp>
+      <p:sp>
+        <p:nvSpPr>
+          <p:cNvPr id="11" name="Rounded Rectangle 10"/>
+          <p:cNvSpPr/>
+          <p:nvPr/>
+        </p:nvSpPr>
+        <p:spPr>
+          <a:xfrm>
+            <a:off x="4279392" y="1920240"/>
+            <a:ext cx="3611880" cy="3246120"/>
+          </a:xfrm>
+          <a:prstGeom prst="roundRect">
+            <a:avLst/>
+          </a:prstGeom>
+          <a:solidFill>
+            <a:srgbClr val="161619"/>
+          </a:solidFill>
+          <a:ln w="12700">
+            <a:solidFill>
+              <a:srgbClr val="2A2A30"/>
+            </a:solidFill>
+          </a:ln>
+          <a:effectLst/>
+        </p:spPr>
+        <p:style>
+          <a:lnRef idx="1">
+            <a:schemeClr val="accent1"/>
+          </a:lnRef>
+          <a:fillRef idx="3">
+            <a:schemeClr val="accent1"/>
+          </a:fillRef>
+          <a:effectRef idx="2">
+            <a:schemeClr val="accent1"/>
+          </a:effectRef>
+          <a:fontRef idx="minor">
+            <a:schemeClr val="lt1"/>
+          </a:fontRef>
+        </p:style>
+        <p:txBody>
+          <a:bodyPr rtlCol="0" anchor="ctr"/>
+          <a:lstStyle/>
+          <a:p>
+            <a:pPr algn="ctr"/>
+            <a:endParaRPr/>
+          </a:p>
+        </p:txBody>
+      </p:sp>
+      <p:sp>
+        <p:nvSpPr>
+          <p:cNvPr id="12" name="TextBox 11"/>
+          <p:cNvSpPr txBox="1"/>
+          <p:nvPr/>
+        </p:nvSpPr>
+        <p:spPr>
+          <a:xfrm>
+            <a:off x="4507992" y="2121408"/>
+            <a:ext cx="3200400" cy="502920"/>
+          </a:xfrm>
+          <a:prstGeom prst="rect">
+            <a:avLst/>
+          </a:prstGeom>
+          <a:noFill/>
+        </p:spPr>
+        <p:txBody>
+          <a:bodyPr wrap="square" lIns="25400" tIns="25400" rIns="25400" bIns="25400" anchor="t">
+            <a:spAutoFit/>
+          </a:bodyPr>
+          <a:lstStyle/>
+          <a:p>
+            <a:pPr algn="l">
+              <a:lnSpc>
+                <a:spcPct val="100000"/>
+              </a:lnSpc>
+              <a:spcBef>
+                <a:spcPts val="0"/>
+              </a:spcBef>
+              <a:spcAft>
+                <a:spcPts val="600"/>
+              </a:spcAft>
+            </a:pPr>
+            <a:r>
+              <a:rPr sz="2000" b="0">
+                <a:solidFill>
+                  <a:srgbClr val="F2F2F2"/>
+                </a:solidFill>
+                <a:latin typeface="Malgun Gothic"/>
+              </a:rPr>
+              <a:t>🌱  </a:t>
+            </a:r>
+            <a:r>
+              <a:rPr sz="1600" b="1">
+                <a:solidFill>
+                  <a:srgbClr val="F4A844"/>
+                </a:solidFill>
+                <a:latin typeface="Malgun Gothic"/>
+              </a:rPr>
+              <a:t>취향 씨앗 확장</a:t>
+            </a:r>
+          </a:p>
+        </p:txBody>
+      </p:sp>
+      <p:sp>
+        <p:nvSpPr>
+          <p:cNvPr id="13" name="TextBox 12"/>
+          <p:cNvSpPr txBox="1"/>
+          <p:nvPr/>
+        </p:nvSpPr>
+        <p:spPr>
+          <a:xfrm>
+            <a:off x="4507992" y="2743200"/>
+            <a:ext cx="3200400" cy="1368131"/>
+          </a:xfrm>
+          <a:prstGeom prst="rect">
+            <a:avLst/>
+          </a:prstGeom>
+          <a:noFill/>
+        </p:spPr>
+        <p:txBody>
+          <a:bodyPr wrap="square" lIns="25400" tIns="25400" rIns="25400" bIns="25400" anchor="t">
+            <a:spAutoFit/>
+          </a:bodyPr>
+          <a:lstStyle/>
+          <a:p>
+            <a:pPr algn="l">
+              <a:lnSpc>
+                <a:spcPct val="118000"/>
+              </a:lnSpc>
+              <a:spcBef>
+                <a:spcPts val="0"/>
+              </a:spcBef>
+              <a:spcAft>
+                <a:spcPts val="500"/>
+              </a:spcAft>
+            </a:pPr>
+            <a:r>
+              <a:rPr sz="1200" b="0" dirty="0">
+                <a:solidFill>
+                  <a:srgbClr val="F2F2F2"/>
+                </a:solidFill>
+                <a:latin typeface="Malgun Gothic"/>
+              </a:rPr>
+              <a:t>• </a:t>
+            </a:r>
+            <a:r>
+              <a:rPr sz="1200" b="0" dirty="0" err="1">
+                <a:solidFill>
+                  <a:srgbClr val="F2F2F2"/>
+                </a:solidFill>
+                <a:latin typeface="Malgun Gothic"/>
+              </a:rPr>
+              <a:t>비구독·시청</a:t>
+            </a:r>
+            <a:r>
+              <a:rPr sz="1200" b="0" dirty="0">
+                <a:solidFill>
+                  <a:srgbClr val="F2F2F2"/>
+                </a:solidFill>
+                <a:latin typeface="Malgun Gothic"/>
+              </a:rPr>
+              <a:t> </a:t>
+            </a:r>
+            <a:r>
+              <a:rPr sz="1200" b="0" dirty="0" err="1">
+                <a:solidFill>
+                  <a:srgbClr val="F2F2F2"/>
+                </a:solidFill>
+                <a:latin typeface="Malgun Gothic"/>
+              </a:rPr>
+              <a:t>채널의</a:t>
+            </a:r>
+            <a:r>
+              <a:rPr sz="1200" b="0" dirty="0">
+                <a:solidFill>
+                  <a:srgbClr val="F2F2F2"/>
+                </a:solidFill>
+                <a:latin typeface="Malgun Gothic"/>
+              </a:rPr>
+              <a:t> </a:t>
+            </a:r>
+            <a:r>
+              <a:rPr sz="1200" b="0" dirty="0" err="1">
+                <a:solidFill>
+                  <a:srgbClr val="F2F2F2"/>
+                </a:solidFill>
+                <a:latin typeface="Malgun Gothic"/>
+              </a:rPr>
+              <a:t>영상</a:t>
+            </a:r>
+            <a:r>
+              <a:rPr sz="1200" b="0" dirty="0">
+                <a:solidFill>
+                  <a:srgbClr val="F2F2F2"/>
+                </a:solidFill>
+                <a:latin typeface="Malgun Gothic"/>
+              </a:rPr>
+              <a:t> </a:t>
+            </a:r>
+            <a:r>
+              <a:rPr sz="1200" b="0" dirty="0" err="1">
+                <a:solidFill>
+                  <a:srgbClr val="F2F2F2"/>
+                </a:solidFill>
+                <a:latin typeface="Malgun Gothic"/>
+              </a:rPr>
+              <a:t>제목을</a:t>
+            </a:r>
+            <a:endParaRPr sz="1200" b="0" dirty="0">
+              <a:solidFill>
+                <a:srgbClr val="F2F2F2"/>
+              </a:solidFill>
+              <a:latin typeface="Malgun Gothic"/>
+            </a:endParaRPr>
+          </a:p>
+          <a:p>
+            <a:pPr algn="l">
+              <a:lnSpc>
+                <a:spcPct val="118000"/>
+              </a:lnSpc>
+              <a:spcBef>
+                <a:spcPts val="0"/>
+              </a:spcBef>
+              <a:spcAft>
+                <a:spcPts val="500"/>
+              </a:spcAft>
+            </a:pPr>
+            <a:r>
+              <a:rPr sz="1200" b="0" dirty="0">
+                <a:solidFill>
+                  <a:srgbClr val="9A9AA2"/>
+                </a:solidFill>
+                <a:latin typeface="Malgun Gothic"/>
+              </a:rPr>
+              <a:t>  </a:t>
+            </a:r>
+            <a:r>
+              <a:rPr sz="1200" b="0" dirty="0" err="1">
+                <a:solidFill>
+                  <a:schemeClr val="bg1"/>
+                </a:solidFill>
+                <a:latin typeface="Malgun Gothic"/>
+              </a:rPr>
+              <a:t>발굴</a:t>
+            </a:r>
+            <a:r>
+              <a:rPr sz="1200" b="0" dirty="0">
+                <a:solidFill>
+                  <a:schemeClr val="bg1"/>
+                </a:solidFill>
+                <a:latin typeface="Malgun Gothic"/>
+              </a:rPr>
+              <a:t> </a:t>
+            </a:r>
+            <a:r>
+              <a:rPr sz="1200" b="0" dirty="0" err="1">
+                <a:solidFill>
+                  <a:schemeClr val="bg1"/>
+                </a:solidFill>
+                <a:latin typeface="Malgun Gothic"/>
+              </a:rPr>
+              <a:t>키워드에</a:t>
+            </a:r>
+            <a:r>
+              <a:rPr sz="1200" b="0" dirty="0">
+                <a:solidFill>
+                  <a:schemeClr val="bg1"/>
+                </a:solidFill>
+                <a:latin typeface="Malgun Gothic"/>
+              </a:rPr>
+              <a:t> </a:t>
+            </a:r>
+            <a:r>
+              <a:rPr sz="1200" b="0" dirty="0" err="1">
+                <a:solidFill>
+                  <a:schemeClr val="bg1"/>
+                </a:solidFill>
+                <a:latin typeface="Malgun Gothic"/>
+              </a:rPr>
+              <a:t>합류</a:t>
+            </a:r>
+            <a:endParaRPr sz="1200" b="0" dirty="0">
+              <a:solidFill>
+                <a:schemeClr val="bg1"/>
+              </a:solidFill>
+              <a:latin typeface="Malgun Gothic"/>
+            </a:endParaRPr>
+          </a:p>
+          <a:p>
+            <a:pPr algn="l">
+              <a:lnSpc>
+                <a:spcPct val="118000"/>
+              </a:lnSpc>
+              <a:spcBef>
+                <a:spcPts val="0"/>
+              </a:spcBef>
+              <a:spcAft>
+                <a:spcPts val="500"/>
+              </a:spcAft>
+            </a:pPr>
+            <a:r>
+              <a:rPr sz="1200" b="0" dirty="0">
+                <a:solidFill>
+                  <a:srgbClr val="F2F2F2"/>
+                </a:solidFill>
+                <a:latin typeface="Malgun Gothic"/>
+              </a:rPr>
+              <a:t>• “</a:t>
+            </a:r>
+            <a:r>
+              <a:rPr sz="1200" b="0" dirty="0" err="1">
+                <a:solidFill>
+                  <a:srgbClr val="F2F2F2"/>
+                </a:solidFill>
+                <a:latin typeface="Malgun Gothic"/>
+              </a:rPr>
+              <a:t>실제로</a:t>
+            </a:r>
+            <a:r>
+              <a:rPr sz="1200" b="0" dirty="0">
+                <a:solidFill>
+                  <a:srgbClr val="F2F2F2"/>
+                </a:solidFill>
+                <a:latin typeface="Malgun Gothic"/>
+              </a:rPr>
+              <a:t> </a:t>
+            </a:r>
+            <a:r>
+              <a:rPr sz="1200" b="0" dirty="0" err="1">
+                <a:solidFill>
+                  <a:srgbClr val="F2F2F2"/>
+                </a:solidFill>
+                <a:latin typeface="Malgun Gothic"/>
+              </a:rPr>
+              <a:t>보는</a:t>
+            </a:r>
+            <a:r>
+              <a:rPr sz="1200" b="0" dirty="0">
+                <a:solidFill>
+                  <a:srgbClr val="F2F2F2"/>
+                </a:solidFill>
+                <a:latin typeface="Malgun Gothic"/>
+              </a:rPr>
+              <a:t> 것” </a:t>
+            </a:r>
+            <a:r>
+              <a:rPr sz="1200" b="0" dirty="0" err="1">
+                <a:solidFill>
+                  <a:srgbClr val="F2F2F2"/>
+                </a:solidFill>
+                <a:latin typeface="Malgun Gothic"/>
+              </a:rPr>
+              <a:t>기반으로</a:t>
+            </a:r>
+            <a:r>
+              <a:rPr sz="1200" b="0" dirty="0">
+                <a:solidFill>
+                  <a:srgbClr val="F2F2F2"/>
+                </a:solidFill>
+                <a:latin typeface="Malgun Gothic"/>
+              </a:rPr>
+              <a:t> </a:t>
+            </a:r>
+            <a:r>
+              <a:rPr sz="1200" b="0" dirty="0" err="1">
+                <a:solidFill>
+                  <a:srgbClr val="F2F2F2"/>
+                </a:solidFill>
+                <a:latin typeface="Malgun Gothic"/>
+              </a:rPr>
+              <a:t>추천</a:t>
+            </a:r>
+            <a:r>
+              <a:rPr sz="1200" b="0" dirty="0">
+                <a:solidFill>
+                  <a:srgbClr val="F2F2F2"/>
+                </a:solidFill>
+                <a:latin typeface="Malgun Gothic"/>
+              </a:rPr>
+              <a:t> </a:t>
+            </a:r>
+            <a:r>
+              <a:rPr sz="1200" b="0" dirty="0" err="1">
+                <a:solidFill>
+                  <a:srgbClr val="F2F2F2"/>
+                </a:solidFill>
+                <a:latin typeface="Malgun Gothic"/>
+              </a:rPr>
+              <a:t>확장</a:t>
+            </a:r>
+            <a:endParaRPr sz="1200" b="0" dirty="0">
+              <a:solidFill>
+                <a:srgbClr val="F2F2F2"/>
+              </a:solidFill>
+              <a:latin typeface="Malgun Gothic"/>
+            </a:endParaRPr>
+          </a:p>
+          <a:p>
+            <a:pPr algn="l">
+              <a:lnSpc>
+                <a:spcPct val="118000"/>
+              </a:lnSpc>
+              <a:spcBef>
+                <a:spcPts val="0"/>
+              </a:spcBef>
+              <a:spcAft>
+                <a:spcPts val="500"/>
+              </a:spcAft>
+            </a:pPr>
+            <a:r>
+              <a:rPr sz="1200" b="0" dirty="0">
+                <a:solidFill>
+                  <a:srgbClr val="F2F2F2"/>
+                </a:solidFill>
+                <a:latin typeface="Malgun Gothic"/>
+              </a:rPr>
+              <a:t>• </a:t>
+            </a:r>
+            <a:r>
+              <a:rPr sz="1200" b="0" dirty="0" err="1">
+                <a:solidFill>
+                  <a:srgbClr val="F2F2F2"/>
+                </a:solidFill>
+                <a:latin typeface="Malgun Gothic"/>
+              </a:rPr>
+              <a:t>시청기록에</a:t>
+            </a:r>
+            <a:r>
+              <a:rPr sz="1200" b="0" dirty="0">
+                <a:solidFill>
+                  <a:srgbClr val="F2F2F2"/>
+                </a:solidFill>
+                <a:latin typeface="Malgun Gothic"/>
+              </a:rPr>
+              <a:t> </a:t>
+            </a:r>
+            <a:r>
+              <a:rPr sz="1200" b="0" dirty="0" err="1">
+                <a:solidFill>
+                  <a:srgbClr val="F2F2F2"/>
+                </a:solidFill>
+                <a:latin typeface="Malgun Gothic"/>
+              </a:rPr>
+              <a:t>제목</a:t>
+            </a:r>
+            <a:r>
+              <a:rPr sz="1200" b="0" dirty="0">
+                <a:solidFill>
+                  <a:srgbClr val="F2F2F2"/>
+                </a:solidFill>
+                <a:latin typeface="Malgun Gothic"/>
+              </a:rPr>
+              <a:t> </a:t>
+            </a:r>
+            <a:r>
+              <a:rPr sz="1200" b="0" dirty="0" err="1">
+                <a:solidFill>
+                  <a:srgbClr val="F2F2F2"/>
+                </a:solidFill>
+                <a:latin typeface="Malgun Gothic"/>
+              </a:rPr>
+              <a:t>내장</a:t>
+            </a:r>
+            <a:r>
+              <a:rPr sz="1200" b="0" dirty="0">
+                <a:solidFill>
+                  <a:srgbClr val="F2F2F2"/>
+                </a:solidFill>
+                <a:latin typeface="Malgun Gothic"/>
+              </a:rPr>
+              <a:t> → API </a:t>
+            </a:r>
+            <a:r>
+              <a:rPr sz="1200" b="0" dirty="0" err="1">
+                <a:solidFill>
+                  <a:srgbClr val="F2F2F2"/>
+                </a:solidFill>
+                <a:latin typeface="Malgun Gothic"/>
+              </a:rPr>
+              <a:t>비용</a:t>
+            </a:r>
+            <a:r>
+              <a:rPr sz="1200" b="0" dirty="0">
+                <a:solidFill>
+                  <a:srgbClr val="F2F2F2"/>
+                </a:solidFill>
+                <a:latin typeface="Malgun Gothic"/>
+              </a:rPr>
+              <a:t> 0</a:t>
+            </a:r>
+          </a:p>
+          <a:p>
+            <a:pPr algn="l">
+              <a:lnSpc>
+                <a:spcPct val="118000"/>
+              </a:lnSpc>
+              <a:spcBef>
+                <a:spcPts val="0"/>
+              </a:spcBef>
+              <a:spcAft>
+                <a:spcPts val="500"/>
+              </a:spcAft>
+            </a:pPr>
+            <a:r>
+              <a:rPr sz="1150" b="0" dirty="0">
+                <a:solidFill>
+                  <a:srgbClr val="6A6A72"/>
+                </a:solidFill>
+                <a:latin typeface="Malgun Gothic"/>
+              </a:rPr>
+              <a:t>→ </a:t>
+            </a:r>
+            <a:r>
+              <a:rPr sz="1150" b="0" dirty="0" err="1">
+                <a:solidFill>
+                  <a:srgbClr val="6A6A72"/>
+                </a:solidFill>
+                <a:latin typeface="Malgun Gothic"/>
+              </a:rPr>
+              <a:t>발굴</a:t>
+            </a:r>
+            <a:r>
+              <a:rPr sz="1150" b="0" dirty="0">
+                <a:solidFill>
+                  <a:srgbClr val="6A6A72"/>
+                </a:solidFill>
+                <a:latin typeface="Malgun Gothic"/>
+              </a:rPr>
+              <a:t> </a:t>
+            </a:r>
+            <a:r>
+              <a:rPr sz="1150" b="0" dirty="0" err="1">
+                <a:solidFill>
+                  <a:srgbClr val="6A6A72"/>
+                </a:solidFill>
+                <a:latin typeface="Malgun Gothic"/>
+              </a:rPr>
+              <a:t>폭이</a:t>
+            </a:r>
+            <a:r>
+              <a:rPr sz="1150" b="0" dirty="0">
+                <a:solidFill>
+                  <a:srgbClr val="6A6A72"/>
+                </a:solidFill>
+                <a:latin typeface="Malgun Gothic"/>
+              </a:rPr>
+              <a:t> </a:t>
+            </a:r>
+            <a:r>
+              <a:rPr sz="1150" b="0" dirty="0" err="1">
+                <a:solidFill>
+                  <a:srgbClr val="6A6A72"/>
+                </a:solidFill>
+                <a:latin typeface="Malgun Gothic"/>
+              </a:rPr>
+              <a:t>넓어짐</a:t>
+            </a:r>
+            <a:endParaRPr sz="1150" b="0" dirty="0">
+              <a:solidFill>
+                <a:srgbClr val="6A6A72"/>
+              </a:solidFill>
+              <a:latin typeface="Malgun Gothic"/>
+            </a:endParaRPr>
+          </a:p>
+        </p:txBody>
+      </p:sp>
+      <p:sp>
+        <p:nvSpPr>
+          <p:cNvPr id="14" name="Rounded Rectangle 13"/>
+          <p:cNvSpPr/>
+          <p:nvPr/>
+        </p:nvSpPr>
+        <p:spPr>
+          <a:xfrm>
+            <a:off x="8055864" y="1920240"/>
+            <a:ext cx="3611880" cy="3246120"/>
+          </a:xfrm>
+          <a:prstGeom prst="roundRect">
+            <a:avLst/>
+          </a:prstGeom>
+          <a:solidFill>
+            <a:srgbClr val="161619"/>
+          </a:solidFill>
+          <a:ln w="12700">
+            <a:solidFill>
+              <a:srgbClr val="2A2A30"/>
+            </a:solidFill>
+          </a:ln>
+          <a:effectLst/>
+        </p:spPr>
+        <p:style>
+          <a:lnRef idx="1">
+            <a:schemeClr val="accent1"/>
+          </a:lnRef>
+          <a:fillRef idx="3">
+            <a:schemeClr val="accent1"/>
+          </a:fillRef>
+          <a:effectRef idx="2">
+            <a:schemeClr val="accent1"/>
+          </a:effectRef>
+          <a:fontRef idx="minor">
+            <a:schemeClr val="lt1"/>
+          </a:fontRef>
+        </p:style>
+        <p:txBody>
+          <a:bodyPr rtlCol="0" anchor="ctr"/>
+          <a:lstStyle/>
+          <a:p>
+            <a:pPr algn="ctr"/>
+            <a:endParaRPr/>
+          </a:p>
+        </p:txBody>
+      </p:sp>
+      <p:sp>
+        <p:nvSpPr>
+          <p:cNvPr id="15" name="TextBox 14"/>
+          <p:cNvSpPr txBox="1"/>
+          <p:nvPr/>
+        </p:nvSpPr>
+        <p:spPr>
+          <a:xfrm>
+            <a:off x="8284464" y="2121408"/>
+            <a:ext cx="3200400" cy="502920"/>
+          </a:xfrm>
+          <a:prstGeom prst="rect">
+            <a:avLst/>
+          </a:prstGeom>
+          <a:noFill/>
+        </p:spPr>
+        <p:txBody>
+          <a:bodyPr wrap="square" lIns="25400" tIns="25400" rIns="25400" bIns="25400" anchor="t">
+            <a:spAutoFit/>
+          </a:bodyPr>
+          <a:lstStyle/>
+          <a:p>
+            <a:pPr algn="l">
+              <a:lnSpc>
+                <a:spcPct val="100000"/>
+              </a:lnSpc>
+              <a:spcBef>
+                <a:spcPts val="0"/>
+              </a:spcBef>
+              <a:spcAft>
+                <a:spcPts val="600"/>
+              </a:spcAft>
+            </a:pPr>
+            <a:r>
+              <a:rPr sz="2000" b="0">
+                <a:solidFill>
+                  <a:srgbClr val="F2F2F2"/>
+                </a:solidFill>
+                <a:latin typeface="Malgun Gothic"/>
+              </a:rPr>
+              <a:t>🎯  </a:t>
+            </a:r>
+            <a:r>
+              <a:rPr sz="1600" b="1">
+                <a:solidFill>
+                  <a:srgbClr val="FF3B3B"/>
+                </a:solidFill>
+                <a:latin typeface="Malgun Gothic"/>
+              </a:rPr>
+              <a:t>카테고리 다양성</a:t>
+            </a:r>
+          </a:p>
+        </p:txBody>
+      </p:sp>
+      <p:sp>
+        <p:nvSpPr>
+          <p:cNvPr id="16" name="TextBox 15"/>
+          <p:cNvSpPr txBox="1"/>
+          <p:nvPr/>
+        </p:nvSpPr>
+        <p:spPr>
+          <a:xfrm>
+            <a:off x="8284464" y="2743200"/>
+            <a:ext cx="3200400" cy="2286000"/>
+          </a:xfrm>
+          <a:prstGeom prst="rect">
+            <a:avLst/>
+          </a:prstGeom>
+          <a:noFill/>
+        </p:spPr>
+        <p:txBody>
+          <a:bodyPr wrap="square" lIns="25400" tIns="25400" rIns="25400" bIns="25400" anchor="t">
+            <a:spAutoFit/>
+          </a:bodyPr>
+          <a:lstStyle/>
+          <a:p>
+            <a:pPr algn="l">
+              <a:lnSpc>
+                <a:spcPct val="118000"/>
+              </a:lnSpc>
+              <a:spcBef>
+                <a:spcPts val="0"/>
+              </a:spcBef>
+              <a:spcAft>
+                <a:spcPts val="500"/>
+              </a:spcAft>
+            </a:pPr>
+            <a:r>
+              <a:rPr sz="1200" b="0">
+                <a:solidFill>
+                  <a:srgbClr val="F2F2F2"/>
+                </a:solidFill>
+                <a:latin typeface="Malgun Gothic"/>
+              </a:rPr>
+              <a:t>• 구독 분류(category)로 관심 카테고리</a:t>
+            </a:r>
+          </a:p>
+          <a:p>
+            <a:pPr algn="l">
+              <a:lnSpc>
+                <a:spcPct val="118000"/>
+              </a:lnSpc>
+              <a:spcBef>
+                <a:spcPts val="0"/>
+              </a:spcBef>
+              <a:spcAft>
+                <a:spcPts val="500"/>
+              </a:spcAft>
+            </a:pPr>
+            <a:r>
+              <a:rPr sz="1200" b="0">
+                <a:solidFill>
+                  <a:srgbClr val="9A9AA2"/>
+                </a:solidFill>
+                <a:latin typeface="Malgun Gothic"/>
+              </a:rPr>
+              <a:t>  도출 (예: 요리·경제·게임)</a:t>
+            </a:r>
+          </a:p>
+          <a:p>
+            <a:pPr algn="l">
+              <a:lnSpc>
+                <a:spcPct val="118000"/>
+              </a:lnSpc>
+              <a:spcBef>
+                <a:spcPts val="0"/>
+              </a:spcBef>
+              <a:spcAft>
+                <a:spcPts val="500"/>
+              </a:spcAft>
+            </a:pPr>
+            <a:r>
+              <a:rPr sz="1200" b="0">
+                <a:solidFill>
+                  <a:srgbClr val="F2F2F2"/>
+                </a:solidFill>
+                <a:latin typeface="Malgun Gothic"/>
+              </a:rPr>
+              <a:t>• 카테고리별 키워드 균형 추출(라운드로빈)</a:t>
+            </a:r>
+          </a:p>
+          <a:p>
+            <a:pPr algn="l">
+              <a:lnSpc>
+                <a:spcPct val="118000"/>
+              </a:lnSpc>
+              <a:spcBef>
+                <a:spcPts val="0"/>
+              </a:spcBef>
+              <a:spcAft>
+                <a:spcPts val="500"/>
+              </a:spcAft>
+            </a:pPr>
+            <a:r>
+              <a:rPr sz="1200" b="0">
+                <a:solidFill>
+                  <a:srgbClr val="F2F2F2"/>
+                </a:solidFill>
+                <a:latin typeface="Malgun Gothic"/>
+              </a:rPr>
+              <a:t>• 관심 카테고리마다 최소 1개 보장</a:t>
+            </a:r>
+          </a:p>
+          <a:p>
+            <a:pPr algn="l">
+              <a:lnSpc>
+                <a:spcPct val="118000"/>
+              </a:lnSpc>
+              <a:spcBef>
+                <a:spcPts val="0"/>
+              </a:spcBef>
+              <a:spcAft>
+                <a:spcPts val="500"/>
+              </a:spcAft>
+            </a:pPr>
+            <a:r>
+              <a:rPr sz="1150" b="0">
+                <a:solidFill>
+                  <a:srgbClr val="6A6A72"/>
+                </a:solidFill>
+                <a:latin typeface="Malgun Gothic"/>
+              </a:rPr>
+              <a:t>→ ‘요리만 추천’ 쏠림 해소</a:t>
+            </a:r>
+          </a:p>
+        </p:txBody>
+      </p:sp>
+      <p:sp>
+        <p:nvSpPr>
+          <p:cNvPr id="17" name="Rounded Rectangle 16"/>
+          <p:cNvSpPr/>
+          <p:nvPr/>
+        </p:nvSpPr>
+        <p:spPr>
+          <a:xfrm>
+            <a:off x="502920" y="5349240"/>
+            <a:ext cx="11183112" cy="914400"/>
+          </a:xfrm>
+          <a:prstGeom prst="roundRect">
+            <a:avLst/>
+          </a:prstGeom>
+          <a:solidFill>
+            <a:srgbClr val="121215"/>
           </a:solidFill>
           <a:ln>
             <a:noFill/>
@@ -7778,1049 +9393,14 @@
       </p:sp>
       <p:sp>
         <p:nvSpPr>
-          <p:cNvPr id="9" name="TextBox 8"/>
-          <p:cNvSpPr txBox="1"/>
-          <p:nvPr/>
-        </p:nvSpPr>
-        <p:spPr>
-          <a:xfrm>
-            <a:off x="502920" y="2011680"/>
-            <a:ext cx="2880360" cy="502920"/>
-          </a:xfrm>
-          <a:prstGeom prst="rect">
-            <a:avLst/>
-          </a:prstGeom>
-          <a:noFill/>
-        </p:spPr>
-        <p:txBody>
-          <a:bodyPr wrap="square" lIns="25400" tIns="25400" rIns="25400" bIns="25400" anchor="ctr">
-            <a:spAutoFit/>
-          </a:bodyPr>
-          <a:lstStyle/>
-          <a:p>
-            <a:pPr algn="l">
-              <a:lnSpc>
-                <a:spcPct val="100000"/>
-              </a:lnSpc>
-              <a:spcBef>
-                <a:spcPts val="0"/>
-              </a:spcBef>
-              <a:spcAft>
-                <a:spcPts val="600"/>
-              </a:spcAft>
-            </a:pPr>
-            <a:r>
-              <a:rPr sz="1300" b="1">
-                <a:solidFill>
-                  <a:srgbClr val="FF3B3B"/>
-                </a:solidFill>
-                <a:latin typeface="Malgun Gothic"/>
-              </a:rPr>
-              <a:t>모드</a:t>
-            </a:r>
-          </a:p>
-        </p:txBody>
-      </p:sp>
-      <p:sp>
-        <p:nvSpPr>
-          <p:cNvPr id="10" name="TextBox 9"/>
-          <p:cNvSpPr txBox="1"/>
-          <p:nvPr/>
-        </p:nvSpPr>
-        <p:spPr>
-          <a:xfrm>
-            <a:off x="3383280" y="2011680"/>
-            <a:ext cx="2103120" cy="502920"/>
-          </a:xfrm>
-          <a:prstGeom prst="rect">
-            <a:avLst/>
-          </a:prstGeom>
-          <a:noFill/>
-        </p:spPr>
-        <p:txBody>
-          <a:bodyPr wrap="square" lIns="25400" tIns="25400" rIns="25400" bIns="25400" anchor="ctr">
-            <a:spAutoFit/>
-          </a:bodyPr>
-          <a:lstStyle/>
-          <a:p>
-            <a:pPr algn="ctr">
-              <a:lnSpc>
-                <a:spcPct val="100000"/>
-              </a:lnSpc>
-              <a:spcBef>
-                <a:spcPts val="0"/>
-              </a:spcBef>
-              <a:spcAft>
-                <a:spcPts val="600"/>
-              </a:spcAft>
-            </a:pPr>
-            <a:r>
-              <a:rPr sz="1300" b="1">
-                <a:solidFill>
-                  <a:srgbClr val="FF3B3B"/>
-                </a:solidFill>
-                <a:latin typeface="Malgun Gothic"/>
-              </a:rPr>
-              <a:t>사용자 부담</a:t>
-            </a:r>
-          </a:p>
-        </p:txBody>
-      </p:sp>
-      <p:sp>
-        <p:nvSpPr>
-          <p:cNvPr id="11" name="TextBox 10"/>
-          <p:cNvSpPr txBox="1"/>
-          <p:nvPr/>
-        </p:nvSpPr>
-        <p:spPr>
-          <a:xfrm>
-            <a:off x="5486400" y="2011680"/>
-            <a:ext cx="3017520" cy="502920"/>
-          </a:xfrm>
-          <a:prstGeom prst="rect">
-            <a:avLst/>
-          </a:prstGeom>
-          <a:noFill/>
-        </p:spPr>
-        <p:txBody>
-          <a:bodyPr wrap="square" lIns="25400" tIns="25400" rIns="25400" bIns="25400" anchor="ctr">
-            <a:spAutoFit/>
-          </a:bodyPr>
-          <a:lstStyle/>
-          <a:p>
-            <a:pPr algn="ctr">
-              <a:lnSpc>
-                <a:spcPct val="100000"/>
-              </a:lnSpc>
-              <a:spcBef>
-                <a:spcPts val="0"/>
-              </a:spcBef>
-              <a:spcAft>
-                <a:spcPts val="600"/>
-              </a:spcAft>
-            </a:pPr>
-            <a:r>
-              <a:rPr sz="1300" b="1">
-                <a:solidFill>
-                  <a:srgbClr val="FF3B3B"/>
-                </a:solidFill>
-                <a:latin typeface="Malgun Gothic"/>
-              </a:rPr>
-              <a:t>API 비용</a:t>
-            </a:r>
-          </a:p>
-        </p:txBody>
-      </p:sp>
-      <p:sp>
-        <p:nvSpPr>
-          <p:cNvPr id="12" name="TextBox 11"/>
-          <p:cNvSpPr txBox="1"/>
-          <p:nvPr/>
-        </p:nvSpPr>
-        <p:spPr>
-          <a:xfrm>
-            <a:off x="8503920" y="2011680"/>
-            <a:ext cx="3154680" cy="502920"/>
-          </a:xfrm>
-          <a:prstGeom prst="rect">
-            <a:avLst/>
-          </a:prstGeom>
-          <a:noFill/>
-        </p:spPr>
-        <p:txBody>
-          <a:bodyPr wrap="square" lIns="25400" tIns="25400" rIns="25400" bIns="25400" anchor="ctr">
-            <a:spAutoFit/>
-          </a:bodyPr>
-          <a:lstStyle/>
-          <a:p>
-            <a:pPr algn="ctr">
-              <a:lnSpc>
-                <a:spcPct val="100000"/>
-              </a:lnSpc>
-              <a:spcBef>
-                <a:spcPts val="0"/>
-              </a:spcBef>
-              <a:spcAft>
-                <a:spcPts val="600"/>
-              </a:spcAft>
-            </a:pPr>
-            <a:r>
-              <a:rPr sz="1300" b="1">
-                <a:solidFill>
-                  <a:srgbClr val="FF3B3B"/>
-                </a:solidFill>
-                <a:latin typeface="Malgun Gothic"/>
-              </a:rPr>
-              <a:t>정확도</a:t>
-            </a:r>
-          </a:p>
-        </p:txBody>
-      </p:sp>
-      <p:sp>
-        <p:nvSpPr>
-          <p:cNvPr id="13" name="Rectangle 12"/>
-          <p:cNvSpPr/>
-          <p:nvPr/>
-        </p:nvSpPr>
-        <p:spPr>
-          <a:xfrm>
-            <a:off x="502920" y="2542032"/>
-            <a:ext cx="11183112" cy="658368"/>
-          </a:xfrm>
-          <a:prstGeom prst="rect">
-            <a:avLst/>
-          </a:prstGeom>
-          <a:solidFill>
-            <a:srgbClr val="16161A"/>
-          </a:solidFill>
-          <a:ln>
-            <a:noFill/>
-          </a:ln>
-          <a:effectLst/>
-        </p:spPr>
-        <p:style>
-          <a:lnRef idx="1">
-            <a:schemeClr val="accent1"/>
-          </a:lnRef>
-          <a:fillRef idx="3">
-            <a:schemeClr val="accent1"/>
-          </a:fillRef>
-          <a:effectRef idx="2">
-            <a:schemeClr val="accent1"/>
-          </a:effectRef>
-          <a:fontRef idx="minor">
-            <a:schemeClr val="lt1"/>
-          </a:fontRef>
-        </p:style>
-        <p:txBody>
-          <a:bodyPr rtlCol="0" anchor="ctr"/>
-          <a:lstStyle/>
-          <a:p>
-            <a:pPr algn="ctr"/>
-            <a:endParaRPr/>
-          </a:p>
-        </p:txBody>
-      </p:sp>
-      <p:sp>
-        <p:nvSpPr>
-          <p:cNvPr id="14" name="TextBox 13"/>
-          <p:cNvSpPr txBox="1"/>
-          <p:nvPr/>
-        </p:nvSpPr>
-        <p:spPr>
-          <a:xfrm>
-            <a:off x="502920" y="2542032"/>
-            <a:ext cx="2880360" cy="658368"/>
-          </a:xfrm>
-          <a:prstGeom prst="rect">
-            <a:avLst/>
-          </a:prstGeom>
-          <a:noFill/>
-        </p:spPr>
-        <p:txBody>
-          <a:bodyPr wrap="square" lIns="25400" tIns="25400" rIns="25400" bIns="25400" anchor="ctr">
-            <a:spAutoFit/>
-          </a:bodyPr>
-          <a:lstStyle/>
-          <a:p>
-            <a:pPr algn="l">
-              <a:lnSpc>
-                <a:spcPct val="100000"/>
-              </a:lnSpc>
-              <a:spcBef>
-                <a:spcPts val="0"/>
-              </a:spcBef>
-              <a:spcAft>
-                <a:spcPts val="600"/>
-              </a:spcAft>
-            </a:pPr>
-            <a:r>
-              <a:rPr sz="1400" b="0">
-                <a:solidFill>
-                  <a:srgbClr val="9A9AA2"/>
-                </a:solidFill>
-                <a:latin typeface="Malgun Gothic"/>
-              </a:rPr>
-              <a:t>둘 다 미업로드</a:t>
-            </a:r>
-          </a:p>
-        </p:txBody>
-      </p:sp>
-      <p:sp>
-        <p:nvSpPr>
-          <p:cNvPr id="15" name="TextBox 14"/>
-          <p:cNvSpPr txBox="1"/>
-          <p:nvPr/>
-        </p:nvSpPr>
-        <p:spPr>
-          <a:xfrm>
-            <a:off x="3383280" y="2542032"/>
-            <a:ext cx="2103120" cy="658368"/>
-          </a:xfrm>
-          <a:prstGeom prst="rect">
-            <a:avLst/>
-          </a:prstGeom>
-          <a:noFill/>
-        </p:spPr>
-        <p:txBody>
-          <a:bodyPr wrap="square" lIns="25400" tIns="25400" rIns="25400" bIns="25400" anchor="ctr">
-            <a:spAutoFit/>
-          </a:bodyPr>
-          <a:lstStyle/>
-          <a:p>
-            <a:pPr algn="ctr">
-              <a:lnSpc>
-                <a:spcPct val="100000"/>
-              </a:lnSpc>
-              <a:spcBef>
-                <a:spcPts val="0"/>
-              </a:spcBef>
-              <a:spcAft>
-                <a:spcPts val="600"/>
-              </a:spcAft>
-            </a:pPr>
-            <a:r>
-              <a:rPr sz="1200" b="0">
-                <a:solidFill>
-                  <a:srgbClr val="9A9AA2"/>
-                </a:solidFill>
-                <a:latin typeface="Malgun Gothic"/>
-              </a:rPr>
-              <a:t>없음</a:t>
-            </a:r>
-          </a:p>
-        </p:txBody>
-      </p:sp>
-      <p:sp>
-        <p:nvSpPr>
-          <p:cNvPr id="16" name="TextBox 15"/>
-          <p:cNvSpPr txBox="1"/>
-          <p:nvPr/>
-        </p:nvSpPr>
-        <p:spPr>
-          <a:xfrm>
-            <a:off x="5486400" y="2542032"/>
-            <a:ext cx="3017520" cy="658368"/>
-          </a:xfrm>
-          <a:prstGeom prst="rect">
-            <a:avLst/>
-          </a:prstGeom>
-          <a:noFill/>
-        </p:spPr>
-        <p:txBody>
-          <a:bodyPr wrap="square" lIns="25400" tIns="25400" rIns="25400" bIns="25400" anchor="ctr">
-            <a:spAutoFit/>
-          </a:bodyPr>
-          <a:lstStyle/>
-          <a:p>
-            <a:pPr algn="ctr">
-              <a:lnSpc>
-                <a:spcPct val="100000"/>
-              </a:lnSpc>
-              <a:spcBef>
-                <a:spcPts val="0"/>
-              </a:spcBef>
-              <a:spcAft>
-                <a:spcPts val="600"/>
-              </a:spcAft>
-            </a:pPr>
-            <a:r>
-              <a:rPr sz="1200" b="0">
-                <a:solidFill>
-                  <a:srgbClr val="9A9AA2"/>
-                </a:solidFill>
-                <a:latin typeface="Consolas"/>
-              </a:rPr>
-              <a:t>commentThreads × 채널 수</a:t>
-            </a:r>
-          </a:p>
-        </p:txBody>
-      </p:sp>
-      <p:sp>
-        <p:nvSpPr>
-          <p:cNvPr id="17" name="TextBox 16"/>
-          <p:cNvSpPr txBox="1"/>
-          <p:nvPr/>
-        </p:nvSpPr>
-        <p:spPr>
-          <a:xfrm>
-            <a:off x="8503920" y="2542032"/>
-            <a:ext cx="3154680" cy="658368"/>
-          </a:xfrm>
-          <a:prstGeom prst="rect">
-            <a:avLst/>
-          </a:prstGeom>
-          <a:noFill/>
-        </p:spPr>
-        <p:txBody>
-          <a:bodyPr wrap="square" lIns="25400" tIns="25400" rIns="25400" bIns="25400" anchor="ctr">
-            <a:spAutoFit/>
-          </a:bodyPr>
-          <a:lstStyle/>
-          <a:p>
-            <a:pPr algn="ctr">
-              <a:lnSpc>
-                <a:spcPct val="100000"/>
-              </a:lnSpc>
-              <a:spcBef>
-                <a:spcPts val="0"/>
-              </a:spcBef>
-              <a:spcAft>
-                <a:spcPts val="600"/>
-              </a:spcAft>
-            </a:pPr>
-            <a:r>
-              <a:rPr sz="1200" b="0">
-                <a:solidFill>
-                  <a:srgbClr val="9A9AA2"/>
-                </a:solidFill>
-                <a:latin typeface="Malgun Gothic"/>
-              </a:rPr>
-              <a:t>댓글 근사 · 시청 미반영</a:t>
-            </a:r>
-          </a:p>
-        </p:txBody>
-      </p:sp>
-      <p:sp>
-        <p:nvSpPr>
           <p:cNvPr id="18" name="TextBox 17"/>
           <p:cNvSpPr txBox="1"/>
           <p:nvPr/>
         </p:nvSpPr>
         <p:spPr>
           <a:xfrm>
-            <a:off x="502920" y="3255264"/>
-            <a:ext cx="2880360" cy="658368"/>
-          </a:xfrm>
-          <a:prstGeom prst="rect">
-            <a:avLst/>
-          </a:prstGeom>
-          <a:noFill/>
-        </p:spPr>
-        <p:txBody>
-          <a:bodyPr wrap="square" lIns="25400" tIns="25400" rIns="25400" bIns="25400" anchor="ctr">
-            <a:spAutoFit/>
-          </a:bodyPr>
-          <a:lstStyle/>
-          <a:p>
-            <a:pPr algn="l">
-              <a:lnSpc>
-                <a:spcPct val="100000"/>
-              </a:lnSpc>
-              <a:spcBef>
-                <a:spcPts val="0"/>
-              </a:spcBef>
-              <a:spcAft>
-                <a:spcPts val="600"/>
-              </a:spcAft>
-            </a:pPr>
-            <a:r>
-              <a:rPr sz="1400" b="1">
-                <a:solidFill>
-                  <a:srgbClr val="F2F2F2"/>
-                </a:solidFill>
-                <a:latin typeface="Malgun Gothic"/>
-              </a:rPr>
-              <a:t>comments.csv 만</a:t>
-            </a:r>
-          </a:p>
-        </p:txBody>
-      </p:sp>
-      <p:sp>
-        <p:nvSpPr>
-          <p:cNvPr id="19" name="TextBox 18"/>
-          <p:cNvSpPr txBox="1"/>
-          <p:nvPr/>
-        </p:nvSpPr>
-        <p:spPr>
-          <a:xfrm>
-            <a:off x="3383280" y="3255264"/>
-            <a:ext cx="2103120" cy="658368"/>
-          </a:xfrm>
-          <a:prstGeom prst="rect">
-            <a:avLst/>
-          </a:prstGeom>
-          <a:noFill/>
-        </p:spPr>
-        <p:txBody>
-          <a:bodyPr wrap="square" lIns="25400" tIns="25400" rIns="25400" bIns="25400" anchor="ctr">
-            <a:spAutoFit/>
-          </a:bodyPr>
-          <a:lstStyle/>
-          <a:p>
-            <a:pPr algn="ctr">
-              <a:lnSpc>
-                <a:spcPct val="100000"/>
-              </a:lnSpc>
-              <a:spcBef>
-                <a:spcPts val="0"/>
-              </a:spcBef>
-              <a:spcAft>
-                <a:spcPts val="600"/>
-              </a:spcAft>
-            </a:pPr>
-            <a:r>
-              <a:rPr sz="1200" b="0">
-                <a:solidFill>
-                  <a:srgbClr val="9A9AA2"/>
-                </a:solidFill>
-                <a:latin typeface="Malgun Gothic"/>
-              </a:rPr>
-              <a:t>1회 업로드</a:t>
-            </a:r>
-          </a:p>
-        </p:txBody>
-      </p:sp>
-      <p:sp>
-        <p:nvSpPr>
-          <p:cNvPr id="20" name="TextBox 19"/>
-          <p:cNvSpPr txBox="1"/>
-          <p:nvPr/>
-        </p:nvSpPr>
-        <p:spPr>
-          <a:xfrm>
-            <a:off x="5486400" y="3255264"/>
-            <a:ext cx="3017520" cy="658368"/>
-          </a:xfrm>
-          <a:prstGeom prst="rect">
-            <a:avLst/>
-          </a:prstGeom>
-          <a:noFill/>
-        </p:spPr>
-        <p:txBody>
-          <a:bodyPr wrap="square" lIns="25400" tIns="25400" rIns="25400" bIns="25400" anchor="ctr">
-            <a:spAutoFit/>
-          </a:bodyPr>
-          <a:lstStyle/>
-          <a:p>
-            <a:pPr algn="ctr">
-              <a:lnSpc>
-                <a:spcPct val="100000"/>
-              </a:lnSpc>
-              <a:spcBef>
-                <a:spcPts val="0"/>
-              </a:spcBef>
-              <a:spcAft>
-                <a:spcPts val="600"/>
-              </a:spcAft>
-            </a:pPr>
-            <a:r>
-              <a:rPr sz="1200" b="0">
-                <a:solidFill>
-                  <a:srgbClr val="9A9AA2"/>
-                </a:solidFill>
-                <a:latin typeface="Consolas"/>
-              </a:rPr>
-              <a:t>videos.list × 영상수/50</a:t>
-            </a:r>
-          </a:p>
-        </p:txBody>
-      </p:sp>
-      <p:sp>
-        <p:nvSpPr>
-          <p:cNvPr id="21" name="TextBox 20"/>
-          <p:cNvSpPr txBox="1"/>
-          <p:nvPr/>
-        </p:nvSpPr>
-        <p:spPr>
-          <a:xfrm>
-            <a:off x="8503920" y="3255264"/>
-            <a:ext cx="3154680" cy="658368"/>
-          </a:xfrm>
-          <a:prstGeom prst="rect">
-            <a:avLst/>
-          </a:prstGeom>
-          <a:noFill/>
-        </p:spPr>
-        <p:txBody>
-          <a:bodyPr wrap="square" lIns="25400" tIns="25400" rIns="25400" bIns="25400" anchor="ctr">
-            <a:spAutoFit/>
-          </a:bodyPr>
-          <a:lstStyle/>
-          <a:p>
-            <a:pPr algn="ctr">
-              <a:lnSpc>
-                <a:spcPct val="100000"/>
-              </a:lnSpc>
-              <a:spcBef>
-                <a:spcPts val="0"/>
-              </a:spcBef>
-              <a:spcAft>
-                <a:spcPts val="600"/>
-              </a:spcAft>
-            </a:pPr>
-            <a:r>
-              <a:rPr sz="1200" b="0">
-                <a:solidFill>
-                  <a:srgbClr val="F2F2F2"/>
-                </a:solidFill>
-                <a:latin typeface="Malgun Gothic"/>
-              </a:rPr>
-              <a:t>댓글 정확 · 시청 미반영</a:t>
-            </a:r>
-          </a:p>
-        </p:txBody>
-      </p:sp>
-      <p:sp>
-        <p:nvSpPr>
-          <p:cNvPr id="22" name="Rectangle 21"/>
-          <p:cNvSpPr/>
-          <p:nvPr/>
-        </p:nvSpPr>
-        <p:spPr>
-          <a:xfrm>
-            <a:off x="502920" y="3968496"/>
-            <a:ext cx="11183112" cy="658368"/>
-          </a:xfrm>
-          <a:prstGeom prst="rect">
-            <a:avLst/>
-          </a:prstGeom>
-          <a:solidFill>
-            <a:srgbClr val="16161A"/>
-          </a:solidFill>
-          <a:ln>
-            <a:noFill/>
-          </a:ln>
-          <a:effectLst/>
-        </p:spPr>
-        <p:style>
-          <a:lnRef idx="1">
-            <a:schemeClr val="accent1"/>
-          </a:lnRef>
-          <a:fillRef idx="3">
-            <a:schemeClr val="accent1"/>
-          </a:fillRef>
-          <a:effectRef idx="2">
-            <a:schemeClr val="accent1"/>
-          </a:effectRef>
-          <a:fontRef idx="minor">
-            <a:schemeClr val="lt1"/>
-          </a:fontRef>
-        </p:style>
-        <p:txBody>
-          <a:bodyPr rtlCol="0" anchor="ctr"/>
-          <a:lstStyle/>
-          <a:p>
-            <a:pPr algn="ctr"/>
-            <a:endParaRPr/>
-          </a:p>
-        </p:txBody>
-      </p:sp>
-      <p:sp>
-        <p:nvSpPr>
-          <p:cNvPr id="23" name="TextBox 22"/>
-          <p:cNvSpPr txBox="1"/>
-          <p:nvPr/>
-        </p:nvSpPr>
-        <p:spPr>
-          <a:xfrm>
-            <a:off x="502920" y="3968496"/>
-            <a:ext cx="2880360" cy="658368"/>
-          </a:xfrm>
-          <a:prstGeom prst="rect">
-            <a:avLst/>
-          </a:prstGeom>
-          <a:noFill/>
-        </p:spPr>
-        <p:txBody>
-          <a:bodyPr wrap="square" lIns="25400" tIns="25400" rIns="25400" bIns="25400" anchor="ctr">
-            <a:spAutoFit/>
-          </a:bodyPr>
-          <a:lstStyle/>
-          <a:p>
-            <a:pPr algn="l">
-              <a:lnSpc>
-                <a:spcPct val="100000"/>
-              </a:lnSpc>
-              <a:spcBef>
-                <a:spcPts val="0"/>
-              </a:spcBef>
-              <a:spcAft>
-                <a:spcPts val="600"/>
-              </a:spcAft>
-            </a:pPr>
-            <a:r>
-              <a:rPr sz="1400" b="1">
-                <a:solidFill>
-                  <a:srgbClr val="F2F2F2"/>
-                </a:solidFill>
-                <a:latin typeface="Malgun Gothic"/>
-              </a:rPr>
-              <a:t>watch-history.json 만</a:t>
-            </a:r>
-          </a:p>
-        </p:txBody>
-      </p:sp>
-      <p:sp>
-        <p:nvSpPr>
-          <p:cNvPr id="24" name="TextBox 23"/>
-          <p:cNvSpPr txBox="1"/>
-          <p:nvPr/>
-        </p:nvSpPr>
-        <p:spPr>
-          <a:xfrm>
-            <a:off x="3383280" y="3968496"/>
-            <a:ext cx="2103120" cy="658368"/>
-          </a:xfrm>
-          <a:prstGeom prst="rect">
-            <a:avLst/>
-          </a:prstGeom>
-          <a:noFill/>
-        </p:spPr>
-        <p:txBody>
-          <a:bodyPr wrap="square" lIns="25400" tIns="25400" rIns="25400" bIns="25400" anchor="ctr">
-            <a:spAutoFit/>
-          </a:bodyPr>
-          <a:lstStyle/>
-          <a:p>
-            <a:pPr algn="ctr">
-              <a:lnSpc>
-                <a:spcPct val="100000"/>
-              </a:lnSpc>
-              <a:spcBef>
-                <a:spcPts val="0"/>
-              </a:spcBef>
-              <a:spcAft>
-                <a:spcPts val="600"/>
-              </a:spcAft>
-            </a:pPr>
-            <a:r>
-              <a:rPr sz="1200" b="0">
-                <a:solidFill>
-                  <a:srgbClr val="9A9AA2"/>
-                </a:solidFill>
-                <a:latin typeface="Malgun Gothic"/>
-              </a:rPr>
-              <a:t>1회 업로드</a:t>
-            </a:r>
-          </a:p>
-        </p:txBody>
-      </p:sp>
-      <p:sp>
-        <p:nvSpPr>
-          <p:cNvPr id="25" name="TextBox 24"/>
-          <p:cNvSpPr txBox="1"/>
-          <p:nvPr/>
-        </p:nvSpPr>
-        <p:spPr>
-          <a:xfrm>
-            <a:off x="5486400" y="3968496"/>
-            <a:ext cx="3017520" cy="658368"/>
-          </a:xfrm>
-          <a:prstGeom prst="rect">
-            <a:avLst/>
-          </a:prstGeom>
-          <a:noFill/>
-        </p:spPr>
-        <p:txBody>
-          <a:bodyPr wrap="square" lIns="25400" tIns="25400" rIns="25400" bIns="25400" anchor="ctr">
-            <a:spAutoFit/>
-          </a:bodyPr>
-          <a:lstStyle/>
-          <a:p>
-            <a:pPr algn="ctr">
-              <a:lnSpc>
-                <a:spcPct val="100000"/>
-              </a:lnSpc>
-              <a:spcBef>
-                <a:spcPts val="0"/>
-              </a:spcBef>
-              <a:spcAft>
-                <a:spcPts val="600"/>
-              </a:spcAft>
-            </a:pPr>
-            <a:r>
-              <a:rPr sz="1200" b="0">
-                <a:solidFill>
-                  <a:srgbClr val="9A9AA2"/>
-                </a:solidFill>
-                <a:latin typeface="Consolas"/>
-              </a:rPr>
-              <a:t>0 units (subtitles에 ID)</a:t>
-            </a:r>
-          </a:p>
-        </p:txBody>
-      </p:sp>
-      <p:sp>
-        <p:nvSpPr>
-          <p:cNvPr id="26" name="TextBox 25"/>
-          <p:cNvSpPr txBox="1"/>
-          <p:nvPr/>
-        </p:nvSpPr>
-        <p:spPr>
-          <a:xfrm>
-            <a:off x="8503920" y="3968496"/>
-            <a:ext cx="3154680" cy="658368"/>
-          </a:xfrm>
-          <a:prstGeom prst="rect">
-            <a:avLst/>
-          </a:prstGeom>
-          <a:noFill/>
-        </p:spPr>
-        <p:txBody>
-          <a:bodyPr wrap="square" lIns="25400" tIns="25400" rIns="25400" bIns="25400" anchor="ctr">
-            <a:spAutoFit/>
-          </a:bodyPr>
-          <a:lstStyle/>
-          <a:p>
-            <a:pPr algn="ctr">
-              <a:lnSpc>
-                <a:spcPct val="100000"/>
-              </a:lnSpc>
-              <a:spcBef>
-                <a:spcPts val="0"/>
-              </a:spcBef>
-              <a:spcAft>
-                <a:spcPts val="600"/>
-              </a:spcAft>
-            </a:pPr>
-            <a:r>
-              <a:rPr sz="1200" b="0">
-                <a:solidFill>
-                  <a:srgbClr val="F2F2F2"/>
-                </a:solidFill>
-                <a:latin typeface="Malgun Gothic"/>
-              </a:rPr>
-              <a:t>시청 정확 · 댓글 근사</a:t>
-            </a:r>
-          </a:p>
-        </p:txBody>
-      </p:sp>
-      <p:sp>
-        <p:nvSpPr>
-          <p:cNvPr id="27" name="Rectangle 26"/>
-          <p:cNvSpPr/>
-          <p:nvPr/>
-        </p:nvSpPr>
-        <p:spPr>
-          <a:xfrm>
-            <a:off x="502920" y="4681728"/>
-            <a:ext cx="11183112" cy="658368"/>
-          </a:xfrm>
-          <a:prstGeom prst="rect">
-            <a:avLst/>
-          </a:prstGeom>
-          <a:solidFill>
-            <a:srgbClr val="142218"/>
-          </a:solidFill>
-          <a:ln>
-            <a:noFill/>
-          </a:ln>
-          <a:effectLst/>
-        </p:spPr>
-        <p:style>
-          <a:lnRef idx="1">
-            <a:schemeClr val="accent1"/>
-          </a:lnRef>
-          <a:fillRef idx="3">
-            <a:schemeClr val="accent1"/>
-          </a:fillRef>
-          <a:effectRef idx="2">
-            <a:schemeClr val="accent1"/>
-          </a:effectRef>
-          <a:fontRef idx="minor">
-            <a:schemeClr val="lt1"/>
-          </a:fontRef>
-        </p:style>
-        <p:txBody>
-          <a:bodyPr rtlCol="0" anchor="ctr"/>
-          <a:lstStyle/>
-          <a:p>
-            <a:pPr algn="ctr"/>
-            <a:endParaRPr/>
-          </a:p>
-        </p:txBody>
-      </p:sp>
-      <p:sp>
-        <p:nvSpPr>
-          <p:cNvPr id="28" name="TextBox 27"/>
-          <p:cNvSpPr txBox="1"/>
-          <p:nvPr/>
-        </p:nvSpPr>
-        <p:spPr>
-          <a:xfrm>
-            <a:off x="502920" y="4681728"/>
-            <a:ext cx="2880360" cy="658368"/>
-          </a:xfrm>
-          <a:prstGeom prst="rect">
-            <a:avLst/>
-          </a:prstGeom>
-          <a:noFill/>
-        </p:spPr>
-        <p:txBody>
-          <a:bodyPr wrap="square" lIns="25400" tIns="25400" rIns="25400" bIns="25400" anchor="ctr">
-            <a:spAutoFit/>
-          </a:bodyPr>
-          <a:lstStyle/>
-          <a:p>
-            <a:pPr algn="l">
-              <a:lnSpc>
-                <a:spcPct val="100000"/>
-              </a:lnSpc>
-              <a:spcBef>
-                <a:spcPts val="0"/>
-              </a:spcBef>
-              <a:spcAft>
-                <a:spcPts val="600"/>
-              </a:spcAft>
-            </a:pPr>
-            <a:r>
-              <a:rPr sz="1400" b="1">
-                <a:solidFill>
-                  <a:srgbClr val="2ECC71"/>
-                </a:solidFill>
-                <a:latin typeface="Malgun Gothic"/>
-              </a:rPr>
-              <a:t>둘 다 ⭐</a:t>
-            </a:r>
-          </a:p>
-        </p:txBody>
-      </p:sp>
-      <p:sp>
-        <p:nvSpPr>
-          <p:cNvPr id="29" name="TextBox 28"/>
-          <p:cNvSpPr txBox="1"/>
-          <p:nvPr/>
-        </p:nvSpPr>
-        <p:spPr>
-          <a:xfrm>
-            <a:off x="3383280" y="4681728"/>
-            <a:ext cx="2103120" cy="658368"/>
-          </a:xfrm>
-          <a:prstGeom prst="rect">
-            <a:avLst/>
-          </a:prstGeom>
-          <a:noFill/>
-        </p:spPr>
-        <p:txBody>
-          <a:bodyPr wrap="square" lIns="25400" tIns="25400" rIns="25400" bIns="25400" anchor="ctr">
-            <a:spAutoFit/>
-          </a:bodyPr>
-          <a:lstStyle/>
-          <a:p>
-            <a:pPr algn="ctr">
-              <a:lnSpc>
-                <a:spcPct val="100000"/>
-              </a:lnSpc>
-              <a:spcBef>
-                <a:spcPts val="0"/>
-              </a:spcBef>
-              <a:spcAft>
-                <a:spcPts val="600"/>
-              </a:spcAft>
-            </a:pPr>
-            <a:r>
-              <a:rPr sz="1200" b="0">
-                <a:solidFill>
-                  <a:srgbClr val="9A9AA2"/>
-                </a:solidFill>
-                <a:latin typeface="Malgun Gothic"/>
-              </a:rPr>
-              <a:t>2회 업로드</a:t>
-            </a:r>
-          </a:p>
-        </p:txBody>
-      </p:sp>
-      <p:sp>
-        <p:nvSpPr>
-          <p:cNvPr id="30" name="TextBox 29"/>
-          <p:cNvSpPr txBox="1"/>
-          <p:nvPr/>
-        </p:nvSpPr>
-        <p:spPr>
-          <a:xfrm>
-            <a:off x="5486400" y="4681728"/>
-            <a:ext cx="3017520" cy="658368"/>
-          </a:xfrm>
-          <a:prstGeom prst="rect">
-            <a:avLst/>
-          </a:prstGeom>
-          <a:noFill/>
-        </p:spPr>
-        <p:txBody>
-          <a:bodyPr wrap="square" lIns="25400" tIns="25400" rIns="25400" bIns="25400" anchor="ctr">
-            <a:spAutoFit/>
-          </a:bodyPr>
-          <a:lstStyle/>
-          <a:p>
-            <a:pPr algn="ctr">
-              <a:lnSpc>
-                <a:spcPct val="100000"/>
-              </a:lnSpc>
-              <a:spcBef>
-                <a:spcPts val="0"/>
-              </a:spcBef>
-              <a:spcAft>
-                <a:spcPts val="600"/>
-              </a:spcAft>
-            </a:pPr>
-            <a:r>
-              <a:rPr sz="1200" b="0">
-                <a:solidFill>
-                  <a:srgbClr val="9A9AA2"/>
-                </a:solidFill>
-                <a:latin typeface="Consolas"/>
-              </a:rPr>
-              <a:t>댓글 영상 해석만</a:t>
-            </a:r>
-          </a:p>
-        </p:txBody>
-      </p:sp>
-      <p:sp>
-        <p:nvSpPr>
-          <p:cNvPr id="31" name="TextBox 30"/>
-          <p:cNvSpPr txBox="1"/>
-          <p:nvPr/>
-        </p:nvSpPr>
-        <p:spPr>
-          <a:xfrm>
-            <a:off x="8503920" y="4681728"/>
-            <a:ext cx="3154680" cy="658368"/>
-          </a:xfrm>
-          <a:prstGeom prst="rect">
-            <a:avLst/>
-          </a:prstGeom>
-          <a:noFill/>
-        </p:spPr>
-        <p:txBody>
-          <a:bodyPr wrap="square" lIns="25400" tIns="25400" rIns="25400" bIns="25400" anchor="ctr">
-            <a:spAutoFit/>
-          </a:bodyPr>
-          <a:lstStyle/>
-          <a:p>
-            <a:pPr algn="ctr">
-              <a:lnSpc>
-                <a:spcPct val="100000"/>
-              </a:lnSpc>
-              <a:spcBef>
-                <a:spcPts val="0"/>
-              </a:spcBef>
-              <a:spcAft>
-                <a:spcPts val="600"/>
-              </a:spcAft>
-            </a:pPr>
-            <a:r>
-              <a:rPr sz="1200" b="0">
-                <a:solidFill>
-                  <a:srgbClr val="2ECC71"/>
-                </a:solidFill>
-                <a:latin typeface="Malgun Gothic"/>
-              </a:rPr>
-              <a:t>모두 정확</a:t>
-            </a:r>
-          </a:p>
-        </p:txBody>
-      </p:sp>
-      <p:sp>
-        <p:nvSpPr>
-          <p:cNvPr id="32" name="TextBox 31"/>
-          <p:cNvSpPr txBox="1"/>
-          <p:nvPr/>
-        </p:nvSpPr>
-        <p:spPr>
-          <a:xfrm>
-            <a:off x="502920" y="5669280"/>
-            <a:ext cx="11155680" cy="822960"/>
+            <a:off x="731520" y="5449824"/>
+            <a:ext cx="10789920" cy="365760"/>
           </a:xfrm>
           <a:prstGeom prst="rect">
             <a:avLst/>
@@ -8835,7 +9415,52 @@
           <a:p>
             <a:pPr algn="l">
               <a:lnSpc>
-                <a:spcPct val="120000"/>
+                <a:spcPct val="100000"/>
+              </a:lnSpc>
+              <a:spcBef>
+                <a:spcPts val="0"/>
+              </a:spcBef>
+              <a:spcAft>
+                <a:spcPts val="600"/>
+              </a:spcAft>
+            </a:pPr>
+            <a:r>
+              <a:rPr sz="1200" b="1">
+                <a:solidFill>
+                  <a:srgbClr val="FF3B3B"/>
+                </a:solidFill>
+                <a:latin typeface="Consolas"/>
+              </a:rPr>
+              <a:t>결과 화면</a:t>
+            </a:r>
+          </a:p>
+        </p:txBody>
+      </p:sp>
+      <p:sp>
+        <p:nvSpPr>
+          <p:cNvPr id="19" name="TextBox 18"/>
+          <p:cNvSpPr txBox="1"/>
+          <p:nvPr/>
+        </p:nvSpPr>
+        <p:spPr>
+          <a:xfrm>
+            <a:off x="731520" y="5797296"/>
+            <a:ext cx="10881360" cy="411480"/>
+          </a:xfrm>
+          <a:prstGeom prst="rect">
+            <a:avLst/>
+          </a:prstGeom>
+          <a:noFill/>
+        </p:spPr>
+        <p:txBody>
+          <a:bodyPr wrap="square" lIns="25400" tIns="25400" rIns="25400" bIns="25400" anchor="t">
+            <a:spAutoFit/>
+          </a:bodyPr>
+          <a:lstStyle/>
+          <a:p>
+            <a:pPr algn="l">
+              <a:lnSpc>
+                <a:spcPct val="100000"/>
               </a:lnSpc>
               <a:spcBef>
                 <a:spcPts val="0"/>
@@ -8847,60 +9472,38 @@
             <a:r>
               <a:rPr sz="1300" b="1">
                 <a:solidFill>
-                  <a:srgbClr val="F4A844"/>
-                </a:solidFill>
-                <a:latin typeface="Malgun Gothic"/>
-              </a:rPr>
-              <a:t>자동 파일 식별: </a:t>
+                  <a:srgbClr val="2ECC71"/>
+                </a:solidFill>
+                <a:latin typeface="Malgun Gothic"/>
+              </a:rPr>
+              <a:t>📺 최근 보지만 구독 안 한 채널</a:t>
             </a:r>
             <a:r>
               <a:rPr sz="1300" b="0">
                 <a:solidFill>
+                  <a:srgbClr val="6A6A72"/>
+                </a:solidFill>
+                <a:latin typeface="Malgun Gothic"/>
+              </a:rPr>
+              <a:t>  +  </a:t>
+            </a:r>
+            <a:r>
+              <a:rPr sz="1300" b="1">
+                <a:solidFill>
+                  <a:srgbClr val="FF3B3B"/>
+                </a:solidFill>
+                <a:latin typeface="Malgun Gothic"/>
+              </a:rPr>
+              <a:t>✨ 취향 기반 새 채널 추천</a:t>
+            </a:r>
+            <a:r>
+              <a:rPr sz="1200" b="0">
+                <a:solidFill>
                   <a:srgbClr val="9A9AA2"/>
                 </a:solidFill>
                 <a:latin typeface="Malgun Gothic"/>
               </a:rPr>
-              <a:t>파일명(watch/comment/시청/댓글) + 내용 첫 4KB(titleUrl·subtitles 패턴)로 종류 자동 분기</a:t>
-            </a:r>
-          </a:p>
-          <a:p>
-            <a:pPr algn="l">
-              <a:lnSpc>
-                <a:spcPct val="120000"/>
-              </a:lnSpc>
-              <a:spcBef>
-                <a:spcPts val="0"/>
-              </a:spcBef>
-              <a:spcAft>
-                <a:spcPts val="600"/>
-              </a:spcAft>
-            </a:pPr>
-            <a:r>
-              <a:rPr sz="1200" b="0">
-                <a:solidFill>
-                  <a:srgbClr val="9A9AA2"/>
-                </a:solidFill>
-                <a:latin typeface="Malgun Gothic"/>
-              </a:rPr>
-              <a:t>watch-history.json은 subtitles[0].url에 channelId가 박혀 있어 </a:t>
-            </a:r>
-            <a:r>
-              <a:rPr sz="1200" b="1">
-                <a:solidFill>
-                  <a:srgbClr val="2ECC71"/>
-                </a:solidFill>
-                <a:latin typeface="Malgun Gothic"/>
-              </a:rPr>
-              <a:t>API 호출 0회</a:t>
-            </a:r>
-            <a:r>
-              <a:rPr sz="1200" b="0">
-                <a:solidFill>
-                  <a:srgbClr val="9A9AA2"/>
-                </a:solidFill>
-                <a:latin typeface="Malgun Gothic"/>
-              </a:rPr>
-              <a:t>로 시청 횟수·마지막 시청일 추출</a:t>
+              <a:t>   두 섹션으로 함께 노출 (발굴 실패·비로그인 시 LLM-이름 폴백)</a:t>
             </a:r>
           </a:p>
         </p:txBody>
@@ -8914,6 +9517,1484 @@
 </file>
 
 <file path=ppt/slides/slide14.xml><?xml version="1.0" encoding="utf-8"?>
+<p:sld xmlns:a="http://schemas.openxmlformats.org/drawingml/2006/main" xmlns:r="http://schemas.openxmlformats.org/officeDocument/2006/relationships" xmlns:p="http://schemas.openxmlformats.org/presentationml/2006/main">
+  <p:cSld>
+    <p:spTree>
+      <p:nvGrpSpPr>
+        <p:cNvPr id="1" name=""/>
+        <p:cNvGrpSpPr/>
+        <p:nvPr/>
+      </p:nvGrpSpPr>
+      <p:grpSpPr>
+        <a:xfrm>
+          <a:off x="0" y="0"/>
+          <a:ext cx="0" cy="0"/>
+          <a:chOff x="0" y="0"/>
+          <a:chExt cx="0" cy="0"/>
+        </a:xfrm>
+      </p:grpSpPr>
+      <p:sp>
+        <p:nvSpPr>
+          <p:cNvPr id="2" name="Rectangle 1"/>
+          <p:cNvSpPr/>
+          <p:nvPr/>
+        </p:nvSpPr>
+        <p:spPr>
+          <a:xfrm>
+            <a:off x="0" y="0"/>
+            <a:ext cx="12191695" cy="6858000"/>
+          </a:xfrm>
+          <a:prstGeom prst="rect">
+            <a:avLst/>
+          </a:prstGeom>
+          <a:solidFill>
+            <a:srgbClr val="0A0A0B"/>
+          </a:solidFill>
+          <a:ln>
+            <a:noFill/>
+          </a:ln>
+          <a:effectLst/>
+        </p:spPr>
+        <p:style>
+          <a:lnRef idx="1">
+            <a:schemeClr val="accent1"/>
+          </a:lnRef>
+          <a:fillRef idx="3">
+            <a:schemeClr val="accent1"/>
+          </a:fillRef>
+          <a:effectRef idx="2">
+            <a:schemeClr val="accent1"/>
+          </a:effectRef>
+          <a:fontRef idx="minor">
+            <a:schemeClr val="lt1"/>
+          </a:fontRef>
+        </p:style>
+        <p:txBody>
+          <a:bodyPr rtlCol="0" anchor="ctr"/>
+          <a:lstStyle/>
+          <a:p>
+            <a:pPr algn="ctr"/>
+            <a:endParaRPr/>
+          </a:p>
+        </p:txBody>
+      </p:sp>
+      <p:sp>
+        <p:nvSpPr>
+          <p:cNvPr id="3" name="Rectangle 2"/>
+          <p:cNvSpPr/>
+          <p:nvPr/>
+        </p:nvSpPr>
+        <p:spPr>
+          <a:xfrm>
+            <a:off x="0" y="0"/>
+            <a:ext cx="118872" cy="6858000"/>
+          </a:xfrm>
+          <a:prstGeom prst="rect">
+            <a:avLst/>
+          </a:prstGeom>
+          <a:solidFill>
+            <a:srgbClr val="FF3B3B"/>
+          </a:solidFill>
+          <a:ln>
+            <a:noFill/>
+          </a:ln>
+          <a:effectLst/>
+        </p:spPr>
+        <p:style>
+          <a:lnRef idx="1">
+            <a:schemeClr val="accent1"/>
+          </a:lnRef>
+          <a:fillRef idx="3">
+            <a:schemeClr val="accent1"/>
+          </a:fillRef>
+          <a:effectRef idx="2">
+            <a:schemeClr val="accent1"/>
+          </a:effectRef>
+          <a:fontRef idx="minor">
+            <a:schemeClr val="lt1"/>
+          </a:fontRef>
+        </p:style>
+        <p:txBody>
+          <a:bodyPr rtlCol="0" anchor="ctr"/>
+          <a:lstStyle/>
+          <a:p>
+            <a:pPr algn="ctr"/>
+            <a:endParaRPr/>
+          </a:p>
+        </p:txBody>
+      </p:sp>
+      <p:sp>
+        <p:nvSpPr>
+          <p:cNvPr id="4" name="TextBox 3"/>
+          <p:cNvSpPr txBox="1"/>
+          <p:nvPr/>
+        </p:nvSpPr>
+        <p:spPr>
+          <a:xfrm>
+            <a:off x="502920" y="320040"/>
+            <a:ext cx="11155680" cy="365760"/>
+          </a:xfrm>
+          <a:prstGeom prst="rect">
+            <a:avLst/>
+          </a:prstGeom>
+          <a:noFill/>
+        </p:spPr>
+        <p:txBody>
+          <a:bodyPr wrap="square" lIns="25400" tIns="25400" rIns="25400" bIns="25400" anchor="t">
+            <a:spAutoFit/>
+          </a:bodyPr>
+          <a:lstStyle/>
+          <a:p>
+            <a:pPr algn="l">
+              <a:lnSpc>
+                <a:spcPct val="100000"/>
+              </a:lnSpc>
+              <a:spcBef>
+                <a:spcPts val="0"/>
+              </a:spcBef>
+              <a:spcAft>
+                <a:spcPts val="600"/>
+              </a:spcAft>
+            </a:pPr>
+            <a:r>
+              <a:rPr sz="1300" b="1">
+                <a:solidFill>
+                  <a:srgbClr val="FF3B3B"/>
+                </a:solidFill>
+                <a:latin typeface="Consolas"/>
+              </a:rPr>
+              <a:t>11 · DATA STRATEGY</a:t>
+            </a:r>
+          </a:p>
+        </p:txBody>
+      </p:sp>
+      <p:sp>
+        <p:nvSpPr>
+          <p:cNvPr id="5" name="TextBox 4"/>
+          <p:cNvSpPr txBox="1"/>
+          <p:nvPr/>
+        </p:nvSpPr>
+        <p:spPr>
+          <a:xfrm>
+            <a:off x="502920" y="603504"/>
+            <a:ext cx="11155680" cy="640080"/>
+          </a:xfrm>
+          <a:prstGeom prst="rect">
+            <a:avLst/>
+          </a:prstGeom>
+          <a:noFill/>
+        </p:spPr>
+        <p:txBody>
+          <a:bodyPr wrap="square" lIns="25400" tIns="25400" rIns="25400" bIns="25400" anchor="t">
+            <a:spAutoFit/>
+          </a:bodyPr>
+          <a:lstStyle/>
+          <a:p>
+            <a:pPr algn="l">
+              <a:lnSpc>
+                <a:spcPct val="100000"/>
+              </a:lnSpc>
+              <a:spcBef>
+                <a:spcPts val="0"/>
+              </a:spcBef>
+              <a:spcAft>
+                <a:spcPts val="600"/>
+              </a:spcAft>
+            </a:pPr>
+            <a:r>
+              <a:rPr sz="3000" b="1">
+                <a:solidFill>
+                  <a:srgbClr val="F2F2F2"/>
+                </a:solidFill>
+                <a:latin typeface="Malgun Gothic"/>
+              </a:rPr>
+              <a:t>Takeout 하이브리드 — 비용 vs 정확도</a:t>
+            </a:r>
+          </a:p>
+        </p:txBody>
+      </p:sp>
+      <p:sp>
+        <p:nvSpPr>
+          <p:cNvPr id="6" name="Rectangle 5"/>
+          <p:cNvSpPr/>
+          <p:nvPr/>
+        </p:nvSpPr>
+        <p:spPr>
+          <a:xfrm>
+            <a:off x="521207" y="1207008"/>
+            <a:ext cx="1920240" cy="31750"/>
+          </a:xfrm>
+          <a:prstGeom prst="rect">
+            <a:avLst/>
+          </a:prstGeom>
+          <a:solidFill>
+            <a:srgbClr val="FF3B3B"/>
+          </a:solidFill>
+          <a:ln>
+            <a:noFill/>
+          </a:ln>
+          <a:effectLst/>
+        </p:spPr>
+        <p:style>
+          <a:lnRef idx="1">
+            <a:schemeClr val="accent1"/>
+          </a:lnRef>
+          <a:fillRef idx="3">
+            <a:schemeClr val="accent1"/>
+          </a:fillRef>
+          <a:effectRef idx="2">
+            <a:schemeClr val="accent1"/>
+          </a:effectRef>
+          <a:fontRef idx="minor">
+            <a:schemeClr val="lt1"/>
+          </a:fontRef>
+        </p:style>
+        <p:txBody>
+          <a:bodyPr rtlCol="0" anchor="ctr"/>
+          <a:lstStyle/>
+          <a:p>
+            <a:pPr algn="ctr"/>
+            <a:endParaRPr/>
+          </a:p>
+        </p:txBody>
+      </p:sp>
+      <p:sp>
+        <p:nvSpPr>
+          <p:cNvPr id="7" name="TextBox 6"/>
+          <p:cNvSpPr txBox="1"/>
+          <p:nvPr/>
+        </p:nvSpPr>
+        <p:spPr>
+          <a:xfrm>
+            <a:off x="502920" y="1371600"/>
+            <a:ext cx="11155680" cy="457200"/>
+          </a:xfrm>
+          <a:prstGeom prst="rect">
+            <a:avLst/>
+          </a:prstGeom>
+          <a:noFill/>
+        </p:spPr>
+        <p:txBody>
+          <a:bodyPr wrap="square" lIns="25400" tIns="25400" rIns="25400" bIns="25400" anchor="t">
+            <a:spAutoFit/>
+          </a:bodyPr>
+          <a:lstStyle/>
+          <a:p>
+            <a:pPr algn="l">
+              <a:lnSpc>
+                <a:spcPct val="100000"/>
+              </a:lnSpc>
+              <a:spcBef>
+                <a:spcPts val="0"/>
+              </a:spcBef>
+              <a:spcAft>
+                <a:spcPts val="600"/>
+              </a:spcAft>
+            </a:pPr>
+            <a:r>
+              <a:rPr sz="1400" b="0">
+                <a:solidFill>
+                  <a:srgbClr val="9A9AA2"/>
+                </a:solidFill>
+                <a:latin typeface="Malgun Gothic"/>
+              </a:rPr>
+              <a:t>YouTube API엔 "내 댓글·시청 기록 전체" 조회가 없다 → </a:t>
+            </a:r>
+            <a:r>
+              <a:rPr sz="1400" b="1">
+                <a:solidFill>
+                  <a:srgbClr val="F2F2F2"/>
+                </a:solidFill>
+                <a:latin typeface="Malgun Gothic"/>
+              </a:rPr>
+              <a:t>Google Takeout 파일을 보조 입력으로 받아 보강</a:t>
+            </a:r>
+          </a:p>
+        </p:txBody>
+      </p:sp>
+      <p:sp>
+        <p:nvSpPr>
+          <p:cNvPr id="8" name="Rectangle 7"/>
+          <p:cNvSpPr/>
+          <p:nvPr/>
+        </p:nvSpPr>
+        <p:spPr>
+          <a:xfrm>
+            <a:off x="502920" y="2011680"/>
+            <a:ext cx="11183112" cy="502920"/>
+          </a:xfrm>
+          <a:prstGeom prst="rect">
+            <a:avLst/>
+          </a:prstGeom>
+          <a:solidFill>
+            <a:srgbClr val="24242A"/>
+          </a:solidFill>
+          <a:ln>
+            <a:noFill/>
+          </a:ln>
+          <a:effectLst/>
+        </p:spPr>
+        <p:style>
+          <a:lnRef idx="1">
+            <a:schemeClr val="accent1"/>
+          </a:lnRef>
+          <a:fillRef idx="3">
+            <a:schemeClr val="accent1"/>
+          </a:fillRef>
+          <a:effectRef idx="2">
+            <a:schemeClr val="accent1"/>
+          </a:effectRef>
+          <a:fontRef idx="minor">
+            <a:schemeClr val="lt1"/>
+          </a:fontRef>
+        </p:style>
+        <p:txBody>
+          <a:bodyPr rtlCol="0" anchor="ctr"/>
+          <a:lstStyle/>
+          <a:p>
+            <a:pPr algn="ctr"/>
+            <a:endParaRPr/>
+          </a:p>
+        </p:txBody>
+      </p:sp>
+      <p:sp>
+        <p:nvSpPr>
+          <p:cNvPr id="9" name="TextBox 8"/>
+          <p:cNvSpPr txBox="1"/>
+          <p:nvPr/>
+        </p:nvSpPr>
+        <p:spPr>
+          <a:xfrm>
+            <a:off x="502920" y="2011680"/>
+            <a:ext cx="2880360" cy="502920"/>
+          </a:xfrm>
+          <a:prstGeom prst="rect">
+            <a:avLst/>
+          </a:prstGeom>
+          <a:noFill/>
+        </p:spPr>
+        <p:txBody>
+          <a:bodyPr wrap="square" lIns="25400" tIns="25400" rIns="25400" bIns="25400" anchor="ctr">
+            <a:spAutoFit/>
+          </a:bodyPr>
+          <a:lstStyle/>
+          <a:p>
+            <a:pPr algn="l">
+              <a:lnSpc>
+                <a:spcPct val="100000"/>
+              </a:lnSpc>
+              <a:spcBef>
+                <a:spcPts val="0"/>
+              </a:spcBef>
+              <a:spcAft>
+                <a:spcPts val="600"/>
+              </a:spcAft>
+            </a:pPr>
+            <a:r>
+              <a:rPr sz="1300" b="1">
+                <a:solidFill>
+                  <a:srgbClr val="FF3B3B"/>
+                </a:solidFill>
+                <a:latin typeface="Malgun Gothic"/>
+              </a:rPr>
+              <a:t>모드</a:t>
+            </a:r>
+          </a:p>
+        </p:txBody>
+      </p:sp>
+      <p:sp>
+        <p:nvSpPr>
+          <p:cNvPr id="10" name="TextBox 9"/>
+          <p:cNvSpPr txBox="1"/>
+          <p:nvPr/>
+        </p:nvSpPr>
+        <p:spPr>
+          <a:xfrm>
+            <a:off x="3383280" y="2011680"/>
+            <a:ext cx="2103120" cy="502920"/>
+          </a:xfrm>
+          <a:prstGeom prst="rect">
+            <a:avLst/>
+          </a:prstGeom>
+          <a:noFill/>
+        </p:spPr>
+        <p:txBody>
+          <a:bodyPr wrap="square" lIns="25400" tIns="25400" rIns="25400" bIns="25400" anchor="ctr">
+            <a:spAutoFit/>
+          </a:bodyPr>
+          <a:lstStyle/>
+          <a:p>
+            <a:pPr algn="ctr">
+              <a:lnSpc>
+                <a:spcPct val="100000"/>
+              </a:lnSpc>
+              <a:spcBef>
+                <a:spcPts val="0"/>
+              </a:spcBef>
+              <a:spcAft>
+                <a:spcPts val="600"/>
+              </a:spcAft>
+            </a:pPr>
+            <a:r>
+              <a:rPr sz="1300" b="1">
+                <a:solidFill>
+                  <a:srgbClr val="FF3B3B"/>
+                </a:solidFill>
+                <a:latin typeface="Malgun Gothic"/>
+              </a:rPr>
+              <a:t>사용자 부담</a:t>
+            </a:r>
+          </a:p>
+        </p:txBody>
+      </p:sp>
+      <p:sp>
+        <p:nvSpPr>
+          <p:cNvPr id="11" name="TextBox 10"/>
+          <p:cNvSpPr txBox="1"/>
+          <p:nvPr/>
+        </p:nvSpPr>
+        <p:spPr>
+          <a:xfrm>
+            <a:off x="5486400" y="2011680"/>
+            <a:ext cx="3017520" cy="502920"/>
+          </a:xfrm>
+          <a:prstGeom prst="rect">
+            <a:avLst/>
+          </a:prstGeom>
+          <a:noFill/>
+        </p:spPr>
+        <p:txBody>
+          <a:bodyPr wrap="square" lIns="25400" tIns="25400" rIns="25400" bIns="25400" anchor="ctr">
+            <a:spAutoFit/>
+          </a:bodyPr>
+          <a:lstStyle/>
+          <a:p>
+            <a:pPr algn="ctr">
+              <a:lnSpc>
+                <a:spcPct val="100000"/>
+              </a:lnSpc>
+              <a:spcBef>
+                <a:spcPts val="0"/>
+              </a:spcBef>
+              <a:spcAft>
+                <a:spcPts val="600"/>
+              </a:spcAft>
+            </a:pPr>
+            <a:r>
+              <a:rPr sz="1300" b="1">
+                <a:solidFill>
+                  <a:srgbClr val="FF3B3B"/>
+                </a:solidFill>
+                <a:latin typeface="Malgun Gothic"/>
+              </a:rPr>
+              <a:t>API 비용</a:t>
+            </a:r>
+          </a:p>
+        </p:txBody>
+      </p:sp>
+      <p:sp>
+        <p:nvSpPr>
+          <p:cNvPr id="12" name="TextBox 11"/>
+          <p:cNvSpPr txBox="1"/>
+          <p:nvPr/>
+        </p:nvSpPr>
+        <p:spPr>
+          <a:xfrm>
+            <a:off x="8503920" y="2011680"/>
+            <a:ext cx="3154680" cy="502920"/>
+          </a:xfrm>
+          <a:prstGeom prst="rect">
+            <a:avLst/>
+          </a:prstGeom>
+          <a:noFill/>
+        </p:spPr>
+        <p:txBody>
+          <a:bodyPr wrap="square" lIns="25400" tIns="25400" rIns="25400" bIns="25400" anchor="ctr">
+            <a:spAutoFit/>
+          </a:bodyPr>
+          <a:lstStyle/>
+          <a:p>
+            <a:pPr algn="ctr">
+              <a:lnSpc>
+                <a:spcPct val="100000"/>
+              </a:lnSpc>
+              <a:spcBef>
+                <a:spcPts val="0"/>
+              </a:spcBef>
+              <a:spcAft>
+                <a:spcPts val="600"/>
+              </a:spcAft>
+            </a:pPr>
+            <a:r>
+              <a:rPr sz="1300" b="1">
+                <a:solidFill>
+                  <a:srgbClr val="FF3B3B"/>
+                </a:solidFill>
+                <a:latin typeface="Malgun Gothic"/>
+              </a:rPr>
+              <a:t>정확도</a:t>
+            </a:r>
+          </a:p>
+        </p:txBody>
+      </p:sp>
+      <p:sp>
+        <p:nvSpPr>
+          <p:cNvPr id="13" name="Rectangle 12"/>
+          <p:cNvSpPr/>
+          <p:nvPr/>
+        </p:nvSpPr>
+        <p:spPr>
+          <a:xfrm>
+            <a:off x="502920" y="2542032"/>
+            <a:ext cx="11183112" cy="658368"/>
+          </a:xfrm>
+          <a:prstGeom prst="rect">
+            <a:avLst/>
+          </a:prstGeom>
+          <a:solidFill>
+            <a:srgbClr val="16161A"/>
+          </a:solidFill>
+          <a:ln>
+            <a:noFill/>
+          </a:ln>
+          <a:effectLst/>
+        </p:spPr>
+        <p:style>
+          <a:lnRef idx="1">
+            <a:schemeClr val="accent1"/>
+          </a:lnRef>
+          <a:fillRef idx="3">
+            <a:schemeClr val="accent1"/>
+          </a:fillRef>
+          <a:effectRef idx="2">
+            <a:schemeClr val="accent1"/>
+          </a:effectRef>
+          <a:fontRef idx="minor">
+            <a:schemeClr val="lt1"/>
+          </a:fontRef>
+        </p:style>
+        <p:txBody>
+          <a:bodyPr rtlCol="0" anchor="ctr"/>
+          <a:lstStyle/>
+          <a:p>
+            <a:pPr algn="ctr"/>
+            <a:endParaRPr/>
+          </a:p>
+        </p:txBody>
+      </p:sp>
+      <p:sp>
+        <p:nvSpPr>
+          <p:cNvPr id="14" name="TextBox 13"/>
+          <p:cNvSpPr txBox="1"/>
+          <p:nvPr/>
+        </p:nvSpPr>
+        <p:spPr>
+          <a:xfrm>
+            <a:off x="502920" y="2542032"/>
+            <a:ext cx="2880360" cy="658368"/>
+          </a:xfrm>
+          <a:prstGeom prst="rect">
+            <a:avLst/>
+          </a:prstGeom>
+          <a:noFill/>
+        </p:spPr>
+        <p:txBody>
+          <a:bodyPr wrap="square" lIns="25400" tIns="25400" rIns="25400" bIns="25400" anchor="ctr">
+            <a:spAutoFit/>
+          </a:bodyPr>
+          <a:lstStyle/>
+          <a:p>
+            <a:pPr algn="l">
+              <a:lnSpc>
+                <a:spcPct val="100000"/>
+              </a:lnSpc>
+              <a:spcBef>
+                <a:spcPts val="0"/>
+              </a:spcBef>
+              <a:spcAft>
+                <a:spcPts val="600"/>
+              </a:spcAft>
+            </a:pPr>
+            <a:r>
+              <a:rPr sz="1400" b="0">
+                <a:solidFill>
+                  <a:srgbClr val="9A9AA2"/>
+                </a:solidFill>
+                <a:latin typeface="Malgun Gothic"/>
+              </a:rPr>
+              <a:t>둘 다 미업로드</a:t>
+            </a:r>
+          </a:p>
+        </p:txBody>
+      </p:sp>
+      <p:sp>
+        <p:nvSpPr>
+          <p:cNvPr id="15" name="TextBox 14"/>
+          <p:cNvSpPr txBox="1"/>
+          <p:nvPr/>
+        </p:nvSpPr>
+        <p:spPr>
+          <a:xfrm>
+            <a:off x="3383280" y="2542032"/>
+            <a:ext cx="2103120" cy="658368"/>
+          </a:xfrm>
+          <a:prstGeom prst="rect">
+            <a:avLst/>
+          </a:prstGeom>
+          <a:noFill/>
+        </p:spPr>
+        <p:txBody>
+          <a:bodyPr wrap="square" lIns="25400" tIns="25400" rIns="25400" bIns="25400" anchor="ctr">
+            <a:spAutoFit/>
+          </a:bodyPr>
+          <a:lstStyle/>
+          <a:p>
+            <a:pPr algn="ctr">
+              <a:lnSpc>
+                <a:spcPct val="100000"/>
+              </a:lnSpc>
+              <a:spcBef>
+                <a:spcPts val="0"/>
+              </a:spcBef>
+              <a:spcAft>
+                <a:spcPts val="600"/>
+              </a:spcAft>
+            </a:pPr>
+            <a:r>
+              <a:rPr sz="1200" b="0">
+                <a:solidFill>
+                  <a:srgbClr val="9A9AA2"/>
+                </a:solidFill>
+                <a:latin typeface="Malgun Gothic"/>
+              </a:rPr>
+              <a:t>없음</a:t>
+            </a:r>
+          </a:p>
+        </p:txBody>
+      </p:sp>
+      <p:sp>
+        <p:nvSpPr>
+          <p:cNvPr id="16" name="TextBox 15"/>
+          <p:cNvSpPr txBox="1"/>
+          <p:nvPr/>
+        </p:nvSpPr>
+        <p:spPr>
+          <a:xfrm>
+            <a:off x="5486400" y="2542032"/>
+            <a:ext cx="3017520" cy="658368"/>
+          </a:xfrm>
+          <a:prstGeom prst="rect">
+            <a:avLst/>
+          </a:prstGeom>
+          <a:noFill/>
+        </p:spPr>
+        <p:txBody>
+          <a:bodyPr wrap="square" lIns="25400" tIns="25400" rIns="25400" bIns="25400" anchor="ctr">
+            <a:spAutoFit/>
+          </a:bodyPr>
+          <a:lstStyle/>
+          <a:p>
+            <a:pPr algn="ctr">
+              <a:lnSpc>
+                <a:spcPct val="100000"/>
+              </a:lnSpc>
+              <a:spcBef>
+                <a:spcPts val="0"/>
+              </a:spcBef>
+              <a:spcAft>
+                <a:spcPts val="600"/>
+              </a:spcAft>
+            </a:pPr>
+            <a:r>
+              <a:rPr sz="1200" b="0">
+                <a:solidFill>
+                  <a:srgbClr val="9A9AA2"/>
+                </a:solidFill>
+                <a:latin typeface="Consolas"/>
+              </a:rPr>
+              <a:t>commentThreads × 채널 수</a:t>
+            </a:r>
+          </a:p>
+        </p:txBody>
+      </p:sp>
+      <p:sp>
+        <p:nvSpPr>
+          <p:cNvPr id="17" name="TextBox 16"/>
+          <p:cNvSpPr txBox="1"/>
+          <p:nvPr/>
+        </p:nvSpPr>
+        <p:spPr>
+          <a:xfrm>
+            <a:off x="8503920" y="2542032"/>
+            <a:ext cx="3154680" cy="658368"/>
+          </a:xfrm>
+          <a:prstGeom prst="rect">
+            <a:avLst/>
+          </a:prstGeom>
+          <a:noFill/>
+        </p:spPr>
+        <p:txBody>
+          <a:bodyPr wrap="square" lIns="25400" tIns="25400" rIns="25400" bIns="25400" anchor="ctr">
+            <a:spAutoFit/>
+          </a:bodyPr>
+          <a:lstStyle/>
+          <a:p>
+            <a:pPr algn="ctr">
+              <a:lnSpc>
+                <a:spcPct val="100000"/>
+              </a:lnSpc>
+              <a:spcBef>
+                <a:spcPts val="0"/>
+              </a:spcBef>
+              <a:spcAft>
+                <a:spcPts val="600"/>
+              </a:spcAft>
+            </a:pPr>
+            <a:r>
+              <a:rPr sz="1200" b="0">
+                <a:solidFill>
+                  <a:srgbClr val="9A9AA2"/>
+                </a:solidFill>
+                <a:latin typeface="Malgun Gothic"/>
+              </a:rPr>
+              <a:t>댓글 근사 · 시청 미반영</a:t>
+            </a:r>
+          </a:p>
+        </p:txBody>
+      </p:sp>
+      <p:sp>
+        <p:nvSpPr>
+          <p:cNvPr id="18" name="TextBox 17"/>
+          <p:cNvSpPr txBox="1"/>
+          <p:nvPr/>
+        </p:nvSpPr>
+        <p:spPr>
+          <a:xfrm>
+            <a:off x="502920" y="3255264"/>
+            <a:ext cx="2880360" cy="658368"/>
+          </a:xfrm>
+          <a:prstGeom prst="rect">
+            <a:avLst/>
+          </a:prstGeom>
+          <a:noFill/>
+        </p:spPr>
+        <p:txBody>
+          <a:bodyPr wrap="square" lIns="25400" tIns="25400" rIns="25400" bIns="25400" anchor="ctr">
+            <a:spAutoFit/>
+          </a:bodyPr>
+          <a:lstStyle/>
+          <a:p>
+            <a:pPr algn="l">
+              <a:lnSpc>
+                <a:spcPct val="100000"/>
+              </a:lnSpc>
+              <a:spcBef>
+                <a:spcPts val="0"/>
+              </a:spcBef>
+              <a:spcAft>
+                <a:spcPts val="600"/>
+              </a:spcAft>
+            </a:pPr>
+            <a:r>
+              <a:rPr sz="1400" b="1">
+                <a:solidFill>
+                  <a:srgbClr val="F2F2F2"/>
+                </a:solidFill>
+                <a:latin typeface="Malgun Gothic"/>
+              </a:rPr>
+              <a:t>comments.csv 만</a:t>
+            </a:r>
+          </a:p>
+        </p:txBody>
+      </p:sp>
+      <p:sp>
+        <p:nvSpPr>
+          <p:cNvPr id="19" name="TextBox 18"/>
+          <p:cNvSpPr txBox="1"/>
+          <p:nvPr/>
+        </p:nvSpPr>
+        <p:spPr>
+          <a:xfrm>
+            <a:off x="3383280" y="3255264"/>
+            <a:ext cx="2103120" cy="658368"/>
+          </a:xfrm>
+          <a:prstGeom prst="rect">
+            <a:avLst/>
+          </a:prstGeom>
+          <a:noFill/>
+        </p:spPr>
+        <p:txBody>
+          <a:bodyPr wrap="square" lIns="25400" tIns="25400" rIns="25400" bIns="25400" anchor="ctr">
+            <a:spAutoFit/>
+          </a:bodyPr>
+          <a:lstStyle/>
+          <a:p>
+            <a:pPr algn="ctr">
+              <a:lnSpc>
+                <a:spcPct val="100000"/>
+              </a:lnSpc>
+              <a:spcBef>
+                <a:spcPts val="0"/>
+              </a:spcBef>
+              <a:spcAft>
+                <a:spcPts val="600"/>
+              </a:spcAft>
+            </a:pPr>
+            <a:r>
+              <a:rPr sz="1200" b="0">
+                <a:solidFill>
+                  <a:srgbClr val="9A9AA2"/>
+                </a:solidFill>
+                <a:latin typeface="Malgun Gothic"/>
+              </a:rPr>
+              <a:t>1회 업로드</a:t>
+            </a:r>
+          </a:p>
+        </p:txBody>
+      </p:sp>
+      <p:sp>
+        <p:nvSpPr>
+          <p:cNvPr id="20" name="TextBox 19"/>
+          <p:cNvSpPr txBox="1"/>
+          <p:nvPr/>
+        </p:nvSpPr>
+        <p:spPr>
+          <a:xfrm>
+            <a:off x="5486400" y="3255264"/>
+            <a:ext cx="3017520" cy="658368"/>
+          </a:xfrm>
+          <a:prstGeom prst="rect">
+            <a:avLst/>
+          </a:prstGeom>
+          <a:noFill/>
+        </p:spPr>
+        <p:txBody>
+          <a:bodyPr wrap="square" lIns="25400" tIns="25400" rIns="25400" bIns="25400" anchor="ctr">
+            <a:spAutoFit/>
+          </a:bodyPr>
+          <a:lstStyle/>
+          <a:p>
+            <a:pPr algn="ctr">
+              <a:lnSpc>
+                <a:spcPct val="100000"/>
+              </a:lnSpc>
+              <a:spcBef>
+                <a:spcPts val="0"/>
+              </a:spcBef>
+              <a:spcAft>
+                <a:spcPts val="600"/>
+              </a:spcAft>
+            </a:pPr>
+            <a:r>
+              <a:rPr sz="1200" b="0">
+                <a:solidFill>
+                  <a:srgbClr val="9A9AA2"/>
+                </a:solidFill>
+                <a:latin typeface="Consolas"/>
+              </a:rPr>
+              <a:t>videos.list × 영상수/50</a:t>
+            </a:r>
+          </a:p>
+        </p:txBody>
+      </p:sp>
+      <p:sp>
+        <p:nvSpPr>
+          <p:cNvPr id="21" name="TextBox 20"/>
+          <p:cNvSpPr txBox="1"/>
+          <p:nvPr/>
+        </p:nvSpPr>
+        <p:spPr>
+          <a:xfrm>
+            <a:off x="8503920" y="3255264"/>
+            <a:ext cx="3154680" cy="658368"/>
+          </a:xfrm>
+          <a:prstGeom prst="rect">
+            <a:avLst/>
+          </a:prstGeom>
+          <a:noFill/>
+        </p:spPr>
+        <p:txBody>
+          <a:bodyPr wrap="square" lIns="25400" tIns="25400" rIns="25400" bIns="25400" anchor="ctr">
+            <a:spAutoFit/>
+          </a:bodyPr>
+          <a:lstStyle/>
+          <a:p>
+            <a:pPr algn="ctr">
+              <a:lnSpc>
+                <a:spcPct val="100000"/>
+              </a:lnSpc>
+              <a:spcBef>
+                <a:spcPts val="0"/>
+              </a:spcBef>
+              <a:spcAft>
+                <a:spcPts val="600"/>
+              </a:spcAft>
+            </a:pPr>
+            <a:r>
+              <a:rPr sz="1200" b="0">
+                <a:solidFill>
+                  <a:srgbClr val="F2F2F2"/>
+                </a:solidFill>
+                <a:latin typeface="Malgun Gothic"/>
+              </a:rPr>
+              <a:t>댓글 정확 · 시청 미반영</a:t>
+            </a:r>
+          </a:p>
+        </p:txBody>
+      </p:sp>
+      <p:sp>
+        <p:nvSpPr>
+          <p:cNvPr id="22" name="Rectangle 21"/>
+          <p:cNvSpPr/>
+          <p:nvPr/>
+        </p:nvSpPr>
+        <p:spPr>
+          <a:xfrm>
+            <a:off x="502920" y="3968496"/>
+            <a:ext cx="11183112" cy="658368"/>
+          </a:xfrm>
+          <a:prstGeom prst="rect">
+            <a:avLst/>
+          </a:prstGeom>
+          <a:solidFill>
+            <a:srgbClr val="16161A"/>
+          </a:solidFill>
+          <a:ln>
+            <a:noFill/>
+          </a:ln>
+          <a:effectLst/>
+        </p:spPr>
+        <p:style>
+          <a:lnRef idx="1">
+            <a:schemeClr val="accent1"/>
+          </a:lnRef>
+          <a:fillRef idx="3">
+            <a:schemeClr val="accent1"/>
+          </a:fillRef>
+          <a:effectRef idx="2">
+            <a:schemeClr val="accent1"/>
+          </a:effectRef>
+          <a:fontRef idx="minor">
+            <a:schemeClr val="lt1"/>
+          </a:fontRef>
+        </p:style>
+        <p:txBody>
+          <a:bodyPr rtlCol="0" anchor="ctr"/>
+          <a:lstStyle/>
+          <a:p>
+            <a:pPr algn="ctr"/>
+            <a:endParaRPr/>
+          </a:p>
+        </p:txBody>
+      </p:sp>
+      <p:sp>
+        <p:nvSpPr>
+          <p:cNvPr id="23" name="TextBox 22"/>
+          <p:cNvSpPr txBox="1"/>
+          <p:nvPr/>
+        </p:nvSpPr>
+        <p:spPr>
+          <a:xfrm>
+            <a:off x="502920" y="3968496"/>
+            <a:ext cx="2880360" cy="658368"/>
+          </a:xfrm>
+          <a:prstGeom prst="rect">
+            <a:avLst/>
+          </a:prstGeom>
+          <a:noFill/>
+        </p:spPr>
+        <p:txBody>
+          <a:bodyPr wrap="square" lIns="25400" tIns="25400" rIns="25400" bIns="25400" anchor="ctr">
+            <a:spAutoFit/>
+          </a:bodyPr>
+          <a:lstStyle/>
+          <a:p>
+            <a:pPr algn="l">
+              <a:lnSpc>
+                <a:spcPct val="100000"/>
+              </a:lnSpc>
+              <a:spcBef>
+                <a:spcPts val="0"/>
+              </a:spcBef>
+              <a:spcAft>
+                <a:spcPts val="600"/>
+              </a:spcAft>
+            </a:pPr>
+            <a:r>
+              <a:rPr sz="1400" b="1">
+                <a:solidFill>
+                  <a:srgbClr val="F2F2F2"/>
+                </a:solidFill>
+                <a:latin typeface="Malgun Gothic"/>
+              </a:rPr>
+              <a:t>watch-history.json 만</a:t>
+            </a:r>
+          </a:p>
+        </p:txBody>
+      </p:sp>
+      <p:sp>
+        <p:nvSpPr>
+          <p:cNvPr id="24" name="TextBox 23"/>
+          <p:cNvSpPr txBox="1"/>
+          <p:nvPr/>
+        </p:nvSpPr>
+        <p:spPr>
+          <a:xfrm>
+            <a:off x="3383280" y="3968496"/>
+            <a:ext cx="2103120" cy="658368"/>
+          </a:xfrm>
+          <a:prstGeom prst="rect">
+            <a:avLst/>
+          </a:prstGeom>
+          <a:noFill/>
+        </p:spPr>
+        <p:txBody>
+          <a:bodyPr wrap="square" lIns="25400" tIns="25400" rIns="25400" bIns="25400" anchor="ctr">
+            <a:spAutoFit/>
+          </a:bodyPr>
+          <a:lstStyle/>
+          <a:p>
+            <a:pPr algn="ctr">
+              <a:lnSpc>
+                <a:spcPct val="100000"/>
+              </a:lnSpc>
+              <a:spcBef>
+                <a:spcPts val="0"/>
+              </a:spcBef>
+              <a:spcAft>
+                <a:spcPts val="600"/>
+              </a:spcAft>
+            </a:pPr>
+            <a:r>
+              <a:rPr sz="1200" b="0">
+                <a:solidFill>
+                  <a:srgbClr val="9A9AA2"/>
+                </a:solidFill>
+                <a:latin typeface="Malgun Gothic"/>
+              </a:rPr>
+              <a:t>1회 업로드</a:t>
+            </a:r>
+          </a:p>
+        </p:txBody>
+      </p:sp>
+      <p:sp>
+        <p:nvSpPr>
+          <p:cNvPr id="25" name="TextBox 24"/>
+          <p:cNvSpPr txBox="1"/>
+          <p:nvPr/>
+        </p:nvSpPr>
+        <p:spPr>
+          <a:xfrm>
+            <a:off x="5486400" y="3968496"/>
+            <a:ext cx="3017520" cy="658368"/>
+          </a:xfrm>
+          <a:prstGeom prst="rect">
+            <a:avLst/>
+          </a:prstGeom>
+          <a:noFill/>
+        </p:spPr>
+        <p:txBody>
+          <a:bodyPr wrap="square" lIns="25400" tIns="25400" rIns="25400" bIns="25400" anchor="ctr">
+            <a:spAutoFit/>
+          </a:bodyPr>
+          <a:lstStyle/>
+          <a:p>
+            <a:pPr algn="ctr">
+              <a:lnSpc>
+                <a:spcPct val="100000"/>
+              </a:lnSpc>
+              <a:spcBef>
+                <a:spcPts val="0"/>
+              </a:spcBef>
+              <a:spcAft>
+                <a:spcPts val="600"/>
+              </a:spcAft>
+            </a:pPr>
+            <a:r>
+              <a:rPr sz="1200" b="0">
+                <a:solidFill>
+                  <a:srgbClr val="9A9AA2"/>
+                </a:solidFill>
+                <a:latin typeface="Consolas"/>
+              </a:rPr>
+              <a:t>0 units (subtitles에 ID)</a:t>
+            </a:r>
+          </a:p>
+        </p:txBody>
+      </p:sp>
+      <p:sp>
+        <p:nvSpPr>
+          <p:cNvPr id="26" name="TextBox 25"/>
+          <p:cNvSpPr txBox="1"/>
+          <p:nvPr/>
+        </p:nvSpPr>
+        <p:spPr>
+          <a:xfrm>
+            <a:off x="8503920" y="3968496"/>
+            <a:ext cx="3154680" cy="658368"/>
+          </a:xfrm>
+          <a:prstGeom prst="rect">
+            <a:avLst/>
+          </a:prstGeom>
+          <a:noFill/>
+        </p:spPr>
+        <p:txBody>
+          <a:bodyPr wrap="square" lIns="25400" tIns="25400" rIns="25400" bIns="25400" anchor="ctr">
+            <a:spAutoFit/>
+          </a:bodyPr>
+          <a:lstStyle/>
+          <a:p>
+            <a:pPr algn="ctr">
+              <a:lnSpc>
+                <a:spcPct val="100000"/>
+              </a:lnSpc>
+              <a:spcBef>
+                <a:spcPts val="0"/>
+              </a:spcBef>
+              <a:spcAft>
+                <a:spcPts val="600"/>
+              </a:spcAft>
+            </a:pPr>
+            <a:r>
+              <a:rPr sz="1200" b="0">
+                <a:solidFill>
+                  <a:srgbClr val="F2F2F2"/>
+                </a:solidFill>
+                <a:latin typeface="Malgun Gothic"/>
+              </a:rPr>
+              <a:t>시청 정확 · 댓글 근사</a:t>
+            </a:r>
+          </a:p>
+        </p:txBody>
+      </p:sp>
+      <p:sp>
+        <p:nvSpPr>
+          <p:cNvPr id="27" name="Rectangle 26"/>
+          <p:cNvSpPr/>
+          <p:nvPr/>
+        </p:nvSpPr>
+        <p:spPr>
+          <a:xfrm>
+            <a:off x="502920" y="4681728"/>
+            <a:ext cx="11183112" cy="658368"/>
+          </a:xfrm>
+          <a:prstGeom prst="rect">
+            <a:avLst/>
+          </a:prstGeom>
+          <a:solidFill>
+            <a:srgbClr val="142218"/>
+          </a:solidFill>
+          <a:ln>
+            <a:noFill/>
+          </a:ln>
+          <a:effectLst/>
+        </p:spPr>
+        <p:style>
+          <a:lnRef idx="1">
+            <a:schemeClr val="accent1"/>
+          </a:lnRef>
+          <a:fillRef idx="3">
+            <a:schemeClr val="accent1"/>
+          </a:fillRef>
+          <a:effectRef idx="2">
+            <a:schemeClr val="accent1"/>
+          </a:effectRef>
+          <a:fontRef idx="minor">
+            <a:schemeClr val="lt1"/>
+          </a:fontRef>
+        </p:style>
+        <p:txBody>
+          <a:bodyPr rtlCol="0" anchor="ctr"/>
+          <a:lstStyle/>
+          <a:p>
+            <a:pPr algn="ctr"/>
+            <a:endParaRPr/>
+          </a:p>
+        </p:txBody>
+      </p:sp>
+      <p:sp>
+        <p:nvSpPr>
+          <p:cNvPr id="28" name="TextBox 27"/>
+          <p:cNvSpPr txBox="1"/>
+          <p:nvPr/>
+        </p:nvSpPr>
+        <p:spPr>
+          <a:xfrm>
+            <a:off x="502920" y="4681728"/>
+            <a:ext cx="2880360" cy="658368"/>
+          </a:xfrm>
+          <a:prstGeom prst="rect">
+            <a:avLst/>
+          </a:prstGeom>
+          <a:noFill/>
+        </p:spPr>
+        <p:txBody>
+          <a:bodyPr wrap="square" lIns="25400" tIns="25400" rIns="25400" bIns="25400" anchor="ctr">
+            <a:spAutoFit/>
+          </a:bodyPr>
+          <a:lstStyle/>
+          <a:p>
+            <a:pPr algn="l">
+              <a:lnSpc>
+                <a:spcPct val="100000"/>
+              </a:lnSpc>
+              <a:spcBef>
+                <a:spcPts val="0"/>
+              </a:spcBef>
+              <a:spcAft>
+                <a:spcPts val="600"/>
+              </a:spcAft>
+            </a:pPr>
+            <a:r>
+              <a:rPr sz="1400" b="1">
+                <a:solidFill>
+                  <a:srgbClr val="2ECC71"/>
+                </a:solidFill>
+                <a:latin typeface="Malgun Gothic"/>
+              </a:rPr>
+              <a:t>둘 다 ⭐</a:t>
+            </a:r>
+          </a:p>
+        </p:txBody>
+      </p:sp>
+      <p:sp>
+        <p:nvSpPr>
+          <p:cNvPr id="29" name="TextBox 28"/>
+          <p:cNvSpPr txBox="1"/>
+          <p:nvPr/>
+        </p:nvSpPr>
+        <p:spPr>
+          <a:xfrm>
+            <a:off x="3383280" y="4681728"/>
+            <a:ext cx="2103120" cy="658368"/>
+          </a:xfrm>
+          <a:prstGeom prst="rect">
+            <a:avLst/>
+          </a:prstGeom>
+          <a:noFill/>
+        </p:spPr>
+        <p:txBody>
+          <a:bodyPr wrap="square" lIns="25400" tIns="25400" rIns="25400" bIns="25400" anchor="ctr">
+            <a:spAutoFit/>
+          </a:bodyPr>
+          <a:lstStyle/>
+          <a:p>
+            <a:pPr algn="ctr">
+              <a:lnSpc>
+                <a:spcPct val="100000"/>
+              </a:lnSpc>
+              <a:spcBef>
+                <a:spcPts val="0"/>
+              </a:spcBef>
+              <a:spcAft>
+                <a:spcPts val="600"/>
+              </a:spcAft>
+            </a:pPr>
+            <a:r>
+              <a:rPr sz="1200" b="0">
+                <a:solidFill>
+                  <a:srgbClr val="9A9AA2"/>
+                </a:solidFill>
+                <a:latin typeface="Malgun Gothic"/>
+              </a:rPr>
+              <a:t>2회 업로드</a:t>
+            </a:r>
+          </a:p>
+        </p:txBody>
+      </p:sp>
+      <p:sp>
+        <p:nvSpPr>
+          <p:cNvPr id="30" name="TextBox 29"/>
+          <p:cNvSpPr txBox="1"/>
+          <p:nvPr/>
+        </p:nvSpPr>
+        <p:spPr>
+          <a:xfrm>
+            <a:off x="5486400" y="4681728"/>
+            <a:ext cx="3017520" cy="658368"/>
+          </a:xfrm>
+          <a:prstGeom prst="rect">
+            <a:avLst/>
+          </a:prstGeom>
+          <a:noFill/>
+        </p:spPr>
+        <p:txBody>
+          <a:bodyPr wrap="square" lIns="25400" tIns="25400" rIns="25400" bIns="25400" anchor="ctr">
+            <a:spAutoFit/>
+          </a:bodyPr>
+          <a:lstStyle/>
+          <a:p>
+            <a:pPr algn="ctr">
+              <a:lnSpc>
+                <a:spcPct val="100000"/>
+              </a:lnSpc>
+              <a:spcBef>
+                <a:spcPts val="0"/>
+              </a:spcBef>
+              <a:spcAft>
+                <a:spcPts val="600"/>
+              </a:spcAft>
+            </a:pPr>
+            <a:r>
+              <a:rPr sz="1200" b="0">
+                <a:solidFill>
+                  <a:srgbClr val="9A9AA2"/>
+                </a:solidFill>
+                <a:latin typeface="Consolas"/>
+              </a:rPr>
+              <a:t>댓글 영상 해석만</a:t>
+            </a:r>
+          </a:p>
+        </p:txBody>
+      </p:sp>
+      <p:sp>
+        <p:nvSpPr>
+          <p:cNvPr id="31" name="TextBox 30"/>
+          <p:cNvSpPr txBox="1"/>
+          <p:nvPr/>
+        </p:nvSpPr>
+        <p:spPr>
+          <a:xfrm>
+            <a:off x="8503920" y="4681728"/>
+            <a:ext cx="3154680" cy="658368"/>
+          </a:xfrm>
+          <a:prstGeom prst="rect">
+            <a:avLst/>
+          </a:prstGeom>
+          <a:noFill/>
+        </p:spPr>
+        <p:txBody>
+          <a:bodyPr wrap="square" lIns="25400" tIns="25400" rIns="25400" bIns="25400" anchor="ctr">
+            <a:spAutoFit/>
+          </a:bodyPr>
+          <a:lstStyle/>
+          <a:p>
+            <a:pPr algn="ctr">
+              <a:lnSpc>
+                <a:spcPct val="100000"/>
+              </a:lnSpc>
+              <a:spcBef>
+                <a:spcPts val="0"/>
+              </a:spcBef>
+              <a:spcAft>
+                <a:spcPts val="600"/>
+              </a:spcAft>
+            </a:pPr>
+            <a:r>
+              <a:rPr sz="1200" b="0">
+                <a:solidFill>
+                  <a:srgbClr val="2ECC71"/>
+                </a:solidFill>
+                <a:latin typeface="Malgun Gothic"/>
+              </a:rPr>
+              <a:t>모두 정확</a:t>
+            </a:r>
+          </a:p>
+        </p:txBody>
+      </p:sp>
+      <p:sp>
+        <p:nvSpPr>
+          <p:cNvPr id="32" name="TextBox 31"/>
+          <p:cNvSpPr txBox="1"/>
+          <p:nvPr/>
+        </p:nvSpPr>
+        <p:spPr>
+          <a:xfrm>
+            <a:off x="502920" y="5669280"/>
+            <a:ext cx="11155680" cy="822960"/>
+          </a:xfrm>
+          <a:prstGeom prst="rect">
+            <a:avLst/>
+          </a:prstGeom>
+          <a:noFill/>
+        </p:spPr>
+        <p:txBody>
+          <a:bodyPr wrap="square" lIns="25400" tIns="25400" rIns="25400" bIns="25400" anchor="t">
+            <a:spAutoFit/>
+          </a:bodyPr>
+          <a:lstStyle/>
+          <a:p>
+            <a:pPr algn="l">
+              <a:lnSpc>
+                <a:spcPct val="120000"/>
+              </a:lnSpc>
+              <a:spcBef>
+                <a:spcPts val="0"/>
+              </a:spcBef>
+              <a:spcAft>
+                <a:spcPts val="600"/>
+              </a:spcAft>
+            </a:pPr>
+            <a:r>
+              <a:rPr sz="1300" b="1">
+                <a:solidFill>
+                  <a:srgbClr val="F4A844"/>
+                </a:solidFill>
+                <a:latin typeface="Malgun Gothic"/>
+              </a:rPr>
+              <a:t>자동 파일 식별: </a:t>
+            </a:r>
+            <a:r>
+              <a:rPr sz="1300" b="0">
+                <a:solidFill>
+                  <a:srgbClr val="9A9AA2"/>
+                </a:solidFill>
+                <a:latin typeface="Malgun Gothic"/>
+              </a:rPr>
+              <a:t>파일명(watch/comment/시청/댓글) + 내용 첫 4KB(titleUrl·subtitles 패턴)로 종류 자동 분기</a:t>
+            </a:r>
+          </a:p>
+          <a:p>
+            <a:pPr algn="l">
+              <a:lnSpc>
+                <a:spcPct val="120000"/>
+              </a:lnSpc>
+              <a:spcBef>
+                <a:spcPts val="0"/>
+              </a:spcBef>
+              <a:spcAft>
+                <a:spcPts val="600"/>
+              </a:spcAft>
+            </a:pPr>
+            <a:r>
+              <a:rPr sz="1200" b="0">
+                <a:solidFill>
+                  <a:srgbClr val="9A9AA2"/>
+                </a:solidFill>
+                <a:latin typeface="Malgun Gothic"/>
+              </a:rPr>
+              <a:t>watch-history.json은 subtitles[0].url에 channelId가 박혀 있어 </a:t>
+            </a:r>
+            <a:r>
+              <a:rPr sz="1200" b="1">
+                <a:solidFill>
+                  <a:srgbClr val="2ECC71"/>
+                </a:solidFill>
+                <a:latin typeface="Malgun Gothic"/>
+              </a:rPr>
+              <a:t>API 호출 0회</a:t>
+            </a:r>
+            <a:r>
+              <a:rPr sz="1200" b="0">
+                <a:solidFill>
+                  <a:srgbClr val="9A9AA2"/>
+                </a:solidFill>
+                <a:latin typeface="Malgun Gothic"/>
+              </a:rPr>
+              <a:t>로 시청 횟수·마지막 시청일 추출</a:t>
+            </a:r>
+          </a:p>
+        </p:txBody>
+      </p:sp>
+    </p:spTree>
+  </p:cSld>
+  <p:clrMapOvr>
+    <a:masterClrMapping/>
+  </p:clrMapOvr>
+</p:sld>
+</file>
+
+<file path=ppt/slides/slide15.xml><?xml version="1.0" encoding="utf-8"?>
 <p:sld xmlns:a="http://schemas.openxmlformats.org/drawingml/2006/main" xmlns:r="http://schemas.openxmlformats.org/officeDocument/2006/relationships" xmlns:p="http://schemas.openxmlformats.org/presentationml/2006/main">
   <p:cSld>
     <p:spTree>

--- a/구독채널_관심도_분석기_발표.pptx
+++ b/구독채널_관심도_분석기_발표.pptx
@@ -5,24 +5,24 @@
     <p:sldMasterId id="2147483648" r:id="rId1"/>
   </p:sldMasterIdLst>
   <p:sldIdLst>
-    <p:sldId id="256" r:id="rId7"/>
-    <p:sldId id="257" r:id="rId8"/>
-    <p:sldId id="258" r:id="rId9"/>
-    <p:sldId id="259" r:id="rId10"/>
-    <p:sldId id="260" r:id="rId11"/>
-    <p:sldId id="261" r:id="rId12"/>
-    <p:sldId id="262" r:id="rId13"/>
-    <p:sldId id="263" r:id="rId14"/>
-    <p:sldId id="264" r:id="rId15"/>
-    <p:sldId id="265" r:id="rId16"/>
-    <p:sldId id="266" r:id="rId17"/>
-    <p:sldId id="267" r:id="rId18"/>
-    <p:sldId id="268" r:id="rId19"/>
-    <p:sldId id="269" r:id="rId20"/>
-    <p:sldId id="270" r:id="rId21"/>
-    <p:sldId id="271" r:id="rId22"/>
+    <p:sldId id="256" r:id="rId2"/>
+    <p:sldId id="257" r:id="rId3"/>
+    <p:sldId id="258" r:id="rId4"/>
+    <p:sldId id="259" r:id="rId5"/>
+    <p:sldId id="260" r:id="rId6"/>
+    <p:sldId id="261" r:id="rId7"/>
+    <p:sldId id="262" r:id="rId8"/>
+    <p:sldId id="263" r:id="rId9"/>
+    <p:sldId id="264" r:id="rId10"/>
+    <p:sldId id="265" r:id="rId11"/>
+    <p:sldId id="266" r:id="rId12"/>
+    <p:sldId id="267" r:id="rId13"/>
+    <p:sldId id="268" r:id="rId14"/>
+    <p:sldId id="269" r:id="rId15"/>
+    <p:sldId id="270" r:id="rId16"/>
+    <p:sldId id="271" r:id="rId17"/>
   </p:sldIdLst>
-  <p:sldSz cx="12191695" cy="6858000" type="screen4x3"/>
+  <p:sldSz cx="12192000" cy="6858000"/>
   <p:notesSz cx="6858000" cy="9144000"/>
   <p:defaultTextStyle>
     <a:defPPr>
@@ -119,7 +119,76 @@
       </a:defRPr>
     </a:lvl9pPr>
   </p:defaultTextStyle>
+  <p:extLst>
+    <p:ext uri="{EFAFB233-063F-42B5-8137-9DF3F51BA10A}">
+      <p15:sldGuideLst xmlns:p15="http://schemas.microsoft.com/office/powerpoint/2012/main">
+        <p15:guide id="1" orient="horz" pos="2160">
+          <p15:clr>
+            <a:srgbClr val="A4A3A4"/>
+          </p15:clr>
+        </p15:guide>
+        <p15:guide id="2" pos="2880">
+          <p15:clr>
+            <a:srgbClr val="A4A3A4"/>
+          </p15:clr>
+        </p15:guide>
+      </p15:sldGuideLst>
+    </p:ext>
+  </p:extLst>
 </p:presentation>
+</file>
+
+<file path=ppt/revisionInfo.xml><?xml version="1.0" encoding="utf-8"?>
+<p1510:revInfo xmlns:a="http://schemas.openxmlformats.org/drawingml/2006/main" xmlns:r="http://schemas.openxmlformats.org/officeDocument/2006/relationships" xmlns:p1510="http://schemas.microsoft.com/office/powerpoint/2015/10/main">
+  <p1510:revLst>
+    <p1510:client id="{F2F971D4-CDB2-4822-BC53-288A61021AA8}" v="3" dt="2026-06-02T04:17:52.154"/>
+  </p1510:revLst>
+</p1510:revInfo>
+</file>
+
+<file path=ppt/changesInfos/changesInfo1.xml><?xml version="1.0" encoding="utf-8"?>
+<pc:chgInfo xmlns:a="http://schemas.openxmlformats.org/drawingml/2006/main" xmlns:r="http://schemas.openxmlformats.org/officeDocument/2006/relationships" xmlns:ac="http://schemas.microsoft.com/office/drawing/2013/main/command" xmlns:pc="http://schemas.microsoft.com/office/powerpoint/2013/main/command">
+  <pc:docChgLst>
+    <pc:chgData name="명준 송" userId="7e48128a0c33bc37" providerId="LiveId" clId="{A62D5C53-2774-4FE3-8307-3525D25D70A4}"/>
+    <pc:docChg chg="modSld">
+      <pc:chgData name="명준 송" userId="7e48128a0c33bc37" providerId="LiveId" clId="{A62D5C53-2774-4FE3-8307-3525D25D70A4}" dt="2026-06-02T04:18:34.892" v="11" actId="20577"/>
+      <pc:docMkLst>
+        <pc:docMk/>
+      </pc:docMkLst>
+      <pc:sldChg chg="addSp modSp mod">
+        <pc:chgData name="명준 송" userId="7e48128a0c33bc37" providerId="LiveId" clId="{A62D5C53-2774-4FE3-8307-3525D25D70A4}" dt="2026-06-02T04:18:34.892" v="11" actId="20577"/>
+        <pc:sldMkLst>
+          <pc:docMk/>
+          <pc:sldMk cId="0" sldId="267"/>
+        </pc:sldMkLst>
+        <pc:spChg chg="mod">
+          <ac:chgData name="명준 송" userId="7e48128a0c33bc37" providerId="LiveId" clId="{A62D5C53-2774-4FE3-8307-3525D25D70A4}" dt="2026-06-02T04:18:34.892" v="11" actId="20577"/>
+          <ac:spMkLst>
+            <pc:docMk/>
+            <pc:sldMk cId="0" sldId="267"/>
+            <ac:spMk id="5" creationId="{00000000-0000-0000-0000-000000000000}"/>
+          </ac:spMkLst>
+        </pc:spChg>
+        <pc:picChg chg="mod">
+          <ac:chgData name="명준 송" userId="7e48128a0c33bc37" providerId="LiveId" clId="{A62D5C53-2774-4FE3-8307-3525D25D70A4}" dt="2026-06-02T04:17:44.366" v="5" actId="14826"/>
+          <ac:picMkLst>
+            <pc:docMk/>
+            <pc:sldMk cId="0" sldId="267"/>
+            <ac:picMk id="7" creationId="{00000000-0000-0000-0000-000000000000}"/>
+          </ac:picMkLst>
+        </pc:picChg>
+        <pc:picChg chg="add mod">
+          <ac:chgData name="명준 송" userId="7e48128a0c33bc37" providerId="LiveId" clId="{A62D5C53-2774-4FE3-8307-3525D25D70A4}" dt="2026-06-02T04:17:58.142" v="7" actId="1076"/>
+          <ac:picMkLst>
+            <pc:docMk/>
+            <pc:sldMk cId="0" sldId="267"/>
+            <ac:picMk id="26" creationId="{30383C1C-7B24-148C-3724-379698AD630C}"/>
+          </ac:picMkLst>
+        </pc:picChg>
+      </pc:sldChg>
+    </pc:docChg>
+  </pc:docChgLst>
+</pc:chgInfo>
 </file>
 
 <file path=ppt/slideLayouts/slideLayout1.xml><?xml version="1.0" encoding="utf-8"?>
@@ -160,10 +229,9 @@
           <a:lstStyle/>
           <a:p>
             <a:r>
-              <a:rPr lang="en-US" smtClean="0"/>
+              <a:rPr lang="en-US"/>
               <a:t>Click to edit Master title style</a:t>
             </a:r>
-            <a:endParaRPr lang="en-US"/>
           </a:p>
         </p:txBody>
       </p:sp>
@@ -279,10 +347,9 @@
           </a:lstStyle>
           <a:p>
             <a:r>
-              <a:rPr lang="en-US" smtClean="0"/>
+              <a:rPr lang="en-US"/>
               <a:t>Click to edit Master subtitle style</a:t>
             </a:r>
-            <a:endParaRPr lang="en-US"/>
           </a:p>
         </p:txBody>
       </p:sp>
@@ -303,7 +370,7 @@
           <a:p>
             <a:fld id="{5BCAD085-E8A6-8845-BD4E-CB4CCA059FC4}" type="datetimeFigureOut">
               <a:rPr lang="en-US" smtClean="0"/>
-              <a:t>1/27/13</a:t>
+              <a:t>6/2/2026</a:t>
             </a:fld>
             <a:endParaRPr lang="en-US"/>
           </a:p>
@@ -397,10 +464,9 @@
           <a:lstStyle/>
           <a:p>
             <a:r>
-              <a:rPr lang="en-US" smtClean="0"/>
+              <a:rPr lang="en-US"/>
               <a:t>Click to edit Master title style</a:t>
             </a:r>
-            <a:endParaRPr lang="en-US"/>
           </a:p>
         </p:txBody>
       </p:sp>
@@ -421,38 +487,37 @@
           <a:p>
             <a:pPr lvl="0"/>
             <a:r>
-              <a:rPr lang="en-US" smtClean="0"/>
+              <a:rPr lang="en-US"/>
               <a:t>Click to edit Master text styles</a:t>
             </a:r>
           </a:p>
           <a:p>
             <a:pPr lvl="1"/>
             <a:r>
-              <a:rPr lang="en-US" smtClean="0"/>
+              <a:rPr lang="en-US"/>
               <a:t>Second level</a:t>
             </a:r>
           </a:p>
           <a:p>
             <a:pPr lvl="2"/>
             <a:r>
-              <a:rPr lang="en-US" smtClean="0"/>
+              <a:rPr lang="en-US"/>
               <a:t>Third level</a:t>
             </a:r>
           </a:p>
           <a:p>
             <a:pPr lvl="3"/>
             <a:r>
-              <a:rPr lang="en-US" smtClean="0"/>
+              <a:rPr lang="en-US"/>
               <a:t>Fourth level</a:t>
             </a:r>
           </a:p>
           <a:p>
             <a:pPr lvl="4"/>
             <a:r>
-              <a:rPr lang="en-US" smtClean="0"/>
+              <a:rPr lang="en-US"/>
               <a:t>Fifth level</a:t>
             </a:r>
-            <a:endParaRPr lang="en-US"/>
           </a:p>
         </p:txBody>
       </p:sp>
@@ -473,7 +538,7 @@
           <a:p>
             <a:fld id="{5BCAD085-E8A6-8845-BD4E-CB4CCA059FC4}" type="datetimeFigureOut">
               <a:rPr lang="en-US" smtClean="0"/>
-              <a:t>1/27/13</a:t>
+              <a:t>6/2/2026</a:t>
             </a:fld>
             <a:endParaRPr lang="en-US"/>
           </a:p>
@@ -572,10 +637,9 @@
           <a:lstStyle/>
           <a:p>
             <a:r>
-              <a:rPr lang="en-US" smtClean="0"/>
+              <a:rPr lang="en-US"/>
               <a:t>Click to edit Master title style</a:t>
             </a:r>
-            <a:endParaRPr lang="en-US"/>
           </a:p>
         </p:txBody>
       </p:sp>
@@ -601,38 +665,37 @@
           <a:p>
             <a:pPr lvl="0"/>
             <a:r>
-              <a:rPr lang="en-US" smtClean="0"/>
+              <a:rPr lang="en-US"/>
               <a:t>Click to edit Master text styles</a:t>
             </a:r>
           </a:p>
           <a:p>
             <a:pPr lvl="1"/>
             <a:r>
-              <a:rPr lang="en-US" smtClean="0"/>
+              <a:rPr lang="en-US"/>
               <a:t>Second level</a:t>
             </a:r>
           </a:p>
           <a:p>
             <a:pPr lvl="2"/>
             <a:r>
-              <a:rPr lang="en-US" smtClean="0"/>
+              <a:rPr lang="en-US"/>
               <a:t>Third level</a:t>
             </a:r>
           </a:p>
           <a:p>
             <a:pPr lvl="3"/>
             <a:r>
-              <a:rPr lang="en-US" smtClean="0"/>
+              <a:rPr lang="en-US"/>
               <a:t>Fourth level</a:t>
             </a:r>
           </a:p>
           <a:p>
             <a:pPr lvl="4"/>
             <a:r>
-              <a:rPr lang="en-US" smtClean="0"/>
+              <a:rPr lang="en-US"/>
               <a:t>Fifth level</a:t>
             </a:r>
-            <a:endParaRPr lang="en-US"/>
           </a:p>
         </p:txBody>
       </p:sp>
@@ -653,7 +716,7 @@
           <a:p>
             <a:fld id="{5BCAD085-E8A6-8845-BD4E-CB4CCA059FC4}" type="datetimeFigureOut">
               <a:rPr lang="en-US" smtClean="0"/>
-              <a:t>1/27/13</a:t>
+              <a:t>6/2/2026</a:t>
             </a:fld>
             <a:endParaRPr lang="en-US"/>
           </a:p>
@@ -747,10 +810,9 @@
           <a:lstStyle/>
           <a:p>
             <a:r>
-              <a:rPr lang="en-US" smtClean="0"/>
+              <a:rPr lang="en-US"/>
               <a:t>Click to edit Master title style</a:t>
             </a:r>
-            <a:endParaRPr lang="en-US"/>
           </a:p>
         </p:txBody>
       </p:sp>
@@ -771,38 +833,37 @@
           <a:p>
             <a:pPr lvl="0"/>
             <a:r>
-              <a:rPr lang="en-US" smtClean="0"/>
+              <a:rPr lang="en-US"/>
               <a:t>Click to edit Master text styles</a:t>
             </a:r>
           </a:p>
           <a:p>
             <a:pPr lvl="1"/>
             <a:r>
-              <a:rPr lang="en-US" smtClean="0"/>
+              <a:rPr lang="en-US"/>
               <a:t>Second level</a:t>
             </a:r>
           </a:p>
           <a:p>
             <a:pPr lvl="2"/>
             <a:r>
-              <a:rPr lang="en-US" smtClean="0"/>
+              <a:rPr lang="en-US"/>
               <a:t>Third level</a:t>
             </a:r>
           </a:p>
           <a:p>
             <a:pPr lvl="3"/>
             <a:r>
-              <a:rPr lang="en-US" smtClean="0"/>
+              <a:rPr lang="en-US"/>
               <a:t>Fourth level</a:t>
             </a:r>
           </a:p>
           <a:p>
             <a:pPr lvl="4"/>
             <a:r>
-              <a:rPr lang="en-US" smtClean="0"/>
+              <a:rPr lang="en-US"/>
               <a:t>Fifth level</a:t>
             </a:r>
-            <a:endParaRPr lang="en-US"/>
           </a:p>
         </p:txBody>
       </p:sp>
@@ -823,7 +884,7 @@
           <a:p>
             <a:fld id="{5BCAD085-E8A6-8845-BD4E-CB4CCA059FC4}" type="datetimeFigureOut">
               <a:rPr lang="en-US" smtClean="0"/>
-              <a:t>1/27/13</a:t>
+              <a:t>6/2/2026</a:t>
             </a:fld>
             <a:endParaRPr lang="en-US"/>
           </a:p>
@@ -926,10 +987,9 @@
           </a:lstStyle>
           <a:p>
             <a:r>
-              <a:rPr lang="en-US" smtClean="0"/>
+              <a:rPr lang="en-US"/>
               <a:t>Click to edit Master title style</a:t>
             </a:r>
-            <a:endParaRPr lang="en-US"/>
           </a:p>
         </p:txBody>
       </p:sp>
@@ -1046,7 +1106,7 @@
           <a:p>
             <a:pPr lvl="0"/>
             <a:r>
-              <a:rPr lang="en-US" smtClean="0"/>
+              <a:rPr lang="en-US"/>
               <a:t>Click to edit Master text styles</a:t>
             </a:r>
           </a:p>
@@ -1069,7 +1129,7 @@
           <a:p>
             <a:fld id="{5BCAD085-E8A6-8845-BD4E-CB4CCA059FC4}" type="datetimeFigureOut">
               <a:rPr lang="en-US" smtClean="0"/>
-              <a:t>1/27/13</a:t>
+              <a:t>6/2/2026</a:t>
             </a:fld>
             <a:endParaRPr lang="en-US"/>
           </a:p>
@@ -1163,10 +1223,9 @@
           <a:lstStyle/>
           <a:p>
             <a:r>
-              <a:rPr lang="en-US" smtClean="0"/>
+              <a:rPr lang="en-US"/>
               <a:t>Click to edit Master title style</a:t>
             </a:r>
-            <a:endParaRPr lang="en-US"/>
           </a:p>
         </p:txBody>
       </p:sp>
@@ -1220,38 +1279,37 @@
           <a:p>
             <a:pPr lvl="0"/>
             <a:r>
-              <a:rPr lang="en-US" smtClean="0"/>
+              <a:rPr lang="en-US"/>
               <a:t>Click to edit Master text styles</a:t>
             </a:r>
           </a:p>
           <a:p>
             <a:pPr lvl="1"/>
             <a:r>
-              <a:rPr lang="en-US" smtClean="0"/>
+              <a:rPr lang="en-US"/>
               <a:t>Second level</a:t>
             </a:r>
           </a:p>
           <a:p>
             <a:pPr lvl="2"/>
             <a:r>
-              <a:rPr lang="en-US" smtClean="0"/>
+              <a:rPr lang="en-US"/>
               <a:t>Third level</a:t>
             </a:r>
           </a:p>
           <a:p>
             <a:pPr lvl="3"/>
             <a:r>
-              <a:rPr lang="en-US" smtClean="0"/>
+              <a:rPr lang="en-US"/>
               <a:t>Fourth level</a:t>
             </a:r>
           </a:p>
           <a:p>
             <a:pPr lvl="4"/>
             <a:r>
-              <a:rPr lang="en-US" smtClean="0"/>
+              <a:rPr lang="en-US"/>
               <a:t>Fifth level</a:t>
             </a:r>
-            <a:endParaRPr lang="en-US"/>
           </a:p>
         </p:txBody>
       </p:sp>
@@ -1305,38 +1363,37 @@
           <a:p>
             <a:pPr lvl="0"/>
             <a:r>
-              <a:rPr lang="en-US" smtClean="0"/>
+              <a:rPr lang="en-US"/>
               <a:t>Click to edit Master text styles</a:t>
             </a:r>
           </a:p>
           <a:p>
             <a:pPr lvl="1"/>
             <a:r>
-              <a:rPr lang="en-US" smtClean="0"/>
+              <a:rPr lang="en-US"/>
               <a:t>Second level</a:t>
             </a:r>
           </a:p>
           <a:p>
             <a:pPr lvl="2"/>
             <a:r>
-              <a:rPr lang="en-US" smtClean="0"/>
+              <a:rPr lang="en-US"/>
               <a:t>Third level</a:t>
             </a:r>
           </a:p>
           <a:p>
             <a:pPr lvl="3"/>
             <a:r>
-              <a:rPr lang="en-US" smtClean="0"/>
+              <a:rPr lang="en-US"/>
               <a:t>Fourth level</a:t>
             </a:r>
           </a:p>
           <a:p>
             <a:pPr lvl="4"/>
             <a:r>
-              <a:rPr lang="en-US" smtClean="0"/>
+              <a:rPr lang="en-US"/>
               <a:t>Fifth level</a:t>
             </a:r>
-            <a:endParaRPr lang="en-US"/>
           </a:p>
         </p:txBody>
       </p:sp>
@@ -1357,7 +1414,7 @@
           <a:p>
             <a:fld id="{5BCAD085-E8A6-8845-BD4E-CB4CCA059FC4}" type="datetimeFigureOut">
               <a:rPr lang="en-US" smtClean="0"/>
-              <a:t>1/27/13</a:t>
+              <a:t>6/2/2026</a:t>
             </a:fld>
             <a:endParaRPr lang="en-US"/>
           </a:p>
@@ -1455,10 +1512,9 @@
           </a:lstStyle>
           <a:p>
             <a:r>
-              <a:rPr lang="en-US" smtClean="0"/>
+              <a:rPr lang="en-US"/>
               <a:t>Click to edit Master title style</a:t>
             </a:r>
-            <a:endParaRPr lang="en-US"/>
           </a:p>
         </p:txBody>
       </p:sp>
@@ -1521,7 +1577,7 @@
           <a:p>
             <a:pPr lvl="0"/>
             <a:r>
-              <a:rPr lang="en-US" smtClean="0"/>
+              <a:rPr lang="en-US"/>
               <a:t>Click to edit Master text styles</a:t>
             </a:r>
           </a:p>
@@ -1577,38 +1633,37 @@
           <a:p>
             <a:pPr lvl="0"/>
             <a:r>
-              <a:rPr lang="en-US" smtClean="0"/>
+              <a:rPr lang="en-US"/>
               <a:t>Click to edit Master text styles</a:t>
             </a:r>
           </a:p>
           <a:p>
             <a:pPr lvl="1"/>
             <a:r>
-              <a:rPr lang="en-US" smtClean="0"/>
+              <a:rPr lang="en-US"/>
               <a:t>Second level</a:t>
             </a:r>
           </a:p>
           <a:p>
             <a:pPr lvl="2"/>
             <a:r>
-              <a:rPr lang="en-US" smtClean="0"/>
+              <a:rPr lang="en-US"/>
               <a:t>Third level</a:t>
             </a:r>
           </a:p>
           <a:p>
             <a:pPr lvl="3"/>
             <a:r>
-              <a:rPr lang="en-US" smtClean="0"/>
+              <a:rPr lang="en-US"/>
               <a:t>Fourth level</a:t>
             </a:r>
           </a:p>
           <a:p>
             <a:pPr lvl="4"/>
             <a:r>
-              <a:rPr lang="en-US" smtClean="0"/>
+              <a:rPr lang="en-US"/>
               <a:t>Fifth level</a:t>
             </a:r>
-            <a:endParaRPr lang="en-US"/>
           </a:p>
         </p:txBody>
       </p:sp>
@@ -1671,7 +1726,7 @@
           <a:p>
             <a:pPr lvl="0"/>
             <a:r>
-              <a:rPr lang="en-US" smtClean="0"/>
+              <a:rPr lang="en-US"/>
               <a:t>Click to edit Master text styles</a:t>
             </a:r>
           </a:p>
@@ -1727,38 +1782,37 @@
           <a:p>
             <a:pPr lvl="0"/>
             <a:r>
-              <a:rPr lang="en-US" smtClean="0"/>
+              <a:rPr lang="en-US"/>
               <a:t>Click to edit Master text styles</a:t>
             </a:r>
           </a:p>
           <a:p>
             <a:pPr lvl="1"/>
             <a:r>
-              <a:rPr lang="en-US" smtClean="0"/>
+              <a:rPr lang="en-US"/>
               <a:t>Second level</a:t>
             </a:r>
           </a:p>
           <a:p>
             <a:pPr lvl="2"/>
             <a:r>
-              <a:rPr lang="en-US" smtClean="0"/>
+              <a:rPr lang="en-US"/>
               <a:t>Third level</a:t>
             </a:r>
           </a:p>
           <a:p>
             <a:pPr lvl="3"/>
             <a:r>
-              <a:rPr lang="en-US" smtClean="0"/>
+              <a:rPr lang="en-US"/>
               <a:t>Fourth level</a:t>
             </a:r>
           </a:p>
           <a:p>
             <a:pPr lvl="4"/>
             <a:r>
-              <a:rPr lang="en-US" smtClean="0"/>
+              <a:rPr lang="en-US"/>
               <a:t>Fifth level</a:t>
             </a:r>
-            <a:endParaRPr lang="en-US"/>
           </a:p>
         </p:txBody>
       </p:sp>
@@ -1779,7 +1833,7 @@
           <a:p>
             <a:fld id="{5BCAD085-E8A6-8845-BD4E-CB4CCA059FC4}" type="datetimeFigureOut">
               <a:rPr lang="en-US" smtClean="0"/>
-              <a:t>1/27/13</a:t>
+              <a:t>6/2/2026</a:t>
             </a:fld>
             <a:endParaRPr lang="en-US"/>
           </a:p>
@@ -1873,10 +1927,9 @@
           <a:lstStyle/>
           <a:p>
             <a:r>
-              <a:rPr lang="en-US" smtClean="0"/>
+              <a:rPr lang="en-US"/>
               <a:t>Click to edit Master title style</a:t>
             </a:r>
-            <a:endParaRPr lang="en-US"/>
           </a:p>
         </p:txBody>
       </p:sp>
@@ -1897,7 +1950,7 @@
           <a:p>
             <a:fld id="{5BCAD085-E8A6-8845-BD4E-CB4CCA059FC4}" type="datetimeFigureOut">
               <a:rPr lang="en-US" smtClean="0"/>
-              <a:t>1/27/13</a:t>
+              <a:t>6/2/2026</a:t>
             </a:fld>
             <a:endParaRPr lang="en-US"/>
           </a:p>
@@ -1992,7 +2045,7 @@
           <a:p>
             <a:fld id="{5BCAD085-E8A6-8845-BD4E-CB4CCA059FC4}" type="datetimeFigureOut">
               <a:rPr lang="en-US" smtClean="0"/>
-              <a:t>1/27/13</a:t>
+              <a:t>6/2/2026</a:t>
             </a:fld>
             <a:endParaRPr lang="en-US"/>
           </a:p>
@@ -2095,10 +2148,9 @@
           </a:lstStyle>
           <a:p>
             <a:r>
-              <a:rPr lang="en-US" smtClean="0"/>
+              <a:rPr lang="en-US"/>
               <a:t>Click to edit Master title style</a:t>
             </a:r>
-            <a:endParaRPr lang="en-US"/>
           </a:p>
         </p:txBody>
       </p:sp>
@@ -2152,38 +2204,37 @@
           <a:p>
             <a:pPr lvl="0"/>
             <a:r>
-              <a:rPr lang="en-US" smtClean="0"/>
+              <a:rPr lang="en-US"/>
               <a:t>Click to edit Master text styles</a:t>
             </a:r>
           </a:p>
           <a:p>
             <a:pPr lvl="1"/>
             <a:r>
-              <a:rPr lang="en-US" smtClean="0"/>
+              <a:rPr lang="en-US"/>
               <a:t>Second level</a:t>
             </a:r>
           </a:p>
           <a:p>
             <a:pPr lvl="2"/>
             <a:r>
-              <a:rPr lang="en-US" smtClean="0"/>
+              <a:rPr lang="en-US"/>
               <a:t>Third level</a:t>
             </a:r>
           </a:p>
           <a:p>
             <a:pPr lvl="3"/>
             <a:r>
-              <a:rPr lang="en-US" smtClean="0"/>
+              <a:rPr lang="en-US"/>
               <a:t>Fourth level</a:t>
             </a:r>
           </a:p>
           <a:p>
             <a:pPr lvl="4"/>
             <a:r>
-              <a:rPr lang="en-US" smtClean="0"/>
+              <a:rPr lang="en-US"/>
               <a:t>Fifth level</a:t>
             </a:r>
-            <a:endParaRPr lang="en-US"/>
           </a:p>
         </p:txBody>
       </p:sp>
@@ -2246,7 +2297,7 @@
           <a:p>
             <a:pPr lvl="0"/>
             <a:r>
-              <a:rPr lang="en-US" smtClean="0"/>
+              <a:rPr lang="en-US"/>
               <a:t>Click to edit Master text styles</a:t>
             </a:r>
           </a:p>
@@ -2269,7 +2320,7 @@
           <a:p>
             <a:fld id="{5BCAD085-E8A6-8845-BD4E-CB4CCA059FC4}" type="datetimeFigureOut">
               <a:rPr lang="en-US" smtClean="0"/>
-              <a:t>1/27/13</a:t>
+              <a:t>6/2/2026</a:t>
             </a:fld>
             <a:endParaRPr lang="en-US"/>
           </a:p>
@@ -2372,10 +2423,9 @@
           </a:lstStyle>
           <a:p>
             <a:r>
-              <a:rPr lang="en-US" smtClean="0"/>
+              <a:rPr lang="en-US"/>
               <a:t>Click to edit Master title style</a:t>
             </a:r>
-            <a:endParaRPr lang="en-US"/>
           </a:p>
         </p:txBody>
       </p:sp>
@@ -2499,7 +2549,7 @@
           <a:p>
             <a:pPr lvl="0"/>
             <a:r>
-              <a:rPr lang="en-US" smtClean="0"/>
+              <a:rPr lang="en-US"/>
               <a:t>Click to edit Master text styles</a:t>
             </a:r>
           </a:p>
@@ -2522,7 +2572,7 @@
           <a:p>
             <a:fld id="{5BCAD085-E8A6-8845-BD4E-CB4CCA059FC4}" type="datetimeFigureOut">
               <a:rPr lang="en-US" smtClean="0"/>
-              <a:t>1/27/13</a:t>
+              <a:t>6/2/2026</a:t>
             </a:fld>
             <a:endParaRPr lang="en-US"/>
           </a:p>
@@ -2631,10 +2681,9 @@
           <a:lstStyle/>
           <a:p>
             <a:r>
-              <a:rPr lang="en-US" smtClean="0"/>
+              <a:rPr lang="en-US"/>
               <a:t>Click to edit Master title style</a:t>
             </a:r>
-            <a:endParaRPr lang="en-US"/>
           </a:p>
         </p:txBody>
       </p:sp>
@@ -2665,38 +2714,37 @@
           <a:p>
             <a:pPr lvl="0"/>
             <a:r>
-              <a:rPr lang="en-US" smtClean="0"/>
+              <a:rPr lang="en-US"/>
               <a:t>Click to edit Master text styles</a:t>
             </a:r>
           </a:p>
           <a:p>
             <a:pPr lvl="1"/>
             <a:r>
-              <a:rPr lang="en-US" smtClean="0"/>
+              <a:rPr lang="en-US"/>
               <a:t>Second level</a:t>
             </a:r>
           </a:p>
           <a:p>
             <a:pPr lvl="2"/>
             <a:r>
-              <a:rPr lang="en-US" smtClean="0"/>
+              <a:rPr lang="en-US"/>
               <a:t>Third level</a:t>
             </a:r>
           </a:p>
           <a:p>
             <a:pPr lvl="3"/>
             <a:r>
-              <a:rPr lang="en-US" smtClean="0"/>
+              <a:rPr lang="en-US"/>
               <a:t>Fourth level</a:t>
             </a:r>
           </a:p>
           <a:p>
             <a:pPr lvl="4"/>
             <a:r>
-              <a:rPr lang="en-US" smtClean="0"/>
+              <a:rPr lang="en-US"/>
               <a:t>Fifth level</a:t>
             </a:r>
-            <a:endParaRPr lang="en-US"/>
           </a:p>
         </p:txBody>
       </p:sp>
@@ -2735,7 +2783,7 @@
           <a:p>
             <a:fld id="{5BCAD085-E8A6-8845-BD4E-CB4CCA059FC4}" type="datetimeFigureOut">
               <a:rPr lang="en-US" smtClean="0"/>
-              <a:t>1/27/13</a:t>
+              <a:t>6/2/2026</a:t>
             </a:fld>
             <a:endParaRPr lang="en-US"/>
           </a:p>
@@ -3094,7 +3142,7 @@
 </file>
 
 <file path=ppt/slides/slide1.xml><?xml version="1.0" encoding="utf-8"?>
-<p:sld xmlns:a="http://schemas.openxmlformats.org/drawingml/2006/main" xmlns:p="http://schemas.openxmlformats.org/presentationml/2006/main" xmlns:r="http://schemas.openxmlformats.org/officeDocument/2006/relationships">
+<p:sld xmlns:a="http://schemas.openxmlformats.org/drawingml/2006/main" xmlns:r="http://schemas.openxmlformats.org/officeDocument/2006/relationships" xmlns:p="http://schemas.openxmlformats.org/presentationml/2006/main">
   <p:cSld>
     <p:spTree>
       <p:nvGrpSpPr>
@@ -3102,7 +3150,14 @@
         <p:cNvGrpSpPr/>
         <p:nvPr/>
       </p:nvGrpSpPr>
-      <p:grpSpPr/>
+      <p:grpSpPr>
+        <a:xfrm>
+          <a:off x="0" y="0"/>
+          <a:ext cx="0" cy="0"/>
+          <a:chOff x="0" y="0"/>
+          <a:chExt cx="0" cy="0"/>
+        </a:xfrm>
+      </p:grpSpPr>
       <p:sp>
         <p:nvSpPr>
           <p:cNvPr id="2" name="Rectangle 1"/>
@@ -3144,6 +3199,7 @@
           <a:lstStyle/>
           <a:p>
             <a:pPr algn="ctr"/>
+            <a:endParaRPr/>
           </a:p>
         </p:txBody>
       </p:sp>
@@ -3188,6 +3244,7 @@
           <a:lstStyle/>
           <a:p>
             <a:pPr algn="ctr"/>
+            <a:endParaRPr/>
           </a:p>
         </p:txBody>
       </p:sp>
@@ -3208,7 +3265,7 @@
           <a:noFill/>
         </p:spPr>
         <p:txBody>
-          <a:bodyPr wrap="square" anchor="t" lIns="25400" rIns="25400" tIns="25400" bIns="25400">
+          <a:bodyPr wrap="square" lIns="25400" tIns="25400" rIns="25400" bIns="25400" anchor="t">
             <a:spAutoFit/>
           </a:bodyPr>
           <a:lstStyle/>
@@ -3253,7 +3310,7 @@
           <a:noFill/>
         </p:spPr>
         <p:txBody>
-          <a:bodyPr wrap="square" anchor="t" lIns="25400" rIns="25400" tIns="25400" bIns="25400">
+          <a:bodyPr wrap="square" lIns="25400" tIns="25400" rIns="25400" bIns="25400" anchor="t">
             <a:spAutoFit/>
           </a:bodyPr>
           <a:lstStyle/>
@@ -3307,7 +3364,7 @@
           <a:noFill/>
         </p:spPr>
         <p:txBody>
-          <a:bodyPr wrap="square" anchor="t" lIns="25400" rIns="25400" tIns="25400" bIns="25400">
+          <a:bodyPr wrap="square" lIns="25400" tIns="25400" rIns="25400" bIns="25400" anchor="t">
             <a:spAutoFit/>
           </a:bodyPr>
           <a:lstStyle/>
@@ -3436,6 +3493,7 @@
           <a:lstStyle/>
           <a:p>
             <a:pPr algn="ctr"/>
+            <a:endParaRPr/>
           </a:p>
         </p:txBody>
       </p:sp>
@@ -3456,7 +3514,7 @@
           <a:noFill/>
         </p:spPr>
         <p:txBody>
-          <a:bodyPr wrap="square" anchor="ctr" lIns="25400" rIns="25400" tIns="25400" bIns="25400">
+          <a:bodyPr wrap="square" lIns="25400" tIns="25400" rIns="25400" bIns="25400" anchor="ctr">
             <a:spAutoFit/>
           </a:bodyPr>
           <a:lstStyle/>
@@ -3527,6 +3585,7 @@
           <a:lstStyle/>
           <a:p>
             <a:pPr algn="ctr"/>
+            <a:endParaRPr/>
           </a:p>
         </p:txBody>
       </p:sp>
@@ -3547,7 +3606,7 @@
           <a:noFill/>
         </p:spPr>
         <p:txBody>
-          <a:bodyPr wrap="square" anchor="ctr" lIns="25400" rIns="25400" tIns="25400" bIns="25400">
+          <a:bodyPr wrap="square" lIns="25400" tIns="25400" rIns="25400" bIns="25400" anchor="ctr">
             <a:spAutoFit/>
           </a:bodyPr>
           <a:lstStyle/>
@@ -3618,6 +3677,7 @@
           <a:lstStyle/>
           <a:p>
             <a:pPr algn="ctr"/>
+            <a:endParaRPr/>
           </a:p>
         </p:txBody>
       </p:sp>
@@ -3638,7 +3698,7 @@
           <a:noFill/>
         </p:spPr>
         <p:txBody>
-          <a:bodyPr wrap="square" anchor="ctr" lIns="25400" rIns="25400" tIns="25400" bIns="25400">
+          <a:bodyPr wrap="square" lIns="25400" tIns="25400" rIns="25400" bIns="25400" anchor="ctr">
             <a:spAutoFit/>
           </a:bodyPr>
           <a:lstStyle/>
@@ -3709,6 +3769,7 @@
           <a:lstStyle/>
           <a:p>
             <a:pPr algn="ctr"/>
+            <a:endParaRPr/>
           </a:p>
         </p:txBody>
       </p:sp>
@@ -3729,7 +3790,7 @@
           <a:noFill/>
         </p:spPr>
         <p:txBody>
-          <a:bodyPr wrap="square" anchor="ctr" lIns="25400" rIns="25400" tIns="25400" bIns="25400">
+          <a:bodyPr wrap="square" lIns="25400" tIns="25400" rIns="25400" bIns="25400" anchor="ctr">
             <a:spAutoFit/>
           </a:bodyPr>
           <a:lstStyle/>
@@ -3800,6 +3861,7 @@
           <a:lstStyle/>
           <a:p>
             <a:pPr algn="ctr"/>
+            <a:endParaRPr/>
           </a:p>
         </p:txBody>
       </p:sp>
@@ -3820,7 +3882,7 @@
           <a:noFill/>
         </p:spPr>
         <p:txBody>
-          <a:bodyPr wrap="square" anchor="ctr" lIns="25400" rIns="25400" tIns="25400" bIns="25400">
+          <a:bodyPr wrap="square" lIns="25400" tIns="25400" rIns="25400" bIns="25400" anchor="ctr">
             <a:spAutoFit/>
           </a:bodyPr>
           <a:lstStyle/>
@@ -3865,7 +3927,7 @@
           <a:noFill/>
         </p:spPr>
         <p:txBody>
-          <a:bodyPr wrap="square" anchor="t" lIns="25400" rIns="25400" tIns="25400" bIns="25400">
+          <a:bodyPr wrap="square" lIns="25400" tIns="25400" rIns="25400" bIns="25400" anchor="t">
             <a:spAutoFit/>
           </a:bodyPr>
           <a:lstStyle/>
@@ -3902,7 +3964,7 @@
 </file>
 
 <file path=ppt/slides/slide10.xml><?xml version="1.0" encoding="utf-8"?>
-<p:sld xmlns:a="http://schemas.openxmlformats.org/drawingml/2006/main" xmlns:p="http://schemas.openxmlformats.org/presentationml/2006/main" xmlns:r="http://schemas.openxmlformats.org/officeDocument/2006/relationships">
+<p:sld xmlns:a="http://schemas.openxmlformats.org/drawingml/2006/main" xmlns:r="http://schemas.openxmlformats.org/officeDocument/2006/relationships" xmlns:p="http://schemas.openxmlformats.org/presentationml/2006/main">
   <p:cSld>
     <p:spTree>
       <p:nvGrpSpPr>
@@ -3910,7 +3972,14 @@
         <p:cNvGrpSpPr/>
         <p:nvPr/>
       </p:nvGrpSpPr>
-      <p:grpSpPr/>
+      <p:grpSpPr>
+        <a:xfrm>
+          <a:off x="0" y="0"/>
+          <a:ext cx="0" cy="0"/>
+          <a:chOff x="0" y="0"/>
+          <a:chExt cx="0" cy="0"/>
+        </a:xfrm>
+      </p:grpSpPr>
       <p:sp>
         <p:nvSpPr>
           <p:cNvPr id="2" name="Rectangle 1"/>
@@ -3952,6 +4021,7 @@
           <a:lstStyle/>
           <a:p>
             <a:pPr algn="ctr"/>
+            <a:endParaRPr/>
           </a:p>
         </p:txBody>
       </p:sp>
@@ -3996,6 +4066,7 @@
           <a:lstStyle/>
           <a:p>
             <a:pPr algn="ctr"/>
+            <a:endParaRPr/>
           </a:p>
         </p:txBody>
       </p:sp>
@@ -4016,7 +4087,7 @@
           <a:noFill/>
         </p:spPr>
         <p:txBody>
-          <a:bodyPr wrap="square" anchor="t" lIns="25400" rIns="25400" tIns="25400" bIns="25400">
+          <a:bodyPr wrap="square" lIns="25400" tIns="25400" rIns="25400" bIns="25400" anchor="t">
             <a:spAutoFit/>
           </a:bodyPr>
           <a:lstStyle/>
@@ -4061,7 +4132,7 @@
           <a:noFill/>
         </p:spPr>
         <p:txBody>
-          <a:bodyPr wrap="square" anchor="t" lIns="25400" rIns="25400" tIns="25400" bIns="25400">
+          <a:bodyPr wrap="square" lIns="25400" tIns="25400" rIns="25400" bIns="25400" anchor="t">
             <a:spAutoFit/>
           </a:bodyPr>
           <a:lstStyle/>
@@ -4130,6 +4201,7 @@
           <a:lstStyle/>
           <a:p>
             <a:pPr algn="ctr"/>
+            <a:endParaRPr/>
           </a:p>
         </p:txBody>
       </p:sp>
@@ -4203,6 +4275,7 @@
           <a:lstStyle/>
           <a:p>
             <a:pPr algn="ctr"/>
+            <a:endParaRPr/>
           </a:p>
         </p:txBody>
       </p:sp>
@@ -4223,7 +4296,7 @@
           <a:noFill/>
         </p:spPr>
         <p:txBody>
-          <a:bodyPr wrap="square" anchor="t" lIns="25400" rIns="25400" tIns="25400" bIns="25400">
+          <a:bodyPr wrap="square" lIns="25400" tIns="25400" rIns="25400" bIns="25400" anchor="t">
             <a:spAutoFit/>
           </a:bodyPr>
           <a:lstStyle/>
@@ -4268,7 +4341,7 @@
           <a:noFill/>
         </p:spPr>
         <p:txBody>
-          <a:bodyPr wrap="square" anchor="t" lIns="25400" rIns="25400" tIns="25400" bIns="25400">
+          <a:bodyPr wrap="square" lIns="25400" tIns="25400" rIns="25400" bIns="25400" anchor="t">
             <a:spAutoFit/>
           </a:bodyPr>
           <a:lstStyle/>
@@ -4350,14 +4423,118 @@
                 <a:spcPts val="600"/>
               </a:spcAft>
             </a:pPr>
-            <a:r>
-              <a:rPr sz="800" b="0">
+            <a:endParaRPr sz="1300" b="0">
+              <a:solidFill>
+                <a:srgbClr val="9A9AA2"/>
+              </a:solidFill>
+              <a:latin typeface="Segoe UI"/>
+            </a:endParaRPr>
+          </a:p>
+          <a:p>
+            <a:pPr algn="l">
+              <a:lnSpc>
+                <a:spcPct val="112000"/>
+              </a:lnSpc>
+              <a:spcBef>
+                <a:spcPts val="0"/>
+              </a:spcBef>
+              <a:spcAft>
+                <a:spcPts val="600"/>
+              </a:spcAft>
+            </a:pPr>
+            <a:r>
+              <a:rPr sz="1300" b="1">
+                <a:solidFill>
+                  <a:srgbClr val="F4A844"/>
+                </a:solidFill>
+                <a:latin typeface="Segoe UI"/>
+              </a:rPr>
+              <a:t>Example result:</a:t>
+            </a:r>
+          </a:p>
+          <a:p>
+            <a:pPr algn="l">
+              <a:lnSpc>
+                <a:spcPct val="112000"/>
+              </a:lnSpc>
+              <a:spcBef>
+                <a:spcPts val="0"/>
+              </a:spcBef>
+              <a:spcAft>
+                <a:spcPts val="600"/>
+              </a:spcAft>
+            </a:pPr>
+            <a:r>
+              <a:rPr sz="1300" b="1">
+                <a:solidFill>
+                  <a:srgbClr val="F2F2F2"/>
+                </a:solidFill>
+                <a:latin typeface="Segoe UI"/>
+              </a:rPr>
+              <a:t>"Solo-cooking + Game/</a:t>
+            </a:r>
+          </a:p>
+          <a:p>
+            <a:pPr algn="l">
+              <a:lnSpc>
+                <a:spcPct val="112000"/>
+              </a:lnSpc>
+              <a:spcBef>
+                <a:spcPts val="0"/>
+              </a:spcBef>
+              <a:spcAft>
+                <a:spcPts val="600"/>
+              </a:spcAft>
+            </a:pPr>
+            <a:r>
+              <a:rPr sz="1300" b="1">
+                <a:solidFill>
+                  <a:srgbClr val="F2F2F2"/>
+                </a:solidFill>
+                <a:latin typeface="Segoe UI"/>
+              </a:rPr>
+              <a:t> History buff"</a:t>
+            </a:r>
+          </a:p>
+          <a:p>
+            <a:pPr algn="l">
+              <a:lnSpc>
+                <a:spcPct val="112000"/>
+              </a:lnSpc>
+              <a:spcBef>
+                <a:spcPts val="0"/>
+              </a:spcBef>
+              <a:spcAft>
+                <a:spcPts val="600"/>
+              </a:spcAft>
+            </a:pPr>
+            <a:endParaRPr sz="1300" b="1">
+              <a:solidFill>
+                <a:srgbClr val="F2F2F2"/>
+              </a:solidFill>
+              <a:latin typeface="Segoe UI"/>
+            </a:endParaRPr>
+          </a:p>
+          <a:p>
+            <a:pPr algn="l">
+              <a:lnSpc>
+                <a:spcPct val="112000"/>
+              </a:lnSpc>
+              <a:spcBef>
+                <a:spcPts val="0"/>
+              </a:spcBef>
+              <a:spcAft>
+                <a:spcPts val="600"/>
+              </a:spcAft>
+            </a:pPr>
+            <a:r>
+              <a:rPr sz="1200" b="0">
                 <a:solidFill>
                   <a:srgbClr val="9A9AA2"/>
                 </a:solidFill>
                 <a:latin typeface="Segoe UI"/>
               </a:rPr>
-              <a:t/>
+              <a:t>• Solo-Cooking Master</a:t>
             </a:r>
           </a:p>
           <a:p>
@@ -4373,13 +4550,13 @@
               </a:spcAft>
             </a:pPr>
             <a:r>
-              <a:rPr sz="1300" b="1">
-                <a:solidFill>
-                  <a:srgbClr val="F4A844"/>
-                </a:solidFill>
-                <a:latin typeface="Segoe UI"/>
-              </a:rPr>
-              <a:t>Example result:</a:t>
+              <a:rPr sz="1200" b="0">
+                <a:solidFill>
+                  <a:srgbClr val="9A9AA2"/>
+                </a:solidFill>
+                <a:latin typeface="Segoe UI"/>
+              </a:rPr>
+              <a:t>• Game Strategist</a:t>
             </a:r>
           </a:p>
           <a:p>
@@ -4395,13 +4572,13 @@
               </a:spcAft>
             </a:pPr>
             <a:r>
-              <a:rPr sz="1300" b="1">
-                <a:solidFill>
-                  <a:srgbClr val="F2F2F2"/>
-                </a:solidFill>
-                <a:latin typeface="Segoe UI"/>
-              </a:rPr>
-              <a:t>"Solo-cooking + Game/</a:t>
+              <a:rPr sz="1200" b="0">
+                <a:solidFill>
+                  <a:srgbClr val="9A9AA2"/>
+                </a:solidFill>
+                <a:latin typeface="Segoe UI"/>
+              </a:rPr>
+              <a:t>• History + Slang buff</a:t>
             </a:r>
           </a:p>
           <a:p>
@@ -4417,13 +4594,13 @@
               </a:spcAft>
             </a:pPr>
             <a:r>
-              <a:rPr sz="1300" b="1">
-                <a:solidFill>
-                  <a:srgbClr val="F2F2F2"/>
-                </a:solidFill>
-                <a:latin typeface="Segoe UI"/>
-              </a:rPr>
-              <a:t> History buff"</a:t>
+              <a:rPr sz="1200" b="0">
+                <a:solidFill>
+                  <a:srgbClr val="9A9AA2"/>
+                </a:solidFill>
+                <a:latin typeface="Segoe UI"/>
+              </a:rPr>
+              <a:t>• Healthy-Food Experimenter</a:t>
             </a:r>
           </a:p>
           <a:p>
@@ -4438,125 +4615,12 @@
                 <a:spcPts val="600"/>
               </a:spcAft>
             </a:pPr>
-            <a:r>
-              <a:rPr sz="600" b="0">
-                <a:solidFill>
-                  <a:srgbClr val="9A9AA2"/>
-                </a:solidFill>
-                <a:latin typeface="Segoe UI"/>
-              </a:rPr>
-              <a:t/>
-            </a:r>
-          </a:p>
-          <a:p>
-            <a:pPr algn="l">
-              <a:lnSpc>
-                <a:spcPct val="112000"/>
-              </a:lnSpc>
-              <a:spcBef>
-                <a:spcPts val="0"/>
-              </a:spcBef>
-              <a:spcAft>
-                <a:spcPts val="600"/>
-              </a:spcAft>
-            </a:pPr>
-            <a:r>
-              <a:rPr sz="1200" b="0">
-                <a:solidFill>
-                  <a:srgbClr val="9A9AA2"/>
-                </a:solidFill>
-                <a:latin typeface="Segoe UI"/>
-              </a:rPr>
-              <a:t>• Solo-Cooking Master</a:t>
-            </a:r>
-          </a:p>
-          <a:p>
-            <a:pPr algn="l">
-              <a:lnSpc>
-                <a:spcPct val="112000"/>
-              </a:lnSpc>
-              <a:spcBef>
-                <a:spcPts val="0"/>
-              </a:spcBef>
-              <a:spcAft>
-                <a:spcPts val="600"/>
-              </a:spcAft>
-            </a:pPr>
-            <a:r>
-              <a:rPr sz="1200" b="0">
-                <a:solidFill>
-                  <a:srgbClr val="9A9AA2"/>
-                </a:solidFill>
-                <a:latin typeface="Segoe UI"/>
-              </a:rPr>
-              <a:t>• Game Strategist</a:t>
-            </a:r>
-          </a:p>
-          <a:p>
-            <a:pPr algn="l">
-              <a:lnSpc>
-                <a:spcPct val="112000"/>
-              </a:lnSpc>
-              <a:spcBef>
-                <a:spcPts val="0"/>
-              </a:spcBef>
-              <a:spcAft>
-                <a:spcPts val="600"/>
-              </a:spcAft>
-            </a:pPr>
-            <a:r>
-              <a:rPr sz="1200" b="0">
-                <a:solidFill>
-                  <a:srgbClr val="9A9AA2"/>
-                </a:solidFill>
-                <a:latin typeface="Segoe UI"/>
-              </a:rPr>
-              <a:t>• History + Slang buff</a:t>
-            </a:r>
-          </a:p>
-          <a:p>
-            <a:pPr algn="l">
-              <a:lnSpc>
-                <a:spcPct val="112000"/>
-              </a:lnSpc>
-              <a:spcBef>
-                <a:spcPts val="0"/>
-              </a:spcBef>
-              <a:spcAft>
-                <a:spcPts val="600"/>
-              </a:spcAft>
-            </a:pPr>
-            <a:r>
-              <a:rPr sz="1200" b="0">
-                <a:solidFill>
-                  <a:srgbClr val="9A9AA2"/>
-                </a:solidFill>
-                <a:latin typeface="Segoe UI"/>
-              </a:rPr>
-              <a:t>• Healthy-Food Experimenter</a:t>
-            </a:r>
-          </a:p>
-          <a:p>
-            <a:pPr algn="l">
-              <a:lnSpc>
-                <a:spcPct val="112000"/>
-              </a:lnSpc>
-              <a:spcBef>
-                <a:spcPts val="0"/>
-              </a:spcBef>
-              <a:spcAft>
-                <a:spcPts val="600"/>
-              </a:spcAft>
-            </a:pPr>
-            <a:r>
-              <a:rPr sz="800" b="0">
-                <a:solidFill>
-                  <a:srgbClr val="9A9AA2"/>
-                </a:solidFill>
-                <a:latin typeface="Segoe UI"/>
-              </a:rPr>
-              <a:t/>
-            </a:r>
+            <a:endParaRPr sz="1200" b="0">
+              <a:solidFill>
+                <a:srgbClr val="9A9AA2"/>
+              </a:solidFill>
+              <a:latin typeface="Segoe UI"/>
+            </a:endParaRPr>
           </a:p>
           <a:p>
             <a:pPr algn="l">
@@ -4613,7 +4677,7 @@
 </file>
 
 <file path=ppt/slides/slide11.xml><?xml version="1.0" encoding="utf-8"?>
-<p:sld xmlns:a="http://schemas.openxmlformats.org/drawingml/2006/main" xmlns:p="http://schemas.openxmlformats.org/presentationml/2006/main" xmlns:r="http://schemas.openxmlformats.org/officeDocument/2006/relationships">
+<p:sld xmlns:a="http://schemas.openxmlformats.org/drawingml/2006/main" xmlns:r="http://schemas.openxmlformats.org/officeDocument/2006/relationships" xmlns:p="http://schemas.openxmlformats.org/presentationml/2006/main">
   <p:cSld>
     <p:spTree>
       <p:nvGrpSpPr>
@@ -4621,7 +4685,14 @@
         <p:cNvGrpSpPr/>
         <p:nvPr/>
       </p:nvGrpSpPr>
-      <p:grpSpPr/>
+      <p:grpSpPr>
+        <a:xfrm>
+          <a:off x="0" y="0"/>
+          <a:ext cx="0" cy="0"/>
+          <a:chOff x="0" y="0"/>
+          <a:chExt cx="0" cy="0"/>
+        </a:xfrm>
+      </p:grpSpPr>
       <p:sp>
         <p:nvSpPr>
           <p:cNvPr id="2" name="Rectangle 1"/>
@@ -4663,6 +4734,7 @@
           <a:lstStyle/>
           <a:p>
             <a:pPr algn="ctr"/>
+            <a:endParaRPr/>
           </a:p>
         </p:txBody>
       </p:sp>
@@ -4707,6 +4779,7 @@
           <a:lstStyle/>
           <a:p>
             <a:pPr algn="ctr"/>
+            <a:endParaRPr/>
           </a:p>
         </p:txBody>
       </p:sp>
@@ -4727,7 +4800,7 @@
           <a:noFill/>
         </p:spPr>
         <p:txBody>
-          <a:bodyPr wrap="square" anchor="t" lIns="25400" rIns="25400" tIns="25400" bIns="25400">
+          <a:bodyPr wrap="square" lIns="25400" tIns="25400" rIns="25400" bIns="25400" anchor="t">
             <a:spAutoFit/>
           </a:bodyPr>
           <a:lstStyle/>
@@ -4772,7 +4845,7 @@
           <a:noFill/>
         </p:spPr>
         <p:txBody>
-          <a:bodyPr wrap="square" anchor="t" lIns="25400" rIns="25400" tIns="25400" bIns="25400">
+          <a:bodyPr wrap="square" lIns="25400" tIns="25400" rIns="25400" bIns="25400" anchor="t">
             <a:spAutoFit/>
           </a:bodyPr>
           <a:lstStyle/>
@@ -4841,6 +4914,7 @@
           <a:lstStyle/>
           <a:p>
             <a:pPr algn="ctr"/>
+            <a:endParaRPr/>
           </a:p>
         </p:txBody>
       </p:sp>
@@ -4914,6 +4988,7 @@
           <a:lstStyle/>
           <a:p>
             <a:pPr algn="ctr"/>
+            <a:endParaRPr/>
           </a:p>
         </p:txBody>
       </p:sp>
@@ -4934,7 +5009,7 @@
           <a:noFill/>
         </p:spPr>
         <p:txBody>
-          <a:bodyPr wrap="square" anchor="t" lIns="25400" rIns="25400" tIns="25400" bIns="25400">
+          <a:bodyPr wrap="square" lIns="25400" tIns="25400" rIns="25400" bIns="25400" anchor="t">
             <a:spAutoFit/>
           </a:bodyPr>
           <a:lstStyle/>
@@ -4979,7 +5054,7 @@
           <a:noFill/>
         </p:spPr>
         <p:txBody>
-          <a:bodyPr wrap="square" anchor="t" lIns="25400" rIns="25400" tIns="25400" bIns="25400">
+          <a:bodyPr wrap="square" lIns="25400" tIns="25400" rIns="25400" bIns="25400" anchor="t">
             <a:spAutoFit/>
           </a:bodyPr>
           <a:lstStyle/>
@@ -5061,14 +5136,64 @@
                 <a:spcPts val="600"/>
               </a:spcAft>
             </a:pPr>
-            <a:r>
-              <a:rPr sz="800" b="0">
+            <a:endParaRPr sz="1300" b="0">
+              <a:solidFill>
+                <a:srgbClr val="9A9AA2"/>
+              </a:solidFill>
+              <a:latin typeface="Segoe UI"/>
+            </a:endParaRPr>
+          </a:p>
+          <a:p>
+            <a:pPr algn="l">
+              <a:lnSpc>
+                <a:spcPct val="112000"/>
+              </a:lnSpc>
+              <a:spcBef>
+                <a:spcPts val="0"/>
+              </a:spcBef>
+              <a:spcAft>
+                <a:spcPts val="600"/>
+              </a:spcAft>
+            </a:pPr>
+            <a:r>
+              <a:rPr sz="1300" b="0">
+                <a:solidFill>
+                  <a:srgbClr val="F2F2F2"/>
+                </a:solidFill>
+                <a:latin typeface="Segoe UI"/>
+              </a:rPr>
+              <a:t>🔴 </a:t>
+            </a:r>
+            <a:r>
+              <a:rPr sz="1300" b="1">
+                <a:solidFill>
+                  <a:srgbClr val="FF3B3B"/>
+                </a:solidFill>
+                <a:latin typeface="Segoe UI"/>
+              </a:rPr>
+              <a:t>Drop Recommended</a:t>
+            </a:r>
+          </a:p>
+          <a:p>
+            <a:pPr algn="l">
+              <a:lnSpc>
+                <a:spcPct val="112000"/>
+              </a:lnSpc>
+              <a:spcBef>
+                <a:spcPts val="0"/>
+              </a:spcBef>
+              <a:spcAft>
+                <a:spcPts val="600"/>
+              </a:spcAft>
+            </a:pPr>
+            <a:r>
+              <a:rPr sz="1200" b="0">
                 <a:solidFill>
                   <a:srgbClr val="9A9AA2"/>
                 </a:solidFill>
                 <a:latin typeface="Segoe UI"/>
               </a:rPr>
-              <a:t/>
+              <a:t>   long inactivity (2yr+)</a:t>
             </a:r>
           </a:p>
           <a:p>
@@ -5083,6 +5208,25 @@
                 <a:spcPts val="600"/>
               </a:spcAft>
             </a:pPr>
+            <a:endParaRPr sz="1200" b="0">
+              <a:solidFill>
+                <a:srgbClr val="9A9AA2"/>
+              </a:solidFill>
+              <a:latin typeface="Segoe UI"/>
+            </a:endParaRPr>
+          </a:p>
+          <a:p>
+            <a:pPr algn="l">
+              <a:lnSpc>
+                <a:spcPct val="112000"/>
+              </a:lnSpc>
+              <a:spcBef>
+                <a:spcPts val="0"/>
+              </a:spcBef>
+              <a:spcAft>
+                <a:spcPts val="600"/>
+              </a:spcAft>
+            </a:pPr>
             <a:r>
               <a:rPr sz="1300" b="0">
                 <a:solidFill>
@@ -5090,16 +5234,16 @@
                 </a:solidFill>
                 <a:latin typeface="Segoe UI"/>
               </a:rPr>
-              <a:t>🔴 </a:t>
+              <a:t>🟡 </a:t>
             </a:r>
             <a:r>
               <a:rPr sz="1300" b="1">
                 <a:solidFill>
-                  <a:srgbClr val="FF3B3B"/>
-                </a:solidFill>
-                <a:latin typeface="Segoe UI"/>
-              </a:rPr>
-              <a:t>Drop Recommended</a:t>
+                  <a:srgbClr val="F4A844"/>
+                </a:solidFill>
+                <a:latin typeface="Segoe UI"/>
+              </a:rPr>
+              <a:t>Keep for Now</a:t>
             </a:r>
           </a:p>
           <a:p>
@@ -5121,7 +5265,7 @@
                 </a:solidFill>
                 <a:latin typeface="Segoe UI"/>
               </a:rPr>
-              <a:t>   long inactivity (2yr+)</a:t>
+              <a:t>   inactive within 1 year</a:t>
             </a:r>
           </a:p>
           <a:p>
@@ -5136,90 +5280,12 @@
                 <a:spcPts val="600"/>
               </a:spcAft>
             </a:pPr>
-            <a:r>
-              <a:rPr sz="600" b="0">
-                <a:solidFill>
-                  <a:srgbClr val="9A9AA2"/>
-                </a:solidFill>
-                <a:latin typeface="Segoe UI"/>
-              </a:rPr>
-              <a:t/>
-            </a:r>
-          </a:p>
-          <a:p>
-            <a:pPr algn="l">
-              <a:lnSpc>
-                <a:spcPct val="112000"/>
-              </a:lnSpc>
-              <a:spcBef>
-                <a:spcPts val="0"/>
-              </a:spcBef>
-              <a:spcAft>
-                <a:spcPts val="600"/>
-              </a:spcAft>
-            </a:pPr>
-            <a:r>
-              <a:rPr sz="1300" b="0">
-                <a:solidFill>
-                  <a:srgbClr val="F2F2F2"/>
-                </a:solidFill>
-                <a:latin typeface="Segoe UI"/>
-              </a:rPr>
-              <a:t>🟡 </a:t>
-            </a:r>
-            <a:r>
-              <a:rPr sz="1300" b="1">
-                <a:solidFill>
-                  <a:srgbClr val="F4A844"/>
-                </a:solidFill>
-                <a:latin typeface="Segoe UI"/>
-              </a:rPr>
-              <a:t>Keep for Now</a:t>
-            </a:r>
-          </a:p>
-          <a:p>
-            <a:pPr algn="l">
-              <a:lnSpc>
-                <a:spcPct val="112000"/>
-              </a:lnSpc>
-              <a:spcBef>
-                <a:spcPts val="0"/>
-              </a:spcBef>
-              <a:spcAft>
-                <a:spcPts val="600"/>
-              </a:spcAft>
-            </a:pPr>
-            <a:r>
-              <a:rPr sz="1200" b="0">
-                <a:solidFill>
-                  <a:srgbClr val="9A9AA2"/>
-                </a:solidFill>
-                <a:latin typeface="Segoe UI"/>
-              </a:rPr>
-              <a:t>   inactive within 1 year</a:t>
-            </a:r>
-          </a:p>
-          <a:p>
-            <a:pPr algn="l">
-              <a:lnSpc>
-                <a:spcPct val="112000"/>
-              </a:lnSpc>
-              <a:spcBef>
-                <a:spcPts val="0"/>
-              </a:spcBef>
-              <a:spcAft>
-                <a:spcPts val="600"/>
-              </a:spcAft>
-            </a:pPr>
-            <a:r>
-              <a:rPr sz="800" b="0">
-                <a:solidFill>
-                  <a:srgbClr val="9A9AA2"/>
-                </a:solidFill>
-                <a:latin typeface="Segoe UI"/>
-              </a:rPr>
-              <a:t/>
-            </a:r>
+            <a:endParaRPr sz="1200" b="0">
+              <a:solidFill>
+                <a:srgbClr val="9A9AA2"/>
+              </a:solidFill>
+              <a:latin typeface="Segoe UI"/>
+            </a:endParaRPr>
           </a:p>
           <a:p>
             <a:pPr algn="l">
@@ -5298,7 +5364,7 @@
 </file>
 
 <file path=ppt/slides/slide12.xml><?xml version="1.0" encoding="utf-8"?>
-<p:sld xmlns:a="http://schemas.openxmlformats.org/drawingml/2006/main" xmlns:p="http://schemas.openxmlformats.org/presentationml/2006/main" xmlns:r="http://schemas.openxmlformats.org/officeDocument/2006/relationships">
+<p:sld xmlns:a="http://schemas.openxmlformats.org/drawingml/2006/main" xmlns:r="http://schemas.openxmlformats.org/officeDocument/2006/relationships" xmlns:p="http://schemas.openxmlformats.org/presentationml/2006/main">
   <p:cSld>
     <p:spTree>
       <p:nvGrpSpPr>
@@ -5306,7 +5372,14 @@
         <p:cNvGrpSpPr/>
         <p:nvPr/>
       </p:nvGrpSpPr>
-      <p:grpSpPr/>
+      <p:grpSpPr>
+        <a:xfrm>
+          <a:off x="0" y="0"/>
+          <a:ext cx="0" cy="0"/>
+          <a:chOff x="0" y="0"/>
+          <a:chExt cx="0" cy="0"/>
+        </a:xfrm>
+      </p:grpSpPr>
       <p:sp>
         <p:nvSpPr>
           <p:cNvPr id="2" name="Rectangle 1"/>
@@ -5348,6 +5421,7 @@
           <a:lstStyle/>
           <a:p>
             <a:pPr algn="ctr"/>
+            <a:endParaRPr/>
           </a:p>
         </p:txBody>
       </p:sp>
@@ -5392,6 +5466,7 @@
           <a:lstStyle/>
           <a:p>
             <a:pPr algn="ctr"/>
+            <a:endParaRPr/>
           </a:p>
         </p:txBody>
       </p:sp>
@@ -5412,7 +5487,7 @@
           <a:noFill/>
         </p:spPr>
         <p:txBody>
-          <a:bodyPr wrap="square" anchor="t" lIns="25400" rIns="25400" tIns="25400" bIns="25400">
+          <a:bodyPr wrap="square" lIns="25400" tIns="25400" rIns="25400" bIns="25400" anchor="t">
             <a:spAutoFit/>
           </a:bodyPr>
           <a:lstStyle/>
@@ -5449,15 +5524,15 @@
         <p:spPr>
           <a:xfrm>
             <a:off x="502920" y="603504"/>
-            <a:ext cx="11155680" cy="640080"/>
-          </a:xfrm>
-          <a:prstGeom prst="rect">
-            <a:avLst/>
-          </a:prstGeom>
-          <a:noFill/>
-        </p:spPr>
-        <p:txBody>
-          <a:bodyPr wrap="square" anchor="t" lIns="25400" rIns="25400" tIns="25400" bIns="25400">
+            <a:ext cx="11155680" cy="512961"/>
+          </a:xfrm>
+          <a:prstGeom prst="rect">
+            <a:avLst/>
+          </a:prstGeom>
+          <a:noFill/>
+        </p:spPr>
+        <p:txBody>
+          <a:bodyPr wrap="square" lIns="25400" tIns="25400" rIns="25400" bIns="25400" anchor="t">
             <a:spAutoFit/>
           </a:bodyPr>
           <a:lstStyle/>
@@ -5480,7 +5555,16 @@
                 </a:solidFill>
                 <a:latin typeface="Segoe UI"/>
               </a:rPr>
-              <a:t>New Channel Recommendation — Video-First Discovery</a:t>
+              <a:t>Channel </a:t>
+            </a:r>
+            <a:r>
+              <a:rPr sz="3000" b="1" dirty="0">
+                <a:solidFill>
+                  <a:srgbClr val="F2F2F2"/>
+                </a:solidFill>
+                <a:latin typeface="Segoe UI"/>
+              </a:rPr>
+              <a:t>Recommendation — Video-First Discovery</a:t>
             </a:r>
           </a:p>
         </p:txBody>
@@ -5526,12 +5610,13 @@
           <a:lstStyle/>
           <a:p>
             <a:pPr algn="ctr"/>
+            <a:endParaRPr/>
           </a:p>
         </p:txBody>
       </p:sp>
       <p:pic>
         <p:nvPicPr>
-          <p:cNvPr id="7" name="Picture 6" descr="채널 추천.png"/>
+          <p:cNvPr id="7" name="Picture 6"/>
           <p:cNvPicPr>
             <a:picLocks noChangeAspect="1"/>
           </p:cNvPicPr>
@@ -5539,14 +5624,13 @@
         </p:nvPicPr>
         <p:blipFill>
           <a:blip r:embed="rId2"/>
-          <a:stretch>
-            <a:fillRect/>
-          </a:stretch>
+          <a:srcRect/>
+          <a:stretch/>
         </p:blipFill>
         <p:spPr>
           <a:xfrm>
-            <a:off x="502920" y="2227512"/>
-            <a:ext cx="6400800" cy="3408815"/>
+            <a:off x="1203323" y="1460585"/>
+            <a:ext cx="4493309" cy="2409430"/>
           </a:xfrm>
           <a:prstGeom prst="rect">
             <a:avLst/>
@@ -5599,6 +5683,7 @@
           <a:lstStyle/>
           <a:p>
             <a:pPr algn="ctr"/>
+            <a:endParaRPr/>
           </a:p>
         </p:txBody>
       </p:sp>
@@ -5619,7 +5704,7 @@
           <a:noFill/>
         </p:spPr>
         <p:txBody>
-          <a:bodyPr wrap="square" anchor="t" lIns="25400" rIns="25400" tIns="25400" bIns="25400">
+          <a:bodyPr wrap="square" lIns="25400" tIns="25400" rIns="25400" bIns="25400" anchor="t">
             <a:spAutoFit/>
           </a:bodyPr>
           <a:lstStyle/>
@@ -5686,7 +5771,7 @@
           <a:noFill/>
         </p:spPr>
         <p:txBody>
-          <a:bodyPr wrap="square" anchor="t" lIns="25400" rIns="25400" tIns="25400" bIns="25400">
+          <a:bodyPr wrap="square" lIns="25400" tIns="25400" rIns="25400" bIns="25400" anchor="t">
             <a:spAutoFit/>
           </a:bodyPr>
           <a:lstStyle/>
@@ -5731,7 +5816,7 @@
           <a:noFill/>
         </p:spPr>
         <p:txBody>
-          <a:bodyPr wrap="square" anchor="t" lIns="25400" rIns="25400" tIns="25400" bIns="25400">
+          <a:bodyPr wrap="square" lIns="25400" tIns="25400" rIns="25400" bIns="25400" anchor="t">
             <a:spAutoFit/>
           </a:bodyPr>
           <a:lstStyle/>
@@ -5776,7 +5861,7 @@
           <a:noFill/>
         </p:spPr>
         <p:txBody>
-          <a:bodyPr wrap="square" anchor="t" lIns="25400" rIns="25400" tIns="25400" bIns="25400">
+          <a:bodyPr wrap="square" lIns="25400" tIns="25400" rIns="25400" bIns="25400" anchor="t">
             <a:spAutoFit/>
           </a:bodyPr>
           <a:lstStyle/>
@@ -5821,7 +5906,7 @@
           <a:noFill/>
         </p:spPr>
         <p:txBody>
-          <a:bodyPr wrap="square" anchor="t" lIns="25400" rIns="25400" tIns="25400" bIns="25400">
+          <a:bodyPr wrap="square" lIns="25400" tIns="25400" rIns="25400" bIns="25400" anchor="t">
             <a:spAutoFit/>
           </a:bodyPr>
           <a:lstStyle/>
@@ -5866,7 +5951,7 @@
           <a:noFill/>
         </p:spPr>
         <p:txBody>
-          <a:bodyPr wrap="square" anchor="t" lIns="25400" rIns="25400" tIns="25400" bIns="25400">
+          <a:bodyPr wrap="square" lIns="25400" tIns="25400" rIns="25400" bIns="25400" anchor="t">
             <a:spAutoFit/>
           </a:bodyPr>
           <a:lstStyle/>
@@ -5911,7 +5996,7 @@
           <a:noFill/>
         </p:spPr>
         <p:txBody>
-          <a:bodyPr wrap="square" anchor="t" lIns="25400" rIns="25400" tIns="25400" bIns="25400">
+          <a:bodyPr wrap="square" lIns="25400" tIns="25400" rIns="25400" bIns="25400" anchor="t">
             <a:spAutoFit/>
           </a:bodyPr>
           <a:lstStyle/>
@@ -5956,7 +6041,7 @@
           <a:noFill/>
         </p:spPr>
         <p:txBody>
-          <a:bodyPr wrap="square" anchor="t" lIns="25400" rIns="25400" tIns="25400" bIns="25400">
+          <a:bodyPr wrap="square" lIns="25400" tIns="25400" rIns="25400" bIns="25400" anchor="t">
             <a:spAutoFit/>
           </a:bodyPr>
           <a:lstStyle/>
@@ -6001,7 +6086,7 @@
           <a:noFill/>
         </p:spPr>
         <p:txBody>
-          <a:bodyPr wrap="square" anchor="t" lIns="25400" rIns="25400" tIns="25400" bIns="25400">
+          <a:bodyPr wrap="square" lIns="25400" tIns="25400" rIns="25400" bIns="25400" anchor="t">
             <a:spAutoFit/>
           </a:bodyPr>
           <a:lstStyle/>
@@ -6046,7 +6131,7 @@
           <a:noFill/>
         </p:spPr>
         <p:txBody>
-          <a:bodyPr wrap="square" anchor="t" lIns="25400" rIns="25400" tIns="25400" bIns="25400">
+          <a:bodyPr wrap="square" lIns="25400" tIns="25400" rIns="25400" bIns="25400" anchor="t">
             <a:spAutoFit/>
           </a:bodyPr>
           <a:lstStyle/>
@@ -6091,7 +6176,7 @@
           <a:noFill/>
         </p:spPr>
         <p:txBody>
-          <a:bodyPr wrap="square" anchor="t" lIns="25400" rIns="25400" tIns="25400" bIns="25400">
+          <a:bodyPr wrap="square" lIns="25400" tIns="25400" rIns="25400" bIns="25400" anchor="t">
             <a:spAutoFit/>
           </a:bodyPr>
           <a:lstStyle/>
@@ -6136,7 +6221,7 @@
           <a:noFill/>
         </p:spPr>
         <p:txBody>
-          <a:bodyPr wrap="square" anchor="t" lIns="25400" rIns="25400" tIns="25400" bIns="25400">
+          <a:bodyPr wrap="square" lIns="25400" tIns="25400" rIns="25400" bIns="25400" anchor="t">
             <a:spAutoFit/>
           </a:bodyPr>
           <a:lstStyle/>
@@ -6181,7 +6266,7 @@
           <a:noFill/>
         </p:spPr>
         <p:txBody>
-          <a:bodyPr wrap="square" anchor="t" lIns="25400" rIns="25400" tIns="25400" bIns="25400">
+          <a:bodyPr wrap="square" lIns="25400" tIns="25400" rIns="25400" bIns="25400" anchor="t">
             <a:spAutoFit/>
           </a:bodyPr>
           <a:lstStyle/>
@@ -6226,7 +6311,7 @@
           <a:noFill/>
         </p:spPr>
         <p:txBody>
-          <a:bodyPr wrap="square" anchor="t" lIns="25400" rIns="25400" tIns="25400" bIns="25400">
+          <a:bodyPr wrap="square" lIns="25400" tIns="25400" rIns="25400" bIns="25400" anchor="t">
             <a:spAutoFit/>
           </a:bodyPr>
           <a:lstStyle/>
@@ -6271,7 +6356,7 @@
           <a:noFill/>
         </p:spPr>
         <p:txBody>
-          <a:bodyPr wrap="square" anchor="t" lIns="25400" rIns="25400" tIns="25400" bIns="25400">
+          <a:bodyPr wrap="square" lIns="25400" tIns="25400" rIns="25400" bIns="25400" anchor="t">
             <a:spAutoFit/>
           </a:bodyPr>
           <a:lstStyle/>
@@ -6316,7 +6401,7 @@
           <a:noFill/>
         </p:spPr>
         <p:txBody>
-          <a:bodyPr wrap="square" anchor="t" lIns="25400" rIns="25400" tIns="25400" bIns="25400">
+          <a:bodyPr wrap="square" lIns="25400" tIns="25400" rIns="25400" bIns="25400" anchor="t">
             <a:spAutoFit/>
           </a:bodyPr>
           <a:lstStyle/>
@@ -6361,7 +6446,7 @@
           <a:noFill/>
         </p:spPr>
         <p:txBody>
-          <a:bodyPr wrap="square" anchor="t" lIns="25400" rIns="25400" tIns="25400" bIns="25400">
+          <a:bodyPr wrap="square" lIns="25400" tIns="25400" rIns="25400" bIns="25400" anchor="t">
             <a:spAutoFit/>
           </a:bodyPr>
           <a:lstStyle/>
@@ -6389,6 +6474,40 @@
           </a:p>
         </p:txBody>
       </p:sp>
+      <p:pic>
+        <p:nvPicPr>
+          <p:cNvPr id="26" name="Picture 6">
+            <a:extLst>
+              <a:ext uri="{FF2B5EF4-FFF2-40B4-BE49-F238E27FC236}">
+                <a16:creationId xmlns:a16="http://schemas.microsoft.com/office/drawing/2014/main" id="{30383C1C-7B24-148C-3724-379698AD630C}"/>
+              </a:ext>
+            </a:extLst>
+          </p:cNvPr>
+          <p:cNvPicPr>
+            <a:picLocks noChangeAspect="1"/>
+          </p:cNvPicPr>
+          <p:nvPr/>
+        </p:nvPicPr>
+        <p:blipFill>
+          <a:blip r:embed="rId3"/>
+          <a:srcRect/>
+          <a:stretch/>
+        </p:blipFill>
+        <p:spPr>
+          <a:xfrm>
+            <a:off x="1172398" y="4225600"/>
+            <a:ext cx="4524234" cy="1954671"/>
+          </a:xfrm>
+          <a:prstGeom prst="rect">
+            <a:avLst/>
+          </a:prstGeom>
+          <a:ln w="12700">
+            <a:solidFill>
+              <a:srgbClr val="33333A"/>
+            </a:solidFill>
+          </a:ln>
+        </p:spPr>
+      </p:pic>
     </p:spTree>
   </p:cSld>
   <p:clrMapOvr>
@@ -6398,7 +6517,7 @@
 </file>
 
 <file path=ppt/slides/slide13.xml><?xml version="1.0" encoding="utf-8"?>
-<p:sld xmlns:a="http://schemas.openxmlformats.org/drawingml/2006/main" xmlns:p="http://schemas.openxmlformats.org/presentationml/2006/main" xmlns:r="http://schemas.openxmlformats.org/officeDocument/2006/relationships">
+<p:sld xmlns:a="http://schemas.openxmlformats.org/drawingml/2006/main" xmlns:r="http://schemas.openxmlformats.org/officeDocument/2006/relationships" xmlns:p="http://schemas.openxmlformats.org/presentationml/2006/main">
   <p:cSld>
     <p:spTree>
       <p:nvGrpSpPr>
@@ -6406,7 +6525,14 @@
         <p:cNvGrpSpPr/>
         <p:nvPr/>
       </p:nvGrpSpPr>
-      <p:grpSpPr/>
+      <p:grpSpPr>
+        <a:xfrm>
+          <a:off x="0" y="0"/>
+          <a:ext cx="0" cy="0"/>
+          <a:chOff x="0" y="0"/>
+          <a:chExt cx="0" cy="0"/>
+        </a:xfrm>
+      </p:grpSpPr>
       <p:sp>
         <p:nvSpPr>
           <p:cNvPr id="2" name="Rectangle 1"/>
@@ -6448,6 +6574,7 @@
           <a:lstStyle/>
           <a:p>
             <a:pPr algn="ctr"/>
+            <a:endParaRPr/>
           </a:p>
         </p:txBody>
       </p:sp>
@@ -6492,6 +6619,7 @@
           <a:lstStyle/>
           <a:p>
             <a:pPr algn="ctr"/>
+            <a:endParaRPr/>
           </a:p>
         </p:txBody>
       </p:sp>
@@ -6512,7 +6640,7 @@
           <a:noFill/>
         </p:spPr>
         <p:txBody>
-          <a:bodyPr wrap="square" anchor="t" lIns="25400" rIns="25400" tIns="25400" bIns="25400">
+          <a:bodyPr wrap="square" lIns="25400" tIns="25400" rIns="25400" bIns="25400" anchor="t">
             <a:spAutoFit/>
           </a:bodyPr>
           <a:lstStyle/>
@@ -6557,7 +6685,7 @@
           <a:noFill/>
         </p:spPr>
         <p:txBody>
-          <a:bodyPr wrap="square" anchor="t" lIns="25400" rIns="25400" tIns="25400" bIns="25400">
+          <a:bodyPr wrap="square" lIns="25400" tIns="25400" rIns="25400" bIns="25400" anchor="t">
             <a:spAutoFit/>
           </a:bodyPr>
           <a:lstStyle/>
@@ -6626,6 +6754,7 @@
           <a:lstStyle/>
           <a:p>
             <a:pPr algn="ctr"/>
+            <a:endParaRPr/>
           </a:p>
         </p:txBody>
       </p:sp>
@@ -6646,7 +6775,7 @@
           <a:noFill/>
         </p:spPr>
         <p:txBody>
-          <a:bodyPr wrap="square" anchor="t" lIns="25400" rIns="25400" tIns="25400" bIns="25400">
+          <a:bodyPr wrap="square" lIns="25400" tIns="25400" rIns="25400" bIns="25400" anchor="t">
             <a:spAutoFit/>
           </a:bodyPr>
           <a:lstStyle/>
@@ -6735,6 +6864,7 @@
           <a:lstStyle/>
           <a:p>
             <a:pPr algn="ctr"/>
+            <a:endParaRPr/>
           </a:p>
         </p:txBody>
       </p:sp>
@@ -6755,7 +6885,7 @@
           <a:noFill/>
         </p:spPr>
         <p:txBody>
-          <a:bodyPr wrap="square" anchor="t" lIns="25400" rIns="25400" tIns="25400" bIns="25400">
+          <a:bodyPr wrap="square" lIns="25400" tIns="25400" rIns="25400" bIns="25400" anchor="t">
             <a:spAutoFit/>
           </a:bodyPr>
           <a:lstStyle/>
@@ -6809,7 +6939,7 @@
           <a:noFill/>
         </p:spPr>
         <p:txBody>
-          <a:bodyPr wrap="square" anchor="t" lIns="25400" rIns="25400" tIns="25400" bIns="25400">
+          <a:bodyPr wrap="square" lIns="25400" tIns="25400" rIns="25400" bIns="25400" anchor="t">
             <a:spAutoFit/>
           </a:bodyPr>
           <a:lstStyle/>
@@ -6854,7 +6984,7 @@
           <a:noFill/>
         </p:spPr>
         <p:txBody>
-          <a:bodyPr wrap="square" anchor="t" lIns="25400" rIns="25400" tIns="25400" bIns="25400">
+          <a:bodyPr wrap="square" lIns="25400" tIns="25400" rIns="25400" bIns="25400" anchor="t">
             <a:spAutoFit/>
           </a:bodyPr>
           <a:lstStyle/>
@@ -7013,6 +7143,7 @@
           <a:lstStyle/>
           <a:p>
             <a:pPr algn="ctr"/>
+            <a:endParaRPr/>
           </a:p>
         </p:txBody>
       </p:sp>
@@ -7033,7 +7164,7 @@
           <a:noFill/>
         </p:spPr>
         <p:txBody>
-          <a:bodyPr wrap="square" anchor="t" lIns="25400" rIns="25400" tIns="25400" bIns="25400">
+          <a:bodyPr wrap="square" lIns="25400" tIns="25400" rIns="25400" bIns="25400" anchor="t">
             <a:spAutoFit/>
           </a:bodyPr>
           <a:lstStyle/>
@@ -7087,7 +7218,7 @@
           <a:noFill/>
         </p:spPr>
         <p:txBody>
-          <a:bodyPr wrap="square" anchor="t" lIns="25400" rIns="25400" tIns="25400" bIns="25400">
+          <a:bodyPr wrap="square" lIns="25400" tIns="25400" rIns="25400" bIns="25400" anchor="t">
             <a:spAutoFit/>
           </a:bodyPr>
           <a:lstStyle/>
@@ -7132,7 +7263,7 @@
           <a:noFill/>
         </p:spPr>
         <p:txBody>
-          <a:bodyPr wrap="square" anchor="t" lIns="25400" rIns="25400" tIns="25400" bIns="25400">
+          <a:bodyPr wrap="square" lIns="25400" tIns="25400" rIns="25400" bIns="25400" anchor="t">
             <a:spAutoFit/>
           </a:bodyPr>
           <a:lstStyle/>
@@ -7291,6 +7422,7 @@
           <a:lstStyle/>
           <a:p>
             <a:pPr algn="ctr"/>
+            <a:endParaRPr/>
           </a:p>
         </p:txBody>
       </p:sp>
@@ -7311,7 +7443,7 @@
           <a:noFill/>
         </p:spPr>
         <p:txBody>
-          <a:bodyPr wrap="square" anchor="t" lIns="25400" rIns="25400" tIns="25400" bIns="25400">
+          <a:bodyPr wrap="square" lIns="25400" tIns="25400" rIns="25400" bIns="25400" anchor="t">
             <a:spAutoFit/>
           </a:bodyPr>
           <a:lstStyle/>
@@ -7365,7 +7497,7 @@
           <a:noFill/>
         </p:spPr>
         <p:txBody>
-          <a:bodyPr wrap="square" anchor="t" lIns="25400" rIns="25400" tIns="25400" bIns="25400">
+          <a:bodyPr wrap="square" lIns="25400" tIns="25400" rIns="25400" bIns="25400" anchor="t">
             <a:spAutoFit/>
           </a:bodyPr>
           <a:lstStyle/>
@@ -7410,7 +7542,7 @@
           <a:noFill/>
         </p:spPr>
         <p:txBody>
-          <a:bodyPr wrap="square" anchor="t" lIns="25400" rIns="25400" tIns="25400" bIns="25400">
+          <a:bodyPr wrap="square" lIns="25400" tIns="25400" rIns="25400" bIns="25400" anchor="t">
             <a:spAutoFit/>
           </a:bodyPr>
           <a:lstStyle/>
@@ -7567,6 +7699,7 @@
           <a:lstStyle/>
           <a:p>
             <a:pPr algn="ctr"/>
+            <a:endParaRPr/>
           </a:p>
         </p:txBody>
       </p:sp>
@@ -7587,7 +7720,7 @@
           <a:noFill/>
         </p:spPr>
         <p:txBody>
-          <a:bodyPr wrap="square" anchor="t" lIns="25400" rIns="25400" tIns="25400" bIns="25400">
+          <a:bodyPr wrap="square" lIns="25400" tIns="25400" rIns="25400" bIns="25400" anchor="t">
             <a:spAutoFit/>
           </a:bodyPr>
           <a:lstStyle/>
@@ -7641,7 +7774,7 @@
           <a:noFill/>
         </p:spPr>
         <p:txBody>
-          <a:bodyPr wrap="square" anchor="t" lIns="25400" rIns="25400" tIns="25400" bIns="25400">
+          <a:bodyPr wrap="square" lIns="25400" tIns="25400" rIns="25400" bIns="25400" anchor="t">
             <a:spAutoFit/>
           </a:bodyPr>
           <a:lstStyle/>
@@ -7696,7 +7829,7 @@
 </file>
 
 <file path=ppt/slides/slide14.xml><?xml version="1.0" encoding="utf-8"?>
-<p:sld xmlns:a="http://schemas.openxmlformats.org/drawingml/2006/main" xmlns:p="http://schemas.openxmlformats.org/presentationml/2006/main" xmlns:r="http://schemas.openxmlformats.org/officeDocument/2006/relationships">
+<p:sld xmlns:a="http://schemas.openxmlformats.org/drawingml/2006/main" xmlns:r="http://schemas.openxmlformats.org/officeDocument/2006/relationships" xmlns:p="http://schemas.openxmlformats.org/presentationml/2006/main">
   <p:cSld>
     <p:spTree>
       <p:nvGrpSpPr>
@@ -7704,7 +7837,14 @@
         <p:cNvGrpSpPr/>
         <p:nvPr/>
       </p:nvGrpSpPr>
-      <p:grpSpPr/>
+      <p:grpSpPr>
+        <a:xfrm>
+          <a:off x="0" y="0"/>
+          <a:ext cx="0" cy="0"/>
+          <a:chOff x="0" y="0"/>
+          <a:chExt cx="0" cy="0"/>
+        </a:xfrm>
+      </p:grpSpPr>
       <p:sp>
         <p:nvSpPr>
           <p:cNvPr id="2" name="Rectangle 1"/>
@@ -7746,6 +7886,7 @@
           <a:lstStyle/>
           <a:p>
             <a:pPr algn="ctr"/>
+            <a:endParaRPr/>
           </a:p>
         </p:txBody>
       </p:sp>
@@ -7790,6 +7931,7 @@
           <a:lstStyle/>
           <a:p>
             <a:pPr algn="ctr"/>
+            <a:endParaRPr/>
           </a:p>
         </p:txBody>
       </p:sp>
@@ -7810,7 +7952,7 @@
           <a:noFill/>
         </p:spPr>
         <p:txBody>
-          <a:bodyPr wrap="square" anchor="t" lIns="25400" rIns="25400" tIns="25400" bIns="25400">
+          <a:bodyPr wrap="square" lIns="25400" tIns="25400" rIns="25400" bIns="25400" anchor="t">
             <a:spAutoFit/>
           </a:bodyPr>
           <a:lstStyle/>
@@ -7855,7 +7997,7 @@
           <a:noFill/>
         </p:spPr>
         <p:txBody>
-          <a:bodyPr wrap="square" anchor="t" lIns="25400" rIns="25400" tIns="25400" bIns="25400">
+          <a:bodyPr wrap="square" lIns="25400" tIns="25400" rIns="25400" bIns="25400" anchor="t">
             <a:spAutoFit/>
           </a:bodyPr>
           <a:lstStyle/>
@@ -7924,6 +8066,7 @@
           <a:lstStyle/>
           <a:p>
             <a:pPr algn="ctr"/>
+            <a:endParaRPr/>
           </a:p>
         </p:txBody>
       </p:sp>
@@ -7944,7 +8087,7 @@
           <a:noFill/>
         </p:spPr>
         <p:txBody>
-          <a:bodyPr wrap="square" anchor="t" lIns="25400" rIns="25400" tIns="25400" bIns="25400">
+          <a:bodyPr wrap="square" lIns="25400" tIns="25400" rIns="25400" bIns="25400" anchor="t">
             <a:spAutoFit/>
           </a:bodyPr>
           <a:lstStyle/>
@@ -8051,6 +8194,7 @@
           <a:lstStyle/>
           <a:p>
             <a:pPr algn="ctr"/>
+            <a:endParaRPr/>
           </a:p>
         </p:txBody>
       </p:sp>
@@ -8071,7 +8215,7 @@
           <a:noFill/>
         </p:spPr>
         <p:txBody>
-          <a:bodyPr wrap="square" anchor="t" lIns="25400" rIns="25400" tIns="25400" bIns="25400">
+          <a:bodyPr wrap="square" lIns="25400" tIns="25400" rIns="25400" bIns="25400" anchor="t">
             <a:spAutoFit/>
           </a:bodyPr>
           <a:lstStyle/>
@@ -8125,7 +8269,7 @@
           <a:noFill/>
         </p:spPr>
         <p:txBody>
-          <a:bodyPr wrap="square" anchor="t" lIns="25400" rIns="25400" tIns="25400" bIns="25400">
+          <a:bodyPr wrap="square" lIns="25400" tIns="25400" rIns="25400" bIns="25400" anchor="t">
             <a:spAutoFit/>
           </a:bodyPr>
           <a:lstStyle/>
@@ -8306,6 +8450,7 @@
           <a:lstStyle/>
           <a:p>
             <a:pPr algn="ctr"/>
+            <a:endParaRPr/>
           </a:p>
         </p:txBody>
       </p:sp>
@@ -8326,7 +8471,7 @@
           <a:noFill/>
         </p:spPr>
         <p:txBody>
-          <a:bodyPr wrap="square" anchor="t" lIns="25400" rIns="25400" tIns="25400" bIns="25400">
+          <a:bodyPr wrap="square" lIns="25400" tIns="25400" rIns="25400" bIns="25400" anchor="t">
             <a:spAutoFit/>
           </a:bodyPr>
           <a:lstStyle/>
@@ -8380,7 +8525,7 @@
           <a:noFill/>
         </p:spPr>
         <p:txBody>
-          <a:bodyPr wrap="square" anchor="t" lIns="25400" rIns="25400" tIns="25400" bIns="25400">
+          <a:bodyPr wrap="square" lIns="25400" tIns="25400" rIns="25400" bIns="25400" anchor="t">
             <a:spAutoFit/>
           </a:bodyPr>
           <a:lstStyle/>
@@ -8561,6 +8706,7 @@
           <a:lstStyle/>
           <a:p>
             <a:pPr algn="ctr"/>
+            <a:endParaRPr/>
           </a:p>
         </p:txBody>
       </p:sp>
@@ -8581,7 +8727,7 @@
           <a:noFill/>
         </p:spPr>
         <p:txBody>
-          <a:bodyPr wrap="square" anchor="t" lIns="25400" rIns="25400" tIns="25400" bIns="25400">
+          <a:bodyPr wrap="square" lIns="25400" tIns="25400" rIns="25400" bIns="25400" anchor="t">
             <a:spAutoFit/>
           </a:bodyPr>
           <a:lstStyle/>
@@ -8635,7 +8781,7 @@
           <a:noFill/>
         </p:spPr>
         <p:txBody>
-          <a:bodyPr wrap="square" anchor="t" lIns="25400" rIns="25400" tIns="25400" bIns="25400">
+          <a:bodyPr wrap="square" lIns="25400" tIns="25400" rIns="25400" bIns="25400" anchor="t">
             <a:spAutoFit/>
           </a:bodyPr>
           <a:lstStyle/>
@@ -8814,6 +8960,7 @@
           <a:lstStyle/>
           <a:p>
             <a:pPr algn="ctr"/>
+            <a:endParaRPr/>
           </a:p>
         </p:txBody>
       </p:sp>
@@ -8834,7 +8981,7 @@
           <a:noFill/>
         </p:spPr>
         <p:txBody>
-          <a:bodyPr wrap="square" anchor="t" lIns="25400" rIns="25400" tIns="25400" bIns="25400">
+          <a:bodyPr wrap="square" lIns="25400" tIns="25400" rIns="25400" bIns="25400" anchor="t">
             <a:spAutoFit/>
           </a:bodyPr>
           <a:lstStyle/>
@@ -8879,7 +9026,7 @@
           <a:noFill/>
         </p:spPr>
         <p:txBody>
-          <a:bodyPr wrap="square" anchor="t" lIns="25400" rIns="25400" tIns="25400" bIns="25400">
+          <a:bodyPr wrap="square" lIns="25400" tIns="25400" rIns="25400" bIns="25400" anchor="t">
             <a:spAutoFit/>
           </a:bodyPr>
           <a:lstStyle/>
@@ -8943,7 +9090,7 @@
 </file>
 
 <file path=ppt/slides/slide15.xml><?xml version="1.0" encoding="utf-8"?>
-<p:sld xmlns:a="http://schemas.openxmlformats.org/drawingml/2006/main" xmlns:p="http://schemas.openxmlformats.org/presentationml/2006/main" xmlns:r="http://schemas.openxmlformats.org/officeDocument/2006/relationships">
+<p:sld xmlns:a="http://schemas.openxmlformats.org/drawingml/2006/main" xmlns:r="http://schemas.openxmlformats.org/officeDocument/2006/relationships" xmlns:p="http://schemas.openxmlformats.org/presentationml/2006/main">
   <p:cSld>
     <p:spTree>
       <p:nvGrpSpPr>
@@ -8951,7 +9098,14 @@
         <p:cNvGrpSpPr/>
         <p:nvPr/>
       </p:nvGrpSpPr>
-      <p:grpSpPr/>
+      <p:grpSpPr>
+        <a:xfrm>
+          <a:off x="0" y="0"/>
+          <a:ext cx="0" cy="0"/>
+          <a:chOff x="0" y="0"/>
+          <a:chExt cx="0" cy="0"/>
+        </a:xfrm>
+      </p:grpSpPr>
       <p:sp>
         <p:nvSpPr>
           <p:cNvPr id="2" name="Rectangle 1"/>
@@ -8993,6 +9147,7 @@
           <a:lstStyle/>
           <a:p>
             <a:pPr algn="ctr"/>
+            <a:endParaRPr/>
           </a:p>
         </p:txBody>
       </p:sp>
@@ -9037,6 +9192,7 @@
           <a:lstStyle/>
           <a:p>
             <a:pPr algn="ctr"/>
+            <a:endParaRPr/>
           </a:p>
         </p:txBody>
       </p:sp>
@@ -9057,7 +9213,7 @@
           <a:noFill/>
         </p:spPr>
         <p:txBody>
-          <a:bodyPr wrap="square" anchor="t" lIns="25400" rIns="25400" tIns="25400" bIns="25400">
+          <a:bodyPr wrap="square" lIns="25400" tIns="25400" rIns="25400" bIns="25400" anchor="t">
             <a:spAutoFit/>
           </a:bodyPr>
           <a:lstStyle/>
@@ -9102,7 +9258,7 @@
           <a:noFill/>
         </p:spPr>
         <p:txBody>
-          <a:bodyPr wrap="square" anchor="t" lIns="25400" rIns="25400" tIns="25400" bIns="25400">
+          <a:bodyPr wrap="square" lIns="25400" tIns="25400" rIns="25400" bIns="25400" anchor="t">
             <a:spAutoFit/>
           </a:bodyPr>
           <a:lstStyle/>
@@ -9171,6 +9327,7 @@
           <a:lstStyle/>
           <a:p>
             <a:pPr algn="ctr"/>
+            <a:endParaRPr/>
           </a:p>
         </p:txBody>
       </p:sp>
@@ -9191,7 +9348,7 @@
           <a:noFill/>
         </p:spPr>
         <p:txBody>
-          <a:bodyPr wrap="square" anchor="t" lIns="25400" rIns="25400" tIns="25400" bIns="25400">
+          <a:bodyPr wrap="square" lIns="25400" tIns="25400" rIns="25400" bIns="25400" anchor="t">
             <a:spAutoFit/>
           </a:bodyPr>
           <a:lstStyle/>
@@ -9269,6 +9426,7 @@
           <a:lstStyle/>
           <a:p>
             <a:pPr algn="ctr"/>
+            <a:endParaRPr/>
           </a:p>
         </p:txBody>
       </p:sp>
@@ -9289,7 +9447,7 @@
           <a:noFill/>
         </p:spPr>
         <p:txBody>
-          <a:bodyPr wrap="square" anchor="ctr" lIns="25400" rIns="25400" tIns="25400" bIns="25400">
+          <a:bodyPr wrap="square" lIns="25400" tIns="25400" rIns="25400" bIns="25400" anchor="ctr">
             <a:spAutoFit/>
           </a:bodyPr>
           <a:lstStyle/>
@@ -9334,7 +9492,7 @@
           <a:noFill/>
         </p:spPr>
         <p:txBody>
-          <a:bodyPr wrap="square" anchor="ctr" lIns="25400" rIns="25400" tIns="25400" bIns="25400">
+          <a:bodyPr wrap="square" lIns="25400" tIns="25400" rIns="25400" bIns="25400" anchor="ctr">
             <a:spAutoFit/>
           </a:bodyPr>
           <a:lstStyle/>
@@ -9379,7 +9537,7 @@
           <a:noFill/>
         </p:spPr>
         <p:txBody>
-          <a:bodyPr wrap="square" anchor="ctr" lIns="25400" rIns="25400" tIns="25400" bIns="25400">
+          <a:bodyPr wrap="square" lIns="25400" tIns="25400" rIns="25400" bIns="25400" anchor="ctr">
             <a:spAutoFit/>
           </a:bodyPr>
           <a:lstStyle/>
@@ -9424,7 +9582,7 @@
           <a:noFill/>
         </p:spPr>
         <p:txBody>
-          <a:bodyPr wrap="square" anchor="ctr" lIns="25400" rIns="25400" tIns="25400" bIns="25400">
+          <a:bodyPr wrap="square" lIns="25400" tIns="25400" rIns="25400" bIns="25400" anchor="ctr">
             <a:spAutoFit/>
           </a:bodyPr>
           <a:lstStyle/>
@@ -9493,6 +9651,7 @@
           <a:lstStyle/>
           <a:p>
             <a:pPr algn="ctr"/>
+            <a:endParaRPr/>
           </a:p>
         </p:txBody>
       </p:sp>
@@ -9513,7 +9672,7 @@
           <a:noFill/>
         </p:spPr>
         <p:txBody>
-          <a:bodyPr wrap="square" anchor="ctr" lIns="25400" rIns="25400" tIns="25400" bIns="25400">
+          <a:bodyPr wrap="square" lIns="25400" tIns="25400" rIns="25400" bIns="25400" anchor="ctr">
             <a:spAutoFit/>
           </a:bodyPr>
           <a:lstStyle/>
@@ -9558,7 +9717,7 @@
           <a:noFill/>
         </p:spPr>
         <p:txBody>
-          <a:bodyPr wrap="square" anchor="ctr" lIns="25400" rIns="25400" tIns="25400" bIns="25400">
+          <a:bodyPr wrap="square" lIns="25400" tIns="25400" rIns="25400" bIns="25400" anchor="ctr">
             <a:spAutoFit/>
           </a:bodyPr>
           <a:lstStyle/>
@@ -9603,7 +9762,7 @@
           <a:noFill/>
         </p:spPr>
         <p:txBody>
-          <a:bodyPr wrap="square" anchor="ctr" lIns="25400" rIns="25400" tIns="25400" bIns="25400">
+          <a:bodyPr wrap="square" lIns="25400" tIns="25400" rIns="25400" bIns="25400" anchor="ctr">
             <a:spAutoFit/>
           </a:bodyPr>
           <a:lstStyle/>
@@ -9648,7 +9807,7 @@
           <a:noFill/>
         </p:spPr>
         <p:txBody>
-          <a:bodyPr wrap="square" anchor="ctr" lIns="25400" rIns="25400" tIns="25400" bIns="25400">
+          <a:bodyPr wrap="square" lIns="25400" tIns="25400" rIns="25400" bIns="25400" anchor="ctr">
             <a:spAutoFit/>
           </a:bodyPr>
           <a:lstStyle/>
@@ -9693,7 +9852,7 @@
           <a:noFill/>
         </p:spPr>
         <p:txBody>
-          <a:bodyPr wrap="square" anchor="ctr" lIns="25400" rIns="25400" tIns="25400" bIns="25400">
+          <a:bodyPr wrap="square" lIns="25400" tIns="25400" rIns="25400" bIns="25400" anchor="ctr">
             <a:spAutoFit/>
           </a:bodyPr>
           <a:lstStyle/>
@@ -9738,7 +9897,7 @@
           <a:noFill/>
         </p:spPr>
         <p:txBody>
-          <a:bodyPr wrap="square" anchor="ctr" lIns="25400" rIns="25400" tIns="25400" bIns="25400">
+          <a:bodyPr wrap="square" lIns="25400" tIns="25400" rIns="25400" bIns="25400" anchor="ctr">
             <a:spAutoFit/>
           </a:bodyPr>
           <a:lstStyle/>
@@ -9783,7 +9942,7 @@
           <a:noFill/>
         </p:spPr>
         <p:txBody>
-          <a:bodyPr wrap="square" anchor="ctr" lIns="25400" rIns="25400" tIns="25400" bIns="25400">
+          <a:bodyPr wrap="square" lIns="25400" tIns="25400" rIns="25400" bIns="25400" anchor="ctr">
             <a:spAutoFit/>
           </a:bodyPr>
           <a:lstStyle/>
@@ -9828,7 +9987,7 @@
           <a:noFill/>
         </p:spPr>
         <p:txBody>
-          <a:bodyPr wrap="square" anchor="ctr" lIns="25400" rIns="25400" tIns="25400" bIns="25400">
+          <a:bodyPr wrap="square" lIns="25400" tIns="25400" rIns="25400" bIns="25400" anchor="ctr">
             <a:spAutoFit/>
           </a:bodyPr>
           <a:lstStyle/>
@@ -9897,6 +10056,7 @@
           <a:lstStyle/>
           <a:p>
             <a:pPr algn="ctr"/>
+            <a:endParaRPr/>
           </a:p>
         </p:txBody>
       </p:sp>
@@ -9917,7 +10077,7 @@
           <a:noFill/>
         </p:spPr>
         <p:txBody>
-          <a:bodyPr wrap="square" anchor="ctr" lIns="25400" rIns="25400" tIns="25400" bIns="25400">
+          <a:bodyPr wrap="square" lIns="25400" tIns="25400" rIns="25400" bIns="25400" anchor="ctr">
             <a:spAutoFit/>
           </a:bodyPr>
           <a:lstStyle/>
@@ -9962,7 +10122,7 @@
           <a:noFill/>
         </p:spPr>
         <p:txBody>
-          <a:bodyPr wrap="square" anchor="ctr" lIns="25400" rIns="25400" tIns="25400" bIns="25400">
+          <a:bodyPr wrap="square" lIns="25400" tIns="25400" rIns="25400" bIns="25400" anchor="ctr">
             <a:spAutoFit/>
           </a:bodyPr>
           <a:lstStyle/>
@@ -10007,7 +10167,7 @@
           <a:noFill/>
         </p:spPr>
         <p:txBody>
-          <a:bodyPr wrap="square" anchor="ctr" lIns="25400" rIns="25400" tIns="25400" bIns="25400">
+          <a:bodyPr wrap="square" lIns="25400" tIns="25400" rIns="25400" bIns="25400" anchor="ctr">
             <a:spAutoFit/>
           </a:bodyPr>
           <a:lstStyle/>
@@ -10052,7 +10212,7 @@
           <a:noFill/>
         </p:spPr>
         <p:txBody>
-          <a:bodyPr wrap="square" anchor="ctr" lIns="25400" rIns="25400" tIns="25400" bIns="25400">
+          <a:bodyPr wrap="square" lIns="25400" tIns="25400" rIns="25400" bIns="25400" anchor="ctr">
             <a:spAutoFit/>
           </a:bodyPr>
           <a:lstStyle/>
@@ -10121,6 +10281,7 @@
           <a:lstStyle/>
           <a:p>
             <a:pPr algn="ctr"/>
+            <a:endParaRPr/>
           </a:p>
         </p:txBody>
       </p:sp>
@@ -10141,7 +10302,7 @@
           <a:noFill/>
         </p:spPr>
         <p:txBody>
-          <a:bodyPr wrap="square" anchor="ctr" lIns="25400" rIns="25400" tIns="25400" bIns="25400">
+          <a:bodyPr wrap="square" lIns="25400" tIns="25400" rIns="25400" bIns="25400" anchor="ctr">
             <a:spAutoFit/>
           </a:bodyPr>
           <a:lstStyle/>
@@ -10186,7 +10347,7 @@
           <a:noFill/>
         </p:spPr>
         <p:txBody>
-          <a:bodyPr wrap="square" anchor="ctr" lIns="25400" rIns="25400" tIns="25400" bIns="25400">
+          <a:bodyPr wrap="square" lIns="25400" tIns="25400" rIns="25400" bIns="25400" anchor="ctr">
             <a:spAutoFit/>
           </a:bodyPr>
           <a:lstStyle/>
@@ -10231,7 +10392,7 @@
           <a:noFill/>
         </p:spPr>
         <p:txBody>
-          <a:bodyPr wrap="square" anchor="ctr" lIns="25400" rIns="25400" tIns="25400" bIns="25400">
+          <a:bodyPr wrap="square" lIns="25400" tIns="25400" rIns="25400" bIns="25400" anchor="ctr">
             <a:spAutoFit/>
           </a:bodyPr>
           <a:lstStyle/>
@@ -10276,7 +10437,7 @@
           <a:noFill/>
         </p:spPr>
         <p:txBody>
-          <a:bodyPr wrap="square" anchor="ctr" lIns="25400" rIns="25400" tIns="25400" bIns="25400">
+          <a:bodyPr wrap="square" lIns="25400" tIns="25400" rIns="25400" bIns="25400" anchor="ctr">
             <a:spAutoFit/>
           </a:bodyPr>
           <a:lstStyle/>
@@ -10321,7 +10482,7 @@
           <a:noFill/>
         </p:spPr>
         <p:txBody>
-          <a:bodyPr wrap="square" anchor="t" lIns="25400" rIns="25400" tIns="25400" bIns="25400">
+          <a:bodyPr wrap="square" lIns="25400" tIns="25400" rIns="25400" bIns="25400" anchor="t">
             <a:spAutoFit/>
           </a:bodyPr>
           <a:lstStyle/>
@@ -10407,7 +10568,7 @@
 </file>
 
 <file path=ppt/slides/slide16.xml><?xml version="1.0" encoding="utf-8"?>
-<p:sld xmlns:a="http://schemas.openxmlformats.org/drawingml/2006/main" xmlns:p="http://schemas.openxmlformats.org/presentationml/2006/main" xmlns:r="http://schemas.openxmlformats.org/officeDocument/2006/relationships">
+<p:sld xmlns:a="http://schemas.openxmlformats.org/drawingml/2006/main" xmlns:r="http://schemas.openxmlformats.org/officeDocument/2006/relationships" xmlns:p="http://schemas.openxmlformats.org/presentationml/2006/main">
   <p:cSld>
     <p:spTree>
       <p:nvGrpSpPr>
@@ -10415,7 +10576,14 @@
         <p:cNvGrpSpPr/>
         <p:nvPr/>
       </p:nvGrpSpPr>
-      <p:grpSpPr/>
+      <p:grpSpPr>
+        <a:xfrm>
+          <a:off x="0" y="0"/>
+          <a:ext cx="0" cy="0"/>
+          <a:chOff x="0" y="0"/>
+          <a:chExt cx="0" cy="0"/>
+        </a:xfrm>
+      </p:grpSpPr>
       <p:sp>
         <p:nvSpPr>
           <p:cNvPr id="2" name="Rectangle 1"/>
@@ -10457,6 +10625,7 @@
           <a:lstStyle/>
           <a:p>
             <a:pPr algn="ctr"/>
+            <a:endParaRPr/>
           </a:p>
         </p:txBody>
       </p:sp>
@@ -10501,6 +10670,7 @@
           <a:lstStyle/>
           <a:p>
             <a:pPr algn="ctr"/>
+            <a:endParaRPr/>
           </a:p>
         </p:txBody>
       </p:sp>
@@ -10521,7 +10691,7 @@
           <a:noFill/>
         </p:spPr>
         <p:txBody>
-          <a:bodyPr wrap="square" anchor="t" lIns="25400" rIns="25400" tIns="25400" bIns="25400">
+          <a:bodyPr wrap="square" lIns="25400" tIns="25400" rIns="25400" bIns="25400" anchor="t">
             <a:spAutoFit/>
           </a:bodyPr>
           <a:lstStyle/>
@@ -10566,7 +10736,7 @@
           <a:noFill/>
         </p:spPr>
         <p:txBody>
-          <a:bodyPr wrap="square" anchor="t" lIns="25400" rIns="25400" tIns="25400" bIns="25400">
+          <a:bodyPr wrap="square" lIns="25400" tIns="25400" rIns="25400" bIns="25400" anchor="t">
             <a:spAutoFit/>
           </a:bodyPr>
           <a:lstStyle/>
@@ -10635,6 +10805,7 @@
           <a:lstStyle/>
           <a:p>
             <a:pPr algn="ctr"/>
+            <a:endParaRPr/>
           </a:p>
         </p:txBody>
       </p:sp>
@@ -10679,6 +10850,7 @@
           <a:lstStyle/>
           <a:p>
             <a:pPr algn="ctr"/>
+            <a:endParaRPr/>
           </a:p>
         </p:txBody>
       </p:sp>
@@ -10699,7 +10871,7 @@
           <a:noFill/>
         </p:spPr>
         <p:txBody>
-          <a:bodyPr wrap="square" anchor="t" lIns="25400" rIns="25400" tIns="25400" bIns="25400">
+          <a:bodyPr wrap="square" lIns="25400" tIns="25400" rIns="25400" bIns="25400" anchor="t">
             <a:spAutoFit/>
           </a:bodyPr>
           <a:lstStyle/>
@@ -10744,7 +10916,7 @@
           <a:noFill/>
         </p:spPr>
         <p:txBody>
-          <a:bodyPr wrap="square" anchor="t" lIns="25400" rIns="25400" tIns="25400" bIns="25400">
+          <a:bodyPr wrap="square" lIns="25400" tIns="25400" rIns="25400" bIns="25400" anchor="t">
             <a:spAutoFit/>
           </a:bodyPr>
           <a:lstStyle/>
@@ -10813,14 +10985,64 @@
                 <a:spcPts val="600"/>
               </a:spcAft>
             </a:pPr>
-            <a:r>
-              <a:rPr sz="700" b="0">
+            <a:endParaRPr sz="1200" b="0">
+              <a:solidFill>
+                <a:srgbClr val="9A9AA2"/>
+              </a:solidFill>
+              <a:latin typeface="Segoe UI"/>
+            </a:endParaRPr>
+          </a:p>
+          <a:p>
+            <a:pPr algn="l">
+              <a:lnSpc>
+                <a:spcPct val="112000"/>
+              </a:lnSpc>
+              <a:spcBef>
+                <a:spcPts val="0"/>
+              </a:spcBef>
+              <a:spcAft>
+                <a:spcPts val="600"/>
+              </a:spcAft>
+            </a:pPr>
+            <a:r>
+              <a:rPr sz="1400" b="0">
+                <a:solidFill>
+                  <a:srgbClr val="F2F2F2"/>
+                </a:solidFill>
+                <a:latin typeface="Segoe UI"/>
+              </a:rPr>
+              <a:t>• OAuth access_token </a:t>
+            </a:r>
+            <a:r>
+              <a:rPr sz="1400" b="1">
+                <a:solidFill>
+                  <a:srgbClr val="F4A844"/>
+                </a:solidFill>
+                <a:latin typeface="Segoe UI"/>
+              </a:rPr>
+              <a:t>expires in 1h</a:t>
+            </a:r>
+          </a:p>
+          <a:p>
+            <a:pPr algn="l">
+              <a:lnSpc>
+                <a:spcPct val="112000"/>
+              </a:lnSpc>
+              <a:spcBef>
+                <a:spcPts val="0"/>
+              </a:spcBef>
+              <a:spcAft>
+                <a:spcPts val="600"/>
+              </a:spcAft>
+            </a:pPr>
+            <a:r>
+              <a:rPr sz="1200" b="0">
                 <a:solidFill>
                   <a:srgbClr val="9A9AA2"/>
                 </a:solidFill>
                 <a:latin typeface="Segoe UI"/>
               </a:rPr>
-              <a:t/>
+              <a:t>  no refresh logic (one-shot token)</a:t>
             </a:r>
           </a:p>
           <a:p>
@@ -10835,6 +11057,25 @@
                 <a:spcPts val="600"/>
               </a:spcAft>
             </a:pPr>
+            <a:endParaRPr sz="1200" b="0">
+              <a:solidFill>
+                <a:srgbClr val="9A9AA2"/>
+              </a:solidFill>
+              <a:latin typeface="Segoe UI"/>
+            </a:endParaRPr>
+          </a:p>
+          <a:p>
+            <a:pPr algn="l">
+              <a:lnSpc>
+                <a:spcPct val="112000"/>
+              </a:lnSpc>
+              <a:spcBef>
+                <a:spcPts val="0"/>
+              </a:spcBef>
+              <a:spcAft>
+                <a:spcPts val="600"/>
+              </a:spcAft>
+            </a:pPr>
             <a:r>
               <a:rPr sz="1400" b="0">
                 <a:solidFill>
@@ -10842,16 +11083,7 @@
                 </a:solidFill>
                 <a:latin typeface="Segoe UI"/>
               </a:rPr>
-              <a:t>• OAuth access_token </a:t>
-            </a:r>
-            <a:r>
-              <a:rPr sz="1400" b="1">
-                <a:solidFill>
-                  <a:srgbClr val="F4A844"/>
-                </a:solidFill>
-                <a:latin typeface="Segoe UI"/>
-              </a:rPr>
-              <a:t>expires in 1h</a:t>
+              <a:t>• Comment API approx: scans only</a:t>
             </a:r>
           </a:p>
           <a:p>
@@ -10873,7 +11105,7 @@
                 </a:solidFill>
                 <a:latin typeface="Segoe UI"/>
               </a:rPr>
-              <a:t>  no refresh logic (one-shot token)</a:t>
+              <a:t>  last 100 per channel → use Takeout</a:t>
             </a:r>
           </a:p>
           <a:p>
@@ -10888,81 +11120,12 @@
                 <a:spcPts val="600"/>
               </a:spcAft>
             </a:pPr>
-            <a:r>
-              <a:rPr sz="700" b="0">
-                <a:solidFill>
-                  <a:srgbClr val="9A9AA2"/>
-                </a:solidFill>
-                <a:latin typeface="Segoe UI"/>
-              </a:rPr>
-              <a:t/>
-            </a:r>
-          </a:p>
-          <a:p>
-            <a:pPr algn="l">
-              <a:lnSpc>
-                <a:spcPct val="112000"/>
-              </a:lnSpc>
-              <a:spcBef>
-                <a:spcPts val="0"/>
-              </a:spcBef>
-              <a:spcAft>
-                <a:spcPts val="600"/>
-              </a:spcAft>
-            </a:pPr>
-            <a:r>
-              <a:rPr sz="1400" b="0">
-                <a:solidFill>
-                  <a:srgbClr val="F2F2F2"/>
-                </a:solidFill>
-                <a:latin typeface="Segoe UI"/>
-              </a:rPr>
-              <a:t>• Comment API approx: scans only</a:t>
-            </a:r>
-          </a:p>
-          <a:p>
-            <a:pPr algn="l">
-              <a:lnSpc>
-                <a:spcPct val="112000"/>
-              </a:lnSpc>
-              <a:spcBef>
-                <a:spcPts val="0"/>
-              </a:spcBef>
-              <a:spcAft>
-                <a:spcPts val="600"/>
-              </a:spcAft>
-            </a:pPr>
-            <a:r>
-              <a:rPr sz="1200" b="0">
-                <a:solidFill>
-                  <a:srgbClr val="9A9AA2"/>
-                </a:solidFill>
-                <a:latin typeface="Segoe UI"/>
-              </a:rPr>
-              <a:t>  last 100 per channel → use Takeout</a:t>
-            </a:r>
-          </a:p>
-          <a:p>
-            <a:pPr algn="l">
-              <a:lnSpc>
-                <a:spcPct val="112000"/>
-              </a:lnSpc>
-              <a:spcBef>
-                <a:spcPts val="0"/>
-              </a:spcBef>
-              <a:spcAft>
-                <a:spcPts val="600"/>
-              </a:spcAft>
-            </a:pPr>
-            <a:r>
-              <a:rPr sz="700" b="0">
-                <a:solidFill>
-                  <a:srgbClr val="9A9AA2"/>
-                </a:solidFill>
-                <a:latin typeface="Segoe UI"/>
-              </a:rPr>
-              <a:t/>
-            </a:r>
+            <a:endParaRPr sz="1200" b="0">
+              <a:solidFill>
+                <a:srgbClr val="9A9AA2"/>
+              </a:solidFill>
+              <a:latin typeface="Segoe UI"/>
+            </a:endParaRPr>
           </a:p>
           <a:p>
             <a:pPr algn="l">
@@ -11047,6 +11210,7 @@
           <a:lstStyle/>
           <a:p>
             <a:pPr algn="ctr"/>
+            <a:endParaRPr/>
           </a:p>
         </p:txBody>
       </p:sp>
@@ -11067,7 +11231,7 @@
           <a:noFill/>
         </p:spPr>
         <p:txBody>
-          <a:bodyPr wrap="square" anchor="t" lIns="25400" rIns="25400" tIns="25400" bIns="25400">
+          <a:bodyPr wrap="square" lIns="25400" tIns="25400" rIns="25400" bIns="25400" anchor="t">
             <a:spAutoFit/>
           </a:bodyPr>
           <a:lstStyle/>
@@ -11112,7 +11276,7 @@
           <a:noFill/>
         </p:spPr>
         <p:txBody>
-          <a:bodyPr wrap="square" anchor="t" lIns="25400" rIns="25400" tIns="25400" bIns="25400">
+          <a:bodyPr wrap="square" lIns="25400" tIns="25400" rIns="25400" bIns="25400" anchor="t">
             <a:spAutoFit/>
           </a:bodyPr>
           <a:lstStyle/>
@@ -11150,15 +11314,12 @@
                 <a:spcPts val="600"/>
               </a:spcAft>
             </a:pPr>
-            <a:r>
-              <a:rPr sz="700" b="0">
-                <a:solidFill>
-                  <a:srgbClr val="9A9AA2"/>
-                </a:solidFill>
-                <a:latin typeface="Segoe UI"/>
-              </a:rPr>
-              <a:t/>
-            </a:r>
+            <a:endParaRPr sz="1400" b="0">
+              <a:solidFill>
+                <a:srgbClr val="F2F2F2"/>
+              </a:solidFill>
+              <a:latin typeface="Segoe UI"/>
+            </a:endParaRPr>
           </a:p>
           <a:p>
             <a:pPr algn="l">
@@ -11194,15 +11355,12 @@
                 <a:spcPts val="600"/>
               </a:spcAft>
             </a:pPr>
-            <a:r>
-              <a:rPr sz="700" b="0">
-                <a:solidFill>
-                  <a:srgbClr val="9A9AA2"/>
-                </a:solidFill>
-                <a:latin typeface="Segoe UI"/>
-              </a:rPr>
-              <a:t/>
-            </a:r>
+            <a:endParaRPr sz="1400" b="0">
+              <a:solidFill>
+                <a:srgbClr val="F2F2F2"/>
+              </a:solidFill>
+              <a:latin typeface="Segoe UI"/>
+            </a:endParaRPr>
           </a:p>
           <a:p>
             <a:pPr algn="l">
@@ -11238,15 +11396,12 @@
                 <a:spcPts val="600"/>
               </a:spcAft>
             </a:pPr>
-            <a:r>
-              <a:rPr sz="700" b="0">
-                <a:solidFill>
-                  <a:srgbClr val="9A9AA2"/>
-                </a:solidFill>
-                <a:latin typeface="Segoe UI"/>
-              </a:rPr>
-              <a:t/>
-            </a:r>
+            <a:endParaRPr sz="1400" b="0">
+              <a:solidFill>
+                <a:srgbClr val="F2F2F2"/>
+              </a:solidFill>
+              <a:latin typeface="Segoe UI"/>
+            </a:endParaRPr>
           </a:p>
           <a:p>
             <a:pPr algn="l">
@@ -11282,15 +11437,12 @@
                 <a:spcPts val="600"/>
               </a:spcAft>
             </a:pPr>
-            <a:r>
-              <a:rPr sz="700" b="0">
-                <a:solidFill>
-                  <a:srgbClr val="9A9AA2"/>
-                </a:solidFill>
-                <a:latin typeface="Segoe UI"/>
-              </a:rPr>
-              <a:t/>
-            </a:r>
+            <a:endParaRPr sz="1400" b="0">
+              <a:solidFill>
+                <a:srgbClr val="F2F2F2"/>
+              </a:solidFill>
+              <a:latin typeface="Segoe UI"/>
+            </a:endParaRPr>
           </a:p>
           <a:p>
             <a:pPr algn="l">
@@ -11347,7 +11499,7 @@
 </file>
 
 <file path=ppt/slides/slide2.xml><?xml version="1.0" encoding="utf-8"?>
-<p:sld xmlns:a="http://schemas.openxmlformats.org/drawingml/2006/main" xmlns:p="http://schemas.openxmlformats.org/presentationml/2006/main" xmlns:r="http://schemas.openxmlformats.org/officeDocument/2006/relationships">
+<p:sld xmlns:a="http://schemas.openxmlformats.org/drawingml/2006/main" xmlns:r="http://schemas.openxmlformats.org/officeDocument/2006/relationships" xmlns:p="http://schemas.openxmlformats.org/presentationml/2006/main">
   <p:cSld>
     <p:spTree>
       <p:nvGrpSpPr>
@@ -11355,7 +11507,14 @@
         <p:cNvGrpSpPr/>
         <p:nvPr/>
       </p:nvGrpSpPr>
-      <p:grpSpPr/>
+      <p:grpSpPr>
+        <a:xfrm>
+          <a:off x="0" y="0"/>
+          <a:ext cx="0" cy="0"/>
+          <a:chOff x="0" y="0"/>
+          <a:chExt cx="0" cy="0"/>
+        </a:xfrm>
+      </p:grpSpPr>
       <p:sp>
         <p:nvSpPr>
           <p:cNvPr id="2" name="Rectangle 1"/>
@@ -11397,6 +11556,7 @@
           <a:lstStyle/>
           <a:p>
             <a:pPr algn="ctr"/>
+            <a:endParaRPr/>
           </a:p>
         </p:txBody>
       </p:sp>
@@ -11441,6 +11601,7 @@
           <a:lstStyle/>
           <a:p>
             <a:pPr algn="ctr"/>
+            <a:endParaRPr/>
           </a:p>
         </p:txBody>
       </p:sp>
@@ -11461,7 +11622,7 @@
           <a:noFill/>
         </p:spPr>
         <p:txBody>
-          <a:bodyPr wrap="square" anchor="t" lIns="25400" rIns="25400" tIns="25400" bIns="25400">
+          <a:bodyPr wrap="square" lIns="25400" tIns="25400" rIns="25400" bIns="25400" anchor="t">
             <a:spAutoFit/>
           </a:bodyPr>
           <a:lstStyle/>
@@ -11506,7 +11667,7 @@
           <a:noFill/>
         </p:spPr>
         <p:txBody>
-          <a:bodyPr wrap="square" anchor="t" lIns="25400" rIns="25400" tIns="25400" bIns="25400">
+          <a:bodyPr wrap="square" lIns="25400" tIns="25400" rIns="25400" bIns="25400" anchor="t">
             <a:spAutoFit/>
           </a:bodyPr>
           <a:lstStyle/>
@@ -11575,6 +11736,7 @@
           <a:lstStyle/>
           <a:p>
             <a:pPr algn="ctr"/>
+            <a:endParaRPr/>
           </a:p>
         </p:txBody>
       </p:sp>
@@ -11619,6 +11781,7 @@
           <a:lstStyle/>
           <a:p>
             <a:pPr algn="ctr"/>
+            <a:endParaRPr/>
           </a:p>
         </p:txBody>
       </p:sp>
@@ -11639,7 +11802,7 @@
           <a:noFill/>
         </p:spPr>
         <p:txBody>
-          <a:bodyPr wrap="square" anchor="t" lIns="25400" rIns="25400" tIns="25400" bIns="25400">
+          <a:bodyPr wrap="square" lIns="25400" tIns="25400" rIns="25400" bIns="25400" anchor="t">
             <a:spAutoFit/>
           </a:bodyPr>
           <a:lstStyle/>
@@ -11684,7 +11847,7 @@
           <a:noFill/>
         </p:spPr>
         <p:txBody>
-          <a:bodyPr wrap="square" anchor="t" lIns="25400" rIns="25400" tIns="25400" bIns="25400">
+          <a:bodyPr wrap="square" lIns="25400" tIns="25400" rIns="25400" bIns="25400" anchor="t">
             <a:spAutoFit/>
           </a:bodyPr>
           <a:lstStyle/>
@@ -11766,14 +11929,55 @@
                 <a:spcPts val="600"/>
               </a:spcAft>
             </a:pPr>
-            <a:r>
-              <a:rPr sz="800" b="0">
+            <a:endParaRPr sz="1500" b="0">
+              <a:solidFill>
+                <a:srgbClr val="9A9AA2"/>
+              </a:solidFill>
+              <a:latin typeface="Segoe UI"/>
+            </a:endParaRPr>
+          </a:p>
+          <a:p>
+            <a:pPr algn="l">
+              <a:lnSpc>
+                <a:spcPct val="110000"/>
+              </a:lnSpc>
+              <a:spcBef>
+                <a:spcPts val="0"/>
+              </a:spcBef>
+              <a:spcAft>
+                <a:spcPts val="600"/>
+              </a:spcAft>
+            </a:pPr>
+            <a:r>
+              <a:rPr sz="1500" b="0">
+                <a:solidFill>
+                  <a:srgbClr val="F2F2F2"/>
+                </a:solidFill>
+                <a:latin typeface="Segoe UI"/>
+              </a:rPr>
+              <a:t>• "Subscribed for years but never</a:t>
+            </a:r>
+          </a:p>
+          <a:p>
+            <a:pPr algn="l">
+              <a:lnSpc>
+                <a:spcPct val="110000"/>
+              </a:lnSpc>
+              <a:spcBef>
+                <a:spcPts val="0"/>
+              </a:spcBef>
+              <a:spcAft>
+                <a:spcPts val="600"/>
+              </a:spcAft>
+            </a:pPr>
+            <a:r>
+              <a:rPr sz="1500" b="0">
                 <a:solidFill>
                   <a:srgbClr val="9A9AA2"/>
                 </a:solidFill>
                 <a:latin typeface="Segoe UI"/>
               </a:rPr>
-              <a:t/>
+              <a:t>  watch" — dormant channels clutter</a:t>
             </a:r>
           </a:p>
           <a:p>
@@ -11791,11 +11995,11 @@
             <a:r>
               <a:rPr sz="1500" b="0">
                 <a:solidFill>
-                  <a:srgbClr val="F2F2F2"/>
-                </a:solidFill>
-                <a:latin typeface="Segoe UI"/>
-              </a:rPr>
-              <a:t>• "Subscribed for years but never</a:t>
+                  <a:srgbClr val="9A9AA2"/>
+                </a:solidFill>
+                <a:latin typeface="Segoe UI"/>
+              </a:rPr>
+              <a:t>  the whole list.</a:t>
             </a:r>
           </a:p>
           <a:p>
@@ -11810,59 +12014,12 @@
                 <a:spcPts val="600"/>
               </a:spcAft>
             </a:pPr>
-            <a:r>
-              <a:rPr sz="1500" b="0">
-                <a:solidFill>
-                  <a:srgbClr val="9A9AA2"/>
-                </a:solidFill>
-                <a:latin typeface="Segoe UI"/>
-              </a:rPr>
-              <a:t>  watch" — dormant channels clutter</a:t>
-            </a:r>
-          </a:p>
-          <a:p>
-            <a:pPr algn="l">
-              <a:lnSpc>
-                <a:spcPct val="110000"/>
-              </a:lnSpc>
-              <a:spcBef>
-                <a:spcPts val="0"/>
-              </a:spcBef>
-              <a:spcAft>
-                <a:spcPts val="600"/>
-              </a:spcAft>
-            </a:pPr>
-            <a:r>
-              <a:rPr sz="1500" b="0">
-                <a:solidFill>
-                  <a:srgbClr val="9A9AA2"/>
-                </a:solidFill>
-                <a:latin typeface="Segoe UI"/>
-              </a:rPr>
-              <a:t>  the whole list.</a:t>
-            </a:r>
-          </a:p>
-          <a:p>
-            <a:pPr algn="l">
-              <a:lnSpc>
-                <a:spcPct val="110000"/>
-              </a:lnSpc>
-              <a:spcBef>
-                <a:spcPts val="0"/>
-              </a:spcBef>
-              <a:spcAft>
-                <a:spcPts val="600"/>
-              </a:spcAft>
-            </a:pPr>
-            <a:r>
-              <a:rPr sz="800" b="0">
-                <a:solidFill>
-                  <a:srgbClr val="9A9AA2"/>
-                </a:solidFill>
-                <a:latin typeface="Segoe UI"/>
-              </a:rPr>
-              <a:t/>
-            </a:r>
+            <a:endParaRPr sz="1500" b="0">
+              <a:solidFill>
+                <a:srgbClr val="9A9AA2"/>
+              </a:solidFill>
+              <a:latin typeface="Segoe UI"/>
+            </a:endParaRPr>
           </a:p>
           <a:p>
             <a:pPr algn="l">
@@ -11960,6 +12117,7 @@
           <a:lstStyle/>
           <a:p>
             <a:pPr algn="ctr"/>
+            <a:endParaRPr/>
           </a:p>
         </p:txBody>
       </p:sp>
@@ -11980,7 +12138,7 @@
           <a:noFill/>
         </p:spPr>
         <p:txBody>
-          <a:bodyPr wrap="square" anchor="t" lIns="25400" rIns="25400" tIns="25400" bIns="25400">
+          <a:bodyPr wrap="square" lIns="25400" tIns="25400" rIns="25400" bIns="25400" anchor="t">
             <a:spAutoFit/>
           </a:bodyPr>
           <a:lstStyle/>
@@ -12025,7 +12183,7 @@
           <a:noFill/>
         </p:spPr>
         <p:txBody>
-          <a:bodyPr wrap="square" anchor="t" lIns="25400" rIns="25400" tIns="25400" bIns="25400">
+          <a:bodyPr wrap="square" lIns="25400" tIns="25400" rIns="25400" bIns="25400" anchor="t">
             <a:spAutoFit/>
           </a:bodyPr>
           <a:lstStyle/>
@@ -12094,14 +12252,142 @@
                 <a:spcPts val="600"/>
               </a:spcAft>
             </a:pPr>
-            <a:r>
-              <a:rPr sz="800" b="0">
+            <a:endParaRPr sz="1500" b="1">
+              <a:solidFill>
+                <a:srgbClr val="F2F2F2"/>
+              </a:solidFill>
+              <a:latin typeface="Segoe UI"/>
+            </a:endParaRPr>
+          </a:p>
+          <a:p>
+            <a:pPr algn="l">
+              <a:lnSpc>
+                <a:spcPct val="110000"/>
+              </a:lnSpc>
+              <a:spcBef>
+                <a:spcPts val="0"/>
+              </a:spcBef>
+              <a:spcAft>
+                <a:spcPts val="600"/>
+              </a:spcAft>
+            </a:pPr>
+            <a:r>
+              <a:rPr sz="1500" b="0">
+                <a:solidFill>
+                  <a:srgbClr val="F2F2F2"/>
+                </a:solidFill>
+                <a:latin typeface="Segoe UI"/>
+              </a:rPr>
+              <a:t>✓ </a:t>
+            </a:r>
+            <a:r>
+              <a:rPr sz="1500" b="1">
+                <a:solidFill>
+                  <a:srgbClr val="FF3B3B"/>
+                </a:solidFill>
+                <a:latin typeface="Segoe UI"/>
+              </a:rPr>
+              <a:t>Zero activity → instant 0 points</a:t>
+            </a:r>
+          </a:p>
+          <a:p>
+            <a:pPr algn="l">
+              <a:lnSpc>
+                <a:spcPct val="110000"/>
+              </a:lnSpc>
+              <a:spcBef>
+                <a:spcPts val="0"/>
+              </a:spcBef>
+              <a:spcAft>
+                <a:spcPts val="600"/>
+              </a:spcAft>
+            </a:pPr>
+            <a:endParaRPr sz="1500" b="1">
+              <a:solidFill>
+                <a:srgbClr val="FF3B3B"/>
+              </a:solidFill>
+              <a:latin typeface="Segoe UI"/>
+            </a:endParaRPr>
+          </a:p>
+          <a:p>
+            <a:pPr algn="l">
+              <a:lnSpc>
+                <a:spcPct val="110000"/>
+              </a:lnSpc>
+              <a:spcBef>
+                <a:spcPts val="0"/>
+              </a:spcBef>
+              <a:spcAft>
+                <a:spcPts val="600"/>
+              </a:spcAft>
+            </a:pPr>
+            <a:r>
+              <a:rPr sz="1500" b="0">
+                <a:solidFill>
+                  <a:srgbClr val="F2F2F2"/>
+                </a:solidFill>
+                <a:latin typeface="Segoe UI"/>
+              </a:rPr>
+              <a:t>✓ Auto-classify into 4 groups 🔥 😊 👋 🌱</a:t>
+            </a:r>
+          </a:p>
+          <a:p>
+            <a:pPr algn="l">
+              <a:lnSpc>
+                <a:spcPct val="110000"/>
+              </a:lnSpc>
+              <a:spcBef>
+                <a:spcPts val="0"/>
+              </a:spcBef>
+              <a:spcAft>
+                <a:spcPts val="600"/>
+              </a:spcAft>
+            </a:pPr>
+            <a:endParaRPr sz="1500" b="0">
+              <a:solidFill>
+                <a:srgbClr val="F2F2F2"/>
+              </a:solidFill>
+              <a:latin typeface="Segoe UI"/>
+            </a:endParaRPr>
+          </a:p>
+          <a:p>
+            <a:pPr algn="l">
+              <a:lnSpc>
+                <a:spcPct val="110000"/>
+              </a:lnSpc>
+              <a:spcBef>
+                <a:spcPts val="0"/>
+              </a:spcBef>
+              <a:spcAft>
+                <a:spcPts val="600"/>
+              </a:spcAft>
+            </a:pPr>
+            <a:r>
+              <a:rPr sz="1500" b="0">
+                <a:solidFill>
+                  <a:srgbClr val="F2F2F2"/>
+                </a:solidFill>
+                <a:latin typeface="Segoe UI"/>
+              </a:rPr>
+              <a:t>✓ Boost accuracy with real </a:t>
+            </a:r>
+            <a:r>
+              <a:rPr sz="1500" b="1">
+                <a:solidFill>
+                  <a:srgbClr val="F2F2F2"/>
+                </a:solidFill>
+                <a:latin typeface="Segoe UI"/>
+              </a:rPr>
+              <a:t>watch history</a:t>
+            </a:r>
+            <a:r>
+              <a:rPr sz="1500" b="0">
                 <a:solidFill>
                   <a:srgbClr val="9A9AA2"/>
                 </a:solidFill>
                 <a:latin typeface="Segoe UI"/>
               </a:rPr>
-              <a:t/>
+              <a:t> (Takeout)</a:t>
             </a:r>
           </a:p>
           <a:p>
@@ -12116,152 +12402,12 @@
                 <a:spcPts val="600"/>
               </a:spcAft>
             </a:pPr>
-            <a:r>
-              <a:rPr sz="1500" b="0">
-                <a:solidFill>
-                  <a:srgbClr val="F2F2F2"/>
-                </a:solidFill>
-                <a:latin typeface="Segoe UI"/>
-              </a:rPr>
-              <a:t>✓ </a:t>
-            </a:r>
-            <a:r>
-              <a:rPr sz="1500" b="1">
-                <a:solidFill>
-                  <a:srgbClr val="FF3B3B"/>
-                </a:solidFill>
-                <a:latin typeface="Segoe UI"/>
-              </a:rPr>
-              <a:t>Zero activity → instant 0 points</a:t>
-            </a:r>
-          </a:p>
-          <a:p>
-            <a:pPr algn="l">
-              <a:lnSpc>
-                <a:spcPct val="110000"/>
-              </a:lnSpc>
-              <a:spcBef>
-                <a:spcPts val="0"/>
-              </a:spcBef>
-              <a:spcAft>
-                <a:spcPts val="600"/>
-              </a:spcAft>
-            </a:pPr>
-            <a:r>
-              <a:rPr sz="800" b="0">
-                <a:solidFill>
-                  <a:srgbClr val="9A9AA2"/>
-                </a:solidFill>
-                <a:latin typeface="Segoe UI"/>
-              </a:rPr>
-              <a:t/>
-            </a:r>
-          </a:p>
-          <a:p>
-            <a:pPr algn="l">
-              <a:lnSpc>
-                <a:spcPct val="110000"/>
-              </a:lnSpc>
-              <a:spcBef>
-                <a:spcPts val="0"/>
-              </a:spcBef>
-              <a:spcAft>
-                <a:spcPts val="600"/>
-              </a:spcAft>
-            </a:pPr>
-            <a:r>
-              <a:rPr sz="1500" b="0">
-                <a:solidFill>
-                  <a:srgbClr val="F2F2F2"/>
-                </a:solidFill>
-                <a:latin typeface="Segoe UI"/>
-              </a:rPr>
-              <a:t>✓ Auto-classify into 4 groups 🔥 😊 👋 🌱</a:t>
-            </a:r>
-          </a:p>
-          <a:p>
-            <a:pPr algn="l">
-              <a:lnSpc>
-                <a:spcPct val="110000"/>
-              </a:lnSpc>
-              <a:spcBef>
-                <a:spcPts val="0"/>
-              </a:spcBef>
-              <a:spcAft>
-                <a:spcPts val="600"/>
-              </a:spcAft>
-            </a:pPr>
-            <a:r>
-              <a:rPr sz="800" b="0">
-                <a:solidFill>
-                  <a:srgbClr val="9A9AA2"/>
-                </a:solidFill>
-                <a:latin typeface="Segoe UI"/>
-              </a:rPr>
-              <a:t/>
-            </a:r>
-          </a:p>
-          <a:p>
-            <a:pPr algn="l">
-              <a:lnSpc>
-                <a:spcPct val="110000"/>
-              </a:lnSpc>
-              <a:spcBef>
-                <a:spcPts val="0"/>
-              </a:spcBef>
-              <a:spcAft>
-                <a:spcPts val="600"/>
-              </a:spcAft>
-            </a:pPr>
-            <a:r>
-              <a:rPr sz="1500" b="0">
-                <a:solidFill>
-                  <a:srgbClr val="F2F2F2"/>
-                </a:solidFill>
-                <a:latin typeface="Segoe UI"/>
-              </a:rPr>
-              <a:t>✓ Boost accuracy with real </a:t>
-            </a:r>
-            <a:r>
-              <a:rPr sz="1500" b="1">
-                <a:solidFill>
-                  <a:srgbClr val="F2F2F2"/>
-                </a:solidFill>
-                <a:latin typeface="Segoe UI"/>
-              </a:rPr>
-              <a:t>watch history</a:t>
-            </a:r>
-            <a:r>
-              <a:rPr sz="1500" b="0">
-                <a:solidFill>
-                  <a:srgbClr val="9A9AA2"/>
-                </a:solidFill>
-                <a:latin typeface="Segoe UI"/>
-              </a:rPr>
-              <a:t> (Takeout)</a:t>
-            </a:r>
-          </a:p>
-          <a:p>
-            <a:pPr algn="l">
-              <a:lnSpc>
-                <a:spcPct val="110000"/>
-              </a:lnSpc>
-              <a:spcBef>
-                <a:spcPts val="0"/>
-              </a:spcBef>
-              <a:spcAft>
-                <a:spcPts val="600"/>
-              </a:spcAft>
-            </a:pPr>
-            <a:r>
-              <a:rPr sz="800" b="0">
-                <a:solidFill>
-                  <a:srgbClr val="9A9AA2"/>
-                </a:solidFill>
-                <a:latin typeface="Segoe UI"/>
-              </a:rPr>
-              <a:t/>
-            </a:r>
+            <a:endParaRPr sz="1500" b="0">
+              <a:solidFill>
+                <a:srgbClr val="9A9AA2"/>
+              </a:solidFill>
+              <a:latin typeface="Segoe UI"/>
+            </a:endParaRPr>
           </a:p>
           <a:p>
             <a:pPr algn="l">
@@ -12296,7 +12442,7 @@
 </file>
 
 <file path=ppt/slides/slide3.xml><?xml version="1.0" encoding="utf-8"?>
-<p:sld xmlns:a="http://schemas.openxmlformats.org/drawingml/2006/main" xmlns:p="http://schemas.openxmlformats.org/presentationml/2006/main" xmlns:r="http://schemas.openxmlformats.org/officeDocument/2006/relationships">
+<p:sld xmlns:a="http://schemas.openxmlformats.org/drawingml/2006/main" xmlns:r="http://schemas.openxmlformats.org/officeDocument/2006/relationships" xmlns:p="http://schemas.openxmlformats.org/presentationml/2006/main">
   <p:cSld>
     <p:spTree>
       <p:nvGrpSpPr>
@@ -12304,7 +12450,14 @@
         <p:cNvGrpSpPr/>
         <p:nvPr/>
       </p:nvGrpSpPr>
-      <p:grpSpPr/>
+      <p:grpSpPr>
+        <a:xfrm>
+          <a:off x="0" y="0"/>
+          <a:ext cx="0" cy="0"/>
+          <a:chOff x="0" y="0"/>
+          <a:chExt cx="0" cy="0"/>
+        </a:xfrm>
+      </p:grpSpPr>
       <p:sp>
         <p:nvSpPr>
           <p:cNvPr id="2" name="Rectangle 1"/>
@@ -12346,6 +12499,7 @@
           <a:lstStyle/>
           <a:p>
             <a:pPr algn="ctr"/>
+            <a:endParaRPr/>
           </a:p>
         </p:txBody>
       </p:sp>
@@ -12390,6 +12544,7 @@
           <a:lstStyle/>
           <a:p>
             <a:pPr algn="ctr"/>
+            <a:endParaRPr/>
           </a:p>
         </p:txBody>
       </p:sp>
@@ -12410,7 +12565,7 @@
           <a:noFill/>
         </p:spPr>
         <p:txBody>
-          <a:bodyPr wrap="square" anchor="t" lIns="25400" rIns="25400" tIns="25400" bIns="25400">
+          <a:bodyPr wrap="square" lIns="25400" tIns="25400" rIns="25400" bIns="25400" anchor="t">
             <a:spAutoFit/>
           </a:bodyPr>
           <a:lstStyle/>
@@ -12455,7 +12610,7 @@
           <a:noFill/>
         </p:spPr>
         <p:txBody>
-          <a:bodyPr wrap="square" anchor="t" lIns="25400" rIns="25400" tIns="25400" bIns="25400">
+          <a:bodyPr wrap="square" lIns="25400" tIns="25400" rIns="25400" bIns="25400" anchor="t">
             <a:spAutoFit/>
           </a:bodyPr>
           <a:lstStyle/>
@@ -12524,6 +12679,7 @@
           <a:lstStyle/>
           <a:p>
             <a:pPr algn="ctr"/>
+            <a:endParaRPr/>
           </a:p>
         </p:txBody>
       </p:sp>
@@ -12570,6 +12726,7 @@
           <a:lstStyle/>
           <a:p>
             <a:pPr algn="ctr"/>
+            <a:endParaRPr/>
           </a:p>
         </p:txBody>
       </p:sp>
@@ -12590,7 +12747,7 @@
           <a:noFill/>
         </p:spPr>
         <p:txBody>
-          <a:bodyPr wrap="square" anchor="t" lIns="25400" rIns="25400" tIns="25400" bIns="25400">
+          <a:bodyPr wrap="square" lIns="25400" tIns="25400" rIns="25400" bIns="25400" anchor="t">
             <a:spAutoFit/>
           </a:bodyPr>
           <a:lstStyle/>
@@ -12644,7 +12801,7 @@
           <a:noFill/>
         </p:spPr>
         <p:txBody>
-          <a:bodyPr wrap="square" anchor="t" lIns="25400" rIns="25400" tIns="25400" bIns="25400">
+          <a:bodyPr wrap="square" lIns="25400" tIns="25400" rIns="25400" bIns="25400" anchor="t">
             <a:spAutoFit/>
           </a:bodyPr>
           <a:lstStyle/>
@@ -12737,6 +12894,7 @@
           <a:lstStyle/>
           <a:p>
             <a:pPr algn="ctr"/>
+            <a:endParaRPr/>
           </a:p>
         </p:txBody>
       </p:sp>
@@ -12757,7 +12915,7 @@
           <a:noFill/>
         </p:spPr>
         <p:txBody>
-          <a:bodyPr wrap="square" anchor="t" lIns="25400" rIns="25400" tIns="25400" bIns="25400">
+          <a:bodyPr wrap="square" lIns="25400" tIns="25400" rIns="25400" bIns="25400" anchor="t">
             <a:spAutoFit/>
           </a:bodyPr>
           <a:lstStyle/>
@@ -12811,7 +12969,7 @@
           <a:noFill/>
         </p:spPr>
         <p:txBody>
-          <a:bodyPr wrap="square" anchor="t" lIns="25400" rIns="25400" tIns="25400" bIns="25400">
+          <a:bodyPr wrap="square" lIns="25400" tIns="25400" rIns="25400" bIns="25400" anchor="t">
             <a:spAutoFit/>
           </a:bodyPr>
           <a:lstStyle/>
@@ -12904,6 +13062,7 @@
           <a:lstStyle/>
           <a:p>
             <a:pPr algn="ctr"/>
+            <a:endParaRPr/>
           </a:p>
         </p:txBody>
       </p:sp>
@@ -12924,7 +13083,7 @@
           <a:noFill/>
         </p:spPr>
         <p:txBody>
-          <a:bodyPr wrap="square" anchor="t" lIns="25400" rIns="25400" tIns="25400" bIns="25400">
+          <a:bodyPr wrap="square" lIns="25400" tIns="25400" rIns="25400" bIns="25400" anchor="t">
             <a:spAutoFit/>
           </a:bodyPr>
           <a:lstStyle/>
@@ -12978,7 +13137,7 @@
           <a:noFill/>
         </p:spPr>
         <p:txBody>
-          <a:bodyPr wrap="square" anchor="t" lIns="25400" rIns="25400" tIns="25400" bIns="25400">
+          <a:bodyPr wrap="square" lIns="25400" tIns="25400" rIns="25400" bIns="25400" anchor="t">
             <a:spAutoFit/>
           </a:bodyPr>
           <a:lstStyle/>
@@ -13071,6 +13230,7 @@
           <a:lstStyle/>
           <a:p>
             <a:pPr algn="ctr"/>
+            <a:endParaRPr/>
           </a:p>
         </p:txBody>
       </p:sp>
@@ -13091,7 +13251,7 @@
           <a:noFill/>
         </p:spPr>
         <p:txBody>
-          <a:bodyPr wrap="square" anchor="t" lIns="25400" rIns="25400" tIns="25400" bIns="25400">
+          <a:bodyPr wrap="square" lIns="25400" tIns="25400" rIns="25400" bIns="25400" anchor="t">
             <a:spAutoFit/>
           </a:bodyPr>
           <a:lstStyle/>
@@ -13145,7 +13305,7 @@
           <a:noFill/>
         </p:spPr>
         <p:txBody>
-          <a:bodyPr wrap="square" anchor="t" lIns="25400" rIns="25400" tIns="25400" bIns="25400">
+          <a:bodyPr wrap="square" lIns="25400" tIns="25400" rIns="25400" bIns="25400" anchor="t">
             <a:spAutoFit/>
           </a:bodyPr>
           <a:lstStyle/>
@@ -13238,6 +13398,7 @@
           <a:lstStyle/>
           <a:p>
             <a:pPr algn="ctr"/>
+            <a:endParaRPr/>
           </a:p>
         </p:txBody>
       </p:sp>
@@ -13258,7 +13419,7 @@
           <a:noFill/>
         </p:spPr>
         <p:txBody>
-          <a:bodyPr wrap="square" anchor="t" lIns="25400" rIns="25400" tIns="25400" bIns="25400">
+          <a:bodyPr wrap="square" lIns="25400" tIns="25400" rIns="25400" bIns="25400" anchor="t">
             <a:spAutoFit/>
           </a:bodyPr>
           <a:lstStyle/>
@@ -13312,7 +13473,7 @@
           <a:noFill/>
         </p:spPr>
         <p:txBody>
-          <a:bodyPr wrap="square" anchor="t" lIns="25400" rIns="25400" tIns="25400" bIns="25400">
+          <a:bodyPr wrap="square" lIns="25400" tIns="25400" rIns="25400" bIns="25400" anchor="t">
             <a:spAutoFit/>
           </a:bodyPr>
           <a:lstStyle/>
@@ -13405,6 +13566,7 @@
           <a:lstStyle/>
           <a:p>
             <a:pPr algn="ctr"/>
+            <a:endParaRPr/>
           </a:p>
         </p:txBody>
       </p:sp>
@@ -13425,7 +13587,7 @@
           <a:noFill/>
         </p:spPr>
         <p:txBody>
-          <a:bodyPr wrap="square" anchor="t" lIns="25400" rIns="25400" tIns="25400" bIns="25400">
+          <a:bodyPr wrap="square" lIns="25400" tIns="25400" rIns="25400" bIns="25400" anchor="t">
             <a:spAutoFit/>
           </a:bodyPr>
           <a:lstStyle/>
@@ -13479,7 +13641,7 @@
           <a:noFill/>
         </p:spPr>
         <p:txBody>
-          <a:bodyPr wrap="square" anchor="t" lIns="25400" rIns="25400" tIns="25400" bIns="25400">
+          <a:bodyPr wrap="square" lIns="25400" tIns="25400" rIns="25400" bIns="25400" anchor="t">
             <a:spAutoFit/>
           </a:bodyPr>
           <a:lstStyle/>
@@ -13538,7 +13700,7 @@
 </file>
 
 <file path=ppt/slides/slide4.xml><?xml version="1.0" encoding="utf-8"?>
-<p:sld xmlns:a="http://schemas.openxmlformats.org/drawingml/2006/main" xmlns:p="http://schemas.openxmlformats.org/presentationml/2006/main" xmlns:r="http://schemas.openxmlformats.org/officeDocument/2006/relationships">
+<p:sld xmlns:a="http://schemas.openxmlformats.org/drawingml/2006/main" xmlns:r="http://schemas.openxmlformats.org/officeDocument/2006/relationships" xmlns:p="http://schemas.openxmlformats.org/presentationml/2006/main">
   <p:cSld>
     <p:spTree>
       <p:nvGrpSpPr>
@@ -13546,7 +13708,14 @@
         <p:cNvGrpSpPr/>
         <p:nvPr/>
       </p:nvGrpSpPr>
-      <p:grpSpPr/>
+      <p:grpSpPr>
+        <a:xfrm>
+          <a:off x="0" y="0"/>
+          <a:ext cx="0" cy="0"/>
+          <a:chOff x="0" y="0"/>
+          <a:chExt cx="0" cy="0"/>
+        </a:xfrm>
+      </p:grpSpPr>
       <p:sp>
         <p:nvSpPr>
           <p:cNvPr id="2" name="Rectangle 1"/>
@@ -13588,6 +13757,7 @@
           <a:lstStyle/>
           <a:p>
             <a:pPr algn="ctr"/>
+            <a:endParaRPr/>
           </a:p>
         </p:txBody>
       </p:sp>
@@ -13632,6 +13802,7 @@
           <a:lstStyle/>
           <a:p>
             <a:pPr algn="ctr"/>
+            <a:endParaRPr/>
           </a:p>
         </p:txBody>
       </p:sp>
@@ -13652,7 +13823,7 @@
           <a:noFill/>
         </p:spPr>
         <p:txBody>
-          <a:bodyPr wrap="square" anchor="t" lIns="25400" rIns="25400" tIns="25400" bIns="25400">
+          <a:bodyPr wrap="square" lIns="25400" tIns="25400" rIns="25400" bIns="25400" anchor="t">
             <a:spAutoFit/>
           </a:bodyPr>
           <a:lstStyle/>
@@ -13697,7 +13868,7 @@
           <a:noFill/>
         </p:spPr>
         <p:txBody>
-          <a:bodyPr wrap="square" anchor="t" lIns="25400" rIns="25400" tIns="25400" bIns="25400">
+          <a:bodyPr wrap="square" lIns="25400" tIns="25400" rIns="25400" bIns="25400" anchor="t">
             <a:spAutoFit/>
           </a:bodyPr>
           <a:lstStyle/>
@@ -13766,6 +13937,7 @@
           <a:lstStyle/>
           <a:p>
             <a:pPr algn="ctr"/>
+            <a:endParaRPr/>
           </a:p>
         </p:txBody>
       </p:sp>
@@ -13812,6 +13984,7 @@
           <a:lstStyle/>
           <a:p>
             <a:pPr algn="ctr"/>
+            <a:endParaRPr/>
           </a:p>
         </p:txBody>
       </p:sp>
@@ -13856,6 +14029,7 @@
           <a:lstStyle/>
           <a:p>
             <a:pPr algn="ctr"/>
+            <a:endParaRPr/>
           </a:p>
         </p:txBody>
       </p:sp>
@@ -13876,7 +14050,7 @@
           <a:noFill/>
         </p:spPr>
         <p:txBody>
-          <a:bodyPr wrap="square" anchor="ctr" lIns="25400" rIns="25400" tIns="25400" bIns="25400">
+          <a:bodyPr wrap="square" lIns="25400" tIns="25400" rIns="25400" bIns="25400" anchor="ctr">
             <a:spAutoFit/>
           </a:bodyPr>
           <a:lstStyle/>
@@ -13921,7 +14095,7 @@
           <a:noFill/>
         </p:spPr>
         <p:txBody>
-          <a:bodyPr wrap="square" anchor="t" lIns="25400" rIns="25400" tIns="25400" bIns="25400">
+          <a:bodyPr wrap="square" lIns="25400" tIns="25400" rIns="25400" bIns="25400" anchor="t">
             <a:spAutoFit/>
           </a:bodyPr>
           <a:lstStyle/>
@@ -14032,7 +14206,7 @@
           <a:noFill/>
         </p:spPr>
         <p:txBody>
-          <a:bodyPr wrap="square" anchor="t" lIns="25400" rIns="25400" tIns="25400" bIns="25400">
+          <a:bodyPr wrap="square" lIns="25400" tIns="25400" rIns="25400" bIns="25400" anchor="t">
             <a:spAutoFit/>
           </a:bodyPr>
           <a:lstStyle/>
@@ -14103,6 +14277,7 @@
           <a:lstStyle/>
           <a:p>
             <a:pPr algn="ctr"/>
+            <a:endParaRPr/>
           </a:p>
         </p:txBody>
       </p:sp>
@@ -14147,6 +14322,7 @@
           <a:lstStyle/>
           <a:p>
             <a:pPr algn="ctr"/>
+            <a:endParaRPr/>
           </a:p>
         </p:txBody>
       </p:sp>
@@ -14167,7 +14343,7 @@
           <a:noFill/>
         </p:spPr>
         <p:txBody>
-          <a:bodyPr wrap="square" anchor="ctr" lIns="25400" rIns="25400" tIns="25400" bIns="25400">
+          <a:bodyPr wrap="square" lIns="25400" tIns="25400" rIns="25400" bIns="25400" anchor="ctr">
             <a:spAutoFit/>
           </a:bodyPr>
           <a:lstStyle/>
@@ -14212,7 +14388,7 @@
           <a:noFill/>
         </p:spPr>
         <p:txBody>
-          <a:bodyPr wrap="square" anchor="t" lIns="25400" rIns="25400" tIns="25400" bIns="25400">
+          <a:bodyPr wrap="square" lIns="25400" tIns="25400" rIns="25400" bIns="25400" anchor="t">
             <a:spAutoFit/>
           </a:bodyPr>
           <a:lstStyle/>
@@ -14323,7 +14499,7 @@
           <a:noFill/>
         </p:spPr>
         <p:txBody>
-          <a:bodyPr wrap="square" anchor="t" lIns="25400" rIns="25400" tIns="25400" bIns="25400">
+          <a:bodyPr wrap="square" lIns="25400" tIns="25400" rIns="25400" bIns="25400" anchor="t">
             <a:spAutoFit/>
           </a:bodyPr>
           <a:lstStyle/>
@@ -14394,6 +14570,7 @@
           <a:lstStyle/>
           <a:p>
             <a:pPr algn="ctr"/>
+            <a:endParaRPr/>
           </a:p>
         </p:txBody>
       </p:sp>
@@ -14438,6 +14615,7 @@
           <a:lstStyle/>
           <a:p>
             <a:pPr algn="ctr"/>
+            <a:endParaRPr/>
           </a:p>
         </p:txBody>
       </p:sp>
@@ -14458,7 +14636,7 @@
           <a:noFill/>
         </p:spPr>
         <p:txBody>
-          <a:bodyPr wrap="square" anchor="ctr" lIns="25400" rIns="25400" tIns="25400" bIns="25400">
+          <a:bodyPr wrap="square" lIns="25400" tIns="25400" rIns="25400" bIns="25400" anchor="ctr">
             <a:spAutoFit/>
           </a:bodyPr>
           <a:lstStyle/>
@@ -14503,7 +14681,7 @@
           <a:noFill/>
         </p:spPr>
         <p:txBody>
-          <a:bodyPr wrap="square" anchor="t" lIns="25400" rIns="25400" tIns="25400" bIns="25400">
+          <a:bodyPr wrap="square" lIns="25400" tIns="25400" rIns="25400" bIns="25400" anchor="t">
             <a:spAutoFit/>
           </a:bodyPr>
           <a:lstStyle/>
@@ -14638,6 +14816,7 @@
           <a:lstStyle/>
           <a:p>
             <a:pPr algn="ctr"/>
+            <a:endParaRPr/>
           </a:p>
         </p:txBody>
       </p:sp>
@@ -14658,7 +14837,7 @@
           <a:noFill/>
         </p:spPr>
         <p:txBody>
-          <a:bodyPr wrap="square" anchor="t" lIns="25400" rIns="25400" tIns="25400" bIns="25400">
+          <a:bodyPr wrap="square" lIns="25400" tIns="25400" rIns="25400" bIns="25400" anchor="t">
             <a:spAutoFit/>
           </a:bodyPr>
           <a:lstStyle/>
@@ -14703,7 +14882,7 @@
           <a:noFill/>
         </p:spPr>
         <p:txBody>
-          <a:bodyPr wrap="square" anchor="t" lIns="25400" rIns="25400" tIns="25400" bIns="25400">
+          <a:bodyPr wrap="square" lIns="25400" tIns="25400" rIns="25400" bIns="25400" anchor="t">
             <a:spAutoFit/>
           </a:bodyPr>
           <a:lstStyle/>
@@ -14767,7 +14946,7 @@
 </file>
 
 <file path=ppt/slides/slide5.xml><?xml version="1.0" encoding="utf-8"?>
-<p:sld xmlns:a="http://schemas.openxmlformats.org/drawingml/2006/main" xmlns:p="http://schemas.openxmlformats.org/presentationml/2006/main" xmlns:r="http://schemas.openxmlformats.org/officeDocument/2006/relationships">
+<p:sld xmlns:a="http://schemas.openxmlformats.org/drawingml/2006/main" xmlns:r="http://schemas.openxmlformats.org/officeDocument/2006/relationships" xmlns:p="http://schemas.openxmlformats.org/presentationml/2006/main">
   <p:cSld>
     <p:spTree>
       <p:nvGrpSpPr>
@@ -14775,7 +14954,14 @@
         <p:cNvGrpSpPr/>
         <p:nvPr/>
       </p:nvGrpSpPr>
-      <p:grpSpPr/>
+      <p:grpSpPr>
+        <a:xfrm>
+          <a:off x="0" y="0"/>
+          <a:ext cx="0" cy="0"/>
+          <a:chOff x="0" y="0"/>
+          <a:chExt cx="0" cy="0"/>
+        </a:xfrm>
+      </p:grpSpPr>
       <p:sp>
         <p:nvSpPr>
           <p:cNvPr id="2" name="Rectangle 1"/>
@@ -14817,6 +15003,7 @@
           <a:lstStyle/>
           <a:p>
             <a:pPr algn="ctr"/>
+            <a:endParaRPr/>
           </a:p>
         </p:txBody>
       </p:sp>
@@ -14861,6 +15048,7 @@
           <a:lstStyle/>
           <a:p>
             <a:pPr algn="ctr"/>
+            <a:endParaRPr/>
           </a:p>
         </p:txBody>
       </p:sp>
@@ -14881,7 +15069,7 @@
           <a:noFill/>
         </p:spPr>
         <p:txBody>
-          <a:bodyPr wrap="square" anchor="t" lIns="25400" rIns="25400" tIns="25400" bIns="25400">
+          <a:bodyPr wrap="square" lIns="25400" tIns="25400" rIns="25400" bIns="25400" anchor="t">
             <a:spAutoFit/>
           </a:bodyPr>
           <a:lstStyle/>
@@ -14926,7 +15114,7 @@
           <a:noFill/>
         </p:spPr>
         <p:txBody>
-          <a:bodyPr wrap="square" anchor="t" lIns="25400" rIns="25400" tIns="25400" bIns="25400">
+          <a:bodyPr wrap="square" lIns="25400" tIns="25400" rIns="25400" bIns="25400" anchor="t">
             <a:spAutoFit/>
           </a:bodyPr>
           <a:lstStyle/>
@@ -14995,6 +15183,7 @@
           <a:lstStyle/>
           <a:p>
             <a:pPr algn="ctr"/>
+            <a:endParaRPr/>
           </a:p>
         </p:txBody>
       </p:sp>
@@ -15015,7 +15204,7 @@
           <a:noFill/>
         </p:spPr>
         <p:txBody>
-          <a:bodyPr wrap="square" anchor="t" lIns="25400" rIns="25400" tIns="25400" bIns="25400">
+          <a:bodyPr wrap="square" lIns="25400" tIns="25400" rIns="25400" bIns="25400" anchor="t">
             <a:spAutoFit/>
           </a:bodyPr>
           <a:lstStyle/>
@@ -15118,7 +15307,7 @@
           <a:noFill/>
         </p:spPr>
         <p:txBody>
-          <a:bodyPr wrap="square" anchor="t" lIns="25400" rIns="25400" tIns="25400" bIns="25400">
+          <a:bodyPr wrap="square" lIns="25400" tIns="25400" rIns="25400" bIns="25400" anchor="t">
             <a:spAutoFit/>
           </a:bodyPr>
           <a:lstStyle/>
@@ -15163,7 +15352,7 @@
           <a:noFill/>
         </p:spPr>
         <p:txBody>
-          <a:bodyPr wrap="square" anchor="t" lIns="25400" rIns="25400" tIns="25400" bIns="25400">
+          <a:bodyPr wrap="square" lIns="25400" tIns="25400" rIns="25400" bIns="25400" anchor="t">
             <a:spAutoFit/>
           </a:bodyPr>
           <a:lstStyle/>
@@ -15200,7 +15389,7 @@
 </file>
 
 <file path=ppt/slides/slide6.xml><?xml version="1.0" encoding="utf-8"?>
-<p:sld xmlns:a="http://schemas.openxmlformats.org/drawingml/2006/main" xmlns:p="http://schemas.openxmlformats.org/presentationml/2006/main" xmlns:r="http://schemas.openxmlformats.org/officeDocument/2006/relationships">
+<p:sld xmlns:a="http://schemas.openxmlformats.org/drawingml/2006/main" xmlns:r="http://schemas.openxmlformats.org/officeDocument/2006/relationships" xmlns:p="http://schemas.openxmlformats.org/presentationml/2006/main">
   <p:cSld>
     <p:spTree>
       <p:nvGrpSpPr>
@@ -15208,7 +15397,14 @@
         <p:cNvGrpSpPr/>
         <p:nvPr/>
       </p:nvGrpSpPr>
-      <p:grpSpPr/>
+      <p:grpSpPr>
+        <a:xfrm>
+          <a:off x="0" y="0"/>
+          <a:ext cx="0" cy="0"/>
+          <a:chOff x="0" y="0"/>
+          <a:chExt cx="0" cy="0"/>
+        </a:xfrm>
+      </p:grpSpPr>
       <p:sp>
         <p:nvSpPr>
           <p:cNvPr id="2" name="Rectangle 1"/>
@@ -15250,6 +15446,7 @@
           <a:lstStyle/>
           <a:p>
             <a:pPr algn="ctr"/>
+            <a:endParaRPr/>
           </a:p>
         </p:txBody>
       </p:sp>
@@ -15294,6 +15491,7 @@
           <a:lstStyle/>
           <a:p>
             <a:pPr algn="ctr"/>
+            <a:endParaRPr/>
           </a:p>
         </p:txBody>
       </p:sp>
@@ -15314,7 +15512,7 @@
           <a:noFill/>
         </p:spPr>
         <p:txBody>
-          <a:bodyPr wrap="square" anchor="t" lIns="25400" rIns="25400" tIns="25400" bIns="25400">
+          <a:bodyPr wrap="square" lIns="25400" tIns="25400" rIns="25400" bIns="25400" anchor="t">
             <a:spAutoFit/>
           </a:bodyPr>
           <a:lstStyle/>
@@ -15359,7 +15557,7 @@
           <a:noFill/>
         </p:spPr>
         <p:txBody>
-          <a:bodyPr wrap="square" anchor="t" lIns="25400" rIns="25400" tIns="25400" bIns="25400">
+          <a:bodyPr wrap="square" lIns="25400" tIns="25400" rIns="25400" bIns="25400" anchor="t">
             <a:spAutoFit/>
           </a:bodyPr>
           <a:lstStyle/>
@@ -15428,6 +15626,7 @@
           <a:lstStyle/>
           <a:p>
             <a:pPr algn="ctr"/>
+            <a:endParaRPr/>
           </a:p>
         </p:txBody>
       </p:sp>
@@ -15474,6 +15673,7 @@
           <a:lstStyle/>
           <a:p>
             <a:pPr algn="ctr"/>
+            <a:endParaRPr/>
           </a:p>
         </p:txBody>
       </p:sp>
@@ -15518,6 +15718,7 @@
           <a:lstStyle/>
           <a:p>
             <a:pPr algn="ctr"/>
+            <a:endParaRPr/>
           </a:p>
         </p:txBody>
       </p:sp>
@@ -15538,7 +15739,7 @@
           <a:noFill/>
         </p:spPr>
         <p:txBody>
-          <a:bodyPr wrap="square" anchor="ctr" lIns="25400" rIns="25400" tIns="25400" bIns="25400">
+          <a:bodyPr wrap="square" lIns="25400" tIns="25400" rIns="25400" bIns="25400" anchor="ctr">
             <a:spAutoFit/>
           </a:bodyPr>
           <a:lstStyle/>
@@ -15583,7 +15784,7 @@
           <a:noFill/>
         </p:spPr>
         <p:txBody>
-          <a:bodyPr wrap="square" anchor="t" lIns="25400" rIns="25400" tIns="25400" bIns="25400">
+          <a:bodyPr wrap="square" lIns="25400" tIns="25400" rIns="25400" bIns="25400" anchor="t">
             <a:spAutoFit/>
           </a:bodyPr>
           <a:lstStyle/>
@@ -15628,7 +15829,7 @@
           <a:noFill/>
         </p:spPr>
         <p:txBody>
-          <a:bodyPr wrap="square" anchor="t" lIns="25400" rIns="25400" tIns="25400" bIns="25400">
+          <a:bodyPr wrap="square" lIns="25400" tIns="25400" rIns="25400" bIns="25400" anchor="t">
             <a:spAutoFit/>
           </a:bodyPr>
           <a:lstStyle/>
@@ -15719,6 +15920,7 @@
           <a:lstStyle/>
           <a:p>
             <a:pPr algn="ctr"/>
+            <a:endParaRPr/>
           </a:p>
         </p:txBody>
       </p:sp>
@@ -15739,7 +15941,7 @@
           <a:noFill/>
         </p:spPr>
         <p:txBody>
-          <a:bodyPr wrap="square" anchor="ctr" lIns="25400" rIns="25400" tIns="25400" bIns="25400">
+          <a:bodyPr wrap="square" lIns="25400" tIns="25400" rIns="25400" bIns="25400" anchor="ctr">
             <a:spAutoFit/>
           </a:bodyPr>
           <a:lstStyle/>
@@ -15784,7 +15986,7 @@
           <a:noFill/>
         </p:spPr>
         <p:txBody>
-          <a:bodyPr wrap="square" anchor="t" lIns="25400" rIns="25400" tIns="25400" bIns="25400">
+          <a:bodyPr wrap="square" lIns="25400" tIns="25400" rIns="25400" bIns="25400" anchor="t">
             <a:spAutoFit/>
           </a:bodyPr>
           <a:lstStyle/>
@@ -15855,6 +16057,7 @@
           <a:lstStyle/>
           <a:p>
             <a:pPr algn="ctr"/>
+            <a:endParaRPr/>
           </a:p>
         </p:txBody>
       </p:sp>
@@ -15899,6 +16102,7 @@
           <a:lstStyle/>
           <a:p>
             <a:pPr algn="ctr"/>
+            <a:endParaRPr/>
           </a:p>
         </p:txBody>
       </p:sp>
@@ -15919,7 +16123,7 @@
           <a:noFill/>
         </p:spPr>
         <p:txBody>
-          <a:bodyPr wrap="square" anchor="ctr" lIns="25400" rIns="25400" tIns="25400" bIns="25400">
+          <a:bodyPr wrap="square" lIns="25400" tIns="25400" rIns="25400" bIns="25400" anchor="ctr">
             <a:spAutoFit/>
           </a:bodyPr>
           <a:lstStyle/>
@@ -15964,7 +16168,7 @@
           <a:noFill/>
         </p:spPr>
         <p:txBody>
-          <a:bodyPr wrap="square" anchor="t" lIns="25400" rIns="25400" tIns="25400" bIns="25400">
+          <a:bodyPr wrap="square" lIns="25400" tIns="25400" rIns="25400" bIns="25400" anchor="t">
             <a:spAutoFit/>
           </a:bodyPr>
           <a:lstStyle/>
@@ -16009,7 +16213,7 @@
           <a:noFill/>
         </p:spPr>
         <p:txBody>
-          <a:bodyPr wrap="square" anchor="t" lIns="25400" rIns="25400" tIns="25400" bIns="25400">
+          <a:bodyPr wrap="square" lIns="25400" tIns="25400" rIns="25400" bIns="25400" anchor="t">
             <a:spAutoFit/>
           </a:bodyPr>
           <a:lstStyle/>
@@ -16100,6 +16304,7 @@
           <a:lstStyle/>
           <a:p>
             <a:pPr algn="ctr"/>
+            <a:endParaRPr/>
           </a:p>
         </p:txBody>
       </p:sp>
@@ -16120,7 +16325,7 @@
           <a:noFill/>
         </p:spPr>
         <p:txBody>
-          <a:bodyPr wrap="square" anchor="ctr" lIns="25400" rIns="25400" tIns="25400" bIns="25400">
+          <a:bodyPr wrap="square" lIns="25400" tIns="25400" rIns="25400" bIns="25400" anchor="ctr">
             <a:spAutoFit/>
           </a:bodyPr>
           <a:lstStyle/>
@@ -16165,7 +16370,7 @@
           <a:noFill/>
         </p:spPr>
         <p:txBody>
-          <a:bodyPr wrap="square" anchor="t" lIns="25400" rIns="25400" tIns="25400" bIns="25400">
+          <a:bodyPr wrap="square" lIns="25400" tIns="25400" rIns="25400" bIns="25400" anchor="t">
             <a:spAutoFit/>
           </a:bodyPr>
           <a:lstStyle/>
@@ -16236,6 +16441,7 @@
           <a:lstStyle/>
           <a:p>
             <a:pPr algn="ctr"/>
+            <a:endParaRPr/>
           </a:p>
         </p:txBody>
       </p:sp>
@@ -16280,6 +16486,7 @@
           <a:lstStyle/>
           <a:p>
             <a:pPr algn="ctr"/>
+            <a:endParaRPr/>
           </a:p>
         </p:txBody>
       </p:sp>
@@ -16300,7 +16507,7 @@
           <a:noFill/>
         </p:spPr>
         <p:txBody>
-          <a:bodyPr wrap="square" anchor="ctr" lIns="25400" rIns="25400" tIns="25400" bIns="25400">
+          <a:bodyPr wrap="square" lIns="25400" tIns="25400" rIns="25400" bIns="25400" anchor="ctr">
             <a:spAutoFit/>
           </a:bodyPr>
           <a:lstStyle/>
@@ -16345,7 +16552,7 @@
           <a:noFill/>
         </p:spPr>
         <p:txBody>
-          <a:bodyPr wrap="square" anchor="t" lIns="25400" rIns="25400" tIns="25400" bIns="25400">
+          <a:bodyPr wrap="square" lIns="25400" tIns="25400" rIns="25400" bIns="25400" anchor="t">
             <a:spAutoFit/>
           </a:bodyPr>
           <a:lstStyle/>
@@ -16390,7 +16597,7 @@
           <a:noFill/>
         </p:spPr>
         <p:txBody>
-          <a:bodyPr wrap="square" anchor="t" lIns="25400" rIns="25400" tIns="25400" bIns="25400">
+          <a:bodyPr wrap="square" lIns="25400" tIns="25400" rIns="25400" bIns="25400" anchor="t">
             <a:spAutoFit/>
           </a:bodyPr>
           <a:lstStyle/>
@@ -16481,6 +16688,7 @@
           <a:lstStyle/>
           <a:p>
             <a:pPr algn="ctr"/>
+            <a:endParaRPr/>
           </a:p>
         </p:txBody>
       </p:sp>
@@ -16501,7 +16709,7 @@
           <a:noFill/>
         </p:spPr>
         <p:txBody>
-          <a:bodyPr wrap="square" anchor="ctr" lIns="25400" rIns="25400" tIns="25400" bIns="25400">
+          <a:bodyPr wrap="square" lIns="25400" tIns="25400" rIns="25400" bIns="25400" anchor="ctr">
             <a:spAutoFit/>
           </a:bodyPr>
           <a:lstStyle/>
@@ -16546,7 +16754,7 @@
           <a:noFill/>
         </p:spPr>
         <p:txBody>
-          <a:bodyPr wrap="square" anchor="t" lIns="25400" rIns="25400" tIns="25400" bIns="25400">
+          <a:bodyPr wrap="square" lIns="25400" tIns="25400" rIns="25400" bIns="25400" anchor="t">
             <a:spAutoFit/>
           </a:bodyPr>
           <a:lstStyle/>
@@ -16617,6 +16825,7 @@
           <a:lstStyle/>
           <a:p>
             <a:pPr algn="ctr"/>
+            <a:endParaRPr/>
           </a:p>
         </p:txBody>
       </p:sp>
@@ -16661,6 +16870,7 @@
           <a:lstStyle/>
           <a:p>
             <a:pPr algn="ctr"/>
+            <a:endParaRPr/>
           </a:p>
         </p:txBody>
       </p:sp>
@@ -16681,7 +16891,7 @@
           <a:noFill/>
         </p:spPr>
         <p:txBody>
-          <a:bodyPr wrap="square" anchor="ctr" lIns="25400" rIns="25400" tIns="25400" bIns="25400">
+          <a:bodyPr wrap="square" lIns="25400" tIns="25400" rIns="25400" bIns="25400" anchor="ctr">
             <a:spAutoFit/>
           </a:bodyPr>
           <a:lstStyle/>
@@ -16726,7 +16936,7 @@
           <a:noFill/>
         </p:spPr>
         <p:txBody>
-          <a:bodyPr wrap="square" anchor="t" lIns="25400" rIns="25400" tIns="25400" bIns="25400">
+          <a:bodyPr wrap="square" lIns="25400" tIns="25400" rIns="25400" bIns="25400" anchor="t">
             <a:spAutoFit/>
           </a:bodyPr>
           <a:lstStyle/>
@@ -16771,7 +16981,7 @@
           <a:noFill/>
         </p:spPr>
         <p:txBody>
-          <a:bodyPr wrap="square" anchor="t" lIns="25400" rIns="25400" tIns="25400" bIns="25400">
+          <a:bodyPr wrap="square" lIns="25400" tIns="25400" rIns="25400" bIns="25400" anchor="t">
             <a:spAutoFit/>
           </a:bodyPr>
           <a:lstStyle/>
@@ -16862,6 +17072,7 @@
           <a:lstStyle/>
           <a:p>
             <a:pPr algn="ctr"/>
+            <a:endParaRPr/>
           </a:p>
         </p:txBody>
       </p:sp>
@@ -16882,7 +17093,7 @@
           <a:noFill/>
         </p:spPr>
         <p:txBody>
-          <a:bodyPr wrap="square" anchor="ctr" lIns="25400" rIns="25400" tIns="25400" bIns="25400">
+          <a:bodyPr wrap="square" lIns="25400" tIns="25400" rIns="25400" bIns="25400" anchor="ctr">
             <a:spAutoFit/>
           </a:bodyPr>
           <a:lstStyle/>
@@ -16927,7 +17138,7 @@
           <a:noFill/>
         </p:spPr>
         <p:txBody>
-          <a:bodyPr wrap="square" anchor="t" lIns="25400" rIns="25400" tIns="25400" bIns="25400">
+          <a:bodyPr wrap="square" lIns="25400" tIns="25400" rIns="25400" bIns="25400" anchor="t">
             <a:spAutoFit/>
           </a:bodyPr>
           <a:lstStyle/>
@@ -16998,6 +17209,7 @@
           <a:lstStyle/>
           <a:p>
             <a:pPr algn="ctr"/>
+            <a:endParaRPr/>
           </a:p>
         </p:txBody>
       </p:sp>
@@ -17042,6 +17254,7 @@
           <a:lstStyle/>
           <a:p>
             <a:pPr algn="ctr"/>
+            <a:endParaRPr/>
           </a:p>
         </p:txBody>
       </p:sp>
@@ -17062,7 +17275,7 @@
           <a:noFill/>
         </p:spPr>
         <p:txBody>
-          <a:bodyPr wrap="square" anchor="ctr" lIns="25400" rIns="25400" tIns="25400" bIns="25400">
+          <a:bodyPr wrap="square" lIns="25400" tIns="25400" rIns="25400" bIns="25400" anchor="ctr">
             <a:spAutoFit/>
           </a:bodyPr>
           <a:lstStyle/>
@@ -17107,7 +17320,7 @@
           <a:noFill/>
         </p:spPr>
         <p:txBody>
-          <a:bodyPr wrap="square" anchor="t" lIns="25400" rIns="25400" tIns="25400" bIns="25400">
+          <a:bodyPr wrap="square" lIns="25400" tIns="25400" rIns="25400" bIns="25400" anchor="t">
             <a:spAutoFit/>
           </a:bodyPr>
           <a:lstStyle/>
@@ -17152,7 +17365,7 @@
           <a:noFill/>
         </p:spPr>
         <p:txBody>
-          <a:bodyPr wrap="square" anchor="t" lIns="25400" rIns="25400" tIns="25400" bIns="25400">
+          <a:bodyPr wrap="square" lIns="25400" tIns="25400" rIns="25400" bIns="25400" anchor="t">
             <a:spAutoFit/>
           </a:bodyPr>
           <a:lstStyle/>
@@ -17243,6 +17456,7 @@
           <a:lstStyle/>
           <a:p>
             <a:pPr algn="ctr"/>
+            <a:endParaRPr/>
           </a:p>
         </p:txBody>
       </p:sp>
@@ -17263,7 +17477,7 @@
           <a:noFill/>
         </p:spPr>
         <p:txBody>
-          <a:bodyPr wrap="square" anchor="ctr" lIns="25400" rIns="25400" tIns="25400" bIns="25400">
+          <a:bodyPr wrap="square" lIns="25400" tIns="25400" rIns="25400" bIns="25400" anchor="ctr">
             <a:spAutoFit/>
           </a:bodyPr>
           <a:lstStyle/>
@@ -17332,6 +17546,7 @@
           <a:lstStyle/>
           <a:p>
             <a:pPr algn="ctr"/>
+            <a:endParaRPr/>
           </a:p>
         </p:txBody>
       </p:sp>
@@ -17352,7 +17567,7 @@
           <a:noFill/>
         </p:spPr>
         <p:txBody>
-          <a:bodyPr wrap="square" anchor="t" lIns="25400" rIns="25400" tIns="25400" bIns="25400">
+          <a:bodyPr wrap="square" lIns="25400" tIns="25400" rIns="25400" bIns="25400" anchor="t">
             <a:spAutoFit/>
           </a:bodyPr>
           <a:lstStyle/>
@@ -17420,7 +17635,7 @@
 </file>
 
 <file path=ppt/slides/slide7.xml><?xml version="1.0" encoding="utf-8"?>
-<p:sld xmlns:a="http://schemas.openxmlformats.org/drawingml/2006/main" xmlns:p="http://schemas.openxmlformats.org/presentationml/2006/main" xmlns:r="http://schemas.openxmlformats.org/officeDocument/2006/relationships">
+<p:sld xmlns:a="http://schemas.openxmlformats.org/drawingml/2006/main" xmlns:r="http://schemas.openxmlformats.org/officeDocument/2006/relationships" xmlns:p="http://schemas.openxmlformats.org/presentationml/2006/main">
   <p:cSld>
     <p:spTree>
       <p:nvGrpSpPr>
@@ -17428,7 +17643,14 @@
         <p:cNvGrpSpPr/>
         <p:nvPr/>
       </p:nvGrpSpPr>
-      <p:grpSpPr/>
+      <p:grpSpPr>
+        <a:xfrm>
+          <a:off x="0" y="0"/>
+          <a:ext cx="0" cy="0"/>
+          <a:chOff x="0" y="0"/>
+          <a:chExt cx="0" cy="0"/>
+        </a:xfrm>
+      </p:grpSpPr>
       <p:sp>
         <p:nvSpPr>
           <p:cNvPr id="2" name="Rectangle 1"/>
@@ -17470,6 +17692,7 @@
           <a:lstStyle/>
           <a:p>
             <a:pPr algn="ctr"/>
+            <a:endParaRPr/>
           </a:p>
         </p:txBody>
       </p:sp>
@@ -17514,6 +17737,7 @@
           <a:lstStyle/>
           <a:p>
             <a:pPr algn="ctr"/>
+            <a:endParaRPr/>
           </a:p>
         </p:txBody>
       </p:sp>
@@ -17534,7 +17758,7 @@
           <a:noFill/>
         </p:spPr>
         <p:txBody>
-          <a:bodyPr wrap="square" anchor="t" lIns="25400" rIns="25400" tIns="25400" bIns="25400">
+          <a:bodyPr wrap="square" lIns="25400" tIns="25400" rIns="25400" bIns="25400" anchor="t">
             <a:spAutoFit/>
           </a:bodyPr>
           <a:lstStyle/>
@@ -17579,7 +17803,7 @@
           <a:noFill/>
         </p:spPr>
         <p:txBody>
-          <a:bodyPr wrap="square" anchor="t" lIns="25400" rIns="25400" tIns="25400" bIns="25400">
+          <a:bodyPr wrap="square" lIns="25400" tIns="25400" rIns="25400" bIns="25400" anchor="t">
             <a:spAutoFit/>
           </a:bodyPr>
           <a:lstStyle/>
@@ -17648,6 +17872,7 @@
           <a:lstStyle/>
           <a:p>
             <a:pPr algn="ctr"/>
+            <a:endParaRPr/>
           </a:p>
         </p:txBody>
       </p:sp>
@@ -17692,6 +17917,7 @@
           <a:lstStyle/>
           <a:p>
             <a:pPr algn="ctr"/>
+            <a:endParaRPr/>
           </a:p>
         </p:txBody>
       </p:sp>
@@ -17712,7 +17938,7 @@
           <a:noFill/>
         </p:spPr>
         <p:txBody>
-          <a:bodyPr wrap="square" anchor="t" lIns="25400" rIns="25400" tIns="25400" bIns="25400">
+          <a:bodyPr wrap="square" lIns="25400" tIns="25400" rIns="25400" bIns="25400" anchor="t">
             <a:spAutoFit/>
           </a:bodyPr>
           <a:lstStyle/>
@@ -17757,7 +17983,7 @@
           <a:noFill/>
         </p:spPr>
         <p:txBody>
-          <a:bodyPr wrap="square" anchor="t" lIns="25400" rIns="25400" tIns="25400" bIns="25400">
+          <a:bodyPr wrap="square" lIns="25400" tIns="25400" rIns="25400" bIns="25400" anchor="t">
             <a:spAutoFit/>
           </a:bodyPr>
           <a:lstStyle/>
@@ -17802,7 +18028,7 @@
           <a:noFill/>
         </p:spPr>
         <p:txBody>
-          <a:bodyPr wrap="square" anchor="t" lIns="25400" rIns="25400" tIns="25400" bIns="25400">
+          <a:bodyPr wrap="square" lIns="25400" tIns="25400" rIns="25400" bIns="25400" anchor="t">
             <a:spAutoFit/>
           </a:bodyPr>
           <a:lstStyle/>
@@ -17847,7 +18073,7 @@
           <a:noFill/>
         </p:spPr>
         <p:txBody>
-          <a:bodyPr wrap="square" anchor="t" lIns="25400" rIns="25400" tIns="25400" bIns="25400">
+          <a:bodyPr wrap="square" lIns="25400" tIns="25400" rIns="25400" bIns="25400" anchor="t">
             <a:spAutoFit/>
           </a:bodyPr>
           <a:lstStyle/>
@@ -17892,7 +18118,7 @@
           <a:noFill/>
         </p:spPr>
         <p:txBody>
-          <a:bodyPr wrap="square" anchor="t" lIns="25400" rIns="25400" tIns="25400" bIns="25400">
+          <a:bodyPr wrap="square" lIns="25400" tIns="25400" rIns="25400" bIns="25400" anchor="t">
             <a:spAutoFit/>
           </a:bodyPr>
           <a:lstStyle/>
@@ -17937,7 +18163,7 @@
           <a:noFill/>
         </p:spPr>
         <p:txBody>
-          <a:bodyPr wrap="square" anchor="t" lIns="25400" rIns="25400" tIns="25400" bIns="25400">
+          <a:bodyPr wrap="square" lIns="25400" tIns="25400" rIns="25400" bIns="25400" anchor="t">
             <a:spAutoFit/>
           </a:bodyPr>
           <a:lstStyle/>
@@ -17982,7 +18208,7 @@
           <a:noFill/>
         </p:spPr>
         <p:txBody>
-          <a:bodyPr wrap="square" anchor="t" lIns="25400" rIns="25400" tIns="25400" bIns="25400">
+          <a:bodyPr wrap="square" lIns="25400" tIns="25400" rIns="25400" bIns="25400" anchor="t">
             <a:spAutoFit/>
           </a:bodyPr>
           <a:lstStyle/>
@@ -18027,7 +18253,7 @@
           <a:noFill/>
         </p:spPr>
         <p:txBody>
-          <a:bodyPr wrap="square" anchor="t" lIns="25400" rIns="25400" tIns="25400" bIns="25400">
+          <a:bodyPr wrap="square" lIns="25400" tIns="25400" rIns="25400" bIns="25400" anchor="t">
             <a:spAutoFit/>
           </a:bodyPr>
           <a:lstStyle/>
@@ -18072,7 +18298,7 @@
           <a:noFill/>
         </p:spPr>
         <p:txBody>
-          <a:bodyPr wrap="square" anchor="t" lIns="25400" rIns="25400" tIns="25400" bIns="25400">
+          <a:bodyPr wrap="square" lIns="25400" tIns="25400" rIns="25400" bIns="25400" anchor="t">
             <a:spAutoFit/>
           </a:bodyPr>
           <a:lstStyle/>
@@ -18117,7 +18343,7 @@
           <a:noFill/>
         </p:spPr>
         <p:txBody>
-          <a:bodyPr wrap="square" anchor="t" lIns="25400" rIns="25400" tIns="25400" bIns="25400">
+          <a:bodyPr wrap="square" lIns="25400" tIns="25400" rIns="25400" bIns="25400" anchor="t">
             <a:spAutoFit/>
           </a:bodyPr>
           <a:lstStyle/>
@@ -18162,7 +18388,7 @@
           <a:noFill/>
         </p:spPr>
         <p:txBody>
-          <a:bodyPr wrap="square" anchor="t" lIns="25400" rIns="25400" tIns="25400" bIns="25400">
+          <a:bodyPr wrap="square" lIns="25400" tIns="25400" rIns="25400" bIns="25400" anchor="t">
             <a:spAutoFit/>
           </a:bodyPr>
           <a:lstStyle/>
@@ -18207,7 +18433,7 @@
           <a:noFill/>
         </p:spPr>
         <p:txBody>
-          <a:bodyPr wrap="square" anchor="t" lIns="25400" rIns="25400" tIns="25400" bIns="25400">
+          <a:bodyPr wrap="square" lIns="25400" tIns="25400" rIns="25400" bIns="25400" anchor="t">
             <a:spAutoFit/>
           </a:bodyPr>
           <a:lstStyle/>
@@ -18252,7 +18478,7 @@
           <a:noFill/>
         </p:spPr>
         <p:txBody>
-          <a:bodyPr wrap="square" anchor="t" lIns="25400" rIns="25400" tIns="25400" bIns="25400">
+          <a:bodyPr wrap="square" lIns="25400" tIns="25400" rIns="25400" bIns="25400" anchor="t">
             <a:spAutoFit/>
           </a:bodyPr>
           <a:lstStyle/>
@@ -18321,6 +18547,7 @@
           <a:lstStyle/>
           <a:p>
             <a:pPr algn="ctr"/>
+            <a:endParaRPr/>
           </a:p>
         </p:txBody>
       </p:sp>
@@ -18341,7 +18568,7 @@
           <a:noFill/>
         </p:spPr>
         <p:txBody>
-          <a:bodyPr wrap="square" anchor="t" lIns="25400" rIns="25400" tIns="25400" bIns="25400">
+          <a:bodyPr wrap="square" lIns="25400" tIns="25400" rIns="25400" bIns="25400" anchor="t">
             <a:spAutoFit/>
           </a:bodyPr>
           <a:lstStyle/>
@@ -18419,6 +18646,7 @@
           <a:lstStyle/>
           <a:p>
             <a:pPr algn="ctr"/>
+            <a:endParaRPr/>
           </a:p>
         </p:txBody>
       </p:sp>
@@ -18439,7 +18667,7 @@
           <a:noFill/>
         </p:spPr>
         <p:txBody>
-          <a:bodyPr wrap="square" anchor="t" lIns="25400" rIns="25400" tIns="25400" bIns="25400">
+          <a:bodyPr wrap="square" lIns="25400" tIns="25400" rIns="25400" bIns="25400" anchor="t">
             <a:spAutoFit/>
           </a:bodyPr>
           <a:lstStyle/>
@@ -18484,7 +18712,7 @@
           <a:noFill/>
         </p:spPr>
         <p:txBody>
-          <a:bodyPr wrap="square" anchor="t" lIns="25400" rIns="25400" tIns="25400" bIns="25400">
+          <a:bodyPr wrap="square" lIns="25400" tIns="25400" rIns="25400" bIns="25400" anchor="t">
             <a:spAutoFit/>
           </a:bodyPr>
           <a:lstStyle/>
@@ -18553,6 +18781,7 @@
           <a:lstStyle/>
           <a:p>
             <a:pPr algn="ctr"/>
+            <a:endParaRPr/>
           </a:p>
         </p:txBody>
       </p:sp>
@@ -18573,7 +18802,7 @@
           <a:noFill/>
         </p:spPr>
         <p:txBody>
-          <a:bodyPr wrap="square" anchor="t" lIns="25400" rIns="25400" tIns="25400" bIns="25400">
+          <a:bodyPr wrap="square" lIns="25400" tIns="25400" rIns="25400" bIns="25400" anchor="t">
             <a:spAutoFit/>
           </a:bodyPr>
           <a:lstStyle/>
@@ -18618,7 +18847,7 @@
           <a:noFill/>
         </p:spPr>
         <p:txBody>
-          <a:bodyPr wrap="square" anchor="t" lIns="25400" rIns="25400" tIns="25400" bIns="25400">
+          <a:bodyPr wrap="square" lIns="25400" tIns="25400" rIns="25400" bIns="25400" anchor="t">
             <a:spAutoFit/>
           </a:bodyPr>
           <a:lstStyle/>
@@ -18687,6 +18916,7 @@
           <a:lstStyle/>
           <a:p>
             <a:pPr algn="ctr"/>
+            <a:endParaRPr/>
           </a:p>
         </p:txBody>
       </p:sp>
@@ -18707,7 +18937,7 @@
           <a:noFill/>
         </p:spPr>
         <p:txBody>
-          <a:bodyPr wrap="square" anchor="t" lIns="25400" rIns="25400" tIns="25400" bIns="25400">
+          <a:bodyPr wrap="square" lIns="25400" tIns="25400" rIns="25400" bIns="25400" anchor="t">
             <a:spAutoFit/>
           </a:bodyPr>
           <a:lstStyle/>
@@ -18752,7 +18982,7 @@
           <a:noFill/>
         </p:spPr>
         <p:txBody>
-          <a:bodyPr wrap="square" anchor="t" lIns="25400" rIns="25400" tIns="25400" bIns="25400">
+          <a:bodyPr wrap="square" lIns="25400" tIns="25400" rIns="25400" bIns="25400" anchor="t">
             <a:spAutoFit/>
           </a:bodyPr>
           <a:lstStyle/>
@@ -18821,6 +19051,7 @@
           <a:lstStyle/>
           <a:p>
             <a:pPr algn="ctr"/>
+            <a:endParaRPr/>
           </a:p>
         </p:txBody>
       </p:sp>
@@ -18841,7 +19072,7 @@
           <a:noFill/>
         </p:spPr>
         <p:txBody>
-          <a:bodyPr wrap="square" anchor="t" lIns="25400" rIns="25400" tIns="25400" bIns="25400">
+          <a:bodyPr wrap="square" lIns="25400" tIns="25400" rIns="25400" bIns="25400" anchor="t">
             <a:spAutoFit/>
           </a:bodyPr>
           <a:lstStyle/>
@@ -18886,7 +19117,7 @@
           <a:noFill/>
         </p:spPr>
         <p:txBody>
-          <a:bodyPr wrap="square" anchor="t" lIns="25400" rIns="25400" tIns="25400" bIns="25400">
+          <a:bodyPr wrap="square" lIns="25400" tIns="25400" rIns="25400" bIns="25400" anchor="t">
             <a:spAutoFit/>
           </a:bodyPr>
           <a:lstStyle/>
@@ -18955,6 +19186,7 @@
           <a:lstStyle/>
           <a:p>
             <a:pPr algn="ctr"/>
+            <a:endParaRPr/>
           </a:p>
         </p:txBody>
       </p:sp>
@@ -18975,7 +19207,7 @@
           <a:noFill/>
         </p:spPr>
         <p:txBody>
-          <a:bodyPr wrap="square" anchor="t" lIns="25400" rIns="25400" tIns="25400" bIns="25400">
+          <a:bodyPr wrap="square" lIns="25400" tIns="25400" rIns="25400" bIns="25400" anchor="t">
             <a:spAutoFit/>
           </a:bodyPr>
           <a:lstStyle/>
@@ -19020,7 +19252,7 @@
           <a:noFill/>
         </p:spPr>
         <p:txBody>
-          <a:bodyPr wrap="square" anchor="t" lIns="25400" rIns="25400" tIns="25400" bIns="25400">
+          <a:bodyPr wrap="square" lIns="25400" tIns="25400" rIns="25400" bIns="25400" anchor="t">
             <a:spAutoFit/>
           </a:bodyPr>
           <a:lstStyle/>
@@ -19089,6 +19321,7 @@
           <a:lstStyle/>
           <a:p>
             <a:pPr algn="ctr"/>
+            <a:endParaRPr/>
           </a:p>
         </p:txBody>
       </p:sp>
@@ -19109,7 +19342,7 @@
           <a:noFill/>
         </p:spPr>
         <p:txBody>
-          <a:bodyPr wrap="square" anchor="t" lIns="25400" rIns="25400" tIns="25400" bIns="25400">
+          <a:bodyPr wrap="square" lIns="25400" tIns="25400" rIns="25400" bIns="25400" anchor="t">
             <a:spAutoFit/>
           </a:bodyPr>
           <a:lstStyle/>
@@ -19178,6 +19411,7 @@
           <a:lstStyle/>
           <a:p>
             <a:pPr algn="ctr"/>
+            <a:endParaRPr/>
           </a:p>
         </p:txBody>
       </p:sp>
@@ -19198,7 +19432,7 @@
           <a:noFill/>
         </p:spPr>
         <p:txBody>
-          <a:bodyPr wrap="square" anchor="ctr" lIns="25400" rIns="25400" tIns="25400" bIns="25400">
+          <a:bodyPr wrap="square" lIns="25400" tIns="25400" rIns="25400" bIns="25400" anchor="ctr">
             <a:spAutoFit/>
           </a:bodyPr>
           <a:lstStyle/>
@@ -19243,7 +19477,7 @@
           <a:noFill/>
         </p:spPr>
         <p:txBody>
-          <a:bodyPr wrap="square" anchor="ctr" lIns="25400" rIns="25400" tIns="25400" bIns="25400">
+          <a:bodyPr wrap="square" lIns="25400" tIns="25400" rIns="25400" bIns="25400" anchor="ctr">
             <a:spAutoFit/>
           </a:bodyPr>
           <a:lstStyle/>
@@ -19288,7 +19522,7 @@
           <a:noFill/>
         </p:spPr>
         <p:txBody>
-          <a:bodyPr wrap="square" anchor="ctr" lIns="25400" rIns="25400" tIns="25400" bIns="25400">
+          <a:bodyPr wrap="square" lIns="25400" tIns="25400" rIns="25400" bIns="25400" anchor="ctr">
             <a:spAutoFit/>
           </a:bodyPr>
           <a:lstStyle/>
@@ -19333,7 +19567,7 @@
           <a:noFill/>
         </p:spPr>
         <p:txBody>
-          <a:bodyPr wrap="square" anchor="ctr" lIns="25400" rIns="25400" tIns="25400" bIns="25400">
+          <a:bodyPr wrap="square" lIns="25400" tIns="25400" rIns="25400" bIns="25400" anchor="ctr">
             <a:spAutoFit/>
           </a:bodyPr>
           <a:lstStyle/>
@@ -19378,7 +19612,7 @@
           <a:noFill/>
         </p:spPr>
         <p:txBody>
-          <a:bodyPr wrap="square" anchor="ctr" lIns="25400" rIns="25400" tIns="25400" bIns="25400">
+          <a:bodyPr wrap="square" lIns="25400" tIns="25400" rIns="25400" bIns="25400" anchor="ctr">
             <a:spAutoFit/>
           </a:bodyPr>
           <a:lstStyle/>
@@ -19423,7 +19657,7 @@
           <a:noFill/>
         </p:spPr>
         <p:txBody>
-          <a:bodyPr wrap="square" anchor="ctr" lIns="25400" rIns="25400" tIns="25400" bIns="25400">
+          <a:bodyPr wrap="square" lIns="25400" tIns="25400" rIns="25400" bIns="25400" anchor="ctr">
             <a:spAutoFit/>
           </a:bodyPr>
           <a:lstStyle/>
@@ -19468,7 +19702,7 @@
           <a:noFill/>
         </p:spPr>
         <p:txBody>
-          <a:bodyPr wrap="square" anchor="ctr" lIns="25400" rIns="25400" tIns="25400" bIns="25400">
+          <a:bodyPr wrap="square" lIns="25400" tIns="25400" rIns="25400" bIns="25400" anchor="ctr">
             <a:spAutoFit/>
           </a:bodyPr>
           <a:lstStyle/>
@@ -19513,7 +19747,7 @@
           <a:noFill/>
         </p:spPr>
         <p:txBody>
-          <a:bodyPr wrap="square" anchor="ctr" lIns="25400" rIns="25400" tIns="25400" bIns="25400">
+          <a:bodyPr wrap="square" lIns="25400" tIns="25400" rIns="25400" bIns="25400" anchor="ctr">
             <a:spAutoFit/>
           </a:bodyPr>
           <a:lstStyle/>
@@ -19558,7 +19792,7 @@
           <a:noFill/>
         </p:spPr>
         <p:txBody>
-          <a:bodyPr wrap="square" anchor="ctr" lIns="25400" rIns="25400" tIns="25400" bIns="25400">
+          <a:bodyPr wrap="square" lIns="25400" tIns="25400" rIns="25400" bIns="25400" anchor="ctr">
             <a:spAutoFit/>
           </a:bodyPr>
           <a:lstStyle/>
@@ -19603,7 +19837,7 @@
           <a:noFill/>
         </p:spPr>
         <p:txBody>
-          <a:bodyPr wrap="square" anchor="ctr" lIns="25400" rIns="25400" tIns="25400" bIns="25400">
+          <a:bodyPr wrap="square" lIns="25400" tIns="25400" rIns="25400" bIns="25400" anchor="ctr">
             <a:spAutoFit/>
           </a:bodyPr>
           <a:lstStyle/>
@@ -19672,6 +19906,7 @@
           <a:lstStyle/>
           <a:p>
             <a:pPr algn="ctr"/>
+            <a:endParaRPr/>
           </a:p>
         </p:txBody>
       </p:sp>
@@ -19692,7 +19927,7 @@
           <a:noFill/>
         </p:spPr>
         <p:txBody>
-          <a:bodyPr wrap="square" anchor="ctr" lIns="25400" rIns="25400" tIns="25400" bIns="25400">
+          <a:bodyPr wrap="square" lIns="25400" tIns="25400" rIns="25400" bIns="25400" anchor="ctr">
             <a:spAutoFit/>
           </a:bodyPr>
           <a:lstStyle/>
@@ -19737,7 +19972,7 @@
           <a:noFill/>
         </p:spPr>
         <p:txBody>
-          <a:bodyPr wrap="square" anchor="ctr" lIns="25400" rIns="25400" tIns="25400" bIns="25400">
+          <a:bodyPr wrap="square" lIns="25400" tIns="25400" rIns="25400" bIns="25400" anchor="ctr">
             <a:spAutoFit/>
           </a:bodyPr>
           <a:lstStyle/>
@@ -19782,7 +20017,7 @@
           <a:noFill/>
         </p:spPr>
         <p:txBody>
-          <a:bodyPr wrap="square" anchor="ctr" lIns="25400" rIns="25400" tIns="25400" bIns="25400">
+          <a:bodyPr wrap="square" lIns="25400" tIns="25400" rIns="25400" bIns="25400" anchor="ctr">
             <a:spAutoFit/>
           </a:bodyPr>
           <a:lstStyle/>
@@ -19827,7 +20062,7 @@
           <a:noFill/>
         </p:spPr>
         <p:txBody>
-          <a:bodyPr wrap="square" anchor="ctr" lIns="25400" rIns="25400" tIns="25400" bIns="25400">
+          <a:bodyPr wrap="square" lIns="25400" tIns="25400" rIns="25400" bIns="25400" anchor="ctr">
             <a:spAutoFit/>
           </a:bodyPr>
           <a:lstStyle/>
@@ -19872,7 +20107,7 @@
           <a:noFill/>
         </p:spPr>
         <p:txBody>
-          <a:bodyPr wrap="square" anchor="ctr" lIns="25400" rIns="25400" tIns="25400" bIns="25400">
+          <a:bodyPr wrap="square" lIns="25400" tIns="25400" rIns="25400" bIns="25400" anchor="ctr">
             <a:spAutoFit/>
           </a:bodyPr>
           <a:lstStyle/>
@@ -19917,7 +20152,7 @@
           <a:noFill/>
         </p:spPr>
         <p:txBody>
-          <a:bodyPr wrap="square" anchor="ctr" lIns="25400" rIns="25400" tIns="25400" bIns="25400">
+          <a:bodyPr wrap="square" lIns="25400" tIns="25400" rIns="25400" bIns="25400" anchor="ctr">
             <a:spAutoFit/>
           </a:bodyPr>
           <a:lstStyle/>
@@ -19962,7 +20197,7 @@
           <a:noFill/>
         </p:spPr>
         <p:txBody>
-          <a:bodyPr wrap="square" anchor="ctr" lIns="25400" rIns="25400" tIns="25400" bIns="25400">
+          <a:bodyPr wrap="square" lIns="25400" tIns="25400" rIns="25400" bIns="25400" anchor="ctr">
             <a:spAutoFit/>
           </a:bodyPr>
           <a:lstStyle/>
@@ -20007,7 +20242,7 @@
           <a:noFill/>
         </p:spPr>
         <p:txBody>
-          <a:bodyPr wrap="square" anchor="ctr" lIns="25400" rIns="25400" tIns="25400" bIns="25400">
+          <a:bodyPr wrap="square" lIns="25400" tIns="25400" rIns="25400" bIns="25400" anchor="ctr">
             <a:spAutoFit/>
           </a:bodyPr>
           <a:lstStyle/>
@@ -20052,7 +20287,7 @@
           <a:noFill/>
         </p:spPr>
         <p:txBody>
-          <a:bodyPr wrap="square" anchor="ctr" lIns="25400" rIns="25400" tIns="25400" bIns="25400">
+          <a:bodyPr wrap="square" lIns="25400" tIns="25400" rIns="25400" bIns="25400" anchor="ctr">
             <a:spAutoFit/>
           </a:bodyPr>
           <a:lstStyle/>
@@ -20097,7 +20332,7 @@
           <a:noFill/>
         </p:spPr>
         <p:txBody>
-          <a:bodyPr wrap="square" anchor="ctr" lIns="25400" rIns="25400" tIns="25400" bIns="25400">
+          <a:bodyPr wrap="square" lIns="25400" tIns="25400" rIns="25400" bIns="25400" anchor="ctr">
             <a:spAutoFit/>
           </a:bodyPr>
           <a:lstStyle/>
@@ -20166,6 +20401,7 @@
           <a:lstStyle/>
           <a:p>
             <a:pPr algn="ctr"/>
+            <a:endParaRPr/>
           </a:p>
         </p:txBody>
       </p:sp>
@@ -20186,7 +20422,7 @@
           <a:noFill/>
         </p:spPr>
         <p:txBody>
-          <a:bodyPr wrap="square" anchor="ctr" lIns="25400" rIns="25400" tIns="25400" bIns="25400">
+          <a:bodyPr wrap="square" lIns="25400" tIns="25400" rIns="25400" bIns="25400" anchor="ctr">
             <a:spAutoFit/>
           </a:bodyPr>
           <a:lstStyle/>
@@ -20231,7 +20467,7 @@
           <a:noFill/>
         </p:spPr>
         <p:txBody>
-          <a:bodyPr wrap="square" anchor="ctr" lIns="25400" rIns="25400" tIns="25400" bIns="25400">
+          <a:bodyPr wrap="square" lIns="25400" tIns="25400" rIns="25400" bIns="25400" anchor="ctr">
             <a:spAutoFit/>
           </a:bodyPr>
           <a:lstStyle/>
@@ -20276,7 +20512,7 @@
           <a:noFill/>
         </p:spPr>
         <p:txBody>
-          <a:bodyPr wrap="square" anchor="ctr" lIns="25400" rIns="25400" tIns="25400" bIns="25400">
+          <a:bodyPr wrap="square" lIns="25400" tIns="25400" rIns="25400" bIns="25400" anchor="ctr">
             <a:spAutoFit/>
           </a:bodyPr>
           <a:lstStyle/>
@@ -20321,7 +20557,7 @@
           <a:noFill/>
         </p:spPr>
         <p:txBody>
-          <a:bodyPr wrap="square" anchor="ctr" lIns="25400" rIns="25400" tIns="25400" bIns="25400">
+          <a:bodyPr wrap="square" lIns="25400" tIns="25400" rIns="25400" bIns="25400" anchor="ctr">
             <a:spAutoFit/>
           </a:bodyPr>
           <a:lstStyle/>
@@ -20366,7 +20602,7 @@
           <a:noFill/>
         </p:spPr>
         <p:txBody>
-          <a:bodyPr wrap="square" anchor="ctr" lIns="25400" rIns="25400" tIns="25400" bIns="25400">
+          <a:bodyPr wrap="square" lIns="25400" tIns="25400" rIns="25400" bIns="25400" anchor="ctr">
             <a:spAutoFit/>
           </a:bodyPr>
           <a:lstStyle/>
@@ -20411,7 +20647,7 @@
           <a:noFill/>
         </p:spPr>
         <p:txBody>
-          <a:bodyPr wrap="square" anchor="ctr" lIns="25400" rIns="25400" tIns="25400" bIns="25400">
+          <a:bodyPr wrap="square" lIns="25400" tIns="25400" rIns="25400" bIns="25400" anchor="ctr">
             <a:spAutoFit/>
           </a:bodyPr>
           <a:lstStyle/>
@@ -20456,7 +20692,7 @@
           <a:noFill/>
         </p:spPr>
         <p:txBody>
-          <a:bodyPr wrap="square" anchor="ctr" lIns="25400" rIns="25400" tIns="25400" bIns="25400">
+          <a:bodyPr wrap="square" lIns="25400" tIns="25400" rIns="25400" bIns="25400" anchor="ctr">
             <a:spAutoFit/>
           </a:bodyPr>
           <a:lstStyle/>
@@ -20501,7 +20737,7 @@
           <a:noFill/>
         </p:spPr>
         <p:txBody>
-          <a:bodyPr wrap="square" anchor="ctr" lIns="25400" rIns="25400" tIns="25400" bIns="25400">
+          <a:bodyPr wrap="square" lIns="25400" tIns="25400" rIns="25400" bIns="25400" anchor="ctr">
             <a:spAutoFit/>
           </a:bodyPr>
           <a:lstStyle/>
@@ -20546,7 +20782,7 @@
           <a:noFill/>
         </p:spPr>
         <p:txBody>
-          <a:bodyPr wrap="square" anchor="ctr" lIns="25400" rIns="25400" tIns="25400" bIns="25400">
+          <a:bodyPr wrap="square" lIns="25400" tIns="25400" rIns="25400" bIns="25400" anchor="ctr">
             <a:spAutoFit/>
           </a:bodyPr>
           <a:lstStyle/>
@@ -20591,7 +20827,7 @@
           <a:noFill/>
         </p:spPr>
         <p:txBody>
-          <a:bodyPr wrap="square" anchor="ctr" lIns="25400" rIns="25400" tIns="25400" bIns="25400">
+          <a:bodyPr wrap="square" lIns="25400" tIns="25400" rIns="25400" bIns="25400" anchor="ctr">
             <a:spAutoFit/>
           </a:bodyPr>
           <a:lstStyle/>
@@ -20636,7 +20872,7 @@
           <a:noFill/>
         </p:spPr>
         <p:txBody>
-          <a:bodyPr wrap="square" anchor="t" lIns="25400" rIns="25400" tIns="25400" bIns="25400">
+          <a:bodyPr wrap="square" lIns="25400" tIns="25400" rIns="25400" bIns="25400" anchor="t">
             <a:spAutoFit/>
           </a:bodyPr>
           <a:lstStyle/>
@@ -20691,7 +20927,7 @@
 </file>
 
 <file path=ppt/slides/slide8.xml><?xml version="1.0" encoding="utf-8"?>
-<p:sld xmlns:a="http://schemas.openxmlformats.org/drawingml/2006/main" xmlns:p="http://schemas.openxmlformats.org/presentationml/2006/main" xmlns:r="http://schemas.openxmlformats.org/officeDocument/2006/relationships">
+<p:sld xmlns:a="http://schemas.openxmlformats.org/drawingml/2006/main" xmlns:r="http://schemas.openxmlformats.org/officeDocument/2006/relationships" xmlns:p="http://schemas.openxmlformats.org/presentationml/2006/main">
   <p:cSld>
     <p:spTree>
       <p:nvGrpSpPr>
@@ -20699,7 +20935,14 @@
         <p:cNvGrpSpPr/>
         <p:nvPr/>
       </p:nvGrpSpPr>
-      <p:grpSpPr/>
+      <p:grpSpPr>
+        <a:xfrm>
+          <a:off x="0" y="0"/>
+          <a:ext cx="0" cy="0"/>
+          <a:chOff x="0" y="0"/>
+          <a:chExt cx="0" cy="0"/>
+        </a:xfrm>
+      </p:grpSpPr>
       <p:sp>
         <p:nvSpPr>
           <p:cNvPr id="2" name="Rectangle 1"/>
@@ -20741,6 +20984,7 @@
           <a:lstStyle/>
           <a:p>
             <a:pPr algn="ctr"/>
+            <a:endParaRPr/>
           </a:p>
         </p:txBody>
       </p:sp>
@@ -20785,6 +21029,7 @@
           <a:lstStyle/>
           <a:p>
             <a:pPr algn="ctr"/>
+            <a:endParaRPr/>
           </a:p>
         </p:txBody>
       </p:sp>
@@ -20805,7 +21050,7 @@
           <a:noFill/>
         </p:spPr>
         <p:txBody>
-          <a:bodyPr wrap="square" anchor="t" lIns="25400" rIns="25400" tIns="25400" bIns="25400">
+          <a:bodyPr wrap="square" lIns="25400" tIns="25400" rIns="25400" bIns="25400" anchor="t">
             <a:spAutoFit/>
           </a:bodyPr>
           <a:lstStyle/>
@@ -20850,7 +21095,7 @@
           <a:noFill/>
         </p:spPr>
         <p:txBody>
-          <a:bodyPr wrap="square" anchor="t" lIns="25400" rIns="25400" tIns="25400" bIns="25400">
+          <a:bodyPr wrap="square" lIns="25400" tIns="25400" rIns="25400" bIns="25400" anchor="t">
             <a:spAutoFit/>
           </a:bodyPr>
           <a:lstStyle/>
@@ -20919,6 +21164,7 @@
           <a:lstStyle/>
           <a:p>
             <a:pPr algn="ctr"/>
+            <a:endParaRPr/>
           </a:p>
         </p:txBody>
       </p:sp>
@@ -20965,6 +21211,7 @@
           <a:lstStyle/>
           <a:p>
             <a:pPr algn="ctr"/>
+            <a:endParaRPr/>
           </a:p>
         </p:txBody>
       </p:sp>
@@ -20985,7 +21232,7 @@
           <a:noFill/>
         </p:spPr>
         <p:txBody>
-          <a:bodyPr wrap="square" anchor="t" lIns="25400" rIns="25400" tIns="25400" bIns="25400">
+          <a:bodyPr wrap="square" lIns="25400" tIns="25400" rIns="25400" bIns="25400" anchor="t">
             <a:spAutoFit/>
           </a:bodyPr>
           <a:lstStyle/>
@@ -21030,7 +21277,7 @@
           <a:noFill/>
         </p:spPr>
         <p:txBody>
-          <a:bodyPr wrap="square" anchor="t" lIns="25400" rIns="25400" tIns="25400" bIns="25400">
+          <a:bodyPr wrap="square" lIns="25400" tIns="25400" rIns="25400" bIns="25400" anchor="t">
             <a:spAutoFit/>
           </a:bodyPr>
           <a:lstStyle/>
@@ -21099,6 +21346,7 @@
           <a:lstStyle/>
           <a:p>
             <a:pPr algn="ctr"/>
+            <a:endParaRPr/>
           </a:p>
         </p:txBody>
       </p:sp>
@@ -21119,7 +21367,7 @@
           <a:noFill/>
         </p:spPr>
         <p:txBody>
-          <a:bodyPr wrap="square" anchor="ctr" lIns="25400" rIns="25400" tIns="25400" bIns="25400">
+          <a:bodyPr wrap="square" lIns="25400" tIns="25400" rIns="25400" bIns="25400" anchor="ctr">
             <a:spAutoFit/>
           </a:bodyPr>
           <a:lstStyle/>
@@ -21164,7 +21412,7 @@
           <a:noFill/>
         </p:spPr>
         <p:txBody>
-          <a:bodyPr wrap="square" anchor="t" lIns="25400" rIns="25400" tIns="25400" bIns="25400">
+          <a:bodyPr wrap="square" lIns="25400" tIns="25400" rIns="25400" bIns="25400" anchor="t">
             <a:spAutoFit/>
           </a:bodyPr>
           <a:lstStyle/>
@@ -21235,6 +21483,7 @@
           <a:lstStyle/>
           <a:p>
             <a:pPr algn="ctr"/>
+            <a:endParaRPr/>
           </a:p>
         </p:txBody>
       </p:sp>
@@ -21255,7 +21504,7 @@
           <a:noFill/>
         </p:spPr>
         <p:txBody>
-          <a:bodyPr wrap="square" anchor="t" lIns="25400" rIns="25400" tIns="25400" bIns="25400">
+          <a:bodyPr wrap="square" lIns="25400" tIns="25400" rIns="25400" bIns="25400" anchor="t">
             <a:spAutoFit/>
           </a:bodyPr>
           <a:lstStyle/>
@@ -21300,7 +21549,7 @@
           <a:noFill/>
         </p:spPr>
         <p:txBody>
-          <a:bodyPr wrap="square" anchor="t" lIns="25400" rIns="25400" tIns="25400" bIns="25400">
+          <a:bodyPr wrap="square" lIns="25400" tIns="25400" rIns="25400" bIns="25400" anchor="t">
             <a:spAutoFit/>
           </a:bodyPr>
           <a:lstStyle/>
@@ -21369,6 +21618,7 @@
           <a:lstStyle/>
           <a:p>
             <a:pPr algn="ctr"/>
+            <a:endParaRPr/>
           </a:p>
         </p:txBody>
       </p:sp>
@@ -21389,7 +21639,7 @@
           <a:noFill/>
         </p:spPr>
         <p:txBody>
-          <a:bodyPr wrap="square" anchor="ctr" lIns="25400" rIns="25400" tIns="25400" bIns="25400">
+          <a:bodyPr wrap="square" lIns="25400" tIns="25400" rIns="25400" bIns="25400" anchor="ctr">
             <a:spAutoFit/>
           </a:bodyPr>
           <a:lstStyle/>
@@ -21434,7 +21684,7 @@
           <a:noFill/>
         </p:spPr>
         <p:txBody>
-          <a:bodyPr wrap="square" anchor="t" lIns="25400" rIns="25400" tIns="25400" bIns="25400">
+          <a:bodyPr wrap="square" lIns="25400" tIns="25400" rIns="25400" bIns="25400" anchor="t">
             <a:spAutoFit/>
           </a:bodyPr>
           <a:lstStyle/>
@@ -21505,6 +21755,7 @@
           <a:lstStyle/>
           <a:p>
             <a:pPr algn="ctr"/>
+            <a:endParaRPr/>
           </a:p>
         </p:txBody>
       </p:sp>
@@ -21525,7 +21776,7 @@
           <a:noFill/>
         </p:spPr>
         <p:txBody>
-          <a:bodyPr wrap="square" anchor="t" lIns="25400" rIns="25400" tIns="25400" bIns="25400">
+          <a:bodyPr wrap="square" lIns="25400" tIns="25400" rIns="25400" bIns="25400" anchor="t">
             <a:spAutoFit/>
           </a:bodyPr>
           <a:lstStyle/>
@@ -21570,7 +21821,7 @@
           <a:noFill/>
         </p:spPr>
         <p:txBody>
-          <a:bodyPr wrap="square" anchor="t" lIns="25400" rIns="25400" tIns="25400" bIns="25400">
+          <a:bodyPr wrap="square" lIns="25400" tIns="25400" rIns="25400" bIns="25400" anchor="t">
             <a:spAutoFit/>
           </a:bodyPr>
           <a:lstStyle/>
@@ -21639,6 +21890,7 @@
           <a:lstStyle/>
           <a:p>
             <a:pPr algn="ctr"/>
+            <a:endParaRPr/>
           </a:p>
         </p:txBody>
       </p:sp>
@@ -21659,7 +21911,7 @@
           <a:noFill/>
         </p:spPr>
         <p:txBody>
-          <a:bodyPr wrap="square" anchor="ctr" lIns="25400" rIns="25400" tIns="25400" bIns="25400">
+          <a:bodyPr wrap="square" lIns="25400" tIns="25400" rIns="25400" bIns="25400" anchor="ctr">
             <a:spAutoFit/>
           </a:bodyPr>
           <a:lstStyle/>
@@ -21704,7 +21956,7 @@
           <a:noFill/>
         </p:spPr>
         <p:txBody>
-          <a:bodyPr wrap="square" anchor="t" lIns="25400" rIns="25400" tIns="25400" bIns="25400">
+          <a:bodyPr wrap="square" lIns="25400" tIns="25400" rIns="25400" bIns="25400" anchor="t">
             <a:spAutoFit/>
           </a:bodyPr>
           <a:lstStyle/>
@@ -21775,6 +22027,7 @@
           <a:lstStyle/>
           <a:p>
             <a:pPr algn="ctr"/>
+            <a:endParaRPr/>
           </a:p>
         </p:txBody>
       </p:sp>
@@ -21795,7 +22048,7 @@
           <a:noFill/>
         </p:spPr>
         <p:txBody>
-          <a:bodyPr wrap="square" anchor="t" lIns="25400" rIns="25400" tIns="25400" bIns="25400">
+          <a:bodyPr wrap="square" lIns="25400" tIns="25400" rIns="25400" bIns="25400" anchor="t">
             <a:spAutoFit/>
           </a:bodyPr>
           <a:lstStyle/>
@@ -21840,7 +22093,7 @@
           <a:noFill/>
         </p:spPr>
         <p:txBody>
-          <a:bodyPr wrap="square" anchor="t" lIns="25400" rIns="25400" tIns="25400" bIns="25400">
+          <a:bodyPr wrap="square" lIns="25400" tIns="25400" rIns="25400" bIns="25400" anchor="t">
             <a:spAutoFit/>
           </a:bodyPr>
           <a:lstStyle/>
@@ -21909,6 +22162,7 @@
           <a:lstStyle/>
           <a:p>
             <a:pPr algn="ctr"/>
+            <a:endParaRPr/>
           </a:p>
         </p:txBody>
       </p:sp>
@@ -21929,7 +22183,7 @@
           <a:noFill/>
         </p:spPr>
         <p:txBody>
-          <a:bodyPr wrap="square" anchor="ctr" lIns="25400" rIns="25400" tIns="25400" bIns="25400">
+          <a:bodyPr wrap="square" lIns="25400" tIns="25400" rIns="25400" bIns="25400" anchor="ctr">
             <a:spAutoFit/>
           </a:bodyPr>
           <a:lstStyle/>
@@ -21974,7 +22228,7 @@
           <a:noFill/>
         </p:spPr>
         <p:txBody>
-          <a:bodyPr wrap="square" anchor="t" lIns="25400" rIns="25400" tIns="25400" bIns="25400">
+          <a:bodyPr wrap="square" lIns="25400" tIns="25400" rIns="25400" bIns="25400" anchor="t">
             <a:spAutoFit/>
           </a:bodyPr>
           <a:lstStyle/>
@@ -22045,6 +22299,7 @@
           <a:lstStyle/>
           <a:p>
             <a:pPr algn="ctr"/>
+            <a:endParaRPr/>
           </a:p>
         </p:txBody>
       </p:sp>
@@ -22065,7 +22320,7 @@
           <a:noFill/>
         </p:spPr>
         <p:txBody>
-          <a:bodyPr wrap="square" anchor="t" lIns="25400" rIns="25400" tIns="25400" bIns="25400">
+          <a:bodyPr wrap="square" lIns="25400" tIns="25400" rIns="25400" bIns="25400" anchor="t">
             <a:spAutoFit/>
           </a:bodyPr>
           <a:lstStyle/>
@@ -22110,7 +22365,7 @@
           <a:noFill/>
         </p:spPr>
         <p:txBody>
-          <a:bodyPr wrap="square" anchor="t" lIns="25400" rIns="25400" tIns="25400" bIns="25400">
+          <a:bodyPr wrap="square" lIns="25400" tIns="25400" rIns="25400" bIns="25400" anchor="t">
             <a:spAutoFit/>
           </a:bodyPr>
           <a:lstStyle/>
@@ -22179,6 +22434,7 @@
           <a:lstStyle/>
           <a:p>
             <a:pPr algn="ctr"/>
+            <a:endParaRPr/>
           </a:p>
         </p:txBody>
       </p:sp>
@@ -22199,7 +22455,7 @@
           <a:noFill/>
         </p:spPr>
         <p:txBody>
-          <a:bodyPr wrap="square" anchor="ctr" lIns="25400" rIns="25400" tIns="25400" bIns="25400">
+          <a:bodyPr wrap="square" lIns="25400" tIns="25400" rIns="25400" bIns="25400" anchor="ctr">
             <a:spAutoFit/>
           </a:bodyPr>
           <a:lstStyle/>
@@ -22244,7 +22500,7 @@
           <a:noFill/>
         </p:spPr>
         <p:txBody>
-          <a:bodyPr wrap="square" anchor="t" lIns="25400" rIns="25400" tIns="25400" bIns="25400">
+          <a:bodyPr wrap="square" lIns="25400" tIns="25400" rIns="25400" bIns="25400" anchor="t">
             <a:spAutoFit/>
           </a:bodyPr>
           <a:lstStyle/>
@@ -22315,6 +22571,7 @@
           <a:lstStyle/>
           <a:p>
             <a:pPr algn="ctr"/>
+            <a:endParaRPr/>
           </a:p>
         </p:txBody>
       </p:sp>
@@ -22335,7 +22592,7 @@
           <a:noFill/>
         </p:spPr>
         <p:txBody>
-          <a:bodyPr wrap="square" anchor="t" lIns="25400" rIns="25400" tIns="25400" bIns="25400">
+          <a:bodyPr wrap="square" lIns="25400" tIns="25400" rIns="25400" bIns="25400" anchor="t">
             <a:spAutoFit/>
           </a:bodyPr>
           <a:lstStyle/>
@@ -22380,7 +22637,7 @@
           <a:noFill/>
         </p:spPr>
         <p:txBody>
-          <a:bodyPr wrap="square" anchor="t" lIns="25400" rIns="25400" tIns="25400" bIns="25400">
+          <a:bodyPr wrap="square" lIns="25400" tIns="25400" rIns="25400" bIns="25400" anchor="t">
             <a:spAutoFit/>
           </a:bodyPr>
           <a:lstStyle/>
@@ -22449,6 +22706,7 @@
           <a:lstStyle/>
           <a:p>
             <a:pPr algn="ctr"/>
+            <a:endParaRPr/>
           </a:p>
         </p:txBody>
       </p:sp>
@@ -22469,7 +22727,7 @@
           <a:noFill/>
         </p:spPr>
         <p:txBody>
-          <a:bodyPr wrap="square" anchor="ctr" lIns="25400" rIns="25400" tIns="25400" bIns="25400">
+          <a:bodyPr wrap="square" lIns="25400" tIns="25400" rIns="25400" bIns="25400" anchor="ctr">
             <a:spAutoFit/>
           </a:bodyPr>
           <a:lstStyle/>
@@ -22514,7 +22772,7 @@
           <a:noFill/>
         </p:spPr>
         <p:txBody>
-          <a:bodyPr wrap="square" anchor="t" lIns="25400" rIns="25400" tIns="25400" bIns="25400">
+          <a:bodyPr wrap="square" lIns="25400" tIns="25400" rIns="25400" bIns="25400" anchor="t">
             <a:spAutoFit/>
           </a:bodyPr>
           <a:lstStyle/>
@@ -22585,6 +22843,7 @@
           <a:lstStyle/>
           <a:p>
             <a:pPr algn="ctr"/>
+            <a:endParaRPr/>
           </a:p>
         </p:txBody>
       </p:sp>
@@ -22605,7 +22864,7 @@
           <a:noFill/>
         </p:spPr>
         <p:txBody>
-          <a:bodyPr wrap="square" anchor="t" lIns="25400" rIns="25400" tIns="25400" bIns="25400">
+          <a:bodyPr wrap="square" lIns="25400" tIns="25400" rIns="25400" bIns="25400" anchor="t">
             <a:spAutoFit/>
           </a:bodyPr>
           <a:lstStyle/>
@@ -22650,7 +22909,7 @@
           <a:noFill/>
         </p:spPr>
         <p:txBody>
-          <a:bodyPr wrap="square" anchor="t" lIns="25400" rIns="25400" tIns="25400" bIns="25400">
+          <a:bodyPr wrap="square" lIns="25400" tIns="25400" rIns="25400" bIns="25400" anchor="t">
             <a:spAutoFit/>
           </a:bodyPr>
           <a:lstStyle/>
@@ -22719,6 +22978,7 @@
           <a:lstStyle/>
           <a:p>
             <a:pPr algn="ctr"/>
+            <a:endParaRPr/>
           </a:p>
         </p:txBody>
       </p:sp>
@@ -22739,7 +22999,7 @@
           <a:noFill/>
         </p:spPr>
         <p:txBody>
-          <a:bodyPr wrap="square" anchor="ctr" lIns="25400" rIns="25400" tIns="25400" bIns="25400">
+          <a:bodyPr wrap="square" lIns="25400" tIns="25400" rIns="25400" bIns="25400" anchor="ctr">
             <a:spAutoFit/>
           </a:bodyPr>
           <a:lstStyle/>
@@ -22784,7 +23044,7 @@
           <a:noFill/>
         </p:spPr>
         <p:txBody>
-          <a:bodyPr wrap="square" anchor="t" lIns="25400" rIns="25400" tIns="25400" bIns="25400">
+          <a:bodyPr wrap="square" lIns="25400" tIns="25400" rIns="25400" bIns="25400" anchor="t">
             <a:spAutoFit/>
           </a:bodyPr>
           <a:lstStyle/>
@@ -22855,6 +23115,7 @@
           <a:lstStyle/>
           <a:p>
             <a:pPr algn="ctr"/>
+            <a:endParaRPr/>
           </a:p>
         </p:txBody>
       </p:sp>
@@ -22875,7 +23136,7 @@
           <a:noFill/>
         </p:spPr>
         <p:txBody>
-          <a:bodyPr wrap="square" anchor="t" lIns="25400" rIns="25400" tIns="25400" bIns="25400">
+          <a:bodyPr wrap="square" lIns="25400" tIns="25400" rIns="25400" bIns="25400" anchor="t">
             <a:spAutoFit/>
           </a:bodyPr>
           <a:lstStyle/>
@@ -22920,7 +23181,7 @@
           <a:noFill/>
         </p:spPr>
         <p:txBody>
-          <a:bodyPr wrap="square" anchor="t" lIns="25400" rIns="25400" tIns="25400" bIns="25400">
+          <a:bodyPr wrap="square" lIns="25400" tIns="25400" rIns="25400" bIns="25400" anchor="t">
             <a:spAutoFit/>
           </a:bodyPr>
           <a:lstStyle/>
@@ -22989,6 +23250,7 @@
           <a:lstStyle/>
           <a:p>
             <a:pPr algn="ctr"/>
+            <a:endParaRPr/>
           </a:p>
         </p:txBody>
       </p:sp>
@@ -23009,7 +23271,7 @@
           <a:noFill/>
         </p:spPr>
         <p:txBody>
-          <a:bodyPr wrap="square" anchor="ctr" lIns="25400" rIns="25400" tIns="25400" bIns="25400">
+          <a:bodyPr wrap="square" lIns="25400" tIns="25400" rIns="25400" bIns="25400" anchor="ctr">
             <a:spAutoFit/>
           </a:bodyPr>
           <a:lstStyle/>
@@ -23054,7 +23316,7 @@
           <a:noFill/>
         </p:spPr>
         <p:txBody>
-          <a:bodyPr wrap="square" anchor="t" lIns="25400" rIns="25400" tIns="25400" bIns="25400">
+          <a:bodyPr wrap="square" lIns="25400" tIns="25400" rIns="25400" bIns="25400" anchor="t">
             <a:spAutoFit/>
           </a:bodyPr>
           <a:lstStyle/>
@@ -23091,7 +23353,7 @@
 </file>
 
 <file path=ppt/slides/slide9.xml><?xml version="1.0" encoding="utf-8"?>
-<p:sld xmlns:a="http://schemas.openxmlformats.org/drawingml/2006/main" xmlns:p="http://schemas.openxmlformats.org/presentationml/2006/main" xmlns:r="http://schemas.openxmlformats.org/officeDocument/2006/relationships">
+<p:sld xmlns:a="http://schemas.openxmlformats.org/drawingml/2006/main" xmlns:r="http://schemas.openxmlformats.org/officeDocument/2006/relationships" xmlns:p="http://schemas.openxmlformats.org/presentationml/2006/main">
   <p:cSld>
     <p:spTree>
       <p:nvGrpSpPr>
@@ -23099,7 +23361,14 @@
         <p:cNvGrpSpPr/>
         <p:nvPr/>
       </p:nvGrpSpPr>
-      <p:grpSpPr/>
+      <p:grpSpPr>
+        <a:xfrm>
+          <a:off x="0" y="0"/>
+          <a:ext cx="0" cy="0"/>
+          <a:chOff x="0" y="0"/>
+          <a:chExt cx="0" cy="0"/>
+        </a:xfrm>
+      </p:grpSpPr>
       <p:sp>
         <p:nvSpPr>
           <p:cNvPr id="2" name="Rectangle 1"/>
@@ -23141,6 +23410,7 @@
           <a:lstStyle/>
           <a:p>
             <a:pPr algn="ctr"/>
+            <a:endParaRPr/>
           </a:p>
         </p:txBody>
       </p:sp>
@@ -23185,6 +23455,7 @@
           <a:lstStyle/>
           <a:p>
             <a:pPr algn="ctr"/>
+            <a:endParaRPr/>
           </a:p>
         </p:txBody>
       </p:sp>
@@ -23205,7 +23476,7 @@
           <a:noFill/>
         </p:spPr>
         <p:txBody>
-          <a:bodyPr wrap="square" anchor="t" lIns="25400" rIns="25400" tIns="25400" bIns="25400">
+          <a:bodyPr wrap="square" lIns="25400" tIns="25400" rIns="25400" bIns="25400" anchor="t">
             <a:spAutoFit/>
           </a:bodyPr>
           <a:lstStyle/>
@@ -23250,7 +23521,7 @@
           <a:noFill/>
         </p:spPr>
         <p:txBody>
-          <a:bodyPr wrap="square" anchor="t" lIns="25400" rIns="25400" tIns="25400" bIns="25400">
+          <a:bodyPr wrap="square" lIns="25400" tIns="25400" rIns="25400" bIns="25400" anchor="t">
             <a:spAutoFit/>
           </a:bodyPr>
           <a:lstStyle/>
@@ -23319,6 +23590,7 @@
           <a:lstStyle/>
           <a:p>
             <a:pPr algn="ctr"/>
+            <a:endParaRPr/>
           </a:p>
         </p:txBody>
       </p:sp>
@@ -23392,6 +23664,7 @@
           <a:lstStyle/>
           <a:p>
             <a:pPr algn="ctr"/>
+            <a:endParaRPr/>
           </a:p>
         </p:txBody>
       </p:sp>
@@ -23412,7 +23685,7 @@
           <a:noFill/>
         </p:spPr>
         <p:txBody>
-          <a:bodyPr wrap="square" anchor="t" lIns="25400" rIns="25400" tIns="25400" bIns="25400">
+          <a:bodyPr wrap="square" lIns="25400" tIns="25400" rIns="25400" bIns="25400" anchor="t">
             <a:spAutoFit/>
           </a:bodyPr>
           <a:lstStyle/>
@@ -23457,7 +23730,7 @@
           <a:noFill/>
         </p:spPr>
         <p:txBody>
-          <a:bodyPr wrap="square" anchor="t" lIns="25400" rIns="25400" tIns="25400" bIns="25400">
+          <a:bodyPr wrap="square" lIns="25400" tIns="25400" rIns="25400" bIns="25400" anchor="t">
             <a:spAutoFit/>
           </a:bodyPr>
           <a:lstStyle/>
@@ -23526,14 +23799,55 @@
                 <a:spcPts val="600"/>
               </a:spcAft>
             </a:pPr>
-            <a:r>
-              <a:rPr sz="700" b="0">
+            <a:endParaRPr sz="1100" b="0">
+              <a:solidFill>
+                <a:srgbClr val="9A9AA2"/>
+              </a:solidFill>
+              <a:latin typeface="Segoe UI"/>
+            </a:endParaRPr>
+          </a:p>
+          <a:p>
+            <a:pPr algn="l">
+              <a:lnSpc>
+                <a:spcPct val="112000"/>
+              </a:lnSpc>
+              <a:spcBef>
+                <a:spcPts val="0"/>
+              </a:spcBef>
+              <a:spcAft>
+                <a:spcPts val="600"/>
+              </a:spcAft>
+            </a:pPr>
+            <a:r>
+              <a:rPr sz="1300" b="0">
+                <a:solidFill>
+                  <a:srgbClr val="F2F2F2"/>
+                </a:solidFill>
+                <a:latin typeface="Segoe UI"/>
+              </a:rPr>
+              <a:t>• Zero-score channels sorted</a:t>
+            </a:r>
+          </a:p>
+          <a:p>
+            <a:pPr algn="l">
+              <a:lnSpc>
+                <a:spcPct val="112000"/>
+              </a:lnSpc>
+              <a:spcBef>
+                <a:spcPts val="0"/>
+              </a:spcBef>
+              <a:spcAft>
+                <a:spcPts val="600"/>
+              </a:spcAft>
+            </a:pPr>
+            <a:r>
+              <a:rPr sz="1300" b="0">
                 <a:solidFill>
                   <a:srgbClr val="9A9AA2"/>
                 </a:solidFill>
                 <a:latin typeface="Segoe UI"/>
               </a:rPr>
-              <a:t/>
+              <a:t>  to the bottom as dormant</a:t>
             </a:r>
           </a:p>
           <a:p>
@@ -23548,6 +23862,25 @@
                 <a:spcPts val="600"/>
               </a:spcAft>
             </a:pPr>
+            <a:endParaRPr sz="1300" b="0">
+              <a:solidFill>
+                <a:srgbClr val="9A9AA2"/>
+              </a:solidFill>
+              <a:latin typeface="Segoe UI"/>
+            </a:endParaRPr>
+          </a:p>
+          <a:p>
+            <a:pPr algn="l">
+              <a:lnSpc>
+                <a:spcPct val="112000"/>
+              </a:lnSpc>
+              <a:spcBef>
+                <a:spcPts val="0"/>
+              </a:spcBef>
+              <a:spcAft>
+                <a:spcPts val="600"/>
+              </a:spcAft>
+            </a:pPr>
             <a:r>
               <a:rPr sz="1300" b="0">
                 <a:solidFill>
@@ -23555,7 +23888,16 @@
                 </a:solidFill>
                 <a:latin typeface="Segoe UI"/>
               </a:rPr>
-              <a:t>• Zero-score channels sorted</a:t>
+              <a:t>• Bottom </a:t>
+            </a:r>
+            <a:r>
+              <a:rPr sz="1300" b="1">
+                <a:solidFill>
+                  <a:srgbClr val="2ECC71"/>
+                </a:solidFill>
+                <a:latin typeface="Segoe UI"/>
+              </a:rPr>
+              <a:t>🤖 AI Analysis Tools</a:t>
             </a:r>
           </a:p>
           <a:p>
@@ -23577,7 +23919,7 @@
                 </a:solidFill>
                 <a:latin typeface="Segoe UI"/>
               </a:rPr>
-              <a:t>  to the bottom as dormant</a:t>
+              <a:t>  — 3 selectable modes</a:t>
             </a:r>
           </a:p>
           <a:p>
@@ -23593,13 +23935,13 @@
               </a:spcAft>
             </a:pPr>
             <a:r>
-              <a:rPr sz="700" b="0">
+              <a:rPr sz="1200" b="0">
                 <a:solidFill>
                   <a:srgbClr val="9A9AA2"/>
                 </a:solidFill>
                 <a:latin typeface="Segoe UI"/>
               </a:rPr>
-              <a:t/>
+              <a:t>   - Viewing-Taste Persona</a:t>
             </a:r>
           </a:p>
           <a:p>
@@ -23615,22 +23957,13 @@
               </a:spcAft>
             </a:pPr>
             <a:r>
-              <a:rPr sz="1300" b="0">
-                <a:solidFill>
-                  <a:srgbClr val="F2F2F2"/>
-                </a:solidFill>
-                <a:latin typeface="Segoe UI"/>
-              </a:rPr>
-              <a:t>• Bottom </a:t>
-            </a:r>
-            <a:r>
-              <a:rPr sz="1300" b="1">
-                <a:solidFill>
-                  <a:srgbClr val="2ECC71"/>
-                </a:solidFill>
-                <a:latin typeface="Segoe UI"/>
-              </a:rPr>
-              <a:t>🤖 AI Analysis Tools</a:t>
+              <a:rPr sz="1200" b="0">
+                <a:solidFill>
+                  <a:srgbClr val="9A9AA2"/>
+                </a:solidFill>
+                <a:latin typeface="Segoe UI"/>
+              </a:rPr>
+              <a:t>   - Subscription Cleanup Coach</a:t>
             </a:r>
           </a:p>
           <a:p>
@@ -23646,13 +23979,13 @@
               </a:spcAft>
             </a:pPr>
             <a:r>
-              <a:rPr sz="1300" b="0">
+              <a:rPr sz="1200" b="0">
                 <a:solidFill>
                   <a:srgbClr val="9A9AA2"/>
                 </a:solidFill>
                 <a:latin typeface="Segoe UI"/>
               </a:rPr>
-              <a:t>  — 3 selectable modes</a:t>
+              <a:t>   - New Channel Recommendation</a:t>
             </a:r>
           </a:p>
           <a:p>
@@ -23667,81 +24000,12 @@
                 <a:spcPts val="600"/>
               </a:spcAft>
             </a:pPr>
-            <a:r>
-              <a:rPr sz="1200" b="0">
-                <a:solidFill>
-                  <a:srgbClr val="9A9AA2"/>
-                </a:solidFill>
-                <a:latin typeface="Segoe UI"/>
-              </a:rPr>
-              <a:t>   - Viewing-Taste Persona</a:t>
-            </a:r>
-          </a:p>
-          <a:p>
-            <a:pPr algn="l">
-              <a:lnSpc>
-                <a:spcPct val="112000"/>
-              </a:lnSpc>
-              <a:spcBef>
-                <a:spcPts val="0"/>
-              </a:spcBef>
-              <a:spcAft>
-                <a:spcPts val="600"/>
-              </a:spcAft>
-            </a:pPr>
-            <a:r>
-              <a:rPr sz="1200" b="0">
-                <a:solidFill>
-                  <a:srgbClr val="9A9AA2"/>
-                </a:solidFill>
-                <a:latin typeface="Segoe UI"/>
-              </a:rPr>
-              <a:t>   - Subscription Cleanup Coach</a:t>
-            </a:r>
-          </a:p>
-          <a:p>
-            <a:pPr algn="l">
-              <a:lnSpc>
-                <a:spcPct val="112000"/>
-              </a:lnSpc>
-              <a:spcBef>
-                <a:spcPts val="0"/>
-              </a:spcBef>
-              <a:spcAft>
-                <a:spcPts val="600"/>
-              </a:spcAft>
-            </a:pPr>
-            <a:r>
-              <a:rPr sz="1200" b="0">
-                <a:solidFill>
-                  <a:srgbClr val="9A9AA2"/>
-                </a:solidFill>
-                <a:latin typeface="Segoe UI"/>
-              </a:rPr>
-              <a:t>   - New Channel Recommendation</a:t>
-            </a:r>
-          </a:p>
-          <a:p>
-            <a:pPr algn="l">
-              <a:lnSpc>
-                <a:spcPct val="112000"/>
-              </a:lnSpc>
-              <a:spcBef>
-                <a:spcPts val="0"/>
-              </a:spcBef>
-              <a:spcAft>
-                <a:spcPts val="600"/>
-              </a:spcAft>
-            </a:pPr>
-            <a:r>
-              <a:rPr sz="700" b="0">
-                <a:solidFill>
-                  <a:srgbClr val="9A9AA2"/>
-                </a:solidFill>
-                <a:latin typeface="Segoe UI"/>
-              </a:rPr>
-              <a:t/>
-            </a:r>
+            <a:endParaRPr sz="1200" b="0">
+              <a:solidFill>
+                <a:srgbClr val="9A9AA2"/>
+              </a:solidFill>
+              <a:latin typeface="Segoe UI"/>
+            </a:endParaRPr>
           </a:p>
           <a:p>
             <a:pPr algn="l">

--- a/구독채널_관심도_분석기_발표.pptx
+++ b/구독채널_관심도_분석기_발표.pptx
@@ -13,14 +13,15 @@
     <p:sldId id="261" r:id="rId7"/>
     <p:sldId id="262" r:id="rId8"/>
     <p:sldId id="263" r:id="rId9"/>
-    <p:sldId id="264" r:id="rId10"/>
-    <p:sldId id="265" r:id="rId11"/>
-    <p:sldId id="266" r:id="rId12"/>
-    <p:sldId id="267" r:id="rId13"/>
-    <p:sldId id="268" r:id="rId14"/>
-    <p:sldId id="269" r:id="rId15"/>
-    <p:sldId id="270" r:id="rId16"/>
-    <p:sldId id="271" r:id="rId17"/>
+    <p:sldId id="272" r:id="rId10"/>
+    <p:sldId id="264" r:id="rId11"/>
+    <p:sldId id="265" r:id="rId12"/>
+    <p:sldId id="266" r:id="rId13"/>
+    <p:sldId id="267" r:id="rId14"/>
+    <p:sldId id="268" r:id="rId15"/>
+    <p:sldId id="269" r:id="rId16"/>
+    <p:sldId id="270" r:id="rId17"/>
+    <p:sldId id="271" r:id="rId18"/>
   </p:sldIdLst>
   <p:sldSz cx="12192000" cy="6858000"/>
   <p:notesSz cx="6858000" cy="9144000"/>
@@ -141,7 +142,7 @@
 <file path=ppt/revisionInfo.xml><?xml version="1.0" encoding="utf-8"?>
 <p1510:revInfo xmlns:a="http://schemas.openxmlformats.org/drawingml/2006/main" xmlns:r="http://schemas.openxmlformats.org/officeDocument/2006/relationships" xmlns:p1510="http://schemas.microsoft.com/office/powerpoint/2015/10/main">
   <p1510:revLst>
-    <p1510:client id="{F2F971D4-CDB2-4822-BC53-288A61021AA8}" v="3" dt="2026-06-02T04:17:52.154"/>
+    <p1510:client id="{F2F971D4-CDB2-4822-BC53-288A61021AA8}" v="9" dt="2026-06-02T04:49:50.120"/>
   </p1510:revLst>
 </p1510:revInfo>
 </file>
@@ -150,17 +151,109 @@
 <pc:chgInfo xmlns:a="http://schemas.openxmlformats.org/drawingml/2006/main" xmlns:r="http://schemas.openxmlformats.org/officeDocument/2006/relationships" xmlns:ac="http://schemas.microsoft.com/office/drawing/2013/main/command" xmlns:pc="http://schemas.microsoft.com/office/powerpoint/2013/main/command">
   <pc:docChgLst>
     <pc:chgData name="명준 송" userId="7e48128a0c33bc37" providerId="LiveId" clId="{A62D5C53-2774-4FE3-8307-3525D25D70A4}"/>
-    <pc:docChg chg="modSld">
-      <pc:chgData name="명준 송" userId="7e48128a0c33bc37" providerId="LiveId" clId="{A62D5C53-2774-4FE3-8307-3525D25D70A4}" dt="2026-06-02T04:18:34.892" v="11" actId="20577"/>
+    <pc:docChg chg="undo custSel addSld delSld modSld">
+      <pc:chgData name="명준 송" userId="7e48128a0c33bc37" providerId="LiveId" clId="{A62D5C53-2774-4FE3-8307-3525D25D70A4}" dt="2026-06-02T04:53:16.015" v="112" actId="20577"/>
       <pc:docMkLst>
         <pc:docMk/>
       </pc:docMkLst>
+      <pc:sldChg chg="modSp mod">
+        <pc:chgData name="명준 송" userId="7e48128a0c33bc37" providerId="LiveId" clId="{A62D5C53-2774-4FE3-8307-3525D25D70A4}" dt="2026-06-02T04:53:16.015" v="112" actId="20577"/>
+        <pc:sldMkLst>
+          <pc:docMk/>
+          <pc:sldMk cId="0" sldId="260"/>
+        </pc:sldMkLst>
+        <pc:spChg chg="mod">
+          <ac:chgData name="명준 송" userId="7e48128a0c33bc37" providerId="LiveId" clId="{A62D5C53-2774-4FE3-8307-3525D25D70A4}" dt="2026-06-02T04:52:59.349" v="99" actId="20577"/>
+          <ac:spMkLst>
+            <pc:docMk/>
+            <pc:sldMk cId="0" sldId="260"/>
+            <ac:spMk id="7" creationId="{00000000-0000-0000-0000-000000000000}"/>
+          </ac:spMkLst>
+        </pc:spChg>
+        <pc:spChg chg="mod">
+          <ac:chgData name="명준 송" userId="7e48128a0c33bc37" providerId="LiveId" clId="{A62D5C53-2774-4FE3-8307-3525D25D70A4}" dt="2026-06-02T04:52:55.759" v="98" actId="20577"/>
+          <ac:spMkLst>
+            <pc:docMk/>
+            <pc:sldMk cId="0" sldId="260"/>
+            <ac:spMk id="10" creationId="{00000000-0000-0000-0000-000000000000}"/>
+          </ac:spMkLst>
+        </pc:spChg>
+        <pc:spChg chg="mod">
+          <ac:chgData name="명준 송" userId="7e48128a0c33bc37" providerId="LiveId" clId="{A62D5C53-2774-4FE3-8307-3525D25D70A4}" dt="2026-06-02T04:53:16.015" v="112" actId="20577"/>
+          <ac:spMkLst>
+            <pc:docMk/>
+            <pc:sldMk cId="0" sldId="260"/>
+            <ac:spMk id="11" creationId="{00000000-0000-0000-0000-000000000000}"/>
+          </ac:spMkLst>
+        </pc:spChg>
+      </pc:sldChg>
+      <pc:sldChg chg="modSp mod">
+        <pc:chgData name="명준 송" userId="7e48128a0c33bc37" providerId="LiveId" clId="{A62D5C53-2774-4FE3-8307-3525D25D70A4}" dt="2026-06-02T04:50:59.725" v="66" actId="20577"/>
+        <pc:sldMkLst>
+          <pc:docMk/>
+          <pc:sldMk cId="0" sldId="264"/>
+        </pc:sldMkLst>
+        <pc:spChg chg="mod">
+          <ac:chgData name="명준 송" userId="7e48128a0c33bc37" providerId="LiveId" clId="{A62D5C53-2774-4FE3-8307-3525D25D70A4}" dt="2026-06-02T04:50:59.725" v="66" actId="20577"/>
+          <ac:spMkLst>
+            <pc:docMk/>
+            <pc:sldMk cId="0" sldId="264"/>
+            <ac:spMk id="4" creationId="{00000000-0000-0000-0000-000000000000}"/>
+          </ac:spMkLst>
+        </pc:spChg>
+        <pc:picChg chg="mod">
+          <ac:chgData name="명준 송" userId="7e48128a0c33bc37" providerId="LiveId" clId="{A62D5C53-2774-4FE3-8307-3525D25D70A4}" dt="2026-06-02T04:46:40.931" v="12" actId="14826"/>
+          <ac:picMkLst>
+            <pc:docMk/>
+            <pc:sldMk cId="0" sldId="264"/>
+            <ac:picMk id="7" creationId="{00000000-0000-0000-0000-000000000000}"/>
+          </ac:picMkLst>
+        </pc:picChg>
+      </pc:sldChg>
+      <pc:sldChg chg="modSp mod">
+        <pc:chgData name="명준 송" userId="7e48128a0c33bc37" providerId="LiveId" clId="{A62D5C53-2774-4FE3-8307-3525D25D70A4}" dt="2026-06-02T04:50:17.366" v="34" actId="20577"/>
+        <pc:sldMkLst>
+          <pc:docMk/>
+          <pc:sldMk cId="0" sldId="265"/>
+        </pc:sldMkLst>
+        <pc:spChg chg="mod">
+          <ac:chgData name="명준 송" userId="7e48128a0c33bc37" providerId="LiveId" clId="{A62D5C53-2774-4FE3-8307-3525D25D70A4}" dt="2026-06-02T04:50:17.366" v="34" actId="20577"/>
+          <ac:spMkLst>
+            <pc:docMk/>
+            <pc:sldMk cId="0" sldId="265"/>
+            <ac:spMk id="4" creationId="{00000000-0000-0000-0000-000000000000}"/>
+          </ac:spMkLst>
+        </pc:spChg>
+      </pc:sldChg>
+      <pc:sldChg chg="modSp mod">
+        <pc:chgData name="명준 송" userId="7e48128a0c33bc37" providerId="LiveId" clId="{A62D5C53-2774-4FE3-8307-3525D25D70A4}" dt="2026-06-02T04:50:22.620" v="38" actId="20577"/>
+        <pc:sldMkLst>
+          <pc:docMk/>
+          <pc:sldMk cId="0" sldId="266"/>
+        </pc:sldMkLst>
+        <pc:spChg chg="mod">
+          <ac:chgData name="명준 송" userId="7e48128a0c33bc37" providerId="LiveId" clId="{A62D5C53-2774-4FE3-8307-3525D25D70A4}" dt="2026-06-02T04:50:22.620" v="38" actId="20577"/>
+          <ac:spMkLst>
+            <pc:docMk/>
+            <pc:sldMk cId="0" sldId="266"/>
+            <ac:spMk id="4" creationId="{00000000-0000-0000-0000-000000000000}"/>
+          </ac:spMkLst>
+        </pc:spChg>
+      </pc:sldChg>
       <pc:sldChg chg="addSp modSp mod">
-        <pc:chgData name="명준 송" userId="7e48128a0c33bc37" providerId="LiveId" clId="{A62D5C53-2774-4FE3-8307-3525D25D70A4}" dt="2026-06-02T04:18:34.892" v="11" actId="20577"/>
+        <pc:chgData name="명준 송" userId="7e48128a0c33bc37" providerId="LiveId" clId="{A62D5C53-2774-4FE3-8307-3525D25D70A4}" dt="2026-06-02T04:50:26.471" v="40" actId="20577"/>
         <pc:sldMkLst>
           <pc:docMk/>
           <pc:sldMk cId="0" sldId="267"/>
         </pc:sldMkLst>
+        <pc:spChg chg="mod">
+          <ac:chgData name="명준 송" userId="7e48128a0c33bc37" providerId="LiveId" clId="{A62D5C53-2774-4FE3-8307-3525D25D70A4}" dt="2026-06-02T04:50:26.471" v="40" actId="20577"/>
+          <ac:spMkLst>
+            <pc:docMk/>
+            <pc:sldMk cId="0" sldId="267"/>
+            <ac:spMk id="4" creationId="{00000000-0000-0000-0000-000000000000}"/>
+          </ac:spMkLst>
+        </pc:spChg>
         <pc:spChg chg="mod">
           <ac:chgData name="명준 송" userId="7e48128a0c33bc37" providerId="LiveId" clId="{A62D5C53-2774-4FE3-8307-3525D25D70A4}" dt="2026-06-02T04:18:34.892" v="11" actId="20577"/>
           <ac:spMkLst>
@@ -170,7 +263,7 @@
           </ac:spMkLst>
         </pc:spChg>
         <pc:picChg chg="mod">
-          <ac:chgData name="명준 송" userId="7e48128a0c33bc37" providerId="LiveId" clId="{A62D5C53-2774-4FE3-8307-3525D25D70A4}" dt="2026-06-02T04:17:44.366" v="5" actId="14826"/>
+          <ac:chgData name="명준 송" userId="7e48128a0c33bc37" providerId="LiveId" clId="{A62D5C53-2774-4FE3-8307-3525D25D70A4}" dt="2026-06-02T04:48:06.820" v="15" actId="14100"/>
           <ac:picMkLst>
             <pc:docMk/>
             <pc:sldMk cId="0" sldId="267"/>
@@ -178,13 +271,80 @@
           </ac:picMkLst>
         </pc:picChg>
         <pc:picChg chg="add mod">
-          <ac:chgData name="명준 송" userId="7e48128a0c33bc37" providerId="LiveId" clId="{A62D5C53-2774-4FE3-8307-3525D25D70A4}" dt="2026-06-02T04:17:58.142" v="7" actId="1076"/>
+          <ac:chgData name="명준 송" userId="7e48128a0c33bc37" providerId="LiveId" clId="{A62D5C53-2774-4FE3-8307-3525D25D70A4}" dt="2026-06-02T04:48:12.608" v="17" actId="14100"/>
           <ac:picMkLst>
             <pc:docMk/>
             <pc:sldMk cId="0" sldId="267"/>
             <ac:picMk id="26" creationId="{30383C1C-7B24-148C-3724-379698AD630C}"/>
           </ac:picMkLst>
         </pc:picChg>
+      </pc:sldChg>
+      <pc:sldChg chg="modSp mod">
+        <pc:chgData name="명준 송" userId="7e48128a0c33bc37" providerId="LiveId" clId="{A62D5C53-2774-4FE3-8307-3525D25D70A4}" dt="2026-06-02T04:50:31.168" v="42" actId="20577"/>
+        <pc:sldMkLst>
+          <pc:docMk/>
+          <pc:sldMk cId="0" sldId="270"/>
+        </pc:sldMkLst>
+        <pc:spChg chg="mod">
+          <ac:chgData name="명준 송" userId="7e48128a0c33bc37" providerId="LiveId" clId="{A62D5C53-2774-4FE3-8307-3525D25D70A4}" dt="2026-06-02T04:50:31.168" v="42" actId="20577"/>
+          <ac:spMkLst>
+            <pc:docMk/>
+            <pc:sldMk cId="0" sldId="270"/>
+            <ac:spMk id="4" creationId="{00000000-0000-0000-0000-000000000000}"/>
+          </ac:spMkLst>
+        </pc:spChg>
+      </pc:sldChg>
+      <pc:sldChg chg="modSp mod">
+        <pc:chgData name="명준 송" userId="7e48128a0c33bc37" providerId="LiveId" clId="{A62D5C53-2774-4FE3-8307-3525D25D70A4}" dt="2026-06-02T04:50:35.734" v="44" actId="20577"/>
+        <pc:sldMkLst>
+          <pc:docMk/>
+          <pc:sldMk cId="0" sldId="271"/>
+        </pc:sldMkLst>
+        <pc:spChg chg="mod">
+          <ac:chgData name="명준 송" userId="7e48128a0c33bc37" providerId="LiveId" clId="{A62D5C53-2774-4FE3-8307-3525D25D70A4}" dt="2026-06-02T04:50:35.734" v="44" actId="20577"/>
+          <ac:spMkLst>
+            <pc:docMk/>
+            <pc:sldMk cId="0" sldId="271"/>
+            <ac:spMk id="4" creationId="{00000000-0000-0000-0000-000000000000}"/>
+          </ac:spMkLst>
+        </pc:spChg>
+      </pc:sldChg>
+      <pc:sldChg chg="add del">
+        <pc:chgData name="명준 송" userId="7e48128a0c33bc37" providerId="LiveId" clId="{A62D5C53-2774-4FE3-8307-3525D25D70A4}" dt="2026-06-02T04:49:44.333" v="24" actId="2696"/>
+        <pc:sldMkLst>
+          <pc:docMk/>
+          <pc:sldMk cId="0" sldId="272"/>
+        </pc:sldMkLst>
+      </pc:sldChg>
+      <pc:sldChg chg="modSp add mod">
+        <pc:chgData name="명준 송" userId="7e48128a0c33bc37" providerId="LiveId" clId="{A62D5C53-2774-4FE3-8307-3525D25D70A4}" dt="2026-06-02T04:51:27.273" v="93" actId="1038"/>
+        <pc:sldMkLst>
+          <pc:docMk/>
+          <pc:sldMk cId="259452641" sldId="272"/>
+        </pc:sldMkLst>
+        <pc:spChg chg="mod">
+          <ac:chgData name="명준 송" userId="7e48128a0c33bc37" providerId="LiveId" clId="{A62D5C53-2774-4FE3-8307-3525D25D70A4}" dt="2026-06-02T04:51:27.273" v="93" actId="1038"/>
+          <ac:spMkLst>
+            <pc:docMk/>
+            <pc:sldMk cId="259452641" sldId="272"/>
+            <ac:spMk id="4" creationId="{00000000-0000-0000-0000-000000000000}"/>
+          </ac:spMkLst>
+        </pc:spChg>
+      </pc:sldChg>
+      <pc:sldChg chg="modSp add del">
+        <pc:chgData name="명준 송" userId="7e48128a0c33bc37" providerId="LiveId" clId="{A62D5C53-2774-4FE3-8307-3525D25D70A4}" dt="2026-06-02T04:49:33.764" v="22"/>
+        <pc:sldMkLst>
+          <pc:docMk/>
+          <pc:sldMk cId="2224600294" sldId="272"/>
+        </pc:sldMkLst>
+        <pc:spChg chg="mod">
+          <ac:chgData name="명준 송" userId="7e48128a0c33bc37" providerId="LiveId" clId="{A62D5C53-2774-4FE3-8307-3525D25D70A4}" dt="2026-06-02T04:49:33.314" v="21"/>
+          <ac:spMkLst>
+            <pc:docMk/>
+            <pc:sldMk cId="2224600294" sldId="272"/>
+            <ac:spMk id="4" creationId="{00000000-0000-0000-0000-000000000000}"/>
+          </ac:spMkLst>
+        </pc:spChg>
       </pc:sldChg>
     </pc:docChg>
   </pc:docChgLst>
@@ -4079,7 +4239,7 @@
         <p:spPr>
           <a:xfrm>
             <a:off x="502920" y="320040"/>
-            <a:ext cx="11155680" cy="365760"/>
+            <a:ext cx="11155680" cy="251351"/>
           </a:xfrm>
           <a:prstGeom prst="rect">
             <a:avLst/>
@@ -4104,14 +4264,47 @@
               </a:spcAft>
             </a:pPr>
             <a:r>
-              <a:rPr sz="1300" b="1">
+              <a:rPr sz="1300" b="1" dirty="0">
                 <a:solidFill>
                   <a:srgbClr val="FF3B3B"/>
                 </a:solidFill>
                 <a:latin typeface="Consolas"/>
               </a:rPr>
-              <a:t>08 · AI TOOL</a:t>
-            </a:r>
+              <a:t>0</a:t>
+            </a:r>
+            <a:r>
+              <a:rPr lang="en-US" sz="1300" b="1" dirty="0">
+                <a:solidFill>
+                  <a:srgbClr val="FF3B3B"/>
+                </a:solidFill>
+                <a:latin typeface="Consolas"/>
+              </a:rPr>
+              <a:t>8</a:t>
+            </a:r>
+            <a:r>
+              <a:rPr sz="1300" b="1" dirty="0">
+                <a:solidFill>
+                  <a:srgbClr val="FF3B3B"/>
+                </a:solidFill>
+                <a:latin typeface="Consolas"/>
+              </a:rPr>
+              <a:t> · RESULT</a:t>
+            </a:r>
+            <a:r>
+              <a:rPr lang="en-US" sz="1300" b="1" dirty="0">
+                <a:solidFill>
+                  <a:srgbClr val="FF3B3B"/>
+                </a:solidFill>
+                <a:latin typeface="Consolas"/>
+              </a:rPr>
+              <a:t> – Interest Ranking</a:t>
+            </a:r>
+            <a:endParaRPr sz="1300" b="1" dirty="0">
+              <a:solidFill>
+                <a:srgbClr val="FF3B3B"/>
+              </a:solidFill>
+              <a:latin typeface="Consolas"/>
+            </a:endParaRPr>
           </a:p>
         </p:txBody>
       </p:sp>
@@ -4155,7 +4348,7 @@
                 </a:solidFill>
                 <a:latin typeface="Segoe UI"/>
               </a:rPr>
-              <a:t>Viewing-Taste Persona</a:t>
+              <a:t>Result — Interest Ranking + AI Tools</a:t>
             </a:r>
           </a:p>
         </p:txBody>
@@ -4207,7 +4400,7 @@
       </p:sp>
       <p:pic>
         <p:nvPicPr>
-          <p:cNvPr id="7" name="Picture 6" descr="페르소나.png"/>
+          <p:cNvPr id="7" name="Picture 6"/>
           <p:cNvPicPr>
             <a:picLocks noChangeAspect="1"/>
           </p:cNvPicPr>
@@ -4215,14 +4408,13 @@
         </p:nvPicPr>
         <p:blipFill>
           <a:blip r:embed="rId2"/>
-          <a:stretch>
-            <a:fillRect/>
-          </a:stretch>
+          <a:srcRect/>
+          <a:stretch/>
         </p:blipFill>
         <p:spPr>
           <a:xfrm>
-            <a:off x="502920" y="1955048"/>
-            <a:ext cx="7406640" cy="3953743"/>
+            <a:off x="502920" y="1954948"/>
+            <a:ext cx="7406640" cy="3953942"/>
           </a:xfrm>
           <a:prstGeom prst="rect">
             <a:avLst/>
@@ -4313,13 +4505,13 @@
               </a:spcAft>
             </a:pPr>
             <a:r>
-              <a:rPr sz="1500" b="1">
+              <a:rPr sz="1600" b="1">
                 <a:solidFill>
                   <a:srgbClr val="FF3B3B"/>
                 </a:solidFill>
                 <a:latin typeface="Segoe UI"/>
               </a:rPr>
-              <a:t>Solar LLM Interpretation</a:t>
+              <a:t>Screen Layout</a:t>
             </a:r>
           </a:p>
         </p:txBody>
@@ -4364,7 +4556,16 @@
                 </a:solidFill>
                 <a:latin typeface="Segoe UI"/>
               </a:rPr>
-              <a:t>Takes channel scores &amp;</a:t>
+              <a:t>• Per-channel </a:t>
+            </a:r>
+            <a:r>
+              <a:rPr sz="1300" b="1">
+                <a:solidFill>
+                  <a:srgbClr val="F2F2F2"/>
+                </a:solidFill>
+                <a:latin typeface="Segoe UI"/>
+              </a:rPr>
+              <a:t>Interest Score·rank</a:t>
             </a:r>
           </a:p>
           <a:p>
@@ -4380,35 +4581,76 @@
               </a:spcAft>
             </a:pPr>
             <a:r>
+              <a:rPr sz="1100" b="0">
+                <a:solidFill>
+                  <a:srgbClr val="9A9AA2"/>
+                </a:solidFill>
+                <a:latin typeface="Segoe UI"/>
+              </a:rPr>
+              <a:t>  (#rank · cmt · likes · subs)</a:t>
+            </a:r>
+          </a:p>
+          <a:p>
+            <a:pPr algn="l">
+              <a:lnSpc>
+                <a:spcPct val="112000"/>
+              </a:lnSpc>
+              <a:spcBef>
+                <a:spcPts val="0"/>
+              </a:spcBef>
+              <a:spcAft>
+                <a:spcPts val="600"/>
+              </a:spcAft>
+            </a:pPr>
+            <a:endParaRPr sz="1100" b="0">
+              <a:solidFill>
+                <a:srgbClr val="9A9AA2"/>
+              </a:solidFill>
+              <a:latin typeface="Segoe UI"/>
+            </a:endParaRPr>
+          </a:p>
+          <a:p>
+            <a:pPr algn="l">
+              <a:lnSpc>
+                <a:spcPct val="112000"/>
+              </a:lnSpc>
+              <a:spcBef>
+                <a:spcPts val="0"/>
+              </a:spcBef>
+              <a:spcAft>
+                <a:spcPts val="600"/>
+              </a:spcAft>
+            </a:pPr>
+            <a:r>
               <a:rPr sz="1300" b="0">
                 <a:solidFill>
+                  <a:srgbClr val="F2F2F2"/>
+                </a:solidFill>
+                <a:latin typeface="Segoe UI"/>
+              </a:rPr>
+              <a:t>• Zero-score channels sorted</a:t>
+            </a:r>
+          </a:p>
+          <a:p>
+            <a:pPr algn="l">
+              <a:lnSpc>
+                <a:spcPct val="112000"/>
+              </a:lnSpc>
+              <a:spcBef>
+                <a:spcPts val="0"/>
+              </a:spcBef>
+              <a:spcAft>
+                <a:spcPts val="600"/>
+              </a:spcAft>
+            </a:pPr>
+            <a:r>
+              <a:rPr sz="1300" b="0">
+                <a:solidFill>
                   <a:srgbClr val="9A9AA2"/>
                 </a:solidFill>
                 <a:latin typeface="Segoe UI"/>
               </a:rPr>
-              <a:t>category distribution, then</a:t>
-            </a:r>
-          </a:p>
-          <a:p>
-            <a:pPr algn="l">
-              <a:lnSpc>
-                <a:spcPct val="112000"/>
-              </a:lnSpc>
-              <a:spcBef>
-                <a:spcPts val="0"/>
-              </a:spcBef>
-              <a:spcAft>
-                <a:spcPts val="600"/>
-              </a:spcAft>
-            </a:pPr>
-            <a:r>
-              <a:rPr sz="1300" b="0">
-                <a:solidFill>
-                  <a:srgbClr val="9A9AA2"/>
-                </a:solidFill>
-                <a:latin typeface="Segoe UI"/>
-              </a:rPr>
-              <a:t>writes one taste report</a:t>
+              <a:t>  to the bottom as dormant</a:t>
             </a:r>
           </a:p>
           <a:p>
@@ -4443,13 +4685,22 @@
               </a:spcAft>
             </a:pPr>
             <a:r>
+              <a:rPr sz="1300" b="0">
+                <a:solidFill>
+                  <a:srgbClr val="F2F2F2"/>
+                </a:solidFill>
+                <a:latin typeface="Segoe UI"/>
+              </a:rPr>
+              <a:t>• Bottom </a:t>
+            </a:r>
+            <a:r>
               <a:rPr sz="1300" b="1">
                 <a:solidFill>
-                  <a:srgbClr val="F4A844"/>
-                </a:solidFill>
-                <a:latin typeface="Segoe UI"/>
-              </a:rPr>
-              <a:t>Example result:</a:t>
+                  <a:srgbClr val="2ECC71"/>
+                </a:solidFill>
+                <a:latin typeface="Segoe UI"/>
+              </a:rPr>
+              <a:t>🤖 AI Analysis Tools</a:t>
             </a:r>
           </a:p>
           <a:p>
@@ -4465,13 +4716,13 @@
               </a:spcAft>
             </a:pPr>
             <a:r>
-              <a:rPr sz="1300" b="1">
-                <a:solidFill>
-                  <a:srgbClr val="F2F2F2"/>
-                </a:solidFill>
-                <a:latin typeface="Segoe UI"/>
-              </a:rPr>
-              <a:t>"Solo-cooking + Game/</a:t>
+              <a:rPr sz="1300" b="0">
+                <a:solidFill>
+                  <a:srgbClr val="9A9AA2"/>
+                </a:solidFill>
+                <a:latin typeface="Segoe UI"/>
+              </a:rPr>
+              <a:t>  — 3 selectable modes</a:t>
             </a:r>
           </a:p>
           <a:p>
@@ -4487,13 +4738,13 @@
               </a:spcAft>
             </a:pPr>
             <a:r>
-              <a:rPr sz="1300" b="1">
-                <a:solidFill>
-                  <a:srgbClr val="F2F2F2"/>
-                </a:solidFill>
-                <a:latin typeface="Segoe UI"/>
-              </a:rPr>
-              <a:t> History buff"</a:t>
+              <a:rPr sz="1200" b="0">
+                <a:solidFill>
+                  <a:srgbClr val="9A9AA2"/>
+                </a:solidFill>
+                <a:latin typeface="Segoe UI"/>
+              </a:rPr>
+              <a:t>   - Viewing-Taste Persona</a:t>
             </a:r>
           </a:p>
           <a:p>
@@ -4508,12 +4759,15 @@
                 <a:spcPts val="600"/>
               </a:spcAft>
             </a:pPr>
-            <a:endParaRPr sz="1300" b="1">
-              <a:solidFill>
-                <a:srgbClr val="F2F2F2"/>
-              </a:solidFill>
-              <a:latin typeface="Segoe UI"/>
-            </a:endParaRPr>
+            <a:r>
+              <a:rPr sz="1200" b="0">
+                <a:solidFill>
+                  <a:srgbClr val="9A9AA2"/>
+                </a:solidFill>
+                <a:latin typeface="Segoe UI"/>
+              </a:rPr>
+              <a:t>   - Subscription Cleanup Coach</a:t>
+            </a:r>
           </a:p>
           <a:p>
             <a:pPr algn="l">
@@ -4534,73 +4788,7 @@
                 </a:solidFill>
                 <a:latin typeface="Segoe UI"/>
               </a:rPr>
-              <a:t>• Solo-Cooking Master</a:t>
-            </a:r>
-          </a:p>
-          <a:p>
-            <a:pPr algn="l">
-              <a:lnSpc>
-                <a:spcPct val="112000"/>
-              </a:lnSpc>
-              <a:spcBef>
-                <a:spcPts val="0"/>
-              </a:spcBef>
-              <a:spcAft>
-                <a:spcPts val="600"/>
-              </a:spcAft>
-            </a:pPr>
-            <a:r>
-              <a:rPr sz="1200" b="0">
-                <a:solidFill>
-                  <a:srgbClr val="9A9AA2"/>
-                </a:solidFill>
-                <a:latin typeface="Segoe UI"/>
-              </a:rPr>
-              <a:t>• Game Strategist</a:t>
-            </a:r>
-          </a:p>
-          <a:p>
-            <a:pPr algn="l">
-              <a:lnSpc>
-                <a:spcPct val="112000"/>
-              </a:lnSpc>
-              <a:spcBef>
-                <a:spcPts val="0"/>
-              </a:spcBef>
-              <a:spcAft>
-                <a:spcPts val="600"/>
-              </a:spcAft>
-            </a:pPr>
-            <a:r>
-              <a:rPr sz="1200" b="0">
-                <a:solidFill>
-                  <a:srgbClr val="9A9AA2"/>
-                </a:solidFill>
-                <a:latin typeface="Segoe UI"/>
-              </a:rPr>
-              <a:t>• History + Slang buff</a:t>
-            </a:r>
-          </a:p>
-          <a:p>
-            <a:pPr algn="l">
-              <a:lnSpc>
-                <a:spcPct val="112000"/>
-              </a:lnSpc>
-              <a:spcBef>
-                <a:spcPts val="0"/>
-              </a:spcBef>
-              <a:spcAft>
-                <a:spcPts val="600"/>
-              </a:spcAft>
-            </a:pPr>
-            <a:r>
-              <a:rPr sz="1200" b="0">
-                <a:solidFill>
-                  <a:srgbClr val="9A9AA2"/>
-                </a:solidFill>
-                <a:latin typeface="Segoe UI"/>
-              </a:rPr>
-              <a:t>• Healthy-Food Experimenter</a:t>
+              <a:t>   - New Channel Recommendation</a:t>
             </a:r>
           </a:p>
           <a:p>
@@ -4635,13 +4823,13 @@
               </a:spcAft>
             </a:pPr>
             <a:r>
-              <a:rPr sz="1200" b="0">
-                <a:solidFill>
-                  <a:srgbClr val="6A6A72"/>
-                </a:solidFill>
-                <a:latin typeface="Segoe UI"/>
-              </a:rPr>
-              <a:t>→ tags·subtitles·summary</a:t>
+              <a:rPr sz="1300" b="0">
+                <a:solidFill>
+                  <a:srgbClr val="F2F2F2"/>
+                </a:solidFill>
+                <a:latin typeface="Segoe UI"/>
+              </a:rPr>
+              <a:t>• Floating button re-opens</a:t>
             </a:r>
           </a:p>
           <a:p>
@@ -4657,13 +4845,13 @@
               </a:spcAft>
             </a:pPr>
             <a:r>
-              <a:rPr sz="1200" b="0">
-                <a:solidFill>
-                  <a:srgbClr val="6A6A72"/>
-                </a:solidFill>
-                <a:latin typeface="Segoe UI"/>
-              </a:rPr>
-              <a:t>   as structured JSON</a:t>
+              <a:rPr sz="1300" b="0">
+                <a:solidFill>
+                  <a:srgbClr val="9A9AA2"/>
+                </a:solidFill>
+                <a:latin typeface="Segoe UI"/>
+              </a:rPr>
+              <a:t>  the tools anytime</a:t>
             </a:r>
           </a:p>
         </p:txBody>
@@ -4792,7 +4980,7 @@
         <p:spPr>
           <a:xfrm>
             <a:off x="502920" y="320040"/>
-            <a:ext cx="11155680" cy="365760"/>
+            <a:ext cx="11155680" cy="251351"/>
           </a:xfrm>
           <a:prstGeom prst="rect">
             <a:avLst/>
@@ -4817,13 +5005,31 @@
               </a:spcAft>
             </a:pPr>
             <a:r>
-              <a:rPr sz="1300" b="1">
+              <a:rPr sz="1300" b="1" dirty="0">
                 <a:solidFill>
                   <a:srgbClr val="FF3B3B"/>
                 </a:solidFill>
                 <a:latin typeface="Consolas"/>
               </a:rPr>
-              <a:t>09 · AI TOOL</a:t>
+              <a:t>0</a:t>
+            </a:r>
+            <a:r>
+              <a:rPr lang="en-US" sz="1300" b="1" dirty="0">
+                <a:solidFill>
+                  <a:srgbClr val="FF3B3B"/>
+                </a:solidFill>
+                <a:latin typeface="Consolas"/>
+              </a:rPr>
+              <a:t>9</a:t>
+            </a:r>
+            <a:r>
+              <a:rPr sz="1300" b="1" dirty="0">
+                <a:solidFill>
+                  <a:srgbClr val="FF3B3B"/>
+                </a:solidFill>
+                <a:latin typeface="Consolas"/>
+              </a:rPr>
+              <a:t> · AI TOOL</a:t>
             </a:r>
           </a:p>
         </p:txBody>
@@ -4868,7 +5074,7 @@
                 </a:solidFill>
                 <a:latin typeface="Segoe UI"/>
               </a:rPr>
-              <a:t>Subscription Cleanup Coach</a:t>
+              <a:t>Viewing-Taste Persona</a:t>
             </a:r>
           </a:p>
         </p:txBody>
@@ -4920,7 +5126,7 @@
       </p:sp>
       <p:pic>
         <p:nvPicPr>
-          <p:cNvPr id="7" name="Picture 6" descr="구독 정리 코치.png"/>
+          <p:cNvPr id="7" name="Picture 6" descr="페르소나.png"/>
           <p:cNvPicPr>
             <a:picLocks noChangeAspect="1"/>
           </p:cNvPicPr>
@@ -4934,8 +5140,8 @@
         </p:blipFill>
         <p:spPr>
           <a:xfrm>
-            <a:off x="502920" y="1954949"/>
-            <a:ext cx="7406640" cy="3953942"/>
+            <a:off x="502920" y="1955048"/>
+            <a:ext cx="7406640" cy="3953743"/>
           </a:xfrm>
           <a:prstGeom prst="rect">
             <a:avLst/>
@@ -5026,13 +5232,13 @@
               </a:spcAft>
             </a:pPr>
             <a:r>
-              <a:rPr sz="1600" b="1">
+              <a:rPr sz="1500" b="1">
                 <a:solidFill>
                   <a:srgbClr val="FF3B3B"/>
                 </a:solidFill>
                 <a:latin typeface="Segoe UI"/>
               </a:rPr>
-              <a:t>Cleanup Logic</a:t>
+              <a:t>Solar LLM Interpretation</a:t>
             </a:r>
           </a:p>
         </p:txBody>
@@ -5077,7 +5283,7 @@
                 </a:solidFill>
                 <a:latin typeface="Segoe UI"/>
               </a:rPr>
-              <a:t>LLM judges dormant &amp;</a:t>
+              <a:t>Takes channel scores &amp;</a:t>
             </a:r>
           </a:p>
           <a:p>
@@ -5099,7 +5305,7 @@
                 </a:solidFill>
                 <a:latin typeface="Segoe UI"/>
               </a:rPr>
-              <a:t>low-interest channels</a:t>
+              <a:t>category distribution, then</a:t>
             </a:r>
           </a:p>
           <a:p>
@@ -5121,7 +5327,7 @@
                 </a:solidFill>
                 <a:latin typeface="Segoe UI"/>
               </a:rPr>
-              <a:t>(score &lt; 20)</a:t>
+              <a:t>writes one taste report</a:t>
             </a:r>
           </a:p>
           <a:p>
@@ -5156,22 +5362,57 @@
               </a:spcAft>
             </a:pPr>
             <a:r>
-              <a:rPr sz="1300" b="0">
+              <a:rPr sz="1300" b="1">
+                <a:solidFill>
+                  <a:srgbClr val="F4A844"/>
+                </a:solidFill>
+                <a:latin typeface="Segoe UI"/>
+              </a:rPr>
+              <a:t>Example result:</a:t>
+            </a:r>
+          </a:p>
+          <a:p>
+            <a:pPr algn="l">
+              <a:lnSpc>
+                <a:spcPct val="112000"/>
+              </a:lnSpc>
+              <a:spcBef>
+                <a:spcPts val="0"/>
+              </a:spcBef>
+              <a:spcAft>
+                <a:spcPts val="600"/>
+              </a:spcAft>
+            </a:pPr>
+            <a:r>
+              <a:rPr sz="1300" b="1">
                 <a:solidFill>
                   <a:srgbClr val="F2F2F2"/>
                 </a:solidFill>
                 <a:latin typeface="Segoe UI"/>
               </a:rPr>
-              <a:t>🔴 </a:t>
-            </a:r>
+              <a:t>"Solo-cooking + Game/</a:t>
+            </a:r>
+          </a:p>
+          <a:p>
+            <a:pPr algn="l">
+              <a:lnSpc>
+                <a:spcPct val="112000"/>
+              </a:lnSpc>
+              <a:spcBef>
+                <a:spcPts val="0"/>
+              </a:spcBef>
+              <a:spcAft>
+                <a:spcPts val="600"/>
+              </a:spcAft>
+            </a:pPr>
             <a:r>
               <a:rPr sz="1300" b="1">
                 <a:solidFill>
-                  <a:srgbClr val="FF3B3B"/>
-                </a:solidFill>
-                <a:latin typeface="Segoe UI"/>
-              </a:rPr>
-              <a:t>Drop Recommended</a:t>
+                  <a:srgbClr val="F2F2F2"/>
+                </a:solidFill>
+                <a:latin typeface="Segoe UI"/>
+              </a:rPr>
+              <a:t> History buff"</a:t>
             </a:r>
           </a:p>
           <a:p>
@@ -5186,6 +5427,25 @@
                 <a:spcPts val="600"/>
               </a:spcAft>
             </a:pPr>
+            <a:endParaRPr sz="1300" b="1">
+              <a:solidFill>
+                <a:srgbClr val="F2F2F2"/>
+              </a:solidFill>
+              <a:latin typeface="Segoe UI"/>
+            </a:endParaRPr>
+          </a:p>
+          <a:p>
+            <a:pPr algn="l">
+              <a:lnSpc>
+                <a:spcPct val="112000"/>
+              </a:lnSpc>
+              <a:spcBef>
+                <a:spcPts val="0"/>
+              </a:spcBef>
+              <a:spcAft>
+                <a:spcPts val="600"/>
+              </a:spcAft>
+            </a:pPr>
             <a:r>
               <a:rPr sz="1200" b="0">
                 <a:solidFill>
@@ -5193,7 +5453,73 @@
                 </a:solidFill>
                 <a:latin typeface="Segoe UI"/>
               </a:rPr>
-              <a:t>   long inactivity (2yr+)</a:t>
+              <a:t>• Solo-Cooking Master</a:t>
+            </a:r>
+          </a:p>
+          <a:p>
+            <a:pPr algn="l">
+              <a:lnSpc>
+                <a:spcPct val="112000"/>
+              </a:lnSpc>
+              <a:spcBef>
+                <a:spcPts val="0"/>
+              </a:spcBef>
+              <a:spcAft>
+                <a:spcPts val="600"/>
+              </a:spcAft>
+            </a:pPr>
+            <a:r>
+              <a:rPr sz="1200" b="0">
+                <a:solidFill>
+                  <a:srgbClr val="9A9AA2"/>
+                </a:solidFill>
+                <a:latin typeface="Segoe UI"/>
+              </a:rPr>
+              <a:t>• Game Strategist</a:t>
+            </a:r>
+          </a:p>
+          <a:p>
+            <a:pPr algn="l">
+              <a:lnSpc>
+                <a:spcPct val="112000"/>
+              </a:lnSpc>
+              <a:spcBef>
+                <a:spcPts val="0"/>
+              </a:spcBef>
+              <a:spcAft>
+                <a:spcPts val="600"/>
+              </a:spcAft>
+            </a:pPr>
+            <a:r>
+              <a:rPr sz="1200" b="0">
+                <a:solidFill>
+                  <a:srgbClr val="9A9AA2"/>
+                </a:solidFill>
+                <a:latin typeface="Segoe UI"/>
+              </a:rPr>
+              <a:t>• History + Slang buff</a:t>
+            </a:r>
+          </a:p>
+          <a:p>
+            <a:pPr algn="l">
+              <a:lnSpc>
+                <a:spcPct val="112000"/>
+              </a:lnSpc>
+              <a:spcBef>
+                <a:spcPts val="0"/>
+              </a:spcBef>
+              <a:spcAft>
+                <a:spcPts val="600"/>
+              </a:spcAft>
+            </a:pPr>
+            <a:r>
+              <a:rPr sz="1200" b="0">
+                <a:solidFill>
+                  <a:srgbClr val="9A9AA2"/>
+                </a:solidFill>
+                <a:latin typeface="Segoe UI"/>
+              </a:rPr>
+              <a:t>• Healthy-Food Experimenter</a:t>
             </a:r>
           </a:p>
           <a:p>
@@ -5228,22 +5554,13 @@
               </a:spcAft>
             </a:pPr>
             <a:r>
-              <a:rPr sz="1300" b="0">
-                <a:solidFill>
-                  <a:srgbClr val="F2F2F2"/>
-                </a:solidFill>
-                <a:latin typeface="Segoe UI"/>
-              </a:rPr>
-              <a:t>🟡 </a:t>
-            </a:r>
-            <a:r>
-              <a:rPr sz="1300" b="1">
-                <a:solidFill>
-                  <a:srgbClr val="F4A844"/>
-                </a:solidFill>
-                <a:latin typeface="Segoe UI"/>
-              </a:rPr>
-              <a:t>Keep for Now</a:t>
+              <a:rPr sz="1200" b="0">
+                <a:solidFill>
+                  <a:srgbClr val="6A6A72"/>
+                </a:solidFill>
+                <a:latin typeface="Segoe UI"/>
+              </a:rPr>
+              <a:t>→ tags·subtitles·summary</a:t>
             </a:r>
           </a:p>
           <a:p>
@@ -5261,96 +5578,11 @@
             <a:r>
               <a:rPr sz="1200" b="0">
                 <a:solidFill>
-                  <a:srgbClr val="9A9AA2"/>
-                </a:solidFill>
-                <a:latin typeface="Segoe UI"/>
-              </a:rPr>
-              <a:t>   inactive within 1 year</a:t>
-            </a:r>
-          </a:p>
-          <a:p>
-            <a:pPr algn="l">
-              <a:lnSpc>
-                <a:spcPct val="112000"/>
-              </a:lnSpc>
-              <a:spcBef>
-                <a:spcPts val="0"/>
-              </a:spcBef>
-              <a:spcAft>
-                <a:spcPts val="600"/>
-              </a:spcAft>
-            </a:pPr>
-            <a:endParaRPr sz="1200" b="0">
-              <a:solidFill>
-                <a:srgbClr val="9A9AA2"/>
-              </a:solidFill>
-              <a:latin typeface="Segoe UI"/>
-            </a:endParaRPr>
-          </a:p>
-          <a:p>
-            <a:pPr algn="l">
-              <a:lnSpc>
-                <a:spcPct val="112000"/>
-              </a:lnSpc>
-              <a:spcBef>
-                <a:spcPts val="0"/>
-              </a:spcBef>
-              <a:spcAft>
-                <a:spcPts val="600"/>
-              </a:spcAft>
-            </a:pPr>
-            <a:r>
-              <a:rPr sz="1300" b="0">
-                <a:solidFill>
-                  <a:srgbClr val="F2F2F2"/>
-                </a:solidFill>
-                <a:latin typeface="Segoe UI"/>
-              </a:rPr>
-              <a:t>Each with a stated reason</a:t>
-            </a:r>
-          </a:p>
-          <a:p>
-            <a:pPr algn="l">
-              <a:lnSpc>
-                <a:spcPct val="112000"/>
-              </a:lnSpc>
-              <a:spcBef>
-                <a:spcPts val="0"/>
-              </a:spcBef>
-              <a:spcAft>
-                <a:spcPts val="600"/>
-              </a:spcAft>
-            </a:pPr>
-            <a:r>
-              <a:rPr sz="1200" b="0">
-                <a:solidFill>
-                  <a:srgbClr val="9A9AA2"/>
-                </a:solidFill>
-                <a:latin typeface="Segoe UI"/>
-              </a:rPr>
-              <a:t>("active ~1530 days ago,</a:t>
-            </a:r>
-          </a:p>
-          <a:p>
-            <a:pPr algn="l">
-              <a:lnSpc>
-                <a:spcPct val="112000"/>
-              </a:lnSpc>
-              <a:spcBef>
-                <a:spcPts val="0"/>
-              </a:spcBef>
-              <a:spcAft>
-                <a:spcPts val="600"/>
-              </a:spcAft>
-            </a:pPr>
-            <a:r>
-              <a:rPr sz="1200" b="0">
-                <a:solidFill>
-                  <a:srgbClr val="9A9AA2"/>
-                </a:solidFill>
-                <a:latin typeface="Segoe UI"/>
-              </a:rPr>
-              <a:t>  inactive 51 months")</a:t>
+                  <a:srgbClr val="6A6A72"/>
+                </a:solidFill>
+                <a:latin typeface="Segoe UI"/>
+              </a:rPr>
+              <a:t>   as structured JSON</a:t>
             </a:r>
           </a:p>
         </p:txBody>
@@ -5479,7 +5711,7 @@
         <p:spPr>
           <a:xfrm>
             <a:off x="502920" y="320040"/>
-            <a:ext cx="11155680" cy="365760"/>
+            <a:ext cx="11155680" cy="251351"/>
           </a:xfrm>
           <a:prstGeom prst="rect">
             <a:avLst/>
@@ -5504,13 +5736,22 @@
               </a:spcAft>
             </a:pPr>
             <a:r>
-              <a:rPr sz="1300" b="1">
+              <a:rPr lang="en-US" sz="1300" b="1" dirty="0">
                 <a:solidFill>
                   <a:srgbClr val="FF3B3B"/>
                 </a:solidFill>
                 <a:latin typeface="Consolas"/>
               </a:rPr>
-              <a:t>10 · AI TOOL</a:t>
+              <a:t>10</a:t>
+            </a:r>
+            <a:r>
+              <a:rPr sz="1300" b="1" dirty="0">
+                <a:solidFill>
+                  <a:srgbClr val="FF3B3B"/>
+                </a:solidFill>
+                <a:latin typeface="Consolas"/>
+              </a:rPr>
+              <a:t> · AI TOOL</a:t>
             </a:r>
           </a:p>
         </p:txBody>
@@ -5524,7 +5765,7 @@
         <p:spPr>
           <a:xfrm>
             <a:off x="502920" y="603504"/>
-            <a:ext cx="11155680" cy="512961"/>
+            <a:ext cx="11155680" cy="640080"/>
           </a:xfrm>
           <a:prstGeom prst="rect">
             <a:avLst/>
@@ -5555,16 +5796,7 @@
                 </a:solidFill>
                 <a:latin typeface="Segoe UI"/>
               </a:rPr>
-              <a:t>Channel </a:t>
-            </a:r>
-            <a:r>
-              <a:rPr sz="3000" b="1" dirty="0">
-                <a:solidFill>
-                  <a:srgbClr val="F2F2F2"/>
-                </a:solidFill>
-                <a:latin typeface="Segoe UI"/>
-              </a:rPr>
-              <a:t>Recommendation — Video-First Discovery</a:t>
+              <a:t>Subscription Cleanup Coach</a:t>
             </a:r>
           </a:p>
         </p:txBody>
@@ -5616,7 +5848,7 @@
       </p:sp>
       <p:pic>
         <p:nvPicPr>
-          <p:cNvPr id="7" name="Picture 6"/>
+          <p:cNvPr id="7" name="Picture 6" descr="구독 정리 코치.png"/>
           <p:cNvPicPr>
             <a:picLocks noChangeAspect="1"/>
           </p:cNvPicPr>
@@ -5624,13 +5856,14 @@
         </p:nvPicPr>
         <p:blipFill>
           <a:blip r:embed="rId2"/>
-          <a:srcRect/>
-          <a:stretch/>
+          <a:stretch>
+            <a:fillRect/>
+          </a:stretch>
         </p:blipFill>
         <p:spPr>
           <a:xfrm>
-            <a:off x="1203323" y="1460585"/>
-            <a:ext cx="4493309" cy="2409430"/>
+            <a:off x="502920" y="1954949"/>
+            <a:ext cx="7406640" cy="3953942"/>
           </a:xfrm>
           <a:prstGeom prst="rect">
             <a:avLst/>
@@ -5650,8 +5883,8 @@
         </p:nvSpPr>
         <p:spPr>
           <a:xfrm>
-            <a:off x="7086600" y="1463040"/>
-            <a:ext cx="4599432" cy="4937760"/>
+            <a:off x="8092440" y="1463040"/>
+            <a:ext cx="3593592" cy="4937760"/>
           </a:xfrm>
           <a:prstGeom prst="roundRect">
             <a:avLst/>
@@ -5695,8 +5928,8 @@
         </p:nvSpPr>
         <p:spPr>
           <a:xfrm>
-            <a:off x="7315200" y="1645920"/>
-            <a:ext cx="4206240" cy="548640"/>
+            <a:off x="8321040" y="1691640"/>
+            <a:ext cx="3200400" cy="457200"/>
           </a:xfrm>
           <a:prstGeom prst="rect">
             <a:avLst/>
@@ -5721,793 +5954,335 @@
               </a:spcAft>
             </a:pPr>
             <a:r>
-              <a:rPr sz="1400" b="1">
+              <a:rPr sz="1600" b="1">
                 <a:solidFill>
                   <a:srgbClr val="FF3B3B"/>
                 </a:solidFill>
                 <a:latin typeface="Segoe UI"/>
               </a:rPr>
-              <a:t>Anti-hallucination: don't invent</a:t>
-            </a:r>
-          </a:p>
-          <a:p>
-            <a:pPr algn="l">
-              <a:lnSpc>
-                <a:spcPct val="100000"/>
-              </a:lnSpc>
-              <a:spcBef>
-                <a:spcPts val="0"/>
-              </a:spcBef>
-              <a:spcAft>
-                <a:spcPts val="600"/>
-              </a:spcAft>
-            </a:pPr>
-            <a:r>
-              <a:rPr sz="1400" b="1">
+              <a:t>Cleanup Logic</a:t>
+            </a:r>
+          </a:p>
+        </p:txBody>
+      </p:sp>
+      <p:sp>
+        <p:nvSpPr>
+          <p:cNvPr id="10" name="TextBox 9"/>
+          <p:cNvSpPr txBox="1"/>
+          <p:nvPr/>
+        </p:nvSpPr>
+        <p:spPr>
+          <a:xfrm>
+            <a:off x="8321040" y="2240280"/>
+            <a:ext cx="3246120" cy="4023360"/>
+          </a:xfrm>
+          <a:prstGeom prst="rect">
+            <a:avLst/>
+          </a:prstGeom>
+          <a:noFill/>
+        </p:spPr>
+        <p:txBody>
+          <a:bodyPr wrap="square" lIns="25400" tIns="25400" rIns="25400" bIns="25400" anchor="t">
+            <a:spAutoFit/>
+          </a:bodyPr>
+          <a:lstStyle/>
+          <a:p>
+            <a:pPr algn="l">
+              <a:lnSpc>
+                <a:spcPct val="112000"/>
+              </a:lnSpc>
+              <a:spcBef>
+                <a:spcPts val="0"/>
+              </a:spcBef>
+              <a:spcAft>
+                <a:spcPts val="600"/>
+              </a:spcAft>
+            </a:pPr>
+            <a:r>
+              <a:rPr sz="1300" b="0">
+                <a:solidFill>
+                  <a:srgbClr val="F2F2F2"/>
+                </a:solidFill>
+                <a:latin typeface="Segoe UI"/>
+              </a:rPr>
+              <a:t>LLM judges dormant &amp;</a:t>
+            </a:r>
+          </a:p>
+          <a:p>
+            <a:pPr algn="l">
+              <a:lnSpc>
+                <a:spcPct val="112000"/>
+              </a:lnSpc>
+              <a:spcBef>
+                <a:spcPts val="0"/>
+              </a:spcBef>
+              <a:spcAft>
+                <a:spcPts val="600"/>
+              </a:spcAft>
+            </a:pPr>
+            <a:r>
+              <a:rPr sz="1300" b="0">
+                <a:solidFill>
+                  <a:srgbClr val="9A9AA2"/>
+                </a:solidFill>
+                <a:latin typeface="Segoe UI"/>
+              </a:rPr>
+              <a:t>low-interest channels</a:t>
+            </a:r>
+          </a:p>
+          <a:p>
+            <a:pPr algn="l">
+              <a:lnSpc>
+                <a:spcPct val="112000"/>
+              </a:lnSpc>
+              <a:spcBef>
+                <a:spcPts val="0"/>
+              </a:spcBef>
+              <a:spcAft>
+                <a:spcPts val="600"/>
+              </a:spcAft>
+            </a:pPr>
+            <a:r>
+              <a:rPr sz="1300" b="0">
+                <a:solidFill>
+                  <a:srgbClr val="9A9AA2"/>
+                </a:solidFill>
+                <a:latin typeface="Segoe UI"/>
+              </a:rPr>
+              <a:t>(score &lt; 20)</a:t>
+            </a:r>
+          </a:p>
+          <a:p>
+            <a:pPr algn="l">
+              <a:lnSpc>
+                <a:spcPct val="112000"/>
+              </a:lnSpc>
+              <a:spcBef>
+                <a:spcPts val="0"/>
+              </a:spcBef>
+              <a:spcAft>
+                <a:spcPts val="600"/>
+              </a:spcAft>
+            </a:pPr>
+            <a:endParaRPr sz="1300" b="0">
+              <a:solidFill>
+                <a:srgbClr val="9A9AA2"/>
+              </a:solidFill>
+              <a:latin typeface="Segoe UI"/>
+            </a:endParaRPr>
+          </a:p>
+          <a:p>
+            <a:pPr algn="l">
+              <a:lnSpc>
+                <a:spcPct val="112000"/>
+              </a:lnSpc>
+              <a:spcBef>
+                <a:spcPts val="0"/>
+              </a:spcBef>
+              <a:spcAft>
+                <a:spcPts val="600"/>
+              </a:spcAft>
+            </a:pPr>
+            <a:r>
+              <a:rPr sz="1300" b="0">
+                <a:solidFill>
+                  <a:srgbClr val="F2F2F2"/>
+                </a:solidFill>
+                <a:latin typeface="Segoe UI"/>
+              </a:rPr>
+              <a:t>🔴 </a:t>
+            </a:r>
+            <a:r>
+              <a:rPr sz="1300" b="1">
                 <a:solidFill>
                   <a:srgbClr val="FF3B3B"/>
                 </a:solidFill>
                 <a:latin typeface="Segoe UI"/>
               </a:rPr>
-              <a:t>names — reverse-trace real videos</a:t>
-            </a:r>
-          </a:p>
-        </p:txBody>
-      </p:sp>
-      <p:sp>
-        <p:nvSpPr>
-          <p:cNvPr id="10" name="TextBox 9"/>
-          <p:cNvSpPr txBox="1"/>
-          <p:nvPr/>
-        </p:nvSpPr>
-        <p:spPr>
-          <a:xfrm>
-            <a:off x="7315200" y="2468880"/>
-            <a:ext cx="457200" cy="548640"/>
-          </a:xfrm>
-          <a:prstGeom prst="rect">
-            <a:avLst/>
-          </a:prstGeom>
-          <a:noFill/>
-        </p:spPr>
-        <p:txBody>
-          <a:bodyPr wrap="square" lIns="25400" tIns="25400" rIns="25400" bIns="25400" anchor="t">
-            <a:spAutoFit/>
-          </a:bodyPr>
-          <a:lstStyle/>
-          <a:p>
-            <a:pPr algn="l">
-              <a:lnSpc>
-                <a:spcPct val="100000"/>
-              </a:lnSpc>
-              <a:spcBef>
-                <a:spcPts val="0"/>
-              </a:spcBef>
-              <a:spcAft>
-                <a:spcPts val="600"/>
-              </a:spcAft>
-            </a:pPr>
-            <a:r>
-              <a:rPr sz="1800" b="1">
-                <a:solidFill>
-                  <a:srgbClr val="2ECC71"/>
-                </a:solidFill>
-                <a:latin typeface="Segoe UI"/>
-              </a:rPr>
-              <a:t>①</a:t>
-            </a:r>
-          </a:p>
-        </p:txBody>
-      </p:sp>
-      <p:sp>
-        <p:nvSpPr>
-          <p:cNvPr id="11" name="TextBox 10"/>
-          <p:cNvSpPr txBox="1"/>
-          <p:nvPr/>
-        </p:nvSpPr>
-        <p:spPr>
-          <a:xfrm>
-            <a:off x="7772400" y="2468880"/>
-            <a:ext cx="3749039" cy="365760"/>
-          </a:xfrm>
-          <a:prstGeom prst="rect">
-            <a:avLst/>
-          </a:prstGeom>
-          <a:noFill/>
-        </p:spPr>
-        <p:txBody>
-          <a:bodyPr wrap="square" lIns="25400" tIns="25400" rIns="25400" bIns="25400" anchor="t">
-            <a:spAutoFit/>
-          </a:bodyPr>
-          <a:lstStyle/>
-          <a:p>
-            <a:pPr algn="l">
-              <a:lnSpc>
-                <a:spcPct val="100000"/>
-              </a:lnSpc>
-              <a:spcBef>
-                <a:spcPts val="0"/>
-              </a:spcBef>
-              <a:spcAft>
-                <a:spcPts val="600"/>
-              </a:spcAft>
-            </a:pPr>
+              <a:t>Drop Recommended</a:t>
+            </a:r>
+          </a:p>
+          <a:p>
+            <a:pPr algn="l">
+              <a:lnSpc>
+                <a:spcPct val="112000"/>
+              </a:lnSpc>
+              <a:spcBef>
+                <a:spcPts val="0"/>
+              </a:spcBef>
+              <a:spcAft>
+                <a:spcPts val="600"/>
+              </a:spcAft>
+            </a:pPr>
+            <a:r>
+              <a:rPr sz="1200" b="0">
+                <a:solidFill>
+                  <a:srgbClr val="9A9AA2"/>
+                </a:solidFill>
+                <a:latin typeface="Segoe UI"/>
+              </a:rPr>
+              <a:t>   long inactivity (2yr+)</a:t>
+            </a:r>
+          </a:p>
+          <a:p>
+            <a:pPr algn="l">
+              <a:lnSpc>
+                <a:spcPct val="112000"/>
+              </a:lnSpc>
+              <a:spcBef>
+                <a:spcPts val="0"/>
+              </a:spcBef>
+              <a:spcAft>
+                <a:spcPts val="600"/>
+              </a:spcAft>
+            </a:pPr>
+            <a:endParaRPr sz="1200" b="0">
+              <a:solidFill>
+                <a:srgbClr val="9A9AA2"/>
+              </a:solidFill>
+              <a:latin typeface="Segoe UI"/>
+            </a:endParaRPr>
+          </a:p>
+          <a:p>
+            <a:pPr algn="l">
+              <a:lnSpc>
+                <a:spcPct val="112000"/>
+              </a:lnSpc>
+              <a:spcBef>
+                <a:spcPts val="0"/>
+              </a:spcBef>
+              <a:spcAft>
+                <a:spcPts val="600"/>
+              </a:spcAft>
+            </a:pPr>
+            <a:r>
+              <a:rPr sz="1300" b="0">
+                <a:solidFill>
+                  <a:srgbClr val="F2F2F2"/>
+                </a:solidFill>
+                <a:latin typeface="Segoe UI"/>
+              </a:rPr>
+              <a:t>🟡 </a:t>
+            </a:r>
             <a:r>
               <a:rPr sz="1300" b="1">
                 <a:solidFill>
+                  <a:srgbClr val="F4A844"/>
+                </a:solidFill>
+                <a:latin typeface="Segoe UI"/>
+              </a:rPr>
+              <a:t>Keep for Now</a:t>
+            </a:r>
+          </a:p>
+          <a:p>
+            <a:pPr algn="l">
+              <a:lnSpc>
+                <a:spcPct val="112000"/>
+              </a:lnSpc>
+              <a:spcBef>
+                <a:spcPts val="0"/>
+              </a:spcBef>
+              <a:spcAft>
+                <a:spcPts val="600"/>
+              </a:spcAft>
+            </a:pPr>
+            <a:r>
+              <a:rPr sz="1200" b="0">
+                <a:solidFill>
+                  <a:srgbClr val="9A9AA2"/>
+                </a:solidFill>
+                <a:latin typeface="Segoe UI"/>
+              </a:rPr>
+              <a:t>   inactive within 1 year</a:t>
+            </a:r>
+          </a:p>
+          <a:p>
+            <a:pPr algn="l">
+              <a:lnSpc>
+                <a:spcPct val="112000"/>
+              </a:lnSpc>
+              <a:spcBef>
+                <a:spcPts val="0"/>
+              </a:spcBef>
+              <a:spcAft>
+                <a:spcPts val="600"/>
+              </a:spcAft>
+            </a:pPr>
+            <a:endParaRPr sz="1200" b="0">
+              <a:solidFill>
+                <a:srgbClr val="9A9AA2"/>
+              </a:solidFill>
+              <a:latin typeface="Segoe UI"/>
+            </a:endParaRPr>
+          </a:p>
+          <a:p>
+            <a:pPr algn="l">
+              <a:lnSpc>
+                <a:spcPct val="112000"/>
+              </a:lnSpc>
+              <a:spcBef>
+                <a:spcPts val="0"/>
+              </a:spcBef>
+              <a:spcAft>
+                <a:spcPts val="600"/>
+              </a:spcAft>
+            </a:pPr>
+            <a:r>
+              <a:rPr sz="1300" b="0">
+                <a:solidFill>
                   <a:srgbClr val="F2F2F2"/>
                 </a:solidFill>
                 <a:latin typeface="Segoe UI"/>
               </a:rPr>
-              <a:t>Extract interest keywords</a:t>
-            </a:r>
-          </a:p>
-        </p:txBody>
-      </p:sp>
-      <p:sp>
-        <p:nvSpPr>
-          <p:cNvPr id="12" name="TextBox 11"/>
-          <p:cNvSpPr txBox="1"/>
-          <p:nvPr/>
-        </p:nvSpPr>
-        <p:spPr>
-          <a:xfrm>
-            <a:off x="7772400" y="2770632"/>
-            <a:ext cx="3749039" cy="365760"/>
-          </a:xfrm>
-          <a:prstGeom prst="rect">
-            <a:avLst/>
-          </a:prstGeom>
-          <a:noFill/>
-        </p:spPr>
-        <p:txBody>
-          <a:bodyPr wrap="square" lIns="25400" tIns="25400" rIns="25400" bIns="25400" anchor="t">
-            <a:spAutoFit/>
-          </a:bodyPr>
-          <a:lstStyle/>
-          <a:p>
-            <a:pPr algn="l">
-              <a:lnSpc>
-                <a:spcPct val="100000"/>
-              </a:lnSpc>
-              <a:spcBef>
-                <a:spcPts val="0"/>
-              </a:spcBef>
-              <a:spcAft>
-                <a:spcPts val="600"/>
-              </a:spcAft>
-            </a:pPr>
-            <a:r>
-              <a:rPr sz="1100" b="0">
+              <a:t>Each with a stated reason</a:t>
+            </a:r>
+          </a:p>
+          <a:p>
+            <a:pPr algn="l">
+              <a:lnSpc>
+                <a:spcPct val="112000"/>
+              </a:lnSpc>
+              <a:spcBef>
+                <a:spcPts val="0"/>
+              </a:spcBef>
+              <a:spcAft>
+                <a:spcPts val="600"/>
+              </a:spcAft>
+            </a:pPr>
+            <a:r>
+              <a:rPr sz="1200" b="0">
                 <a:solidFill>
                   <a:srgbClr val="9A9AA2"/>
                 </a:solidFill>
-                <a:latin typeface="Consolas"/>
-              </a:rPr>
-              <a:t>top channels + recent titles</a:t>
-            </a:r>
-          </a:p>
-        </p:txBody>
-      </p:sp>
-      <p:sp>
-        <p:nvSpPr>
-          <p:cNvPr id="13" name="TextBox 12"/>
-          <p:cNvSpPr txBox="1"/>
-          <p:nvPr/>
-        </p:nvSpPr>
-        <p:spPr>
-          <a:xfrm>
-            <a:off x="7315200" y="3218688"/>
-            <a:ext cx="457200" cy="548640"/>
-          </a:xfrm>
-          <a:prstGeom prst="rect">
-            <a:avLst/>
-          </a:prstGeom>
-          <a:noFill/>
-        </p:spPr>
-        <p:txBody>
-          <a:bodyPr wrap="square" lIns="25400" tIns="25400" rIns="25400" bIns="25400" anchor="t">
-            <a:spAutoFit/>
-          </a:bodyPr>
-          <a:lstStyle/>
-          <a:p>
-            <a:pPr algn="l">
-              <a:lnSpc>
-                <a:spcPct val="100000"/>
-              </a:lnSpc>
-              <a:spcBef>
-                <a:spcPts val="0"/>
-              </a:spcBef>
-              <a:spcAft>
-                <a:spcPts val="600"/>
-              </a:spcAft>
-            </a:pPr>
-            <a:r>
-              <a:rPr sz="1800" b="1">
-                <a:solidFill>
-                  <a:srgbClr val="2ECC71"/>
-                </a:solidFill>
-                <a:latin typeface="Segoe UI"/>
-              </a:rPr>
-              <a:t>②</a:t>
-            </a:r>
-          </a:p>
-        </p:txBody>
-      </p:sp>
-      <p:sp>
-        <p:nvSpPr>
-          <p:cNvPr id="14" name="TextBox 13"/>
-          <p:cNvSpPr txBox="1"/>
-          <p:nvPr/>
-        </p:nvSpPr>
-        <p:spPr>
-          <a:xfrm>
-            <a:off x="7772400" y="3218688"/>
-            <a:ext cx="3749039" cy="365760"/>
-          </a:xfrm>
-          <a:prstGeom prst="rect">
-            <a:avLst/>
-          </a:prstGeom>
-          <a:noFill/>
-        </p:spPr>
-        <p:txBody>
-          <a:bodyPr wrap="square" lIns="25400" tIns="25400" rIns="25400" bIns="25400" anchor="t">
-            <a:spAutoFit/>
-          </a:bodyPr>
-          <a:lstStyle/>
-          <a:p>
-            <a:pPr algn="l">
-              <a:lnSpc>
-                <a:spcPct val="100000"/>
-              </a:lnSpc>
-              <a:spcBef>
-                <a:spcPts val="0"/>
-              </a:spcBef>
-              <a:spcAft>
-                <a:spcPts val="600"/>
-              </a:spcAft>
-            </a:pPr>
-            <a:r>
-              <a:rPr sz="1300" b="1">
-                <a:solidFill>
-                  <a:srgbClr val="F2F2F2"/>
-                </a:solidFill>
-                <a:latin typeface="Segoe UI"/>
-              </a:rPr>
-              <a:t>Search videos per keyword</a:t>
-            </a:r>
-          </a:p>
-        </p:txBody>
-      </p:sp>
-      <p:sp>
-        <p:nvSpPr>
-          <p:cNvPr id="15" name="TextBox 14"/>
-          <p:cNvSpPr txBox="1"/>
-          <p:nvPr/>
-        </p:nvSpPr>
-        <p:spPr>
-          <a:xfrm>
-            <a:off x="7772400" y="3520440"/>
-            <a:ext cx="3749039" cy="365760"/>
-          </a:xfrm>
-          <a:prstGeom prst="rect">
-            <a:avLst/>
-          </a:prstGeom>
-          <a:noFill/>
-        </p:spPr>
-        <p:txBody>
-          <a:bodyPr wrap="square" lIns="25400" tIns="25400" rIns="25400" bIns="25400" anchor="t">
-            <a:spAutoFit/>
-          </a:bodyPr>
-          <a:lstStyle/>
-          <a:p>
-            <a:pPr algn="l">
-              <a:lnSpc>
-                <a:spcPct val="100000"/>
-              </a:lnSpc>
-              <a:spcBef>
-                <a:spcPts val="0"/>
-              </a:spcBef>
-              <a:spcAft>
-                <a:spcPts val="600"/>
-              </a:spcAft>
-            </a:pPr>
-            <a:r>
-              <a:rPr sz="1100" b="0">
+                <a:latin typeface="Segoe UI"/>
+              </a:rPr>
+              <a:t>("active ~1530 days ago,</a:t>
+            </a:r>
+          </a:p>
+          <a:p>
+            <a:pPr algn="l">
+              <a:lnSpc>
+                <a:spcPct val="112000"/>
+              </a:lnSpc>
+              <a:spcBef>
+                <a:spcPts val="0"/>
+              </a:spcBef>
+              <a:spcAft>
+                <a:spcPts val="600"/>
+              </a:spcAft>
+            </a:pPr>
+            <a:r>
+              <a:rPr sz="1200" b="0">
                 <a:solidFill>
                   <a:srgbClr val="9A9AA2"/>
                 </a:solidFill>
-                <a:latin typeface="Consolas"/>
-              </a:rPr>
-              <a:t>search.list → collect channelId</a:t>
-            </a:r>
-          </a:p>
-        </p:txBody>
-      </p:sp>
-      <p:sp>
-        <p:nvSpPr>
-          <p:cNvPr id="16" name="TextBox 15"/>
-          <p:cNvSpPr txBox="1"/>
-          <p:nvPr/>
-        </p:nvSpPr>
-        <p:spPr>
-          <a:xfrm>
-            <a:off x="7315200" y="3968496"/>
-            <a:ext cx="457200" cy="548640"/>
-          </a:xfrm>
-          <a:prstGeom prst="rect">
-            <a:avLst/>
-          </a:prstGeom>
-          <a:noFill/>
-        </p:spPr>
-        <p:txBody>
-          <a:bodyPr wrap="square" lIns="25400" tIns="25400" rIns="25400" bIns="25400" anchor="t">
-            <a:spAutoFit/>
-          </a:bodyPr>
-          <a:lstStyle/>
-          <a:p>
-            <a:pPr algn="l">
-              <a:lnSpc>
-                <a:spcPct val="100000"/>
-              </a:lnSpc>
-              <a:spcBef>
-                <a:spcPts val="0"/>
-              </a:spcBef>
-              <a:spcAft>
-                <a:spcPts val="600"/>
-              </a:spcAft>
-            </a:pPr>
-            <a:r>
-              <a:rPr sz="1800" b="1">
-                <a:solidFill>
-                  <a:srgbClr val="2ECC71"/>
-                </a:solidFill>
-                <a:latin typeface="Segoe UI"/>
-              </a:rPr>
-              <a:t>③</a:t>
-            </a:r>
-          </a:p>
-        </p:txBody>
-      </p:sp>
-      <p:sp>
-        <p:nvSpPr>
-          <p:cNvPr id="17" name="TextBox 16"/>
-          <p:cNvSpPr txBox="1"/>
-          <p:nvPr/>
-        </p:nvSpPr>
-        <p:spPr>
-          <a:xfrm>
-            <a:off x="7772400" y="3968496"/>
-            <a:ext cx="3749039" cy="365760"/>
-          </a:xfrm>
-          <a:prstGeom prst="rect">
-            <a:avLst/>
-          </a:prstGeom>
-          <a:noFill/>
-        </p:spPr>
-        <p:txBody>
-          <a:bodyPr wrap="square" lIns="25400" tIns="25400" rIns="25400" bIns="25400" anchor="t">
-            <a:spAutoFit/>
-          </a:bodyPr>
-          <a:lstStyle/>
-          <a:p>
-            <a:pPr algn="l">
-              <a:lnSpc>
-                <a:spcPct val="100000"/>
-              </a:lnSpc>
-              <a:spcBef>
-                <a:spcPts val="0"/>
-              </a:spcBef>
-              <a:spcAft>
-                <a:spcPts val="600"/>
-              </a:spcAft>
-            </a:pPr>
-            <a:r>
-              <a:rPr sz="1300" b="1">
-                <a:solidFill>
-                  <a:srgbClr val="F2F2F2"/>
-                </a:solidFill>
-                <a:latin typeface="Segoe UI"/>
-              </a:rPr>
-              <a:t>Aggregate channelId frequency</a:t>
-            </a:r>
-          </a:p>
-        </p:txBody>
-      </p:sp>
-      <p:sp>
-        <p:nvSpPr>
-          <p:cNvPr id="18" name="TextBox 17"/>
-          <p:cNvSpPr txBox="1"/>
-          <p:nvPr/>
-        </p:nvSpPr>
-        <p:spPr>
-          <a:xfrm>
-            <a:off x="7772400" y="4270248"/>
-            <a:ext cx="3749039" cy="365760"/>
-          </a:xfrm>
-          <a:prstGeom prst="rect">
-            <a:avLst/>
-          </a:prstGeom>
-          <a:noFill/>
-        </p:spPr>
-        <p:txBody>
-          <a:bodyPr wrap="square" lIns="25400" tIns="25400" rIns="25400" bIns="25400" anchor="t">
-            <a:spAutoFit/>
-          </a:bodyPr>
-          <a:lstStyle/>
-          <a:p>
-            <a:pPr algn="l">
-              <a:lnSpc>
-                <a:spcPct val="100000"/>
-              </a:lnSpc>
-              <a:spcBef>
-                <a:spcPts val="0"/>
-              </a:spcBef>
-              <a:spcAft>
-                <a:spcPts val="600"/>
-              </a:spcAft>
-            </a:pPr>
-            <a:r>
-              <a:rPr sz="1100" b="0">
-                <a:solidFill>
-                  <a:srgbClr val="9A9AA2"/>
-                </a:solidFill>
-                <a:latin typeface="Consolas"/>
-              </a:rPr>
-              <a:t>2+ keywords = real topic</a:t>
-            </a:r>
-          </a:p>
-        </p:txBody>
-      </p:sp>
-      <p:sp>
-        <p:nvSpPr>
-          <p:cNvPr id="19" name="TextBox 18"/>
-          <p:cNvSpPr txBox="1"/>
-          <p:nvPr/>
-        </p:nvSpPr>
-        <p:spPr>
-          <a:xfrm>
-            <a:off x="7315200" y="4718304"/>
-            <a:ext cx="457200" cy="548640"/>
-          </a:xfrm>
-          <a:prstGeom prst="rect">
-            <a:avLst/>
-          </a:prstGeom>
-          <a:noFill/>
-        </p:spPr>
-        <p:txBody>
-          <a:bodyPr wrap="square" lIns="25400" tIns="25400" rIns="25400" bIns="25400" anchor="t">
-            <a:spAutoFit/>
-          </a:bodyPr>
-          <a:lstStyle/>
-          <a:p>
-            <a:pPr algn="l">
-              <a:lnSpc>
-                <a:spcPct val="100000"/>
-              </a:lnSpc>
-              <a:spcBef>
-                <a:spcPts val="0"/>
-              </a:spcBef>
-              <a:spcAft>
-                <a:spcPts val="600"/>
-              </a:spcAft>
-            </a:pPr>
-            <a:r>
-              <a:rPr sz="1800" b="1">
-                <a:solidFill>
-                  <a:srgbClr val="2ECC71"/>
-                </a:solidFill>
-                <a:latin typeface="Segoe UI"/>
-              </a:rPr>
-              <a:t>④</a:t>
-            </a:r>
-          </a:p>
-        </p:txBody>
-      </p:sp>
-      <p:sp>
-        <p:nvSpPr>
-          <p:cNvPr id="20" name="TextBox 19"/>
-          <p:cNvSpPr txBox="1"/>
-          <p:nvPr/>
-        </p:nvSpPr>
-        <p:spPr>
-          <a:xfrm>
-            <a:off x="7772400" y="4718304"/>
-            <a:ext cx="3749039" cy="365760"/>
-          </a:xfrm>
-          <a:prstGeom prst="rect">
-            <a:avLst/>
-          </a:prstGeom>
-          <a:noFill/>
-        </p:spPr>
-        <p:txBody>
-          <a:bodyPr wrap="square" lIns="25400" tIns="25400" rIns="25400" bIns="25400" anchor="t">
-            <a:spAutoFit/>
-          </a:bodyPr>
-          <a:lstStyle/>
-          <a:p>
-            <a:pPr algn="l">
-              <a:lnSpc>
-                <a:spcPct val="100000"/>
-              </a:lnSpc>
-              <a:spcBef>
-                <a:spcPts val="0"/>
-              </a:spcBef>
-              <a:spcAft>
-                <a:spcPts val="600"/>
-              </a:spcAft>
-            </a:pPr>
-            <a:r>
-              <a:rPr sz="1300" b="1">
-                <a:solidFill>
-                  <a:srgbClr val="F2F2F2"/>
-                </a:solidFill>
-                <a:latin typeface="Segoe UI"/>
-              </a:rPr>
-              <a:t>Profile candidates</a:t>
-            </a:r>
-          </a:p>
-        </p:txBody>
-      </p:sp>
-      <p:sp>
-        <p:nvSpPr>
-          <p:cNvPr id="21" name="TextBox 20"/>
-          <p:cNvSpPr txBox="1"/>
-          <p:nvPr/>
-        </p:nvSpPr>
-        <p:spPr>
-          <a:xfrm>
-            <a:off x="7772400" y="5020056"/>
-            <a:ext cx="3749039" cy="365760"/>
-          </a:xfrm>
-          <a:prstGeom prst="rect">
-            <a:avLst/>
-          </a:prstGeom>
-          <a:noFill/>
-        </p:spPr>
-        <p:txBody>
-          <a:bodyPr wrap="square" lIns="25400" tIns="25400" rIns="25400" bIns="25400" anchor="t">
-            <a:spAutoFit/>
-          </a:bodyPr>
-          <a:lstStyle/>
-          <a:p>
-            <a:pPr algn="l">
-              <a:lnSpc>
-                <a:spcPct val="100000"/>
-              </a:lnSpc>
-              <a:spcBef>
-                <a:spcPts val="0"/>
-              </a:spcBef>
-              <a:spcAft>
-                <a:spcPts val="600"/>
-              </a:spcAft>
-            </a:pPr>
-            <a:r>
-              <a:rPr sz="1100" b="0">
-                <a:solidFill>
-                  <a:srgbClr val="9A9AA2"/>
-                </a:solidFill>
-                <a:latin typeface="Consolas"/>
-              </a:rPr>
-              <a:t>real desc·titles (1 unit)</a:t>
-            </a:r>
-          </a:p>
-        </p:txBody>
-      </p:sp>
-      <p:sp>
-        <p:nvSpPr>
-          <p:cNvPr id="22" name="TextBox 21"/>
-          <p:cNvSpPr txBox="1"/>
-          <p:nvPr/>
-        </p:nvSpPr>
-        <p:spPr>
-          <a:xfrm>
-            <a:off x="7315200" y="5468112"/>
-            <a:ext cx="457200" cy="548640"/>
-          </a:xfrm>
-          <a:prstGeom prst="rect">
-            <a:avLst/>
-          </a:prstGeom>
-          <a:noFill/>
-        </p:spPr>
-        <p:txBody>
-          <a:bodyPr wrap="square" lIns="25400" tIns="25400" rIns="25400" bIns="25400" anchor="t">
-            <a:spAutoFit/>
-          </a:bodyPr>
-          <a:lstStyle/>
-          <a:p>
-            <a:pPr algn="l">
-              <a:lnSpc>
-                <a:spcPct val="100000"/>
-              </a:lnSpc>
-              <a:spcBef>
-                <a:spcPts val="0"/>
-              </a:spcBef>
-              <a:spcAft>
-                <a:spcPts val="600"/>
-              </a:spcAft>
-            </a:pPr>
-            <a:r>
-              <a:rPr sz="1800" b="1">
-                <a:solidFill>
-                  <a:srgbClr val="2ECC71"/>
-                </a:solidFill>
-                <a:latin typeface="Segoe UI"/>
-              </a:rPr>
-              <a:t>⑤</a:t>
-            </a:r>
-          </a:p>
-        </p:txBody>
-      </p:sp>
-      <p:sp>
-        <p:nvSpPr>
-          <p:cNvPr id="23" name="TextBox 22"/>
-          <p:cNvSpPr txBox="1"/>
-          <p:nvPr/>
-        </p:nvSpPr>
-        <p:spPr>
-          <a:xfrm>
-            <a:off x="7772400" y="5468112"/>
-            <a:ext cx="3749039" cy="365760"/>
-          </a:xfrm>
-          <a:prstGeom prst="rect">
-            <a:avLst/>
-          </a:prstGeom>
-          <a:noFill/>
-        </p:spPr>
-        <p:txBody>
-          <a:bodyPr wrap="square" lIns="25400" tIns="25400" rIns="25400" bIns="25400" anchor="t">
-            <a:spAutoFit/>
-          </a:bodyPr>
-          <a:lstStyle/>
-          <a:p>
-            <a:pPr algn="l">
-              <a:lnSpc>
-                <a:spcPct val="100000"/>
-              </a:lnSpc>
-              <a:spcBef>
-                <a:spcPts val="0"/>
-              </a:spcBef>
-              <a:spcAft>
-                <a:spcPts val="600"/>
-              </a:spcAft>
-            </a:pPr>
-            <a:r>
-              <a:rPr sz="1300" b="1">
-                <a:solidFill>
-                  <a:srgbClr val="F2F2F2"/>
-                </a:solidFill>
-                <a:latin typeface="Segoe UI"/>
-              </a:rPr>
-              <a:t>LLM curation</a:t>
-            </a:r>
-          </a:p>
-        </p:txBody>
-      </p:sp>
-      <p:sp>
-        <p:nvSpPr>
-          <p:cNvPr id="24" name="TextBox 23"/>
-          <p:cNvSpPr txBox="1"/>
-          <p:nvPr/>
-        </p:nvSpPr>
-        <p:spPr>
-          <a:xfrm>
-            <a:off x="7772400" y="5769864"/>
-            <a:ext cx="3749039" cy="365760"/>
-          </a:xfrm>
-          <a:prstGeom prst="rect">
-            <a:avLst/>
-          </a:prstGeom>
-          <a:noFill/>
-        </p:spPr>
-        <p:txBody>
-          <a:bodyPr wrap="square" lIns="25400" tIns="25400" rIns="25400" bIns="25400" anchor="t">
-            <a:spAutoFit/>
-          </a:bodyPr>
-          <a:lstStyle/>
-          <a:p>
-            <a:pPr algn="l">
-              <a:lnSpc>
-                <a:spcPct val="100000"/>
-              </a:lnSpc>
-              <a:spcBef>
-                <a:spcPts val="0"/>
-              </a:spcBef>
-              <a:spcAft>
-                <a:spcPts val="600"/>
-              </a:spcAft>
-            </a:pPr>
-            <a:r>
-              <a:rPr sz="1100" b="0">
-                <a:solidFill>
-                  <a:srgbClr val="9A9AA2"/>
-                </a:solidFill>
-                <a:latin typeface="Consolas"/>
-              </a:rPr>
-              <a:t>rank · reason · fit decision</a:t>
-            </a:r>
-          </a:p>
-        </p:txBody>
-      </p:sp>
-      <p:sp>
-        <p:nvSpPr>
-          <p:cNvPr id="25" name="TextBox 24"/>
-          <p:cNvSpPr txBox="1"/>
-          <p:nvPr/>
-        </p:nvSpPr>
-        <p:spPr>
-          <a:xfrm>
-            <a:off x="7315200" y="6263640"/>
-            <a:ext cx="4206240" cy="365760"/>
-          </a:xfrm>
-          <a:prstGeom prst="rect">
-            <a:avLst/>
-          </a:prstGeom>
-          <a:noFill/>
-        </p:spPr>
-        <p:txBody>
-          <a:bodyPr wrap="square" lIns="25400" tIns="25400" rIns="25400" bIns="25400" anchor="t">
-            <a:spAutoFit/>
-          </a:bodyPr>
-          <a:lstStyle/>
-          <a:p>
-            <a:pPr algn="l">
-              <a:lnSpc>
-                <a:spcPct val="100000"/>
-              </a:lnSpc>
-              <a:spcBef>
-                <a:spcPts val="0"/>
-              </a:spcBef>
-              <a:spcAft>
-                <a:spcPts val="600"/>
-              </a:spcAft>
-            </a:pPr>
-            <a:r>
-              <a:rPr sz="1000" b="0">
-                <a:solidFill>
-                  <a:srgbClr val="6A6A72"/>
-                </a:solidFill>
-                <a:latin typeface="Segoe UI"/>
-              </a:rPr>
-              <a:t>Costly search(100u) only at ②, deep profiling at 1u → quota saved</a:t>
-            </a:r>
-          </a:p>
-        </p:txBody>
-      </p:sp>
-      <p:pic>
-        <p:nvPicPr>
-          <p:cNvPr id="26" name="Picture 6">
-            <a:extLst>
-              <a:ext uri="{FF2B5EF4-FFF2-40B4-BE49-F238E27FC236}">
-                <a16:creationId xmlns:a16="http://schemas.microsoft.com/office/drawing/2014/main" id="{30383C1C-7B24-148C-3724-379698AD630C}"/>
-              </a:ext>
-            </a:extLst>
-          </p:cNvPr>
-          <p:cNvPicPr>
-            <a:picLocks noChangeAspect="1"/>
-          </p:cNvPicPr>
-          <p:nvPr/>
-        </p:nvPicPr>
-        <p:blipFill>
-          <a:blip r:embed="rId3"/>
-          <a:srcRect/>
-          <a:stretch/>
-        </p:blipFill>
-        <p:spPr>
-          <a:xfrm>
-            <a:off x="1172398" y="4225600"/>
-            <a:ext cx="4524234" cy="1954671"/>
-          </a:xfrm>
-          <a:prstGeom prst="rect">
-            <a:avLst/>
-          </a:prstGeom>
-          <a:ln w="12700">
-            <a:solidFill>
-              <a:srgbClr val="33333A"/>
-            </a:solidFill>
-          </a:ln>
-        </p:spPr>
-      </p:pic>
+                <a:latin typeface="Segoe UI"/>
+              </a:rPr>
+              <a:t>  inactive 51 months")</a:t>
+            </a:r>
+          </a:p>
+        </p:txBody>
+      </p:sp>
     </p:spTree>
   </p:cSld>
   <p:clrMapOvr>
@@ -6632,7 +6407,7 @@
         <p:spPr>
           <a:xfrm>
             <a:off x="502920" y="320040"/>
-            <a:ext cx="11155680" cy="365760"/>
+            <a:ext cx="11155680" cy="251351"/>
           </a:xfrm>
           <a:prstGeom prst="rect">
             <a:avLst/>
@@ -6657,13 +6432,31 @@
               </a:spcAft>
             </a:pPr>
             <a:r>
-              <a:rPr sz="1300" b="1">
+              <a:rPr sz="1300" b="1" dirty="0">
                 <a:solidFill>
                   <a:srgbClr val="FF3B3B"/>
                 </a:solidFill>
                 <a:latin typeface="Consolas"/>
               </a:rPr>
-              <a:t>DEV · CATEGORY ENGINE</a:t>
+              <a:t>1</a:t>
+            </a:r>
+            <a:r>
+              <a:rPr lang="en-US" sz="1300" b="1" dirty="0">
+                <a:solidFill>
+                  <a:srgbClr val="FF3B3B"/>
+                </a:solidFill>
+                <a:latin typeface="Consolas"/>
+              </a:rPr>
+              <a:t>1</a:t>
+            </a:r>
+            <a:r>
+              <a:rPr sz="1300" b="1" dirty="0">
+                <a:solidFill>
+                  <a:srgbClr val="FF3B3B"/>
+                </a:solidFill>
+                <a:latin typeface="Consolas"/>
+              </a:rPr>
+              <a:t> · AI TOOL</a:t>
             </a:r>
           </a:p>
         </p:txBody>
@@ -6677,7 +6470,7 @@
         <p:spPr>
           <a:xfrm>
             <a:off x="502920" y="603504"/>
-            <a:ext cx="11155680" cy="640080"/>
+            <a:ext cx="11155680" cy="512961"/>
           </a:xfrm>
           <a:prstGeom prst="rect">
             <a:avLst/>
@@ -6702,13 +6495,22 @@
               </a:spcAft>
             </a:pPr>
             <a:r>
-              <a:rPr sz="2400" b="1">
+              <a:rPr sz="3000" b="1">
                 <a:solidFill>
                   <a:srgbClr val="F2F2F2"/>
                 </a:solidFill>
                 <a:latin typeface="Segoe UI"/>
               </a:rPr>
-              <a:t>Category Classification System — Deterministic + Cosine Similarity</a:t>
+              <a:t>Channel </a:t>
+            </a:r>
+            <a:r>
+              <a:rPr sz="3000" b="1" dirty="0">
+                <a:solidFill>
+                  <a:srgbClr val="F2F2F2"/>
+                </a:solidFill>
+                <a:latin typeface="Segoe UI"/>
+              </a:rPr>
+              <a:t>Recommendation — Video-First Discovery</a:t>
             </a:r>
           </a:p>
         </p:txBody>
@@ -6758,69 +6560,34 @@
           </a:p>
         </p:txBody>
       </p:sp>
-      <p:sp>
-        <p:nvSpPr>
-          <p:cNvPr id="7" name="TextBox 6"/>
-          <p:cNvSpPr txBox="1"/>
-          <p:nvPr/>
-        </p:nvSpPr>
-        <p:spPr>
-          <a:xfrm>
-            <a:off x="502920" y="1371600"/>
-            <a:ext cx="11155680" cy="411480"/>
-          </a:xfrm>
-          <a:prstGeom prst="rect">
-            <a:avLst/>
-          </a:prstGeom>
-          <a:noFill/>
-        </p:spPr>
-        <p:txBody>
-          <a:bodyPr wrap="square" lIns="25400" tIns="25400" rIns="25400" bIns="25400" anchor="t">
-            <a:spAutoFit/>
-          </a:bodyPr>
-          <a:lstStyle/>
-          <a:p>
-            <a:pPr algn="l">
-              <a:lnSpc>
-                <a:spcPct val="100000"/>
-              </a:lnSpc>
-              <a:spcBef>
-                <a:spcPts val="0"/>
-              </a:spcBef>
-              <a:spcAft>
-                <a:spcPts val="600"/>
-              </a:spcAft>
-            </a:pPr>
-            <a:r>
-              <a:rPr sz="1400" b="0">
-                <a:solidFill>
-                  <a:srgbClr val="9A9AA2"/>
-                </a:solidFill>
-                <a:latin typeface="Segoe UI"/>
-              </a:rPr>
-              <a:t>Added during development — auto-classifies channels into categories, a shared base for </a:t>
-            </a:r>
-            <a:r>
-              <a:rPr sz="1400" b="1">
-                <a:solidFill>
-                  <a:srgbClr val="F2F2F2"/>
-                </a:solidFill>
-                <a:latin typeface="Segoe UI"/>
-              </a:rPr>
-              <a:t>recommendation · similar channels · persona. </a:t>
-            </a:r>
-            <a:r>
-              <a:rPr sz="1400" b="1">
-                <a:solidFill>
-                  <a:srgbClr val="2ECC71"/>
-                </a:solidFill>
-                <a:latin typeface="Segoe UI"/>
-              </a:rPr>
-              <a:t>Zero extra API/LLM calls.</a:t>
-            </a:r>
-          </a:p>
-        </p:txBody>
-      </p:sp>
+      <p:pic>
+        <p:nvPicPr>
+          <p:cNvPr id="7" name="Picture 6"/>
+          <p:cNvPicPr>
+            <a:picLocks noChangeAspect="1"/>
+          </p:cNvPicPr>
+          <p:nvPr/>
+        </p:nvPicPr>
+        <p:blipFill>
+          <a:blip r:embed="rId2"/>
+          <a:srcRect/>
+          <a:stretch/>
+        </p:blipFill>
+        <p:spPr>
+          <a:xfrm>
+            <a:off x="906287" y="1329301"/>
+            <a:ext cx="5094770" cy="2731949"/>
+          </a:xfrm>
+          <a:prstGeom prst="rect">
+            <a:avLst/>
+          </a:prstGeom>
+          <a:ln w="12700">
+            <a:solidFill>
+              <a:srgbClr val="33333A"/>
+            </a:solidFill>
+          </a:ln>
+        </p:spPr>
+      </p:pic>
       <p:sp>
         <p:nvSpPr>
           <p:cNvPr id="8" name="Rounded Rectangle 7"/>
@@ -6829,8 +6596,8 @@
         </p:nvSpPr>
         <p:spPr>
           <a:xfrm>
-            <a:off x="502920" y="1920240"/>
-            <a:ext cx="3611880" cy="3154680"/>
+            <a:off x="7086600" y="1463040"/>
+            <a:ext cx="4599432" cy="4937760"/>
           </a:xfrm>
           <a:prstGeom prst="roundRect">
             <a:avLst/>
@@ -6838,10 +6605,8 @@
           <a:solidFill>
             <a:srgbClr val="161619"/>
           </a:solidFill>
-          <a:ln w="12700">
-            <a:solidFill>
-              <a:srgbClr val="2A2A30"/>
-            </a:solidFill>
+          <a:ln>
+            <a:noFill/>
           </a:ln>
           <a:effectLst/>
         </p:spPr>
@@ -6876,8 +6641,8 @@
         </p:nvSpPr>
         <p:spPr>
           <a:xfrm>
-            <a:off x="731520" y="2103120"/>
-            <a:ext cx="3200400" cy="457200"/>
+            <a:off x="7315200" y="1645920"/>
+            <a:ext cx="4206240" cy="548640"/>
           </a:xfrm>
           <a:prstGeom prst="rect">
             <a:avLst/>
@@ -6902,36 +6667,139 @@
               </a:spcAft>
             </a:pPr>
             <a:r>
-              <a:rPr sz="1900" b="0">
+              <a:rPr sz="1400" b="1">
+                <a:solidFill>
+                  <a:srgbClr val="FF3B3B"/>
+                </a:solidFill>
+                <a:latin typeface="Segoe UI"/>
+              </a:rPr>
+              <a:t>Anti-hallucination: don't invent</a:t>
+            </a:r>
+          </a:p>
+          <a:p>
+            <a:pPr algn="l">
+              <a:lnSpc>
+                <a:spcPct val="100000"/>
+              </a:lnSpc>
+              <a:spcBef>
+                <a:spcPts val="0"/>
+              </a:spcBef>
+              <a:spcAft>
+                <a:spcPts val="600"/>
+              </a:spcAft>
+            </a:pPr>
+            <a:r>
+              <a:rPr sz="1400" b="1">
+                <a:solidFill>
+                  <a:srgbClr val="FF3B3B"/>
+                </a:solidFill>
+                <a:latin typeface="Segoe UI"/>
+              </a:rPr>
+              <a:t>names — reverse-trace real videos</a:t>
+            </a:r>
+          </a:p>
+        </p:txBody>
+      </p:sp>
+      <p:sp>
+        <p:nvSpPr>
+          <p:cNvPr id="10" name="TextBox 9"/>
+          <p:cNvSpPr txBox="1"/>
+          <p:nvPr/>
+        </p:nvSpPr>
+        <p:spPr>
+          <a:xfrm>
+            <a:off x="7315200" y="2468880"/>
+            <a:ext cx="457200" cy="548640"/>
+          </a:xfrm>
+          <a:prstGeom prst="rect">
+            <a:avLst/>
+          </a:prstGeom>
+          <a:noFill/>
+        </p:spPr>
+        <p:txBody>
+          <a:bodyPr wrap="square" lIns="25400" tIns="25400" rIns="25400" bIns="25400" anchor="t">
+            <a:spAutoFit/>
+          </a:bodyPr>
+          <a:lstStyle/>
+          <a:p>
+            <a:pPr algn="l">
+              <a:lnSpc>
+                <a:spcPct val="100000"/>
+              </a:lnSpc>
+              <a:spcBef>
+                <a:spcPts val="0"/>
+              </a:spcBef>
+              <a:spcAft>
+                <a:spcPts val="600"/>
+              </a:spcAft>
+            </a:pPr>
+            <a:r>
+              <a:rPr sz="1800" b="1">
+                <a:solidFill>
+                  <a:srgbClr val="2ECC71"/>
+                </a:solidFill>
+                <a:latin typeface="Segoe UI"/>
+              </a:rPr>
+              <a:t>①</a:t>
+            </a:r>
+          </a:p>
+        </p:txBody>
+      </p:sp>
+      <p:sp>
+        <p:nvSpPr>
+          <p:cNvPr id="11" name="TextBox 10"/>
+          <p:cNvSpPr txBox="1"/>
+          <p:nvPr/>
+        </p:nvSpPr>
+        <p:spPr>
+          <a:xfrm>
+            <a:off x="7772400" y="2468880"/>
+            <a:ext cx="3749039" cy="365760"/>
+          </a:xfrm>
+          <a:prstGeom prst="rect">
+            <a:avLst/>
+          </a:prstGeom>
+          <a:noFill/>
+        </p:spPr>
+        <p:txBody>
+          <a:bodyPr wrap="square" lIns="25400" tIns="25400" rIns="25400" bIns="25400" anchor="t">
+            <a:spAutoFit/>
+          </a:bodyPr>
+          <a:lstStyle/>
+          <a:p>
+            <a:pPr algn="l">
+              <a:lnSpc>
+                <a:spcPct val="100000"/>
+              </a:lnSpc>
+              <a:spcBef>
+                <a:spcPts val="0"/>
+              </a:spcBef>
+              <a:spcAft>
+                <a:spcPts val="600"/>
+              </a:spcAft>
+            </a:pPr>
+            <a:r>
+              <a:rPr sz="1300" b="1">
                 <a:solidFill>
                   <a:srgbClr val="F2F2F2"/>
                 </a:solidFill>
                 <a:latin typeface="Segoe UI"/>
               </a:rPr>
-              <a:t>📚  </a:t>
-            </a:r>
-            <a:r>
-              <a:rPr sz="1500" b="1">
-                <a:solidFill>
-                  <a:srgbClr val="F4A844"/>
-                </a:solidFill>
-                <a:latin typeface="Segoe UI"/>
-              </a:rPr>
-              <a:t>Keyword Lexicon</a:t>
-            </a:r>
-          </a:p>
-        </p:txBody>
-      </p:sp>
-      <p:sp>
-        <p:nvSpPr>
-          <p:cNvPr id="10" name="TextBox 9"/>
-          <p:cNvSpPr txBox="1"/>
-          <p:nvPr/>
-        </p:nvSpPr>
-        <p:spPr>
-          <a:xfrm>
-            <a:off x="731520" y="2487168"/>
-            <a:ext cx="3200400" cy="292608"/>
+              <a:t>Extract interest keywords</a:t>
+            </a:r>
+          </a:p>
+        </p:txBody>
+      </p:sp>
+      <p:sp>
+        <p:nvSpPr>
+          <p:cNvPr id="12" name="TextBox 11"/>
+          <p:cNvSpPr txBox="1"/>
+          <p:nvPr/>
+        </p:nvSpPr>
+        <p:spPr>
+          <a:xfrm>
+            <a:off x="7772400" y="2770632"/>
+            <a:ext cx="3749039" cy="365760"/>
           </a:xfrm>
           <a:prstGeom prst="rect">
             <a:avLst/>
@@ -6958,868 +6826,634 @@
             <a:r>
               <a:rPr sz="1100" b="0">
                 <a:solidFill>
+                  <a:srgbClr val="9A9AA2"/>
+                </a:solidFill>
+                <a:latin typeface="Consolas"/>
+              </a:rPr>
+              <a:t>top channels + recent titles</a:t>
+            </a:r>
+          </a:p>
+        </p:txBody>
+      </p:sp>
+      <p:sp>
+        <p:nvSpPr>
+          <p:cNvPr id="13" name="TextBox 12"/>
+          <p:cNvSpPr txBox="1"/>
+          <p:nvPr/>
+        </p:nvSpPr>
+        <p:spPr>
+          <a:xfrm>
+            <a:off x="7315200" y="3218688"/>
+            <a:ext cx="457200" cy="548640"/>
+          </a:xfrm>
+          <a:prstGeom prst="rect">
+            <a:avLst/>
+          </a:prstGeom>
+          <a:noFill/>
+        </p:spPr>
+        <p:txBody>
+          <a:bodyPr wrap="square" lIns="25400" tIns="25400" rIns="25400" bIns="25400" anchor="t">
+            <a:spAutoFit/>
+          </a:bodyPr>
+          <a:lstStyle/>
+          <a:p>
+            <a:pPr algn="l">
+              <a:lnSpc>
+                <a:spcPct val="100000"/>
+              </a:lnSpc>
+              <a:spcBef>
+                <a:spcPts val="0"/>
+              </a:spcBef>
+              <a:spcAft>
+                <a:spcPts val="600"/>
+              </a:spcAft>
+            </a:pPr>
+            <a:r>
+              <a:rPr sz="1800" b="1">
+                <a:solidFill>
+                  <a:srgbClr val="2ECC71"/>
+                </a:solidFill>
+                <a:latin typeface="Segoe UI"/>
+              </a:rPr>
+              <a:t>②</a:t>
+            </a:r>
+          </a:p>
+        </p:txBody>
+      </p:sp>
+      <p:sp>
+        <p:nvSpPr>
+          <p:cNvPr id="14" name="TextBox 13"/>
+          <p:cNvSpPr txBox="1"/>
+          <p:nvPr/>
+        </p:nvSpPr>
+        <p:spPr>
+          <a:xfrm>
+            <a:off x="7772400" y="3218688"/>
+            <a:ext cx="3749039" cy="365760"/>
+          </a:xfrm>
+          <a:prstGeom prst="rect">
+            <a:avLst/>
+          </a:prstGeom>
+          <a:noFill/>
+        </p:spPr>
+        <p:txBody>
+          <a:bodyPr wrap="square" lIns="25400" tIns="25400" rIns="25400" bIns="25400" anchor="t">
+            <a:spAutoFit/>
+          </a:bodyPr>
+          <a:lstStyle/>
+          <a:p>
+            <a:pPr algn="l">
+              <a:lnSpc>
+                <a:spcPct val="100000"/>
+              </a:lnSpc>
+              <a:spcBef>
+                <a:spcPts val="0"/>
+              </a:spcBef>
+              <a:spcAft>
+                <a:spcPts val="600"/>
+              </a:spcAft>
+            </a:pPr>
+            <a:r>
+              <a:rPr sz="1300" b="1">
+                <a:solidFill>
+                  <a:srgbClr val="F2F2F2"/>
+                </a:solidFill>
+                <a:latin typeface="Segoe UI"/>
+              </a:rPr>
+              <a:t>Search videos per keyword</a:t>
+            </a:r>
+          </a:p>
+        </p:txBody>
+      </p:sp>
+      <p:sp>
+        <p:nvSpPr>
+          <p:cNvPr id="15" name="TextBox 14"/>
+          <p:cNvSpPr txBox="1"/>
+          <p:nvPr/>
+        </p:nvSpPr>
+        <p:spPr>
+          <a:xfrm>
+            <a:off x="7772400" y="3520440"/>
+            <a:ext cx="3749039" cy="365760"/>
+          </a:xfrm>
+          <a:prstGeom prst="rect">
+            <a:avLst/>
+          </a:prstGeom>
+          <a:noFill/>
+        </p:spPr>
+        <p:txBody>
+          <a:bodyPr wrap="square" lIns="25400" tIns="25400" rIns="25400" bIns="25400" anchor="t">
+            <a:spAutoFit/>
+          </a:bodyPr>
+          <a:lstStyle/>
+          <a:p>
+            <a:pPr algn="l">
+              <a:lnSpc>
+                <a:spcPct val="100000"/>
+              </a:lnSpc>
+              <a:spcBef>
+                <a:spcPts val="0"/>
+              </a:spcBef>
+              <a:spcAft>
+                <a:spcPts val="600"/>
+              </a:spcAft>
+            </a:pPr>
+            <a:r>
+              <a:rPr sz="1100" b="0">
+                <a:solidFill>
+                  <a:srgbClr val="9A9AA2"/>
+                </a:solidFill>
+                <a:latin typeface="Consolas"/>
+              </a:rPr>
+              <a:t>search.list → collect channelId</a:t>
+            </a:r>
+          </a:p>
+        </p:txBody>
+      </p:sp>
+      <p:sp>
+        <p:nvSpPr>
+          <p:cNvPr id="16" name="TextBox 15"/>
+          <p:cNvSpPr txBox="1"/>
+          <p:nvPr/>
+        </p:nvSpPr>
+        <p:spPr>
+          <a:xfrm>
+            <a:off x="7315200" y="3968496"/>
+            <a:ext cx="457200" cy="548640"/>
+          </a:xfrm>
+          <a:prstGeom prst="rect">
+            <a:avLst/>
+          </a:prstGeom>
+          <a:noFill/>
+        </p:spPr>
+        <p:txBody>
+          <a:bodyPr wrap="square" lIns="25400" tIns="25400" rIns="25400" bIns="25400" anchor="t">
+            <a:spAutoFit/>
+          </a:bodyPr>
+          <a:lstStyle/>
+          <a:p>
+            <a:pPr algn="l">
+              <a:lnSpc>
+                <a:spcPct val="100000"/>
+              </a:lnSpc>
+              <a:spcBef>
+                <a:spcPts val="0"/>
+              </a:spcBef>
+              <a:spcAft>
+                <a:spcPts val="600"/>
+              </a:spcAft>
+            </a:pPr>
+            <a:r>
+              <a:rPr sz="1800" b="1">
+                <a:solidFill>
+                  <a:srgbClr val="2ECC71"/>
+                </a:solidFill>
+                <a:latin typeface="Segoe UI"/>
+              </a:rPr>
+              <a:t>③</a:t>
+            </a:r>
+          </a:p>
+        </p:txBody>
+      </p:sp>
+      <p:sp>
+        <p:nvSpPr>
+          <p:cNvPr id="17" name="TextBox 16"/>
+          <p:cNvSpPr txBox="1"/>
+          <p:nvPr/>
+        </p:nvSpPr>
+        <p:spPr>
+          <a:xfrm>
+            <a:off x="7772400" y="3968496"/>
+            <a:ext cx="3749039" cy="365760"/>
+          </a:xfrm>
+          <a:prstGeom prst="rect">
+            <a:avLst/>
+          </a:prstGeom>
+          <a:noFill/>
+        </p:spPr>
+        <p:txBody>
+          <a:bodyPr wrap="square" lIns="25400" tIns="25400" rIns="25400" bIns="25400" anchor="t">
+            <a:spAutoFit/>
+          </a:bodyPr>
+          <a:lstStyle/>
+          <a:p>
+            <a:pPr algn="l">
+              <a:lnSpc>
+                <a:spcPct val="100000"/>
+              </a:lnSpc>
+              <a:spcBef>
+                <a:spcPts val="0"/>
+              </a:spcBef>
+              <a:spcAft>
+                <a:spcPts val="600"/>
+              </a:spcAft>
+            </a:pPr>
+            <a:r>
+              <a:rPr sz="1300" b="1">
+                <a:solidFill>
+                  <a:srgbClr val="F2F2F2"/>
+                </a:solidFill>
+                <a:latin typeface="Segoe UI"/>
+              </a:rPr>
+              <a:t>Aggregate channelId frequency</a:t>
+            </a:r>
+          </a:p>
+        </p:txBody>
+      </p:sp>
+      <p:sp>
+        <p:nvSpPr>
+          <p:cNvPr id="18" name="TextBox 17"/>
+          <p:cNvSpPr txBox="1"/>
+          <p:nvPr/>
+        </p:nvSpPr>
+        <p:spPr>
+          <a:xfrm>
+            <a:off x="7772400" y="4270248"/>
+            <a:ext cx="3749039" cy="365760"/>
+          </a:xfrm>
+          <a:prstGeom prst="rect">
+            <a:avLst/>
+          </a:prstGeom>
+          <a:noFill/>
+        </p:spPr>
+        <p:txBody>
+          <a:bodyPr wrap="square" lIns="25400" tIns="25400" rIns="25400" bIns="25400" anchor="t">
+            <a:spAutoFit/>
+          </a:bodyPr>
+          <a:lstStyle/>
+          <a:p>
+            <a:pPr algn="l">
+              <a:lnSpc>
+                <a:spcPct val="100000"/>
+              </a:lnSpc>
+              <a:spcBef>
+                <a:spcPts val="0"/>
+              </a:spcBef>
+              <a:spcAft>
+                <a:spcPts val="600"/>
+              </a:spcAft>
+            </a:pPr>
+            <a:r>
+              <a:rPr sz="1100" b="0">
+                <a:solidFill>
+                  <a:srgbClr val="9A9AA2"/>
+                </a:solidFill>
+                <a:latin typeface="Consolas"/>
+              </a:rPr>
+              <a:t>2+ keywords = real topic</a:t>
+            </a:r>
+          </a:p>
+        </p:txBody>
+      </p:sp>
+      <p:sp>
+        <p:nvSpPr>
+          <p:cNvPr id="19" name="TextBox 18"/>
+          <p:cNvSpPr txBox="1"/>
+          <p:nvPr/>
+        </p:nvSpPr>
+        <p:spPr>
+          <a:xfrm>
+            <a:off x="7315200" y="4718304"/>
+            <a:ext cx="457200" cy="548640"/>
+          </a:xfrm>
+          <a:prstGeom prst="rect">
+            <a:avLst/>
+          </a:prstGeom>
+          <a:noFill/>
+        </p:spPr>
+        <p:txBody>
+          <a:bodyPr wrap="square" lIns="25400" tIns="25400" rIns="25400" bIns="25400" anchor="t">
+            <a:spAutoFit/>
+          </a:bodyPr>
+          <a:lstStyle/>
+          <a:p>
+            <a:pPr algn="l">
+              <a:lnSpc>
+                <a:spcPct val="100000"/>
+              </a:lnSpc>
+              <a:spcBef>
+                <a:spcPts val="0"/>
+              </a:spcBef>
+              <a:spcAft>
+                <a:spcPts val="600"/>
+              </a:spcAft>
+            </a:pPr>
+            <a:r>
+              <a:rPr sz="1800" b="1">
+                <a:solidFill>
+                  <a:srgbClr val="2ECC71"/>
+                </a:solidFill>
+                <a:latin typeface="Segoe UI"/>
+              </a:rPr>
+              <a:t>④</a:t>
+            </a:r>
+          </a:p>
+        </p:txBody>
+      </p:sp>
+      <p:sp>
+        <p:nvSpPr>
+          <p:cNvPr id="20" name="TextBox 19"/>
+          <p:cNvSpPr txBox="1"/>
+          <p:nvPr/>
+        </p:nvSpPr>
+        <p:spPr>
+          <a:xfrm>
+            <a:off x="7772400" y="4718304"/>
+            <a:ext cx="3749039" cy="365760"/>
+          </a:xfrm>
+          <a:prstGeom prst="rect">
+            <a:avLst/>
+          </a:prstGeom>
+          <a:noFill/>
+        </p:spPr>
+        <p:txBody>
+          <a:bodyPr wrap="square" lIns="25400" tIns="25400" rIns="25400" bIns="25400" anchor="t">
+            <a:spAutoFit/>
+          </a:bodyPr>
+          <a:lstStyle/>
+          <a:p>
+            <a:pPr algn="l">
+              <a:lnSpc>
+                <a:spcPct val="100000"/>
+              </a:lnSpc>
+              <a:spcBef>
+                <a:spcPts val="0"/>
+              </a:spcBef>
+              <a:spcAft>
+                <a:spcPts val="600"/>
+              </a:spcAft>
+            </a:pPr>
+            <a:r>
+              <a:rPr sz="1300" b="1">
+                <a:solidFill>
+                  <a:srgbClr val="F2F2F2"/>
+                </a:solidFill>
+                <a:latin typeface="Segoe UI"/>
+              </a:rPr>
+              <a:t>Profile candidates</a:t>
+            </a:r>
+          </a:p>
+        </p:txBody>
+      </p:sp>
+      <p:sp>
+        <p:nvSpPr>
+          <p:cNvPr id="21" name="TextBox 20"/>
+          <p:cNvSpPr txBox="1"/>
+          <p:nvPr/>
+        </p:nvSpPr>
+        <p:spPr>
+          <a:xfrm>
+            <a:off x="7772400" y="5020056"/>
+            <a:ext cx="3749039" cy="365760"/>
+          </a:xfrm>
+          <a:prstGeom prst="rect">
+            <a:avLst/>
+          </a:prstGeom>
+          <a:noFill/>
+        </p:spPr>
+        <p:txBody>
+          <a:bodyPr wrap="square" lIns="25400" tIns="25400" rIns="25400" bIns="25400" anchor="t">
+            <a:spAutoFit/>
+          </a:bodyPr>
+          <a:lstStyle/>
+          <a:p>
+            <a:pPr algn="l">
+              <a:lnSpc>
+                <a:spcPct val="100000"/>
+              </a:lnSpc>
+              <a:spcBef>
+                <a:spcPts val="0"/>
+              </a:spcBef>
+              <a:spcAft>
+                <a:spcPts val="600"/>
+              </a:spcAft>
+            </a:pPr>
+            <a:r>
+              <a:rPr sz="1100" b="0">
+                <a:solidFill>
+                  <a:srgbClr val="9A9AA2"/>
+                </a:solidFill>
+                <a:latin typeface="Consolas"/>
+              </a:rPr>
+              <a:t>real desc·titles (1 unit)</a:t>
+            </a:r>
+          </a:p>
+        </p:txBody>
+      </p:sp>
+      <p:sp>
+        <p:nvSpPr>
+          <p:cNvPr id="22" name="TextBox 21"/>
+          <p:cNvSpPr txBox="1"/>
+          <p:nvPr/>
+        </p:nvSpPr>
+        <p:spPr>
+          <a:xfrm>
+            <a:off x="7315200" y="5468112"/>
+            <a:ext cx="457200" cy="548640"/>
+          </a:xfrm>
+          <a:prstGeom prst="rect">
+            <a:avLst/>
+          </a:prstGeom>
+          <a:noFill/>
+        </p:spPr>
+        <p:txBody>
+          <a:bodyPr wrap="square" lIns="25400" tIns="25400" rIns="25400" bIns="25400" anchor="t">
+            <a:spAutoFit/>
+          </a:bodyPr>
+          <a:lstStyle/>
+          <a:p>
+            <a:pPr algn="l">
+              <a:lnSpc>
+                <a:spcPct val="100000"/>
+              </a:lnSpc>
+              <a:spcBef>
+                <a:spcPts val="0"/>
+              </a:spcBef>
+              <a:spcAft>
+                <a:spcPts val="600"/>
+              </a:spcAft>
+            </a:pPr>
+            <a:r>
+              <a:rPr sz="1800" b="1">
+                <a:solidFill>
+                  <a:srgbClr val="2ECC71"/>
+                </a:solidFill>
+                <a:latin typeface="Segoe UI"/>
+              </a:rPr>
+              <a:t>⑤</a:t>
+            </a:r>
+          </a:p>
+        </p:txBody>
+      </p:sp>
+      <p:sp>
+        <p:nvSpPr>
+          <p:cNvPr id="23" name="TextBox 22"/>
+          <p:cNvSpPr txBox="1"/>
+          <p:nvPr/>
+        </p:nvSpPr>
+        <p:spPr>
+          <a:xfrm>
+            <a:off x="7772400" y="5468112"/>
+            <a:ext cx="3749039" cy="365760"/>
+          </a:xfrm>
+          <a:prstGeom prst="rect">
+            <a:avLst/>
+          </a:prstGeom>
+          <a:noFill/>
+        </p:spPr>
+        <p:txBody>
+          <a:bodyPr wrap="square" lIns="25400" tIns="25400" rIns="25400" bIns="25400" anchor="t">
+            <a:spAutoFit/>
+          </a:bodyPr>
+          <a:lstStyle/>
+          <a:p>
+            <a:pPr algn="l">
+              <a:lnSpc>
+                <a:spcPct val="100000"/>
+              </a:lnSpc>
+              <a:spcBef>
+                <a:spcPts val="0"/>
+              </a:spcBef>
+              <a:spcAft>
+                <a:spcPts val="600"/>
+              </a:spcAft>
+            </a:pPr>
+            <a:r>
+              <a:rPr sz="1300" b="1">
+                <a:solidFill>
+                  <a:srgbClr val="F2F2F2"/>
+                </a:solidFill>
+                <a:latin typeface="Segoe UI"/>
+              </a:rPr>
+              <a:t>LLM curation</a:t>
+            </a:r>
+          </a:p>
+        </p:txBody>
+      </p:sp>
+      <p:sp>
+        <p:nvSpPr>
+          <p:cNvPr id="24" name="TextBox 23"/>
+          <p:cNvSpPr txBox="1"/>
+          <p:nvPr/>
+        </p:nvSpPr>
+        <p:spPr>
+          <a:xfrm>
+            <a:off x="7772400" y="5769864"/>
+            <a:ext cx="3749039" cy="365760"/>
+          </a:xfrm>
+          <a:prstGeom prst="rect">
+            <a:avLst/>
+          </a:prstGeom>
+          <a:noFill/>
+        </p:spPr>
+        <p:txBody>
+          <a:bodyPr wrap="square" lIns="25400" tIns="25400" rIns="25400" bIns="25400" anchor="t">
+            <a:spAutoFit/>
+          </a:bodyPr>
+          <a:lstStyle/>
+          <a:p>
+            <a:pPr algn="l">
+              <a:lnSpc>
+                <a:spcPct val="100000"/>
+              </a:lnSpc>
+              <a:spcBef>
+                <a:spcPts val="0"/>
+              </a:spcBef>
+              <a:spcAft>
+                <a:spcPts val="600"/>
+              </a:spcAft>
+            </a:pPr>
+            <a:r>
+              <a:rPr sz="1100" b="0">
+                <a:solidFill>
+                  <a:srgbClr val="9A9AA2"/>
+                </a:solidFill>
+                <a:latin typeface="Consolas"/>
+              </a:rPr>
+              <a:t>rank · reason · fit decision</a:t>
+            </a:r>
+          </a:p>
+        </p:txBody>
+      </p:sp>
+      <p:sp>
+        <p:nvSpPr>
+          <p:cNvPr id="25" name="TextBox 24"/>
+          <p:cNvSpPr txBox="1"/>
+          <p:nvPr/>
+        </p:nvSpPr>
+        <p:spPr>
+          <a:xfrm>
+            <a:off x="7315200" y="6263640"/>
+            <a:ext cx="4206240" cy="365760"/>
+          </a:xfrm>
+          <a:prstGeom prst="rect">
+            <a:avLst/>
+          </a:prstGeom>
+          <a:noFill/>
+        </p:spPr>
+        <p:txBody>
+          <a:bodyPr wrap="square" lIns="25400" tIns="25400" rIns="25400" bIns="25400" anchor="t">
+            <a:spAutoFit/>
+          </a:bodyPr>
+          <a:lstStyle/>
+          <a:p>
+            <a:pPr algn="l">
+              <a:lnSpc>
+                <a:spcPct val="100000"/>
+              </a:lnSpc>
+              <a:spcBef>
+                <a:spcPts val="0"/>
+              </a:spcBef>
+              <a:spcAft>
+                <a:spcPts val="600"/>
+              </a:spcAft>
+            </a:pPr>
+            <a:r>
+              <a:rPr sz="1000" b="0">
+                <a:solidFill>
                   <a:srgbClr val="6A6A72"/>
                 </a:solidFill>
-                <a:latin typeface="Consolas"/>
-              </a:rPr>
-              <a:t>category_list.yaml</a:t>
-            </a:r>
-          </a:p>
-        </p:txBody>
-      </p:sp>
-      <p:sp>
-        <p:nvSpPr>
-          <p:cNvPr id="11" name="TextBox 10"/>
-          <p:cNvSpPr txBox="1"/>
-          <p:nvPr/>
-        </p:nvSpPr>
-        <p:spPr>
-          <a:xfrm>
-            <a:off x="731520" y="2834640"/>
-            <a:ext cx="3200400" cy="2194560"/>
-          </a:xfrm>
-          <a:prstGeom prst="rect">
-            <a:avLst/>
-          </a:prstGeom>
-          <a:noFill/>
-        </p:spPr>
-        <p:txBody>
-          <a:bodyPr wrap="square" lIns="25400" tIns="25400" rIns="25400" bIns="25400" anchor="t">
-            <a:spAutoFit/>
-          </a:bodyPr>
-          <a:lstStyle/>
-          <a:p>
-            <a:pPr algn="l">
-              <a:lnSpc>
-                <a:spcPct val="116000"/>
-              </a:lnSpc>
-              <a:spcBef>
-                <a:spcPts val="0"/>
-              </a:spcBef>
-              <a:spcAft>
-                <a:spcPts val="500"/>
-              </a:spcAft>
-            </a:pPr>
-            <a:r>
-              <a:rPr sz="1150" b="0">
-                <a:solidFill>
-                  <a:srgbClr val="F2F2F2"/>
-                </a:solidFill>
-                <a:latin typeface="Segoe UI"/>
-              </a:rPr>
-              <a:t>• 14 top categories + sub-details</a:t>
-            </a:r>
-          </a:p>
-          <a:p>
-            <a:pPr algn="l">
-              <a:lnSpc>
-                <a:spcPct val="116000"/>
-              </a:lnSpc>
-              <a:spcBef>
-                <a:spcPts val="0"/>
-              </a:spcBef>
-              <a:spcAft>
-                <a:spcPts val="500"/>
-              </a:spcAft>
-            </a:pPr>
-            <a:r>
-              <a:rPr sz="1150" b="0">
-                <a:solidFill>
-                  <a:srgbClr val="F2F2F2"/>
-                </a:solidFill>
-                <a:latin typeface="Segoe UI"/>
-              </a:rPr>
-              <a:t>• core / general two-tier weights</a:t>
-            </a:r>
-          </a:p>
-          <a:p>
-            <a:pPr algn="l">
-              <a:lnSpc>
-                <a:spcPct val="116000"/>
-              </a:lnSpc>
-              <a:spcBef>
-                <a:spcPts val="0"/>
-              </a:spcBef>
-              <a:spcAft>
-                <a:spcPts val="500"/>
-              </a:spcAft>
-            </a:pPr>
-            <a:r>
-              <a:rPr sz="1150" b="0">
-                <a:solidFill>
-                  <a:srgbClr val="F2F2F2"/>
-                </a:solidFill>
-                <a:latin typeface="Segoe UI"/>
-              </a:rPr>
-              <a:t>• Korean = substring match</a:t>
-            </a:r>
-          </a:p>
-          <a:p>
-            <a:pPr algn="l">
-              <a:lnSpc>
-                <a:spcPct val="116000"/>
-              </a:lnSpc>
-              <a:spcBef>
-                <a:spcPts val="0"/>
-              </a:spcBef>
-              <a:spcAft>
-                <a:spcPts val="500"/>
-              </a:spcAft>
-            </a:pPr>
-            <a:r>
-              <a:rPr sz="1150" b="0">
-                <a:solidFill>
-                  <a:srgbClr val="F2F2F2"/>
-                </a:solidFill>
-                <a:latin typeface="Segoe UI"/>
-              </a:rPr>
-              <a:t>• English = word-boundary regex</a:t>
-            </a:r>
-          </a:p>
-          <a:p>
-            <a:pPr algn="l">
-              <a:lnSpc>
-                <a:spcPct val="116000"/>
-              </a:lnSpc>
-              <a:spcBef>
-                <a:spcPts val="0"/>
-              </a:spcBef>
-              <a:spcAft>
-                <a:spcPts val="500"/>
-              </a:spcAft>
-            </a:pPr>
-            <a:r>
-              <a:rPr sz="1100" b="0">
-                <a:solidFill>
-                  <a:srgbClr val="6A6A72"/>
-                </a:solidFill>
-                <a:latin typeface="Segoe UI"/>
-              </a:rPr>
-              <a:t>e.g. "ai" won't match "email"</a:t>
-            </a:r>
-          </a:p>
-        </p:txBody>
-      </p:sp>
-      <p:sp>
-        <p:nvSpPr>
-          <p:cNvPr id="12" name="Rounded Rectangle 11"/>
-          <p:cNvSpPr/>
-          <p:nvPr/>
-        </p:nvSpPr>
-        <p:spPr>
-          <a:xfrm>
-            <a:off x="4279392" y="1920240"/>
-            <a:ext cx="3611880" cy="3154680"/>
-          </a:xfrm>
-          <a:prstGeom prst="roundRect">
-            <a:avLst/>
-          </a:prstGeom>
-          <a:solidFill>
-            <a:srgbClr val="161619"/>
-          </a:solidFill>
+                <a:latin typeface="Segoe UI"/>
+              </a:rPr>
+              <a:t>Costly search(100u) only at ②, deep profiling at 1u → quota saved</a:t>
+            </a:r>
+          </a:p>
+        </p:txBody>
+      </p:sp>
+      <p:pic>
+        <p:nvPicPr>
+          <p:cNvPr id="26" name="Picture 6">
+            <a:extLst>
+              <a:ext uri="{FF2B5EF4-FFF2-40B4-BE49-F238E27FC236}">
+                <a16:creationId xmlns:a16="http://schemas.microsoft.com/office/drawing/2014/main" id="{30383C1C-7B24-148C-3724-379698AD630C}"/>
+              </a:ext>
+            </a:extLst>
+          </p:cNvPr>
+          <p:cNvPicPr>
+            <a:picLocks noChangeAspect="1"/>
+          </p:cNvPicPr>
+          <p:nvPr/>
+        </p:nvPicPr>
+        <p:blipFill>
+          <a:blip r:embed="rId3"/>
+          <a:srcRect/>
+          <a:stretch/>
+        </p:blipFill>
+        <p:spPr>
+          <a:xfrm>
+            <a:off x="906287" y="4144999"/>
+            <a:ext cx="5094770" cy="2201168"/>
+          </a:xfrm>
+          <a:prstGeom prst="rect">
+            <a:avLst/>
+          </a:prstGeom>
           <a:ln w="12700">
             <a:solidFill>
-              <a:srgbClr val="2A2A30"/>
+              <a:srgbClr val="33333A"/>
             </a:solidFill>
           </a:ln>
-          <a:effectLst/>
-        </p:spPr>
-        <p:style>
-          <a:lnRef idx="1">
-            <a:schemeClr val="accent1"/>
-          </a:lnRef>
-          <a:fillRef idx="3">
-            <a:schemeClr val="accent1"/>
-          </a:fillRef>
-          <a:effectRef idx="2">
-            <a:schemeClr val="accent1"/>
-          </a:effectRef>
-          <a:fontRef idx="minor">
-            <a:schemeClr val="lt1"/>
-          </a:fontRef>
-        </p:style>
-        <p:txBody>
-          <a:bodyPr rtlCol="0" anchor="ctr"/>
-          <a:lstStyle/>
-          <a:p>
-            <a:pPr algn="ctr"/>
-            <a:endParaRPr/>
-          </a:p>
-        </p:txBody>
-      </p:sp>
-      <p:sp>
-        <p:nvSpPr>
-          <p:cNvPr id="13" name="TextBox 12"/>
-          <p:cNvSpPr txBox="1"/>
-          <p:nvPr/>
-        </p:nvSpPr>
-        <p:spPr>
-          <a:xfrm>
-            <a:off x="4507992" y="2103120"/>
-            <a:ext cx="3200400" cy="457200"/>
-          </a:xfrm>
-          <a:prstGeom prst="rect">
-            <a:avLst/>
-          </a:prstGeom>
-          <a:noFill/>
-        </p:spPr>
-        <p:txBody>
-          <a:bodyPr wrap="square" lIns="25400" tIns="25400" rIns="25400" bIns="25400" anchor="t">
-            <a:spAutoFit/>
-          </a:bodyPr>
-          <a:lstStyle/>
-          <a:p>
-            <a:pPr algn="l">
-              <a:lnSpc>
-                <a:spcPct val="100000"/>
-              </a:lnSpc>
-              <a:spcBef>
-                <a:spcPts val="0"/>
-              </a:spcBef>
-              <a:spcAft>
-                <a:spcPts val="600"/>
-              </a:spcAft>
-            </a:pPr>
-            <a:r>
-              <a:rPr sz="1900" b="0">
-                <a:solidFill>
-                  <a:srgbClr val="F2F2F2"/>
-                </a:solidFill>
-                <a:latin typeface="Segoe UI"/>
-              </a:rPr>
-              <a:t>🏷️  </a:t>
-            </a:r>
-            <a:r>
-              <a:rPr sz="1500" b="1">
-                <a:solidFill>
-                  <a:srgbClr val="2ECC71"/>
-                </a:solidFill>
-                <a:latin typeface="Segoe UI"/>
-              </a:rPr>
-              <a:t>Deterministic Classify</a:t>
-            </a:r>
-          </a:p>
-        </p:txBody>
-      </p:sp>
-      <p:sp>
-        <p:nvSpPr>
-          <p:cNvPr id="14" name="TextBox 13"/>
-          <p:cNvSpPr txBox="1"/>
-          <p:nvPr/>
-        </p:nvSpPr>
-        <p:spPr>
-          <a:xfrm>
-            <a:off x="4507992" y="2487168"/>
-            <a:ext cx="3200400" cy="292608"/>
-          </a:xfrm>
-          <a:prstGeom prst="rect">
-            <a:avLst/>
-          </a:prstGeom>
-          <a:noFill/>
-        </p:spPr>
-        <p:txBody>
-          <a:bodyPr wrap="square" lIns="25400" tIns="25400" rIns="25400" bIns="25400" anchor="t">
-            <a:spAutoFit/>
-          </a:bodyPr>
-          <a:lstStyle/>
-          <a:p>
-            <a:pPr algn="l">
-              <a:lnSpc>
-                <a:spcPct val="100000"/>
-              </a:lnSpc>
-              <a:spcBef>
-                <a:spcPts val="0"/>
-              </a:spcBef>
-              <a:spcAft>
-                <a:spcPts val="600"/>
-              </a:spcAft>
-            </a:pPr>
-            <a:r>
-              <a:rPr sz="1100" b="0">
-                <a:solidFill>
-                  <a:srgbClr val="6A6A72"/>
-                </a:solidFill>
-                <a:latin typeface="Consolas"/>
-              </a:rPr>
-              <a:t>classify_channel</a:t>
-            </a:r>
-          </a:p>
-        </p:txBody>
-      </p:sp>
-      <p:sp>
-        <p:nvSpPr>
-          <p:cNvPr id="15" name="TextBox 14"/>
-          <p:cNvSpPr txBox="1"/>
-          <p:nvPr/>
-        </p:nvSpPr>
-        <p:spPr>
-          <a:xfrm>
-            <a:off x="4507992" y="2834640"/>
-            <a:ext cx="3200400" cy="2194560"/>
-          </a:xfrm>
-          <a:prstGeom prst="rect">
-            <a:avLst/>
-          </a:prstGeom>
-          <a:noFill/>
-        </p:spPr>
-        <p:txBody>
-          <a:bodyPr wrap="square" lIns="25400" tIns="25400" rIns="25400" bIns="25400" anchor="t">
-            <a:spAutoFit/>
-          </a:bodyPr>
-          <a:lstStyle/>
-          <a:p>
-            <a:pPr algn="l">
-              <a:lnSpc>
-                <a:spcPct val="116000"/>
-              </a:lnSpc>
-              <a:spcBef>
-                <a:spcPts val="0"/>
-              </a:spcBef>
-              <a:spcAft>
-                <a:spcPts val="500"/>
-              </a:spcAft>
-            </a:pPr>
-            <a:r>
-              <a:rPr sz="1150" b="0">
-                <a:solidFill>
-                  <a:srgbClr val="F2F2F2"/>
-                </a:solidFill>
-                <a:latin typeface="Segoe UI"/>
-              </a:rPr>
-              <a:t>• Match keywords in name + desc</a:t>
-            </a:r>
-          </a:p>
-          <a:p>
-            <a:pPr algn="l">
-              <a:lnSpc>
-                <a:spcPct val="116000"/>
-              </a:lnSpc>
-              <a:spcBef>
-                <a:spcPts val="0"/>
-              </a:spcBef>
-              <a:spcAft>
-                <a:spcPts val="500"/>
-              </a:spcAft>
-            </a:pPr>
-            <a:r>
-              <a:rPr sz="1150" b="0">
-                <a:solidFill>
-                  <a:srgbClr val="9A9AA2"/>
-                </a:solidFill>
-                <a:latin typeface="Segoe UI"/>
-              </a:rPr>
-              <a:t>  + recent video titles</a:t>
-            </a:r>
-          </a:p>
-          <a:p>
-            <a:pPr algn="l">
-              <a:lnSpc>
-                <a:spcPct val="116000"/>
-              </a:lnSpc>
-              <a:spcBef>
-                <a:spcPts val="0"/>
-              </a:spcBef>
-              <a:spcAft>
-                <a:spcPts val="500"/>
-              </a:spcAft>
-            </a:pPr>
-            <a:r>
-              <a:rPr sz="1150" b="0">
-                <a:solidFill>
-                  <a:srgbClr val="F2F2F2"/>
-                </a:solidFill>
-                <a:latin typeface="Segoe UI"/>
-              </a:rPr>
-              <a:t>• categoryScores vector (top-N,</a:t>
-            </a:r>
-          </a:p>
-          <a:p>
-            <a:pPr algn="l">
-              <a:lnSpc>
-                <a:spcPct val="116000"/>
-              </a:lnSpc>
-              <a:spcBef>
-                <a:spcPts val="0"/>
-              </a:spcBef>
-              <a:spcAft>
-                <a:spcPts val="500"/>
-              </a:spcAft>
-            </a:pPr>
-            <a:r>
-              <a:rPr sz="1150" b="0">
-                <a:solidFill>
-                  <a:srgbClr val="9A9AA2"/>
-                </a:solidFill>
-                <a:latin typeface="Segoe UI"/>
-              </a:rPr>
-              <a:t>  normalized to sum = 1)</a:t>
-            </a:r>
-          </a:p>
-          <a:p>
-            <a:pPr algn="l">
-              <a:lnSpc>
-                <a:spcPct val="116000"/>
-              </a:lnSpc>
-              <a:spcBef>
-                <a:spcPts val="0"/>
-              </a:spcBef>
-              <a:spcAft>
-                <a:spcPts val="500"/>
-              </a:spcAft>
-            </a:pPr>
-            <a:r>
-              <a:rPr sz="1100" b="0">
-                <a:solidFill>
-                  <a:srgbClr val="6A6A72"/>
-                </a:solidFill>
-                <a:latin typeface="Segoe UI"/>
-              </a:rPr>
-              <a:t>LRU cache (versioned key), cost 0</a:t>
-            </a:r>
-          </a:p>
-        </p:txBody>
-      </p:sp>
-      <p:sp>
-        <p:nvSpPr>
-          <p:cNvPr id="16" name="Rounded Rectangle 15"/>
-          <p:cNvSpPr/>
-          <p:nvPr/>
-        </p:nvSpPr>
-        <p:spPr>
-          <a:xfrm>
-            <a:off x="8055864" y="1920240"/>
-            <a:ext cx="3611880" cy="3154680"/>
-          </a:xfrm>
-          <a:prstGeom prst="roundRect">
-            <a:avLst/>
-          </a:prstGeom>
-          <a:solidFill>
-            <a:srgbClr val="161619"/>
-          </a:solidFill>
-          <a:ln w="12700">
-            <a:solidFill>
-              <a:srgbClr val="2A2A30"/>
-            </a:solidFill>
-          </a:ln>
-          <a:effectLst/>
-        </p:spPr>
-        <p:style>
-          <a:lnRef idx="1">
-            <a:schemeClr val="accent1"/>
-          </a:lnRef>
-          <a:fillRef idx="3">
-            <a:schemeClr val="accent1"/>
-          </a:fillRef>
-          <a:effectRef idx="2">
-            <a:schemeClr val="accent1"/>
-          </a:effectRef>
-          <a:fontRef idx="minor">
-            <a:schemeClr val="lt1"/>
-          </a:fontRef>
-        </p:style>
-        <p:txBody>
-          <a:bodyPr rtlCol="0" anchor="ctr"/>
-          <a:lstStyle/>
-          <a:p>
-            <a:pPr algn="ctr"/>
-            <a:endParaRPr/>
-          </a:p>
-        </p:txBody>
-      </p:sp>
-      <p:sp>
-        <p:nvSpPr>
-          <p:cNvPr id="17" name="TextBox 16"/>
-          <p:cNvSpPr txBox="1"/>
-          <p:nvPr/>
-        </p:nvSpPr>
-        <p:spPr>
-          <a:xfrm>
-            <a:off x="8284464" y="2103120"/>
-            <a:ext cx="3200400" cy="457200"/>
-          </a:xfrm>
-          <a:prstGeom prst="rect">
-            <a:avLst/>
-          </a:prstGeom>
-          <a:noFill/>
-        </p:spPr>
-        <p:txBody>
-          <a:bodyPr wrap="square" lIns="25400" tIns="25400" rIns="25400" bIns="25400" anchor="t">
-            <a:spAutoFit/>
-          </a:bodyPr>
-          <a:lstStyle/>
-          <a:p>
-            <a:pPr algn="l">
-              <a:lnSpc>
-                <a:spcPct val="100000"/>
-              </a:lnSpc>
-              <a:spcBef>
-                <a:spcPts val="0"/>
-              </a:spcBef>
-              <a:spcAft>
-                <a:spcPts val="600"/>
-              </a:spcAft>
-            </a:pPr>
-            <a:r>
-              <a:rPr sz="1900" b="0">
-                <a:solidFill>
-                  <a:srgbClr val="F2F2F2"/>
-                </a:solidFill>
-                <a:latin typeface="Segoe UI"/>
-              </a:rPr>
-              <a:t>🧭  </a:t>
-            </a:r>
-            <a:r>
-              <a:rPr sz="1500" b="1">
-                <a:solidFill>
-                  <a:srgbClr val="FF3B3B"/>
-                </a:solidFill>
-                <a:latin typeface="Segoe UI"/>
-              </a:rPr>
-              <a:t>Cosine Similarity</a:t>
-            </a:r>
-          </a:p>
-        </p:txBody>
-      </p:sp>
-      <p:sp>
-        <p:nvSpPr>
-          <p:cNvPr id="18" name="TextBox 17"/>
-          <p:cNvSpPr txBox="1"/>
-          <p:nvPr/>
-        </p:nvSpPr>
-        <p:spPr>
-          <a:xfrm>
-            <a:off x="8284464" y="2487168"/>
-            <a:ext cx="3200400" cy="292608"/>
-          </a:xfrm>
-          <a:prstGeom prst="rect">
-            <a:avLst/>
-          </a:prstGeom>
-          <a:noFill/>
-        </p:spPr>
-        <p:txBody>
-          <a:bodyPr wrap="square" lIns="25400" tIns="25400" rIns="25400" bIns="25400" anchor="t">
-            <a:spAutoFit/>
-          </a:bodyPr>
-          <a:lstStyle/>
-          <a:p>
-            <a:pPr algn="l">
-              <a:lnSpc>
-                <a:spcPct val="100000"/>
-              </a:lnSpc>
-              <a:spcBef>
-                <a:spcPts val="0"/>
-              </a:spcBef>
-              <a:spcAft>
-                <a:spcPts val="600"/>
-              </a:spcAft>
-            </a:pPr>
-            <a:r>
-              <a:rPr sz="1100" b="0">
-                <a:solidFill>
-                  <a:srgbClr val="6A6A72"/>
-                </a:solidFill>
-                <a:latin typeface="Consolas"/>
-              </a:rPr>
-              <a:t>attach_similarity</a:t>
-            </a:r>
-          </a:p>
-        </p:txBody>
-      </p:sp>
-      <p:sp>
-        <p:nvSpPr>
-          <p:cNvPr id="19" name="TextBox 18"/>
-          <p:cNvSpPr txBox="1"/>
-          <p:nvPr/>
-        </p:nvSpPr>
-        <p:spPr>
-          <a:xfrm>
-            <a:off x="8284464" y="2834640"/>
-            <a:ext cx="3200400" cy="2194560"/>
-          </a:xfrm>
-          <a:prstGeom prst="rect">
-            <a:avLst/>
-          </a:prstGeom>
-          <a:noFill/>
-        </p:spPr>
-        <p:txBody>
-          <a:bodyPr wrap="square" lIns="25400" tIns="25400" rIns="25400" bIns="25400" anchor="t">
-            <a:spAutoFit/>
-          </a:bodyPr>
-          <a:lstStyle/>
-          <a:p>
-            <a:pPr algn="l">
-              <a:lnSpc>
-                <a:spcPct val="116000"/>
-              </a:lnSpc>
-              <a:spcBef>
-                <a:spcPts val="0"/>
-              </a:spcBef>
-              <a:spcAft>
-                <a:spcPts val="500"/>
-              </a:spcAft>
-            </a:pPr>
-            <a:r>
-              <a:rPr sz="1150" b="0">
-                <a:solidFill>
-                  <a:srgbClr val="F2F2F2"/>
-                </a:solidFill>
-                <a:latin typeface="Segoe UI"/>
-              </a:rPr>
-              <a:t>• Reuse categoryScores vectors</a:t>
-            </a:r>
-          </a:p>
-          <a:p>
-            <a:pPr algn="l">
-              <a:lnSpc>
-                <a:spcPct val="116000"/>
-              </a:lnSpc>
-              <a:spcBef>
-                <a:spcPts val="0"/>
-              </a:spcBef>
-              <a:spcAft>
-                <a:spcPts val="500"/>
-              </a:spcAft>
-            </a:pPr>
-            <a:r>
-              <a:rPr sz="1150" b="0">
-                <a:solidFill>
-                  <a:srgbClr val="F2F2F2"/>
-                </a:solidFill>
-                <a:latin typeface="Segoe UI"/>
-              </a:rPr>
-              <a:t>• Representativeness vs taste</a:t>
-            </a:r>
-          </a:p>
-          <a:p>
-            <a:pPr algn="l">
-              <a:lnSpc>
-                <a:spcPct val="116000"/>
-              </a:lnSpc>
-              <a:spcBef>
-                <a:spcPts val="0"/>
-              </a:spcBef>
-              <a:spcAft>
-                <a:spcPts val="500"/>
-              </a:spcAft>
-            </a:pPr>
-            <a:r>
-              <a:rPr sz="1150" b="0">
-                <a:solidFill>
-                  <a:srgbClr val="9A9AA2"/>
-                </a:solidFill>
-                <a:latin typeface="Segoe UI"/>
-              </a:rPr>
-              <a:t>  centroid (score-weighted)</a:t>
-            </a:r>
-          </a:p>
-          <a:p>
-            <a:pPr algn="l">
-              <a:lnSpc>
-                <a:spcPct val="116000"/>
-              </a:lnSpc>
-              <a:spcBef>
-                <a:spcPts val="0"/>
-              </a:spcBef>
-              <a:spcAft>
-                <a:spcPts val="500"/>
-              </a:spcAft>
-            </a:pPr>
-            <a:r>
-              <a:rPr sz="1150" b="0">
-                <a:solidFill>
-                  <a:srgbClr val="F2F2F2"/>
-                </a:solidFill>
-                <a:latin typeface="Segoe UI"/>
-              </a:rPr>
-              <a:t>• Top-K similar channels</a:t>
-            </a:r>
-          </a:p>
-          <a:p>
-            <a:pPr algn="l">
-              <a:lnSpc>
-                <a:spcPct val="116000"/>
-              </a:lnSpc>
-              <a:spcBef>
-                <a:spcPts val="0"/>
-              </a:spcBef>
-              <a:spcAft>
-                <a:spcPts val="500"/>
-              </a:spcAft>
-            </a:pPr>
-            <a:r>
-              <a:rPr sz="1100" b="0">
-                <a:solidFill>
-                  <a:srgbClr val="6A6A72"/>
-                </a:solidFill>
-                <a:latin typeface="Segoe UI"/>
-              </a:rPr>
-              <a:t>vector math only — 0 extra API</a:t>
-            </a:r>
-          </a:p>
-        </p:txBody>
-      </p:sp>
-      <p:sp>
-        <p:nvSpPr>
-          <p:cNvPr id="20" name="Rounded Rectangle 19"/>
-          <p:cNvSpPr/>
-          <p:nvPr/>
-        </p:nvSpPr>
-        <p:spPr>
-          <a:xfrm>
-            <a:off x="502920" y="5257800"/>
-            <a:ext cx="11183112" cy="1005840"/>
-          </a:xfrm>
-          <a:prstGeom prst="roundRect">
-            <a:avLst/>
-          </a:prstGeom>
-          <a:solidFill>
-            <a:srgbClr val="121215"/>
-          </a:solidFill>
-          <a:ln>
-            <a:noFill/>
-          </a:ln>
-          <a:effectLst/>
-        </p:spPr>
-        <p:style>
-          <a:lnRef idx="1">
-            <a:schemeClr val="accent1"/>
-          </a:lnRef>
-          <a:fillRef idx="3">
-            <a:schemeClr val="accent1"/>
-          </a:fillRef>
-          <a:effectRef idx="2">
-            <a:schemeClr val="accent1"/>
-          </a:effectRef>
-          <a:fontRef idx="minor">
-            <a:schemeClr val="lt1"/>
-          </a:fontRef>
-        </p:style>
-        <p:txBody>
-          <a:bodyPr rtlCol="0" anchor="ctr"/>
-          <a:lstStyle/>
-          <a:p>
-            <a:pPr algn="ctr"/>
-            <a:endParaRPr/>
-          </a:p>
-        </p:txBody>
-      </p:sp>
-      <p:sp>
-        <p:nvSpPr>
-          <p:cNvPr id="21" name="TextBox 20"/>
-          <p:cNvSpPr txBox="1"/>
-          <p:nvPr/>
-        </p:nvSpPr>
-        <p:spPr>
-          <a:xfrm>
-            <a:off x="731520" y="5358384"/>
-            <a:ext cx="10789920" cy="365760"/>
-          </a:xfrm>
-          <a:prstGeom prst="rect">
-            <a:avLst/>
-          </a:prstGeom>
-          <a:noFill/>
-        </p:spPr>
-        <p:txBody>
-          <a:bodyPr wrap="square" lIns="25400" tIns="25400" rIns="25400" bIns="25400" anchor="t">
-            <a:spAutoFit/>
-          </a:bodyPr>
-          <a:lstStyle/>
-          <a:p>
-            <a:pPr algn="l">
-              <a:lnSpc>
-                <a:spcPct val="100000"/>
-              </a:lnSpc>
-              <a:spcBef>
-                <a:spcPts val="0"/>
-              </a:spcBef>
-              <a:spcAft>
-                <a:spcPts val="600"/>
-              </a:spcAft>
-            </a:pPr>
-            <a:r>
-              <a:rPr sz="1200" b="1">
-                <a:solidFill>
-                  <a:srgbClr val="FF3B3B"/>
-                </a:solidFill>
-                <a:latin typeface="Consolas"/>
-              </a:rPr>
-              <a:t>Algorithms introduced</a:t>
-            </a:r>
-            <a:r>
-              <a:rPr sz="1200" b="0">
-                <a:solidFill>
-                  <a:srgbClr val="9A9AA2"/>
-                </a:solidFill>
-                <a:latin typeface="Segoe UI"/>
-              </a:rPr>
-              <a:t>   Cosine Similarity · Weighted Keyword Matching · Vector Normalization · LRU Cache</a:t>
-            </a:r>
-          </a:p>
-        </p:txBody>
-      </p:sp>
-      <p:sp>
-        <p:nvSpPr>
-          <p:cNvPr id="22" name="TextBox 21"/>
-          <p:cNvSpPr txBox="1"/>
-          <p:nvPr/>
-        </p:nvSpPr>
-        <p:spPr>
-          <a:xfrm>
-            <a:off x="731520" y="5742432"/>
-            <a:ext cx="10881360" cy="457200"/>
-          </a:xfrm>
-          <a:prstGeom prst="rect">
-            <a:avLst/>
-          </a:prstGeom>
-          <a:noFill/>
-        </p:spPr>
-        <p:txBody>
-          <a:bodyPr wrap="square" lIns="25400" tIns="25400" rIns="25400" bIns="25400" anchor="t">
-            <a:spAutoFit/>
-          </a:bodyPr>
-          <a:lstStyle/>
-          <a:p>
-            <a:pPr algn="l">
-              <a:lnSpc>
-                <a:spcPct val="100000"/>
-              </a:lnSpc>
-              <a:spcBef>
-                <a:spcPts val="0"/>
-              </a:spcBef>
-              <a:spcAft>
-                <a:spcPts val="600"/>
-              </a:spcAft>
-            </a:pPr>
-            <a:r>
-              <a:rPr sz="1300" b="0">
-                <a:solidFill>
-                  <a:srgbClr val="F2F2F2"/>
-                </a:solidFill>
-                <a:latin typeface="Segoe UI"/>
-              </a:rPr>
-              <a:t>→ This classification directly enables the next step's </a:t>
-            </a:r>
-            <a:r>
-              <a:rPr sz="1300" b="1">
-                <a:solidFill>
-                  <a:srgbClr val="F4A844"/>
-                </a:solidFill>
-                <a:latin typeface="Segoe UI"/>
-              </a:rPr>
-              <a:t>category diversity</a:t>
-            </a:r>
-            <a:r>
-              <a:rPr sz="1300" b="0">
-                <a:solidFill>
-                  <a:srgbClr val="9A9AA2"/>
-                </a:solidFill>
-                <a:latin typeface="Segoe UI"/>
-              </a:rPr>
-              <a:t> in recommendations (≥1 each for cooking·economy·gaming).</a:t>
-            </a:r>
-          </a:p>
-        </p:txBody>
-      </p:sp>
+        </p:spPr>
+      </p:pic>
     </p:spTree>
   </p:cSld>
   <p:clrMapOvr>
@@ -7975,7 +7609,7 @@
                 </a:solidFill>
                 <a:latin typeface="Consolas"/>
               </a:rPr>
-              <a:t>DEV · SMART RECOMMENDATION</a:t>
+              <a:t>DEV · CATEGORY ENGINE</a:t>
             </a:r>
           </a:p>
         </p:txBody>
@@ -8020,7 +7654,7 @@
                 </a:solidFill>
                 <a:latin typeface="Segoe UI"/>
               </a:rPr>
-              <a:t>Recommendation Upgrade — Watch History · Category Diversity</a:t>
+              <a:t>Category Classification System — Deterministic + Cosine Similarity</a:t>
             </a:r>
           </a:p>
         </p:txBody>
@@ -8110,7 +7744,7 @@
                 </a:solidFill>
                 <a:latin typeface="Segoe UI"/>
               </a:rPr>
-              <a:t>Beyond subscriptions: reflect </a:t>
+              <a:t>Added during development — auto-classifies channels into categories, a shared base for </a:t>
             </a:r>
             <a:r>
               <a:rPr sz="1400" b="1">
@@ -8119,34 +7753,16 @@
                 </a:solidFill>
                 <a:latin typeface="Segoe UI"/>
               </a:rPr>
-              <a:t>recent watch history</a:t>
-            </a:r>
-            <a:r>
-              <a:rPr sz="1400" b="0">
-                <a:solidFill>
-                  <a:srgbClr val="9A9AA2"/>
-                </a:solidFill>
-                <a:latin typeface="Segoe UI"/>
-              </a:rPr>
-              <a:t>, and recommend </a:t>
+              <a:t>recommendation · similar channels · persona. </a:t>
             </a:r>
             <a:r>
               <a:rPr sz="1400" b="1">
                 <a:solidFill>
-                  <a:srgbClr val="F2F2F2"/>
-                </a:solidFill>
-                <a:latin typeface="Segoe UI"/>
-              </a:rPr>
-              <a:t>evenly across interests</a:t>
-            </a:r>
-            <a:r>
-              <a:rPr sz="1400" b="0">
-                <a:solidFill>
-                  <a:srgbClr val="9A9AA2"/>
-                </a:solidFill>
-                <a:latin typeface="Segoe UI"/>
-              </a:rPr>
-              <a:t> instead of one dominant category.</a:t>
+                  <a:srgbClr val="2ECC71"/>
+                </a:solidFill>
+                <a:latin typeface="Segoe UI"/>
+              </a:rPr>
+              <a:t>Zero extra API/LLM calls.</a:t>
             </a:r>
           </a:p>
         </p:txBody>
@@ -8160,7 +7776,7 @@
         <p:spPr>
           <a:xfrm>
             <a:off x="502920" y="1920240"/>
-            <a:ext cx="3611880" cy="3200400"/>
+            <a:ext cx="3611880" cy="3154680"/>
           </a:xfrm>
           <a:prstGeom prst="roundRect">
             <a:avLst/>
@@ -8238,16 +7854,16 @@
                 </a:solidFill>
                 <a:latin typeface="Segoe UI"/>
               </a:rPr>
-              <a:t>📺  </a:t>
+              <a:t>📚  </a:t>
             </a:r>
             <a:r>
               <a:rPr sz="1500" b="1">
                 <a:solidFill>
-                  <a:srgbClr val="2ECC71"/>
-                </a:solidFill>
-                <a:latin typeface="Segoe UI"/>
-              </a:rPr>
-              <a:t>Reflect Watched-but-Unsub</a:t>
+                  <a:srgbClr val="F4A844"/>
+                </a:solidFill>
+                <a:latin typeface="Segoe UI"/>
+              </a:rPr>
+              <a:t>Keyword Lexicon</a:t>
             </a:r>
           </a:p>
         </p:txBody>
@@ -8260,7 +7876,52 @@
         </p:nvSpPr>
         <p:spPr>
           <a:xfrm>
-            <a:off x="731520" y="2578608"/>
+            <a:off x="731520" y="2487168"/>
+            <a:ext cx="3200400" cy="292608"/>
+          </a:xfrm>
+          <a:prstGeom prst="rect">
+            <a:avLst/>
+          </a:prstGeom>
+          <a:noFill/>
+        </p:spPr>
+        <p:txBody>
+          <a:bodyPr wrap="square" lIns="25400" tIns="25400" rIns="25400" bIns="25400" anchor="t">
+            <a:spAutoFit/>
+          </a:bodyPr>
+          <a:lstStyle/>
+          <a:p>
+            <a:pPr algn="l">
+              <a:lnSpc>
+                <a:spcPct val="100000"/>
+              </a:lnSpc>
+              <a:spcBef>
+                <a:spcPts val="0"/>
+              </a:spcBef>
+              <a:spcAft>
+                <a:spcPts val="600"/>
+              </a:spcAft>
+            </a:pPr>
+            <a:r>
+              <a:rPr sz="1100" b="0">
+                <a:solidFill>
+                  <a:srgbClr val="6A6A72"/>
+                </a:solidFill>
+                <a:latin typeface="Consolas"/>
+              </a:rPr>
+              <a:t>category_list.yaml</a:t>
+            </a:r>
+          </a:p>
+        </p:txBody>
+      </p:sp>
+      <p:sp>
+        <p:nvSpPr>
+          <p:cNvPr id="11" name="TextBox 10"/>
+          <p:cNvSpPr txBox="1"/>
+          <p:nvPr/>
+        </p:nvSpPr>
+        <p:spPr>
+          <a:xfrm>
+            <a:off x="731520" y="2834640"/>
             <a:ext cx="3200400" cy="2194560"/>
           </a:xfrm>
           <a:prstGeom prst="rect">
@@ -8292,7 +7953,7 @@
                 </a:solidFill>
                 <a:latin typeface="Segoe UI"/>
               </a:rPr>
-              <a:t>• "Recently watched but not</a:t>
+              <a:t>• 14 top categories + sub-details</a:t>
             </a:r>
           </a:p>
           <a:p>
@@ -8310,11 +7971,11 @@
             <a:r>
               <a:rPr sz="1150" b="0">
                 <a:solidFill>
-                  <a:srgbClr val="9A9AA2"/>
-                </a:solidFill>
-                <a:latin typeface="Segoe UI"/>
-              </a:rPr>
-              <a:t>  subscribed" channels as a</a:t>
+                  <a:srgbClr val="F2F2F2"/>
+                </a:solidFill>
+                <a:latin typeface="Segoe UI"/>
+              </a:rPr>
+              <a:t>• core / general two-tier weights</a:t>
             </a:r>
           </a:p>
           <a:p>
@@ -8332,11 +7993,11 @@
             <a:r>
               <a:rPr sz="1150" b="0">
                 <a:solidFill>
-                  <a:srgbClr val="9A9AA2"/>
-                </a:solidFill>
-                <a:latin typeface="Segoe UI"/>
-              </a:rPr>
-              <a:t>  separate recommendation section</a:t>
+                  <a:srgbClr val="F2F2F2"/>
+                </a:solidFill>
+                <a:latin typeface="Segoe UI"/>
+              </a:rPr>
+              <a:t>• Korean = substring match</a:t>
             </a:r>
           </a:p>
           <a:p>
@@ -8358,7 +8019,7 @@
                 </a:solidFill>
                 <a:latin typeface="Segoe UI"/>
               </a:rPr>
-              <a:t>• Noise cut: 2+ times within 90 days</a:t>
+              <a:t>• English = word-boundary regex</a:t>
             </a:r>
           </a:p>
           <a:p>
@@ -8374,49 +8035,27 @@
               </a:spcAft>
             </a:pPr>
             <a:r>
-              <a:rPr sz="1150" b="0">
-                <a:solidFill>
-                  <a:srgbClr val="F2F2F2"/>
-                </a:solidFill>
-                <a:latin typeface="Segoe UI"/>
-              </a:rPr>
-              <a:t>• Rank by frequency × recency</a:t>
-            </a:r>
-          </a:p>
-          <a:p>
-            <a:pPr algn="l">
-              <a:lnSpc>
-                <a:spcPct val="116000"/>
-              </a:lnSpc>
-              <a:spcBef>
-                <a:spcPts val="0"/>
-              </a:spcBef>
-              <a:spcAft>
-                <a:spcPts val="500"/>
-              </a:spcAft>
-            </a:pPr>
-            <a:r>
               <a:rPr sz="1100" b="0">
                 <a:solidFill>
                   <a:srgbClr val="6A6A72"/>
                 </a:solidFill>
                 <a:latin typeface="Segoe UI"/>
               </a:rPr>
-              <a:t>→ always an 'addition', not 'replace'</a:t>
-            </a:r>
-          </a:p>
-        </p:txBody>
-      </p:sp>
-      <p:sp>
-        <p:nvSpPr>
-          <p:cNvPr id="11" name="Rounded Rectangle 10"/>
+              <a:t>e.g. "ai" won't match "email"</a:t>
+            </a:r>
+          </a:p>
+        </p:txBody>
+      </p:sp>
+      <p:sp>
+        <p:nvSpPr>
+          <p:cNvPr id="12" name="Rounded Rectangle 11"/>
           <p:cNvSpPr/>
           <p:nvPr/>
         </p:nvSpPr>
         <p:spPr>
           <a:xfrm>
             <a:off x="4279392" y="1920240"/>
-            <a:ext cx="3611880" cy="3200400"/>
+            <a:ext cx="3611880" cy="3154680"/>
           </a:xfrm>
           <a:prstGeom prst="roundRect">
             <a:avLst/>
@@ -8456,7 +8095,7 @@
       </p:sp>
       <p:sp>
         <p:nvSpPr>
-          <p:cNvPr id="12" name="TextBox 11"/>
+          <p:cNvPr id="13" name="TextBox 12"/>
           <p:cNvSpPr txBox="1"/>
           <p:nvPr/>
         </p:nvSpPr>
@@ -8494,29 +8133,74 @@
                 </a:solidFill>
                 <a:latin typeface="Segoe UI"/>
               </a:rPr>
-              <a:t>🌱  </a:t>
+              <a:t>🏷️  </a:t>
             </a:r>
             <a:r>
               <a:rPr sz="1500" b="1">
                 <a:solidFill>
-                  <a:srgbClr val="F4A844"/>
-                </a:solidFill>
-                <a:latin typeface="Segoe UI"/>
-              </a:rPr>
-              <a:t>Taste Seed Expansion</a:t>
-            </a:r>
-          </a:p>
-        </p:txBody>
-      </p:sp>
-      <p:sp>
-        <p:nvSpPr>
-          <p:cNvPr id="13" name="TextBox 12"/>
-          <p:cNvSpPr txBox="1"/>
-          <p:nvPr/>
-        </p:nvSpPr>
-        <p:spPr>
-          <a:xfrm>
-            <a:off x="4507992" y="2578608"/>
+                  <a:srgbClr val="2ECC71"/>
+                </a:solidFill>
+                <a:latin typeface="Segoe UI"/>
+              </a:rPr>
+              <a:t>Deterministic Classify</a:t>
+            </a:r>
+          </a:p>
+        </p:txBody>
+      </p:sp>
+      <p:sp>
+        <p:nvSpPr>
+          <p:cNvPr id="14" name="TextBox 13"/>
+          <p:cNvSpPr txBox="1"/>
+          <p:nvPr/>
+        </p:nvSpPr>
+        <p:spPr>
+          <a:xfrm>
+            <a:off x="4507992" y="2487168"/>
+            <a:ext cx="3200400" cy="292608"/>
+          </a:xfrm>
+          <a:prstGeom prst="rect">
+            <a:avLst/>
+          </a:prstGeom>
+          <a:noFill/>
+        </p:spPr>
+        <p:txBody>
+          <a:bodyPr wrap="square" lIns="25400" tIns="25400" rIns="25400" bIns="25400" anchor="t">
+            <a:spAutoFit/>
+          </a:bodyPr>
+          <a:lstStyle/>
+          <a:p>
+            <a:pPr algn="l">
+              <a:lnSpc>
+                <a:spcPct val="100000"/>
+              </a:lnSpc>
+              <a:spcBef>
+                <a:spcPts val="0"/>
+              </a:spcBef>
+              <a:spcAft>
+                <a:spcPts val="600"/>
+              </a:spcAft>
+            </a:pPr>
+            <a:r>
+              <a:rPr sz="1100" b="0">
+                <a:solidFill>
+                  <a:srgbClr val="6A6A72"/>
+                </a:solidFill>
+                <a:latin typeface="Consolas"/>
+              </a:rPr>
+              <a:t>classify_channel</a:t>
+            </a:r>
+          </a:p>
+        </p:txBody>
+      </p:sp>
+      <p:sp>
+        <p:nvSpPr>
+          <p:cNvPr id="15" name="TextBox 14"/>
+          <p:cNvSpPr txBox="1"/>
+          <p:nvPr/>
+        </p:nvSpPr>
+        <p:spPr>
+          <a:xfrm>
+            <a:off x="4507992" y="2834640"/>
             <a:ext cx="3200400" cy="2194560"/>
           </a:xfrm>
           <a:prstGeom prst="rect">
@@ -8548,7 +8232,7 @@
                 </a:solidFill>
                 <a:latin typeface="Segoe UI"/>
               </a:rPr>
-              <a:t>• Feed video titles of watched-</a:t>
+              <a:t>• Match keywords in name + desc</a:t>
             </a:r>
           </a:p>
           <a:p>
@@ -8570,7 +8254,7 @@
                 </a:solidFill>
                 <a:latin typeface="Segoe UI"/>
               </a:rPr>
-              <a:t>  unsubscribed channels into</a:t>
+              <a:t>  + recent video titles</a:t>
             </a:r>
           </a:p>
           <a:p>
@@ -8588,11 +8272,33 @@
             <a:r>
               <a:rPr sz="1150" b="0">
                 <a:solidFill>
+                  <a:srgbClr val="F2F2F2"/>
+                </a:solidFill>
+                <a:latin typeface="Segoe UI"/>
+              </a:rPr>
+              <a:t>• categoryScores vector (top-N,</a:t>
+            </a:r>
+          </a:p>
+          <a:p>
+            <a:pPr algn="l">
+              <a:lnSpc>
+                <a:spcPct val="116000"/>
+              </a:lnSpc>
+              <a:spcBef>
+                <a:spcPts val="0"/>
+              </a:spcBef>
+              <a:spcAft>
+                <a:spcPts val="500"/>
+              </a:spcAft>
+            </a:pPr>
+            <a:r>
+              <a:rPr sz="1150" b="0">
+                <a:solidFill>
                   <a:srgbClr val="9A9AA2"/>
                 </a:solidFill>
                 <a:latin typeface="Segoe UI"/>
               </a:rPr>
-              <a:t>  discovery keywords</a:t>
+              <a:t>  normalized to sum = 1)</a:t>
             </a:r>
           </a:p>
           <a:p>
@@ -8608,71 +8314,27 @@
               </a:spcAft>
             </a:pPr>
             <a:r>
-              <a:rPr sz="1150" b="0">
-                <a:solidFill>
-                  <a:srgbClr val="F2F2F2"/>
-                </a:solidFill>
-                <a:latin typeface="Segoe UI"/>
-              </a:rPr>
-              <a:t>• Based on what you actually watch</a:t>
-            </a:r>
-          </a:p>
-          <a:p>
-            <a:pPr algn="l">
-              <a:lnSpc>
-                <a:spcPct val="116000"/>
-              </a:lnSpc>
-              <a:spcBef>
-                <a:spcPts val="0"/>
-              </a:spcBef>
-              <a:spcAft>
-                <a:spcPts val="500"/>
-              </a:spcAft>
-            </a:pPr>
-            <a:r>
-              <a:rPr sz="1150" b="0">
-                <a:solidFill>
-                  <a:srgbClr val="F2F2F2"/>
-                </a:solidFill>
-                <a:latin typeface="Segoe UI"/>
-              </a:rPr>
-              <a:t>• Titles embedded → zero API cost</a:t>
-            </a:r>
-          </a:p>
-          <a:p>
-            <a:pPr algn="l">
-              <a:lnSpc>
-                <a:spcPct val="116000"/>
-              </a:lnSpc>
-              <a:spcBef>
-                <a:spcPts val="0"/>
-              </a:spcBef>
-              <a:spcAft>
-                <a:spcPts val="500"/>
-              </a:spcAft>
-            </a:pPr>
-            <a:r>
               <a:rPr sz="1100" b="0">
                 <a:solidFill>
                   <a:srgbClr val="6A6A72"/>
                 </a:solidFill>
                 <a:latin typeface="Segoe UI"/>
               </a:rPr>
-              <a:t>→ broader discovery</a:t>
-            </a:r>
-          </a:p>
-        </p:txBody>
-      </p:sp>
-      <p:sp>
-        <p:nvSpPr>
-          <p:cNvPr id="14" name="Rounded Rectangle 13"/>
+              <a:t>LRU cache (versioned key), cost 0</a:t>
+            </a:r>
+          </a:p>
+        </p:txBody>
+      </p:sp>
+      <p:sp>
+        <p:nvSpPr>
+          <p:cNvPr id="16" name="Rounded Rectangle 15"/>
           <p:cNvSpPr/>
           <p:nvPr/>
         </p:nvSpPr>
         <p:spPr>
           <a:xfrm>
             <a:off x="8055864" y="1920240"/>
-            <a:ext cx="3611880" cy="3200400"/>
+            <a:ext cx="3611880" cy="3154680"/>
           </a:xfrm>
           <a:prstGeom prst="roundRect">
             <a:avLst/>
@@ -8712,7 +8374,7 @@
       </p:sp>
       <p:sp>
         <p:nvSpPr>
-          <p:cNvPr id="15" name="TextBox 14"/>
+          <p:cNvPr id="17" name="TextBox 16"/>
           <p:cNvSpPr txBox="1"/>
           <p:nvPr/>
         </p:nvSpPr>
@@ -8750,7 +8412,7 @@
                 </a:solidFill>
                 <a:latin typeface="Segoe UI"/>
               </a:rPr>
-              <a:t>🎯  </a:t>
+              <a:t>🧭  </a:t>
             </a:r>
             <a:r>
               <a:rPr sz="1500" b="1">
@@ -8759,20 +8421,65 @@
                 </a:solidFill>
                 <a:latin typeface="Segoe UI"/>
               </a:rPr>
-              <a:t>Category Diversity</a:t>
-            </a:r>
-          </a:p>
-        </p:txBody>
-      </p:sp>
-      <p:sp>
-        <p:nvSpPr>
-          <p:cNvPr id="16" name="TextBox 15"/>
-          <p:cNvSpPr txBox="1"/>
-          <p:nvPr/>
-        </p:nvSpPr>
-        <p:spPr>
-          <a:xfrm>
-            <a:off x="8284464" y="2578608"/>
+              <a:t>Cosine Similarity</a:t>
+            </a:r>
+          </a:p>
+        </p:txBody>
+      </p:sp>
+      <p:sp>
+        <p:nvSpPr>
+          <p:cNvPr id="18" name="TextBox 17"/>
+          <p:cNvSpPr txBox="1"/>
+          <p:nvPr/>
+        </p:nvSpPr>
+        <p:spPr>
+          <a:xfrm>
+            <a:off x="8284464" y="2487168"/>
+            <a:ext cx="3200400" cy="292608"/>
+          </a:xfrm>
+          <a:prstGeom prst="rect">
+            <a:avLst/>
+          </a:prstGeom>
+          <a:noFill/>
+        </p:spPr>
+        <p:txBody>
+          <a:bodyPr wrap="square" lIns="25400" tIns="25400" rIns="25400" bIns="25400" anchor="t">
+            <a:spAutoFit/>
+          </a:bodyPr>
+          <a:lstStyle/>
+          <a:p>
+            <a:pPr algn="l">
+              <a:lnSpc>
+                <a:spcPct val="100000"/>
+              </a:lnSpc>
+              <a:spcBef>
+                <a:spcPts val="0"/>
+              </a:spcBef>
+              <a:spcAft>
+                <a:spcPts val="600"/>
+              </a:spcAft>
+            </a:pPr>
+            <a:r>
+              <a:rPr sz="1100" b="0">
+                <a:solidFill>
+                  <a:srgbClr val="6A6A72"/>
+                </a:solidFill>
+                <a:latin typeface="Consolas"/>
+              </a:rPr>
+              <a:t>attach_similarity</a:t>
+            </a:r>
+          </a:p>
+        </p:txBody>
+      </p:sp>
+      <p:sp>
+        <p:nvSpPr>
+          <p:cNvPr id="19" name="TextBox 18"/>
+          <p:cNvSpPr txBox="1"/>
+          <p:nvPr/>
+        </p:nvSpPr>
+        <p:spPr>
+          <a:xfrm>
+            <a:off x="8284464" y="2834640"/>
             <a:ext cx="3200400" cy="2194560"/>
           </a:xfrm>
           <a:prstGeom prst="rect">
@@ -8804,7 +8511,7 @@
                 </a:solidFill>
                 <a:latin typeface="Segoe UI"/>
               </a:rPr>
-              <a:t>• Derive interest categories from</a:t>
+              <a:t>• Reuse categoryScores vectors</a:t>
             </a:r>
           </a:p>
           <a:p>
@@ -8822,11 +8529,33 @@
             <a:r>
               <a:rPr sz="1150" b="0">
                 <a:solidFill>
+                  <a:srgbClr val="F2F2F2"/>
+                </a:solidFill>
+                <a:latin typeface="Segoe UI"/>
+              </a:rPr>
+              <a:t>• Representativeness vs taste</a:t>
+            </a:r>
+          </a:p>
+          <a:p>
+            <a:pPr algn="l">
+              <a:lnSpc>
+                <a:spcPct val="116000"/>
+              </a:lnSpc>
+              <a:spcBef>
+                <a:spcPts val="0"/>
+              </a:spcBef>
+              <a:spcAft>
+                <a:spcPts val="500"/>
+              </a:spcAft>
+            </a:pPr>
+            <a:r>
+              <a:rPr sz="1150" b="0">
+                <a:solidFill>
                   <a:srgbClr val="9A9AA2"/>
                 </a:solidFill>
                 <a:latin typeface="Segoe UI"/>
               </a:rPr>
-              <a:t>  subscription classification</a:t>
+              <a:t>  centroid (score-weighted)</a:t>
             </a:r>
           </a:p>
           <a:p>
@@ -8848,7 +8577,7 @@
                 </a:solidFill>
                 <a:latin typeface="Segoe UI"/>
               </a:rPr>
-              <a:t>• Balanced keyword extraction</a:t>
+              <a:t>• Top-K similar channels</a:t>
             </a:r>
           </a:p>
           <a:p>
@@ -8864,71 +8593,27 @@
               </a:spcAft>
             </a:pPr>
             <a:r>
-              <a:rPr sz="1150" b="0">
-                <a:solidFill>
-                  <a:srgbClr val="9A9AA2"/>
-                </a:solidFill>
-                <a:latin typeface="Segoe UI"/>
-              </a:rPr>
-              <a:t>  (round-robin)</a:t>
-            </a:r>
-          </a:p>
-          <a:p>
-            <a:pPr algn="l">
-              <a:lnSpc>
-                <a:spcPct val="116000"/>
-              </a:lnSpc>
-              <a:spcBef>
-                <a:spcPts val="0"/>
-              </a:spcBef>
-              <a:spcAft>
-                <a:spcPts val="500"/>
-              </a:spcAft>
-            </a:pPr>
-            <a:r>
-              <a:rPr sz="1150" b="0">
-                <a:solidFill>
-                  <a:srgbClr val="F2F2F2"/>
-                </a:solidFill>
-                <a:latin typeface="Segoe UI"/>
-              </a:rPr>
-              <a:t>• Guarantee ≥1 per category</a:t>
-            </a:r>
-          </a:p>
-          <a:p>
-            <a:pPr algn="l">
-              <a:lnSpc>
-                <a:spcPct val="116000"/>
-              </a:lnSpc>
-              <a:spcBef>
-                <a:spcPts val="0"/>
-              </a:spcBef>
-              <a:spcAft>
-                <a:spcPts val="500"/>
-              </a:spcAft>
-            </a:pPr>
-            <a:r>
               <a:rPr sz="1100" b="0">
                 <a:solidFill>
                   <a:srgbClr val="6A6A72"/>
                 </a:solidFill>
                 <a:latin typeface="Segoe UI"/>
               </a:rPr>
-              <a:t>→ fixes "cooking-only" skew</a:t>
-            </a:r>
-          </a:p>
-        </p:txBody>
-      </p:sp>
-      <p:sp>
-        <p:nvSpPr>
-          <p:cNvPr id="17" name="Rounded Rectangle 16"/>
+              <a:t>vector math only — 0 extra API</a:t>
+            </a:r>
+          </a:p>
+        </p:txBody>
+      </p:sp>
+      <p:sp>
+        <p:nvSpPr>
+          <p:cNvPr id="20" name="Rounded Rectangle 19"/>
           <p:cNvSpPr/>
           <p:nvPr/>
         </p:nvSpPr>
         <p:spPr>
           <a:xfrm>
-            <a:off x="502920" y="5349240"/>
-            <a:ext cx="11183112" cy="914400"/>
+            <a:off x="502920" y="5257800"/>
+            <a:ext cx="11183112" cy="1005840"/>
           </a:xfrm>
           <a:prstGeom prst="roundRect">
             <a:avLst/>
@@ -8966,13 +8651,13 @@
       </p:sp>
       <p:sp>
         <p:nvSpPr>
-          <p:cNvPr id="18" name="TextBox 17"/>
-          <p:cNvSpPr txBox="1"/>
-          <p:nvPr/>
-        </p:nvSpPr>
-        <p:spPr>
-          <a:xfrm>
-            <a:off x="731520" y="5449824"/>
+          <p:cNvPr id="21" name="TextBox 20"/>
+          <p:cNvSpPr txBox="1"/>
+          <p:nvPr/>
+        </p:nvSpPr>
+        <p:spPr>
+          <a:xfrm>
+            <a:off x="731520" y="5358384"/>
             <a:ext cx="10789920" cy="365760"/>
           </a:xfrm>
           <a:prstGeom prst="rect">
@@ -9004,21 +8689,30 @@
                 </a:solidFill>
                 <a:latin typeface="Consolas"/>
               </a:rPr>
-              <a:t>Result screen</a:t>
-            </a:r>
-          </a:p>
-        </p:txBody>
-      </p:sp>
-      <p:sp>
-        <p:nvSpPr>
-          <p:cNvPr id="19" name="TextBox 18"/>
-          <p:cNvSpPr txBox="1"/>
-          <p:nvPr/>
-        </p:nvSpPr>
-        <p:spPr>
-          <a:xfrm>
-            <a:off x="731520" y="5797296"/>
-            <a:ext cx="10881360" cy="411480"/>
+              <a:t>Algorithms introduced</a:t>
+            </a:r>
+            <a:r>
+              <a:rPr sz="1200" b="0">
+                <a:solidFill>
+                  <a:srgbClr val="9A9AA2"/>
+                </a:solidFill>
+                <a:latin typeface="Segoe UI"/>
+              </a:rPr>
+              <a:t>   Cosine Similarity · Weighted Keyword Matching · Vector Normalization · LRU Cache</a:t>
+            </a:r>
+          </a:p>
+        </p:txBody>
+      </p:sp>
+      <p:sp>
+        <p:nvSpPr>
+          <p:cNvPr id="22" name="TextBox 21"/>
+          <p:cNvSpPr txBox="1"/>
+          <p:nvPr/>
+        </p:nvSpPr>
+        <p:spPr>
+          <a:xfrm>
+            <a:off x="731520" y="5742432"/>
+            <a:ext cx="10881360" cy="457200"/>
           </a:xfrm>
           <a:prstGeom prst="rect">
             <a:avLst/>
@@ -9043,40 +8737,31 @@
               </a:spcAft>
             </a:pPr>
             <a:r>
+              <a:rPr sz="1300" b="0">
+                <a:solidFill>
+                  <a:srgbClr val="F2F2F2"/>
+                </a:solidFill>
+                <a:latin typeface="Segoe UI"/>
+              </a:rPr>
+              <a:t>→ This classification directly enables the next step's </a:t>
+            </a:r>
+            <a:r>
               <a:rPr sz="1300" b="1">
                 <a:solidFill>
-                  <a:srgbClr val="2ECC71"/>
-                </a:solidFill>
-                <a:latin typeface="Segoe UI"/>
-              </a:rPr>
-              <a:t>📺 Recently watched, not subscribed</a:t>
+                  <a:srgbClr val="F4A844"/>
+                </a:solidFill>
+                <a:latin typeface="Segoe UI"/>
+              </a:rPr>
+              <a:t>category diversity</a:t>
             </a:r>
             <a:r>
               <a:rPr sz="1300" b="0">
                 <a:solidFill>
-                  <a:srgbClr val="6A6A72"/>
-                </a:solidFill>
-                <a:latin typeface="Segoe UI"/>
-              </a:rPr>
-              <a:t>  +  </a:t>
-            </a:r>
-            <a:r>
-              <a:rPr sz="1300" b="1">
-                <a:solidFill>
-                  <a:srgbClr val="FF3B3B"/>
-                </a:solidFill>
-                <a:latin typeface="Segoe UI"/>
-              </a:rPr>
-              <a:t>✨ Taste-based new channels</a:t>
-            </a:r>
-            <a:r>
-              <a:rPr sz="1200" b="0">
-                <a:solidFill>
                   <a:srgbClr val="9A9AA2"/>
                 </a:solidFill>
                 <a:latin typeface="Segoe UI"/>
               </a:rPr>
-              <a:t>   shown together (LLM-name fallback if discovery fails / not logged in)</a:t>
+              <a:t> in recommendations (≥1 each for cooking·economy·gaming).</a:t>
             </a:r>
           </a:p>
         </p:txBody>
@@ -9236,7 +8921,7 @@
                 </a:solidFill>
                 <a:latin typeface="Consolas"/>
               </a:rPr>
-              <a:t>11 · DATA STRATEGY</a:t>
+              <a:t>DEV · SMART RECOMMENDATION</a:t>
             </a:r>
           </a:p>
         </p:txBody>
@@ -9275,13 +8960,13 @@
               </a:spcAft>
             </a:pPr>
             <a:r>
-              <a:rPr sz="3000" b="1">
+              <a:rPr sz="2400" b="1">
                 <a:solidFill>
                   <a:srgbClr val="F2F2F2"/>
                 </a:solidFill>
                 <a:latin typeface="Segoe UI"/>
               </a:rPr>
-              <a:t>Takeout Hybrid — Cost vs Accuracy</a:t>
+              <a:t>Recommendation Upgrade — Watch History · Category Diversity</a:t>
             </a:r>
           </a:p>
         </p:txBody>
@@ -9340,7 +9025,7 @@
         <p:spPr>
           <a:xfrm>
             <a:off x="502920" y="1371600"/>
-            <a:ext cx="11155680" cy="457200"/>
+            <a:ext cx="11155680" cy="411480"/>
           </a:xfrm>
           <a:prstGeom prst="rect">
             <a:avLst/>
@@ -9371,7 +9056,7 @@
                 </a:solidFill>
                 <a:latin typeface="Segoe UI"/>
               </a:rPr>
-              <a:t>YouTube API can't fetch your full comment/watch history → </a:t>
+              <a:t>Beyond subscriptions: reflect </a:t>
             </a:r>
             <a:r>
               <a:rPr sz="1400" b="1">
@@ -9380,27 +9065,822 @@
                 </a:solidFill>
                 <a:latin typeface="Segoe UI"/>
               </a:rPr>
-              <a:t>take Google Takeout files as auxiliary input to boost accuracy</a:t>
-            </a:r>
-          </a:p>
-        </p:txBody>
-      </p:sp>
-      <p:sp>
-        <p:nvSpPr>
-          <p:cNvPr id="8" name="Rectangle 7"/>
+              <a:t>recent watch history</a:t>
+            </a:r>
+            <a:r>
+              <a:rPr sz="1400" b="0">
+                <a:solidFill>
+                  <a:srgbClr val="9A9AA2"/>
+                </a:solidFill>
+                <a:latin typeface="Segoe UI"/>
+              </a:rPr>
+              <a:t>, and recommend </a:t>
+            </a:r>
+            <a:r>
+              <a:rPr sz="1400" b="1">
+                <a:solidFill>
+                  <a:srgbClr val="F2F2F2"/>
+                </a:solidFill>
+                <a:latin typeface="Segoe UI"/>
+              </a:rPr>
+              <a:t>evenly across interests</a:t>
+            </a:r>
+            <a:r>
+              <a:rPr sz="1400" b="0">
+                <a:solidFill>
+                  <a:srgbClr val="9A9AA2"/>
+                </a:solidFill>
+                <a:latin typeface="Segoe UI"/>
+              </a:rPr>
+              <a:t> instead of one dominant category.</a:t>
+            </a:r>
+          </a:p>
+        </p:txBody>
+      </p:sp>
+      <p:sp>
+        <p:nvSpPr>
+          <p:cNvPr id="8" name="Rounded Rectangle 7"/>
           <p:cNvSpPr/>
           <p:nvPr/>
         </p:nvSpPr>
         <p:spPr>
           <a:xfrm>
-            <a:off x="502920" y="2011680"/>
-            <a:ext cx="11183112" cy="502920"/>
-          </a:xfrm>
-          <a:prstGeom prst="rect">
+            <a:off x="502920" y="1920240"/>
+            <a:ext cx="3611880" cy="3200400"/>
+          </a:xfrm>
+          <a:prstGeom prst="roundRect">
             <a:avLst/>
           </a:prstGeom>
           <a:solidFill>
-            <a:srgbClr val="24242A"/>
+            <a:srgbClr val="161619"/>
+          </a:solidFill>
+          <a:ln w="12700">
+            <a:solidFill>
+              <a:srgbClr val="2A2A30"/>
+            </a:solidFill>
+          </a:ln>
+          <a:effectLst/>
+        </p:spPr>
+        <p:style>
+          <a:lnRef idx="1">
+            <a:schemeClr val="accent1"/>
+          </a:lnRef>
+          <a:fillRef idx="3">
+            <a:schemeClr val="accent1"/>
+          </a:fillRef>
+          <a:effectRef idx="2">
+            <a:schemeClr val="accent1"/>
+          </a:effectRef>
+          <a:fontRef idx="minor">
+            <a:schemeClr val="lt1"/>
+          </a:fontRef>
+        </p:style>
+        <p:txBody>
+          <a:bodyPr rtlCol="0" anchor="ctr"/>
+          <a:lstStyle/>
+          <a:p>
+            <a:pPr algn="ctr"/>
+            <a:endParaRPr/>
+          </a:p>
+        </p:txBody>
+      </p:sp>
+      <p:sp>
+        <p:nvSpPr>
+          <p:cNvPr id="9" name="TextBox 8"/>
+          <p:cNvSpPr txBox="1"/>
+          <p:nvPr/>
+        </p:nvSpPr>
+        <p:spPr>
+          <a:xfrm>
+            <a:off x="731520" y="2103120"/>
+            <a:ext cx="3200400" cy="457200"/>
+          </a:xfrm>
+          <a:prstGeom prst="rect">
+            <a:avLst/>
+          </a:prstGeom>
+          <a:noFill/>
+        </p:spPr>
+        <p:txBody>
+          <a:bodyPr wrap="square" lIns="25400" tIns="25400" rIns="25400" bIns="25400" anchor="t">
+            <a:spAutoFit/>
+          </a:bodyPr>
+          <a:lstStyle/>
+          <a:p>
+            <a:pPr algn="l">
+              <a:lnSpc>
+                <a:spcPct val="100000"/>
+              </a:lnSpc>
+              <a:spcBef>
+                <a:spcPts val="0"/>
+              </a:spcBef>
+              <a:spcAft>
+                <a:spcPts val="600"/>
+              </a:spcAft>
+            </a:pPr>
+            <a:r>
+              <a:rPr sz="1900" b="0">
+                <a:solidFill>
+                  <a:srgbClr val="F2F2F2"/>
+                </a:solidFill>
+                <a:latin typeface="Segoe UI"/>
+              </a:rPr>
+              <a:t>📺  </a:t>
+            </a:r>
+            <a:r>
+              <a:rPr sz="1500" b="1">
+                <a:solidFill>
+                  <a:srgbClr val="2ECC71"/>
+                </a:solidFill>
+                <a:latin typeface="Segoe UI"/>
+              </a:rPr>
+              <a:t>Reflect Watched-but-Unsub</a:t>
+            </a:r>
+          </a:p>
+        </p:txBody>
+      </p:sp>
+      <p:sp>
+        <p:nvSpPr>
+          <p:cNvPr id="10" name="TextBox 9"/>
+          <p:cNvSpPr txBox="1"/>
+          <p:nvPr/>
+        </p:nvSpPr>
+        <p:spPr>
+          <a:xfrm>
+            <a:off x="731520" y="2578608"/>
+            <a:ext cx="3200400" cy="2194560"/>
+          </a:xfrm>
+          <a:prstGeom prst="rect">
+            <a:avLst/>
+          </a:prstGeom>
+          <a:noFill/>
+        </p:spPr>
+        <p:txBody>
+          <a:bodyPr wrap="square" lIns="25400" tIns="25400" rIns="25400" bIns="25400" anchor="t">
+            <a:spAutoFit/>
+          </a:bodyPr>
+          <a:lstStyle/>
+          <a:p>
+            <a:pPr algn="l">
+              <a:lnSpc>
+                <a:spcPct val="116000"/>
+              </a:lnSpc>
+              <a:spcBef>
+                <a:spcPts val="0"/>
+              </a:spcBef>
+              <a:spcAft>
+                <a:spcPts val="500"/>
+              </a:spcAft>
+            </a:pPr>
+            <a:r>
+              <a:rPr sz="1150" b="0">
+                <a:solidFill>
+                  <a:srgbClr val="F2F2F2"/>
+                </a:solidFill>
+                <a:latin typeface="Segoe UI"/>
+              </a:rPr>
+              <a:t>• "Recently watched but not</a:t>
+            </a:r>
+          </a:p>
+          <a:p>
+            <a:pPr algn="l">
+              <a:lnSpc>
+                <a:spcPct val="116000"/>
+              </a:lnSpc>
+              <a:spcBef>
+                <a:spcPts val="0"/>
+              </a:spcBef>
+              <a:spcAft>
+                <a:spcPts val="500"/>
+              </a:spcAft>
+            </a:pPr>
+            <a:r>
+              <a:rPr sz="1150" b="0">
+                <a:solidFill>
+                  <a:srgbClr val="9A9AA2"/>
+                </a:solidFill>
+                <a:latin typeface="Segoe UI"/>
+              </a:rPr>
+              <a:t>  subscribed" channels as a</a:t>
+            </a:r>
+          </a:p>
+          <a:p>
+            <a:pPr algn="l">
+              <a:lnSpc>
+                <a:spcPct val="116000"/>
+              </a:lnSpc>
+              <a:spcBef>
+                <a:spcPts val="0"/>
+              </a:spcBef>
+              <a:spcAft>
+                <a:spcPts val="500"/>
+              </a:spcAft>
+            </a:pPr>
+            <a:r>
+              <a:rPr sz="1150" b="0">
+                <a:solidFill>
+                  <a:srgbClr val="9A9AA2"/>
+                </a:solidFill>
+                <a:latin typeface="Segoe UI"/>
+              </a:rPr>
+              <a:t>  separate recommendation section</a:t>
+            </a:r>
+          </a:p>
+          <a:p>
+            <a:pPr algn="l">
+              <a:lnSpc>
+                <a:spcPct val="116000"/>
+              </a:lnSpc>
+              <a:spcBef>
+                <a:spcPts val="0"/>
+              </a:spcBef>
+              <a:spcAft>
+                <a:spcPts val="500"/>
+              </a:spcAft>
+            </a:pPr>
+            <a:r>
+              <a:rPr sz="1150" b="0">
+                <a:solidFill>
+                  <a:srgbClr val="F2F2F2"/>
+                </a:solidFill>
+                <a:latin typeface="Segoe UI"/>
+              </a:rPr>
+              <a:t>• Noise cut: 2+ times within 90 days</a:t>
+            </a:r>
+          </a:p>
+          <a:p>
+            <a:pPr algn="l">
+              <a:lnSpc>
+                <a:spcPct val="116000"/>
+              </a:lnSpc>
+              <a:spcBef>
+                <a:spcPts val="0"/>
+              </a:spcBef>
+              <a:spcAft>
+                <a:spcPts val="500"/>
+              </a:spcAft>
+            </a:pPr>
+            <a:r>
+              <a:rPr sz="1150" b="0">
+                <a:solidFill>
+                  <a:srgbClr val="F2F2F2"/>
+                </a:solidFill>
+                <a:latin typeface="Segoe UI"/>
+              </a:rPr>
+              <a:t>• Rank by frequency × recency</a:t>
+            </a:r>
+          </a:p>
+          <a:p>
+            <a:pPr algn="l">
+              <a:lnSpc>
+                <a:spcPct val="116000"/>
+              </a:lnSpc>
+              <a:spcBef>
+                <a:spcPts val="0"/>
+              </a:spcBef>
+              <a:spcAft>
+                <a:spcPts val="500"/>
+              </a:spcAft>
+            </a:pPr>
+            <a:r>
+              <a:rPr sz="1100" b="0">
+                <a:solidFill>
+                  <a:srgbClr val="6A6A72"/>
+                </a:solidFill>
+                <a:latin typeface="Segoe UI"/>
+              </a:rPr>
+              <a:t>→ always an 'addition', not 'replace'</a:t>
+            </a:r>
+          </a:p>
+        </p:txBody>
+      </p:sp>
+      <p:sp>
+        <p:nvSpPr>
+          <p:cNvPr id="11" name="Rounded Rectangle 10"/>
+          <p:cNvSpPr/>
+          <p:nvPr/>
+        </p:nvSpPr>
+        <p:spPr>
+          <a:xfrm>
+            <a:off x="4279392" y="1920240"/>
+            <a:ext cx="3611880" cy="3200400"/>
+          </a:xfrm>
+          <a:prstGeom prst="roundRect">
+            <a:avLst/>
+          </a:prstGeom>
+          <a:solidFill>
+            <a:srgbClr val="161619"/>
+          </a:solidFill>
+          <a:ln w="12700">
+            <a:solidFill>
+              <a:srgbClr val="2A2A30"/>
+            </a:solidFill>
+          </a:ln>
+          <a:effectLst/>
+        </p:spPr>
+        <p:style>
+          <a:lnRef idx="1">
+            <a:schemeClr val="accent1"/>
+          </a:lnRef>
+          <a:fillRef idx="3">
+            <a:schemeClr val="accent1"/>
+          </a:fillRef>
+          <a:effectRef idx="2">
+            <a:schemeClr val="accent1"/>
+          </a:effectRef>
+          <a:fontRef idx="minor">
+            <a:schemeClr val="lt1"/>
+          </a:fontRef>
+        </p:style>
+        <p:txBody>
+          <a:bodyPr rtlCol="0" anchor="ctr"/>
+          <a:lstStyle/>
+          <a:p>
+            <a:pPr algn="ctr"/>
+            <a:endParaRPr/>
+          </a:p>
+        </p:txBody>
+      </p:sp>
+      <p:sp>
+        <p:nvSpPr>
+          <p:cNvPr id="12" name="TextBox 11"/>
+          <p:cNvSpPr txBox="1"/>
+          <p:nvPr/>
+        </p:nvSpPr>
+        <p:spPr>
+          <a:xfrm>
+            <a:off x="4507992" y="2103120"/>
+            <a:ext cx="3200400" cy="457200"/>
+          </a:xfrm>
+          <a:prstGeom prst="rect">
+            <a:avLst/>
+          </a:prstGeom>
+          <a:noFill/>
+        </p:spPr>
+        <p:txBody>
+          <a:bodyPr wrap="square" lIns="25400" tIns="25400" rIns="25400" bIns="25400" anchor="t">
+            <a:spAutoFit/>
+          </a:bodyPr>
+          <a:lstStyle/>
+          <a:p>
+            <a:pPr algn="l">
+              <a:lnSpc>
+                <a:spcPct val="100000"/>
+              </a:lnSpc>
+              <a:spcBef>
+                <a:spcPts val="0"/>
+              </a:spcBef>
+              <a:spcAft>
+                <a:spcPts val="600"/>
+              </a:spcAft>
+            </a:pPr>
+            <a:r>
+              <a:rPr sz="1900" b="0">
+                <a:solidFill>
+                  <a:srgbClr val="F2F2F2"/>
+                </a:solidFill>
+                <a:latin typeface="Segoe UI"/>
+              </a:rPr>
+              <a:t>🌱  </a:t>
+            </a:r>
+            <a:r>
+              <a:rPr sz="1500" b="1">
+                <a:solidFill>
+                  <a:srgbClr val="F4A844"/>
+                </a:solidFill>
+                <a:latin typeface="Segoe UI"/>
+              </a:rPr>
+              <a:t>Taste Seed Expansion</a:t>
+            </a:r>
+          </a:p>
+        </p:txBody>
+      </p:sp>
+      <p:sp>
+        <p:nvSpPr>
+          <p:cNvPr id="13" name="TextBox 12"/>
+          <p:cNvSpPr txBox="1"/>
+          <p:nvPr/>
+        </p:nvSpPr>
+        <p:spPr>
+          <a:xfrm>
+            <a:off x="4507992" y="2578608"/>
+            <a:ext cx="3200400" cy="2194560"/>
+          </a:xfrm>
+          <a:prstGeom prst="rect">
+            <a:avLst/>
+          </a:prstGeom>
+          <a:noFill/>
+        </p:spPr>
+        <p:txBody>
+          <a:bodyPr wrap="square" lIns="25400" tIns="25400" rIns="25400" bIns="25400" anchor="t">
+            <a:spAutoFit/>
+          </a:bodyPr>
+          <a:lstStyle/>
+          <a:p>
+            <a:pPr algn="l">
+              <a:lnSpc>
+                <a:spcPct val="116000"/>
+              </a:lnSpc>
+              <a:spcBef>
+                <a:spcPts val="0"/>
+              </a:spcBef>
+              <a:spcAft>
+                <a:spcPts val="500"/>
+              </a:spcAft>
+            </a:pPr>
+            <a:r>
+              <a:rPr sz="1150" b="0">
+                <a:solidFill>
+                  <a:srgbClr val="F2F2F2"/>
+                </a:solidFill>
+                <a:latin typeface="Segoe UI"/>
+              </a:rPr>
+              <a:t>• Feed video titles of watched-</a:t>
+            </a:r>
+          </a:p>
+          <a:p>
+            <a:pPr algn="l">
+              <a:lnSpc>
+                <a:spcPct val="116000"/>
+              </a:lnSpc>
+              <a:spcBef>
+                <a:spcPts val="0"/>
+              </a:spcBef>
+              <a:spcAft>
+                <a:spcPts val="500"/>
+              </a:spcAft>
+            </a:pPr>
+            <a:r>
+              <a:rPr sz="1150" b="0">
+                <a:solidFill>
+                  <a:srgbClr val="9A9AA2"/>
+                </a:solidFill>
+                <a:latin typeface="Segoe UI"/>
+              </a:rPr>
+              <a:t>  unsubscribed channels into</a:t>
+            </a:r>
+          </a:p>
+          <a:p>
+            <a:pPr algn="l">
+              <a:lnSpc>
+                <a:spcPct val="116000"/>
+              </a:lnSpc>
+              <a:spcBef>
+                <a:spcPts val="0"/>
+              </a:spcBef>
+              <a:spcAft>
+                <a:spcPts val="500"/>
+              </a:spcAft>
+            </a:pPr>
+            <a:r>
+              <a:rPr sz="1150" b="0">
+                <a:solidFill>
+                  <a:srgbClr val="9A9AA2"/>
+                </a:solidFill>
+                <a:latin typeface="Segoe UI"/>
+              </a:rPr>
+              <a:t>  discovery keywords</a:t>
+            </a:r>
+          </a:p>
+          <a:p>
+            <a:pPr algn="l">
+              <a:lnSpc>
+                <a:spcPct val="116000"/>
+              </a:lnSpc>
+              <a:spcBef>
+                <a:spcPts val="0"/>
+              </a:spcBef>
+              <a:spcAft>
+                <a:spcPts val="500"/>
+              </a:spcAft>
+            </a:pPr>
+            <a:r>
+              <a:rPr sz="1150" b="0">
+                <a:solidFill>
+                  <a:srgbClr val="F2F2F2"/>
+                </a:solidFill>
+                <a:latin typeface="Segoe UI"/>
+              </a:rPr>
+              <a:t>• Based on what you actually watch</a:t>
+            </a:r>
+          </a:p>
+          <a:p>
+            <a:pPr algn="l">
+              <a:lnSpc>
+                <a:spcPct val="116000"/>
+              </a:lnSpc>
+              <a:spcBef>
+                <a:spcPts val="0"/>
+              </a:spcBef>
+              <a:spcAft>
+                <a:spcPts val="500"/>
+              </a:spcAft>
+            </a:pPr>
+            <a:r>
+              <a:rPr sz="1150" b="0">
+                <a:solidFill>
+                  <a:srgbClr val="F2F2F2"/>
+                </a:solidFill>
+                <a:latin typeface="Segoe UI"/>
+              </a:rPr>
+              <a:t>• Titles embedded → zero API cost</a:t>
+            </a:r>
+          </a:p>
+          <a:p>
+            <a:pPr algn="l">
+              <a:lnSpc>
+                <a:spcPct val="116000"/>
+              </a:lnSpc>
+              <a:spcBef>
+                <a:spcPts val="0"/>
+              </a:spcBef>
+              <a:spcAft>
+                <a:spcPts val="500"/>
+              </a:spcAft>
+            </a:pPr>
+            <a:r>
+              <a:rPr sz="1100" b="0">
+                <a:solidFill>
+                  <a:srgbClr val="6A6A72"/>
+                </a:solidFill>
+                <a:latin typeface="Segoe UI"/>
+              </a:rPr>
+              <a:t>→ broader discovery</a:t>
+            </a:r>
+          </a:p>
+        </p:txBody>
+      </p:sp>
+      <p:sp>
+        <p:nvSpPr>
+          <p:cNvPr id="14" name="Rounded Rectangle 13"/>
+          <p:cNvSpPr/>
+          <p:nvPr/>
+        </p:nvSpPr>
+        <p:spPr>
+          <a:xfrm>
+            <a:off x="8055864" y="1920240"/>
+            <a:ext cx="3611880" cy="3200400"/>
+          </a:xfrm>
+          <a:prstGeom prst="roundRect">
+            <a:avLst/>
+          </a:prstGeom>
+          <a:solidFill>
+            <a:srgbClr val="161619"/>
+          </a:solidFill>
+          <a:ln w="12700">
+            <a:solidFill>
+              <a:srgbClr val="2A2A30"/>
+            </a:solidFill>
+          </a:ln>
+          <a:effectLst/>
+        </p:spPr>
+        <p:style>
+          <a:lnRef idx="1">
+            <a:schemeClr val="accent1"/>
+          </a:lnRef>
+          <a:fillRef idx="3">
+            <a:schemeClr val="accent1"/>
+          </a:fillRef>
+          <a:effectRef idx="2">
+            <a:schemeClr val="accent1"/>
+          </a:effectRef>
+          <a:fontRef idx="minor">
+            <a:schemeClr val="lt1"/>
+          </a:fontRef>
+        </p:style>
+        <p:txBody>
+          <a:bodyPr rtlCol="0" anchor="ctr"/>
+          <a:lstStyle/>
+          <a:p>
+            <a:pPr algn="ctr"/>
+            <a:endParaRPr/>
+          </a:p>
+        </p:txBody>
+      </p:sp>
+      <p:sp>
+        <p:nvSpPr>
+          <p:cNvPr id="15" name="TextBox 14"/>
+          <p:cNvSpPr txBox="1"/>
+          <p:nvPr/>
+        </p:nvSpPr>
+        <p:spPr>
+          <a:xfrm>
+            <a:off x="8284464" y="2103120"/>
+            <a:ext cx="3200400" cy="457200"/>
+          </a:xfrm>
+          <a:prstGeom prst="rect">
+            <a:avLst/>
+          </a:prstGeom>
+          <a:noFill/>
+        </p:spPr>
+        <p:txBody>
+          <a:bodyPr wrap="square" lIns="25400" tIns="25400" rIns="25400" bIns="25400" anchor="t">
+            <a:spAutoFit/>
+          </a:bodyPr>
+          <a:lstStyle/>
+          <a:p>
+            <a:pPr algn="l">
+              <a:lnSpc>
+                <a:spcPct val="100000"/>
+              </a:lnSpc>
+              <a:spcBef>
+                <a:spcPts val="0"/>
+              </a:spcBef>
+              <a:spcAft>
+                <a:spcPts val="600"/>
+              </a:spcAft>
+            </a:pPr>
+            <a:r>
+              <a:rPr sz="1900" b="0">
+                <a:solidFill>
+                  <a:srgbClr val="F2F2F2"/>
+                </a:solidFill>
+                <a:latin typeface="Segoe UI"/>
+              </a:rPr>
+              <a:t>🎯  </a:t>
+            </a:r>
+            <a:r>
+              <a:rPr sz="1500" b="1">
+                <a:solidFill>
+                  <a:srgbClr val="FF3B3B"/>
+                </a:solidFill>
+                <a:latin typeface="Segoe UI"/>
+              </a:rPr>
+              <a:t>Category Diversity</a:t>
+            </a:r>
+          </a:p>
+        </p:txBody>
+      </p:sp>
+      <p:sp>
+        <p:nvSpPr>
+          <p:cNvPr id="16" name="TextBox 15"/>
+          <p:cNvSpPr txBox="1"/>
+          <p:nvPr/>
+        </p:nvSpPr>
+        <p:spPr>
+          <a:xfrm>
+            <a:off x="8284464" y="2578608"/>
+            <a:ext cx="3200400" cy="2194560"/>
+          </a:xfrm>
+          <a:prstGeom prst="rect">
+            <a:avLst/>
+          </a:prstGeom>
+          <a:noFill/>
+        </p:spPr>
+        <p:txBody>
+          <a:bodyPr wrap="square" lIns="25400" tIns="25400" rIns="25400" bIns="25400" anchor="t">
+            <a:spAutoFit/>
+          </a:bodyPr>
+          <a:lstStyle/>
+          <a:p>
+            <a:pPr algn="l">
+              <a:lnSpc>
+                <a:spcPct val="116000"/>
+              </a:lnSpc>
+              <a:spcBef>
+                <a:spcPts val="0"/>
+              </a:spcBef>
+              <a:spcAft>
+                <a:spcPts val="500"/>
+              </a:spcAft>
+            </a:pPr>
+            <a:r>
+              <a:rPr sz="1150" b="0">
+                <a:solidFill>
+                  <a:srgbClr val="F2F2F2"/>
+                </a:solidFill>
+                <a:latin typeface="Segoe UI"/>
+              </a:rPr>
+              <a:t>• Derive interest categories from</a:t>
+            </a:r>
+          </a:p>
+          <a:p>
+            <a:pPr algn="l">
+              <a:lnSpc>
+                <a:spcPct val="116000"/>
+              </a:lnSpc>
+              <a:spcBef>
+                <a:spcPts val="0"/>
+              </a:spcBef>
+              <a:spcAft>
+                <a:spcPts val="500"/>
+              </a:spcAft>
+            </a:pPr>
+            <a:r>
+              <a:rPr sz="1150" b="0">
+                <a:solidFill>
+                  <a:srgbClr val="9A9AA2"/>
+                </a:solidFill>
+                <a:latin typeface="Segoe UI"/>
+              </a:rPr>
+              <a:t>  subscription classification</a:t>
+            </a:r>
+          </a:p>
+          <a:p>
+            <a:pPr algn="l">
+              <a:lnSpc>
+                <a:spcPct val="116000"/>
+              </a:lnSpc>
+              <a:spcBef>
+                <a:spcPts val="0"/>
+              </a:spcBef>
+              <a:spcAft>
+                <a:spcPts val="500"/>
+              </a:spcAft>
+            </a:pPr>
+            <a:r>
+              <a:rPr sz="1150" b="0">
+                <a:solidFill>
+                  <a:srgbClr val="F2F2F2"/>
+                </a:solidFill>
+                <a:latin typeface="Segoe UI"/>
+              </a:rPr>
+              <a:t>• Balanced keyword extraction</a:t>
+            </a:r>
+          </a:p>
+          <a:p>
+            <a:pPr algn="l">
+              <a:lnSpc>
+                <a:spcPct val="116000"/>
+              </a:lnSpc>
+              <a:spcBef>
+                <a:spcPts val="0"/>
+              </a:spcBef>
+              <a:spcAft>
+                <a:spcPts val="500"/>
+              </a:spcAft>
+            </a:pPr>
+            <a:r>
+              <a:rPr sz="1150" b="0">
+                <a:solidFill>
+                  <a:srgbClr val="9A9AA2"/>
+                </a:solidFill>
+                <a:latin typeface="Segoe UI"/>
+              </a:rPr>
+              <a:t>  (round-robin)</a:t>
+            </a:r>
+          </a:p>
+          <a:p>
+            <a:pPr algn="l">
+              <a:lnSpc>
+                <a:spcPct val="116000"/>
+              </a:lnSpc>
+              <a:spcBef>
+                <a:spcPts val="0"/>
+              </a:spcBef>
+              <a:spcAft>
+                <a:spcPts val="500"/>
+              </a:spcAft>
+            </a:pPr>
+            <a:r>
+              <a:rPr sz="1150" b="0">
+                <a:solidFill>
+                  <a:srgbClr val="F2F2F2"/>
+                </a:solidFill>
+                <a:latin typeface="Segoe UI"/>
+              </a:rPr>
+              <a:t>• Guarantee ≥1 per category</a:t>
+            </a:r>
+          </a:p>
+          <a:p>
+            <a:pPr algn="l">
+              <a:lnSpc>
+                <a:spcPct val="116000"/>
+              </a:lnSpc>
+              <a:spcBef>
+                <a:spcPts val="0"/>
+              </a:spcBef>
+              <a:spcAft>
+                <a:spcPts val="500"/>
+              </a:spcAft>
+            </a:pPr>
+            <a:r>
+              <a:rPr sz="1100" b="0">
+                <a:solidFill>
+                  <a:srgbClr val="6A6A72"/>
+                </a:solidFill>
+                <a:latin typeface="Segoe UI"/>
+              </a:rPr>
+              <a:t>→ fixes "cooking-only" skew</a:t>
+            </a:r>
+          </a:p>
+        </p:txBody>
+      </p:sp>
+      <p:sp>
+        <p:nvSpPr>
+          <p:cNvPr id="17" name="Rounded Rectangle 16"/>
+          <p:cNvSpPr/>
+          <p:nvPr/>
+        </p:nvSpPr>
+        <p:spPr>
+          <a:xfrm>
+            <a:off x="502920" y="5349240"/>
+            <a:ext cx="11183112" cy="914400"/>
+          </a:xfrm>
+          <a:prstGeom prst="roundRect">
+            <a:avLst/>
+          </a:prstGeom>
+          <a:solidFill>
+            <a:srgbClr val="121215"/>
           </a:solidFill>
           <a:ln>
             <a:noFill/>
@@ -9432,22 +9912,22 @@
       </p:sp>
       <p:sp>
         <p:nvSpPr>
-          <p:cNvPr id="9" name="TextBox 8"/>
-          <p:cNvSpPr txBox="1"/>
-          <p:nvPr/>
-        </p:nvSpPr>
-        <p:spPr>
-          <a:xfrm>
-            <a:off x="502920" y="2011680"/>
-            <a:ext cx="2880360" cy="502920"/>
-          </a:xfrm>
-          <a:prstGeom prst="rect">
-            <a:avLst/>
-          </a:prstGeom>
-          <a:noFill/>
-        </p:spPr>
-        <p:txBody>
-          <a:bodyPr wrap="square" lIns="25400" tIns="25400" rIns="25400" bIns="25400" anchor="ctr">
+          <p:cNvPr id="18" name="TextBox 17"/>
+          <p:cNvSpPr txBox="1"/>
+          <p:nvPr/>
+        </p:nvSpPr>
+        <p:spPr>
+          <a:xfrm>
+            <a:off x="731520" y="5449824"/>
+            <a:ext cx="10789920" cy="365760"/>
+          </a:xfrm>
+          <a:prstGeom prst="rect">
+            <a:avLst/>
+          </a:prstGeom>
+          <a:noFill/>
+        </p:spPr>
+        <p:txBody>
+          <a:bodyPr wrap="square" lIns="25400" tIns="25400" rIns="25400" bIns="25400" anchor="t">
             <a:spAutoFit/>
           </a:bodyPr>
           <a:lstStyle/>
@@ -9464,1097 +9944,85 @@
               </a:spcAft>
             </a:pPr>
             <a:r>
+              <a:rPr sz="1200" b="1">
+                <a:solidFill>
+                  <a:srgbClr val="FF3B3B"/>
+                </a:solidFill>
+                <a:latin typeface="Consolas"/>
+              </a:rPr>
+              <a:t>Result screen</a:t>
+            </a:r>
+          </a:p>
+        </p:txBody>
+      </p:sp>
+      <p:sp>
+        <p:nvSpPr>
+          <p:cNvPr id="19" name="TextBox 18"/>
+          <p:cNvSpPr txBox="1"/>
+          <p:nvPr/>
+        </p:nvSpPr>
+        <p:spPr>
+          <a:xfrm>
+            <a:off x="731520" y="5797296"/>
+            <a:ext cx="10881360" cy="411480"/>
+          </a:xfrm>
+          <a:prstGeom prst="rect">
+            <a:avLst/>
+          </a:prstGeom>
+          <a:noFill/>
+        </p:spPr>
+        <p:txBody>
+          <a:bodyPr wrap="square" lIns="25400" tIns="25400" rIns="25400" bIns="25400" anchor="t">
+            <a:spAutoFit/>
+          </a:bodyPr>
+          <a:lstStyle/>
+          <a:p>
+            <a:pPr algn="l">
+              <a:lnSpc>
+                <a:spcPct val="100000"/>
+              </a:lnSpc>
+              <a:spcBef>
+                <a:spcPts val="0"/>
+              </a:spcBef>
+              <a:spcAft>
+                <a:spcPts val="600"/>
+              </a:spcAft>
+            </a:pPr>
+            <a:r>
               <a:rPr sz="1300" b="1">
                 <a:solidFill>
+                  <a:srgbClr val="2ECC71"/>
+                </a:solidFill>
+                <a:latin typeface="Segoe UI"/>
+              </a:rPr>
+              <a:t>📺 Recently watched, not subscribed</a:t>
+            </a:r>
+            <a:r>
+              <a:rPr sz="1300" b="0">
+                <a:solidFill>
+                  <a:srgbClr val="6A6A72"/>
+                </a:solidFill>
+                <a:latin typeface="Segoe UI"/>
+              </a:rPr>
+              <a:t>  +  </a:t>
+            </a:r>
+            <a:r>
+              <a:rPr sz="1300" b="1">
+                <a:solidFill>
                   <a:srgbClr val="FF3B3B"/>
                 </a:solidFill>
                 <a:latin typeface="Segoe UI"/>
               </a:rPr>
-              <a:t>Mode</a:t>
-            </a:r>
-          </a:p>
-        </p:txBody>
-      </p:sp>
-      <p:sp>
-        <p:nvSpPr>
-          <p:cNvPr id="10" name="TextBox 9"/>
-          <p:cNvSpPr txBox="1"/>
-          <p:nvPr/>
-        </p:nvSpPr>
-        <p:spPr>
-          <a:xfrm>
-            <a:off x="3383280" y="2011680"/>
-            <a:ext cx="2103120" cy="502920"/>
-          </a:xfrm>
-          <a:prstGeom prst="rect">
-            <a:avLst/>
-          </a:prstGeom>
-          <a:noFill/>
-        </p:spPr>
-        <p:txBody>
-          <a:bodyPr wrap="square" lIns="25400" tIns="25400" rIns="25400" bIns="25400" anchor="ctr">
-            <a:spAutoFit/>
-          </a:bodyPr>
-          <a:lstStyle/>
-          <a:p>
-            <a:pPr algn="ctr">
-              <a:lnSpc>
-                <a:spcPct val="100000"/>
-              </a:lnSpc>
-              <a:spcBef>
-                <a:spcPts val="0"/>
-              </a:spcBef>
-              <a:spcAft>
-                <a:spcPts val="600"/>
-              </a:spcAft>
-            </a:pPr>
-            <a:r>
-              <a:rPr sz="1300" b="1">
-                <a:solidFill>
-                  <a:srgbClr val="FF3B3B"/>
-                </a:solidFill>
-                <a:latin typeface="Segoe UI"/>
-              </a:rPr>
-              <a:t>User Effort</a:t>
-            </a:r>
-          </a:p>
-        </p:txBody>
-      </p:sp>
-      <p:sp>
-        <p:nvSpPr>
-          <p:cNvPr id="11" name="TextBox 10"/>
-          <p:cNvSpPr txBox="1"/>
-          <p:nvPr/>
-        </p:nvSpPr>
-        <p:spPr>
-          <a:xfrm>
-            <a:off x="5486400" y="2011680"/>
-            <a:ext cx="3017520" cy="502920"/>
-          </a:xfrm>
-          <a:prstGeom prst="rect">
-            <a:avLst/>
-          </a:prstGeom>
-          <a:noFill/>
-        </p:spPr>
-        <p:txBody>
-          <a:bodyPr wrap="square" lIns="25400" tIns="25400" rIns="25400" bIns="25400" anchor="ctr">
-            <a:spAutoFit/>
-          </a:bodyPr>
-          <a:lstStyle/>
-          <a:p>
-            <a:pPr algn="ctr">
-              <a:lnSpc>
-                <a:spcPct val="100000"/>
-              </a:lnSpc>
-              <a:spcBef>
-                <a:spcPts val="0"/>
-              </a:spcBef>
-              <a:spcAft>
-                <a:spcPts val="600"/>
-              </a:spcAft>
-            </a:pPr>
-            <a:r>
-              <a:rPr sz="1300" b="1">
-                <a:solidFill>
-                  <a:srgbClr val="FF3B3B"/>
-                </a:solidFill>
-                <a:latin typeface="Segoe UI"/>
-              </a:rPr>
-              <a:t>API Cost</a:t>
-            </a:r>
-          </a:p>
-        </p:txBody>
-      </p:sp>
-      <p:sp>
-        <p:nvSpPr>
-          <p:cNvPr id="12" name="TextBox 11"/>
-          <p:cNvSpPr txBox="1"/>
-          <p:nvPr/>
-        </p:nvSpPr>
-        <p:spPr>
-          <a:xfrm>
-            <a:off x="8503920" y="2011680"/>
-            <a:ext cx="3154680" cy="502920"/>
-          </a:xfrm>
-          <a:prstGeom prst="rect">
-            <a:avLst/>
-          </a:prstGeom>
-          <a:noFill/>
-        </p:spPr>
-        <p:txBody>
-          <a:bodyPr wrap="square" lIns="25400" tIns="25400" rIns="25400" bIns="25400" anchor="ctr">
-            <a:spAutoFit/>
-          </a:bodyPr>
-          <a:lstStyle/>
-          <a:p>
-            <a:pPr algn="ctr">
-              <a:lnSpc>
-                <a:spcPct val="100000"/>
-              </a:lnSpc>
-              <a:spcBef>
-                <a:spcPts val="0"/>
-              </a:spcBef>
-              <a:spcAft>
-                <a:spcPts val="600"/>
-              </a:spcAft>
-            </a:pPr>
-            <a:r>
-              <a:rPr sz="1300" b="1">
-                <a:solidFill>
-                  <a:srgbClr val="FF3B3B"/>
-                </a:solidFill>
-                <a:latin typeface="Segoe UI"/>
-              </a:rPr>
-              <a:t>Accuracy</a:t>
-            </a:r>
-          </a:p>
-        </p:txBody>
-      </p:sp>
-      <p:sp>
-        <p:nvSpPr>
-          <p:cNvPr id="13" name="Rectangle 12"/>
-          <p:cNvSpPr/>
-          <p:nvPr/>
-        </p:nvSpPr>
-        <p:spPr>
-          <a:xfrm>
-            <a:off x="502920" y="2542032"/>
-            <a:ext cx="11183112" cy="658368"/>
-          </a:xfrm>
-          <a:prstGeom prst="rect">
-            <a:avLst/>
-          </a:prstGeom>
-          <a:solidFill>
-            <a:srgbClr val="16161A"/>
-          </a:solidFill>
-          <a:ln>
-            <a:noFill/>
-          </a:ln>
-          <a:effectLst/>
-        </p:spPr>
-        <p:style>
-          <a:lnRef idx="1">
-            <a:schemeClr val="accent1"/>
-          </a:lnRef>
-          <a:fillRef idx="3">
-            <a:schemeClr val="accent1"/>
-          </a:fillRef>
-          <a:effectRef idx="2">
-            <a:schemeClr val="accent1"/>
-          </a:effectRef>
-          <a:fontRef idx="minor">
-            <a:schemeClr val="lt1"/>
-          </a:fontRef>
-        </p:style>
-        <p:txBody>
-          <a:bodyPr rtlCol="0" anchor="ctr"/>
-          <a:lstStyle/>
-          <a:p>
-            <a:pPr algn="ctr"/>
-            <a:endParaRPr/>
-          </a:p>
-        </p:txBody>
-      </p:sp>
-      <p:sp>
-        <p:nvSpPr>
-          <p:cNvPr id="14" name="TextBox 13"/>
-          <p:cNvSpPr txBox="1"/>
-          <p:nvPr/>
-        </p:nvSpPr>
-        <p:spPr>
-          <a:xfrm>
-            <a:off x="502920" y="2542032"/>
-            <a:ext cx="2880360" cy="658368"/>
-          </a:xfrm>
-          <a:prstGeom prst="rect">
-            <a:avLst/>
-          </a:prstGeom>
-          <a:noFill/>
-        </p:spPr>
-        <p:txBody>
-          <a:bodyPr wrap="square" lIns="25400" tIns="25400" rIns="25400" bIns="25400" anchor="ctr">
-            <a:spAutoFit/>
-          </a:bodyPr>
-          <a:lstStyle/>
-          <a:p>
-            <a:pPr algn="l">
-              <a:lnSpc>
-                <a:spcPct val="100000"/>
-              </a:lnSpc>
-              <a:spcBef>
-                <a:spcPts val="0"/>
-              </a:spcBef>
-              <a:spcAft>
-                <a:spcPts val="600"/>
-              </a:spcAft>
-            </a:pPr>
-            <a:r>
-              <a:rPr sz="1400" b="0">
+              <a:t>✨ Taste-based new channels</a:t>
+            </a:r>
+            <a:r>
+              <a:rPr sz="1200" b="0">
                 <a:solidFill>
                   <a:srgbClr val="9A9AA2"/>
                 </a:solidFill>
                 <a:latin typeface="Segoe UI"/>
               </a:rPr>
-              <a:t>Neither uploaded</a:t>
-            </a:r>
-          </a:p>
-        </p:txBody>
-      </p:sp>
-      <p:sp>
-        <p:nvSpPr>
-          <p:cNvPr id="15" name="TextBox 14"/>
-          <p:cNvSpPr txBox="1"/>
-          <p:nvPr/>
-        </p:nvSpPr>
-        <p:spPr>
-          <a:xfrm>
-            <a:off x="3383280" y="2542032"/>
-            <a:ext cx="2103120" cy="658368"/>
-          </a:xfrm>
-          <a:prstGeom prst="rect">
-            <a:avLst/>
-          </a:prstGeom>
-          <a:noFill/>
-        </p:spPr>
-        <p:txBody>
-          <a:bodyPr wrap="square" lIns="25400" tIns="25400" rIns="25400" bIns="25400" anchor="ctr">
-            <a:spAutoFit/>
-          </a:bodyPr>
-          <a:lstStyle/>
-          <a:p>
-            <a:pPr algn="ctr">
-              <a:lnSpc>
-                <a:spcPct val="100000"/>
-              </a:lnSpc>
-              <a:spcBef>
-                <a:spcPts val="0"/>
-              </a:spcBef>
-              <a:spcAft>
-                <a:spcPts val="600"/>
-              </a:spcAft>
-            </a:pPr>
-            <a:r>
-              <a:rPr sz="1200" b="0">
-                <a:solidFill>
-                  <a:srgbClr val="9A9AA2"/>
-                </a:solidFill>
-                <a:latin typeface="Segoe UI"/>
-              </a:rPr>
-              <a:t>none</a:t>
-            </a:r>
-          </a:p>
-        </p:txBody>
-      </p:sp>
-      <p:sp>
-        <p:nvSpPr>
-          <p:cNvPr id="16" name="TextBox 15"/>
-          <p:cNvSpPr txBox="1"/>
-          <p:nvPr/>
-        </p:nvSpPr>
-        <p:spPr>
-          <a:xfrm>
-            <a:off x="5486400" y="2542032"/>
-            <a:ext cx="3017520" cy="658368"/>
-          </a:xfrm>
-          <a:prstGeom prst="rect">
-            <a:avLst/>
-          </a:prstGeom>
-          <a:noFill/>
-        </p:spPr>
-        <p:txBody>
-          <a:bodyPr wrap="square" lIns="25400" tIns="25400" rIns="25400" bIns="25400" anchor="ctr">
-            <a:spAutoFit/>
-          </a:bodyPr>
-          <a:lstStyle/>
-          <a:p>
-            <a:pPr algn="ctr">
-              <a:lnSpc>
-                <a:spcPct val="100000"/>
-              </a:lnSpc>
-              <a:spcBef>
-                <a:spcPts val="0"/>
-              </a:spcBef>
-              <a:spcAft>
-                <a:spcPts val="600"/>
-              </a:spcAft>
-            </a:pPr>
-            <a:r>
-              <a:rPr sz="1150" b="0">
-                <a:solidFill>
-                  <a:srgbClr val="9A9AA2"/>
-                </a:solidFill>
-                <a:latin typeface="Consolas"/>
-              </a:rPr>
-              <a:t>commentThreads × #channels</a:t>
-            </a:r>
-          </a:p>
-        </p:txBody>
-      </p:sp>
-      <p:sp>
-        <p:nvSpPr>
-          <p:cNvPr id="17" name="TextBox 16"/>
-          <p:cNvSpPr txBox="1"/>
-          <p:nvPr/>
-        </p:nvSpPr>
-        <p:spPr>
-          <a:xfrm>
-            <a:off x="8503920" y="2542032"/>
-            <a:ext cx="3154680" cy="658368"/>
-          </a:xfrm>
-          <a:prstGeom prst="rect">
-            <a:avLst/>
-          </a:prstGeom>
-          <a:noFill/>
-        </p:spPr>
-        <p:txBody>
-          <a:bodyPr wrap="square" lIns="25400" tIns="25400" rIns="25400" bIns="25400" anchor="ctr">
-            <a:spAutoFit/>
-          </a:bodyPr>
-          <a:lstStyle/>
-          <a:p>
-            <a:pPr algn="ctr">
-              <a:lnSpc>
-                <a:spcPct val="100000"/>
-              </a:lnSpc>
-              <a:spcBef>
-                <a:spcPts val="0"/>
-              </a:spcBef>
-              <a:spcAft>
-                <a:spcPts val="600"/>
-              </a:spcAft>
-            </a:pPr>
-            <a:r>
-              <a:rPr sz="1200" b="0">
-                <a:solidFill>
-                  <a:srgbClr val="9A9AA2"/>
-                </a:solidFill>
-                <a:latin typeface="Segoe UI"/>
-              </a:rPr>
-              <a:t>approx comments · no watch</a:t>
-            </a:r>
-          </a:p>
-        </p:txBody>
-      </p:sp>
-      <p:sp>
-        <p:nvSpPr>
-          <p:cNvPr id="18" name="TextBox 17"/>
-          <p:cNvSpPr txBox="1"/>
-          <p:nvPr/>
-        </p:nvSpPr>
-        <p:spPr>
-          <a:xfrm>
-            <a:off x="502920" y="3255264"/>
-            <a:ext cx="2880360" cy="658368"/>
-          </a:xfrm>
-          <a:prstGeom prst="rect">
-            <a:avLst/>
-          </a:prstGeom>
-          <a:noFill/>
-        </p:spPr>
-        <p:txBody>
-          <a:bodyPr wrap="square" lIns="25400" tIns="25400" rIns="25400" bIns="25400" anchor="ctr">
-            <a:spAutoFit/>
-          </a:bodyPr>
-          <a:lstStyle/>
-          <a:p>
-            <a:pPr algn="l">
-              <a:lnSpc>
-                <a:spcPct val="100000"/>
-              </a:lnSpc>
-              <a:spcBef>
-                <a:spcPts val="0"/>
-              </a:spcBef>
-              <a:spcAft>
-                <a:spcPts val="600"/>
-              </a:spcAft>
-            </a:pPr>
-            <a:r>
-              <a:rPr sz="1400" b="1">
-                <a:solidFill>
-                  <a:srgbClr val="F2F2F2"/>
-                </a:solidFill>
-                <a:latin typeface="Segoe UI"/>
-              </a:rPr>
-              <a:t>comments.csv only</a:t>
-            </a:r>
-          </a:p>
-        </p:txBody>
-      </p:sp>
-      <p:sp>
-        <p:nvSpPr>
-          <p:cNvPr id="19" name="TextBox 18"/>
-          <p:cNvSpPr txBox="1"/>
-          <p:nvPr/>
-        </p:nvSpPr>
-        <p:spPr>
-          <a:xfrm>
-            <a:off x="3383280" y="3255264"/>
-            <a:ext cx="2103120" cy="658368"/>
-          </a:xfrm>
-          <a:prstGeom prst="rect">
-            <a:avLst/>
-          </a:prstGeom>
-          <a:noFill/>
-        </p:spPr>
-        <p:txBody>
-          <a:bodyPr wrap="square" lIns="25400" tIns="25400" rIns="25400" bIns="25400" anchor="ctr">
-            <a:spAutoFit/>
-          </a:bodyPr>
-          <a:lstStyle/>
-          <a:p>
-            <a:pPr algn="ctr">
-              <a:lnSpc>
-                <a:spcPct val="100000"/>
-              </a:lnSpc>
-              <a:spcBef>
-                <a:spcPts val="0"/>
-              </a:spcBef>
-              <a:spcAft>
-                <a:spcPts val="600"/>
-              </a:spcAft>
-            </a:pPr>
-            <a:r>
-              <a:rPr sz="1200" b="0">
-                <a:solidFill>
-                  <a:srgbClr val="9A9AA2"/>
-                </a:solidFill>
-                <a:latin typeface="Segoe UI"/>
-              </a:rPr>
-              <a:t>1 upload</a:t>
-            </a:r>
-          </a:p>
-        </p:txBody>
-      </p:sp>
-      <p:sp>
-        <p:nvSpPr>
-          <p:cNvPr id="20" name="TextBox 19"/>
-          <p:cNvSpPr txBox="1"/>
-          <p:nvPr/>
-        </p:nvSpPr>
-        <p:spPr>
-          <a:xfrm>
-            <a:off x="5486400" y="3255264"/>
-            <a:ext cx="3017520" cy="658368"/>
-          </a:xfrm>
-          <a:prstGeom prst="rect">
-            <a:avLst/>
-          </a:prstGeom>
-          <a:noFill/>
-        </p:spPr>
-        <p:txBody>
-          <a:bodyPr wrap="square" lIns="25400" tIns="25400" rIns="25400" bIns="25400" anchor="ctr">
-            <a:spAutoFit/>
-          </a:bodyPr>
-          <a:lstStyle/>
-          <a:p>
-            <a:pPr algn="ctr">
-              <a:lnSpc>
-                <a:spcPct val="100000"/>
-              </a:lnSpc>
-              <a:spcBef>
-                <a:spcPts val="0"/>
-              </a:spcBef>
-              <a:spcAft>
-                <a:spcPts val="600"/>
-              </a:spcAft>
-            </a:pPr>
-            <a:r>
-              <a:rPr sz="1150" b="0">
-                <a:solidFill>
-                  <a:srgbClr val="9A9AA2"/>
-                </a:solidFill>
-                <a:latin typeface="Consolas"/>
-              </a:rPr>
-              <a:t>videos.list × #videos/50</a:t>
-            </a:r>
-          </a:p>
-        </p:txBody>
-      </p:sp>
-      <p:sp>
-        <p:nvSpPr>
-          <p:cNvPr id="21" name="TextBox 20"/>
-          <p:cNvSpPr txBox="1"/>
-          <p:nvPr/>
-        </p:nvSpPr>
-        <p:spPr>
-          <a:xfrm>
-            <a:off x="8503920" y="3255264"/>
-            <a:ext cx="3154680" cy="658368"/>
-          </a:xfrm>
-          <a:prstGeom prst="rect">
-            <a:avLst/>
-          </a:prstGeom>
-          <a:noFill/>
-        </p:spPr>
-        <p:txBody>
-          <a:bodyPr wrap="square" lIns="25400" tIns="25400" rIns="25400" bIns="25400" anchor="ctr">
-            <a:spAutoFit/>
-          </a:bodyPr>
-          <a:lstStyle/>
-          <a:p>
-            <a:pPr algn="ctr">
-              <a:lnSpc>
-                <a:spcPct val="100000"/>
-              </a:lnSpc>
-              <a:spcBef>
-                <a:spcPts val="0"/>
-              </a:spcBef>
-              <a:spcAft>
-                <a:spcPts val="600"/>
-              </a:spcAft>
-            </a:pPr>
-            <a:r>
-              <a:rPr sz="1200" b="0">
-                <a:solidFill>
-                  <a:srgbClr val="F2F2F2"/>
-                </a:solidFill>
-                <a:latin typeface="Segoe UI"/>
-              </a:rPr>
-              <a:t>exact comments · no watch</a:t>
-            </a:r>
-          </a:p>
-        </p:txBody>
-      </p:sp>
-      <p:sp>
-        <p:nvSpPr>
-          <p:cNvPr id="22" name="Rectangle 21"/>
-          <p:cNvSpPr/>
-          <p:nvPr/>
-        </p:nvSpPr>
-        <p:spPr>
-          <a:xfrm>
-            <a:off x="502920" y="3968496"/>
-            <a:ext cx="11183112" cy="658368"/>
-          </a:xfrm>
-          <a:prstGeom prst="rect">
-            <a:avLst/>
-          </a:prstGeom>
-          <a:solidFill>
-            <a:srgbClr val="16161A"/>
-          </a:solidFill>
-          <a:ln>
-            <a:noFill/>
-          </a:ln>
-          <a:effectLst/>
-        </p:spPr>
-        <p:style>
-          <a:lnRef idx="1">
-            <a:schemeClr val="accent1"/>
-          </a:lnRef>
-          <a:fillRef idx="3">
-            <a:schemeClr val="accent1"/>
-          </a:fillRef>
-          <a:effectRef idx="2">
-            <a:schemeClr val="accent1"/>
-          </a:effectRef>
-          <a:fontRef idx="minor">
-            <a:schemeClr val="lt1"/>
-          </a:fontRef>
-        </p:style>
-        <p:txBody>
-          <a:bodyPr rtlCol="0" anchor="ctr"/>
-          <a:lstStyle/>
-          <a:p>
-            <a:pPr algn="ctr"/>
-            <a:endParaRPr/>
-          </a:p>
-        </p:txBody>
-      </p:sp>
-      <p:sp>
-        <p:nvSpPr>
-          <p:cNvPr id="23" name="TextBox 22"/>
-          <p:cNvSpPr txBox="1"/>
-          <p:nvPr/>
-        </p:nvSpPr>
-        <p:spPr>
-          <a:xfrm>
-            <a:off x="502920" y="3968496"/>
-            <a:ext cx="2880360" cy="658368"/>
-          </a:xfrm>
-          <a:prstGeom prst="rect">
-            <a:avLst/>
-          </a:prstGeom>
-          <a:noFill/>
-        </p:spPr>
-        <p:txBody>
-          <a:bodyPr wrap="square" lIns="25400" tIns="25400" rIns="25400" bIns="25400" anchor="ctr">
-            <a:spAutoFit/>
-          </a:bodyPr>
-          <a:lstStyle/>
-          <a:p>
-            <a:pPr algn="l">
-              <a:lnSpc>
-                <a:spcPct val="100000"/>
-              </a:lnSpc>
-              <a:spcBef>
-                <a:spcPts val="0"/>
-              </a:spcBef>
-              <a:spcAft>
-                <a:spcPts val="600"/>
-              </a:spcAft>
-            </a:pPr>
-            <a:r>
-              <a:rPr sz="1400" b="1">
-                <a:solidFill>
-                  <a:srgbClr val="F2F2F2"/>
-                </a:solidFill>
-                <a:latin typeface="Segoe UI"/>
-              </a:rPr>
-              <a:t>watch-history.json only</a:t>
-            </a:r>
-          </a:p>
-        </p:txBody>
-      </p:sp>
-      <p:sp>
-        <p:nvSpPr>
-          <p:cNvPr id="24" name="TextBox 23"/>
-          <p:cNvSpPr txBox="1"/>
-          <p:nvPr/>
-        </p:nvSpPr>
-        <p:spPr>
-          <a:xfrm>
-            <a:off x="3383280" y="3968496"/>
-            <a:ext cx="2103120" cy="658368"/>
-          </a:xfrm>
-          <a:prstGeom prst="rect">
-            <a:avLst/>
-          </a:prstGeom>
-          <a:noFill/>
-        </p:spPr>
-        <p:txBody>
-          <a:bodyPr wrap="square" lIns="25400" tIns="25400" rIns="25400" bIns="25400" anchor="ctr">
-            <a:spAutoFit/>
-          </a:bodyPr>
-          <a:lstStyle/>
-          <a:p>
-            <a:pPr algn="ctr">
-              <a:lnSpc>
-                <a:spcPct val="100000"/>
-              </a:lnSpc>
-              <a:spcBef>
-                <a:spcPts val="0"/>
-              </a:spcBef>
-              <a:spcAft>
-                <a:spcPts val="600"/>
-              </a:spcAft>
-            </a:pPr>
-            <a:r>
-              <a:rPr sz="1200" b="0">
-                <a:solidFill>
-                  <a:srgbClr val="9A9AA2"/>
-                </a:solidFill>
-                <a:latin typeface="Segoe UI"/>
-              </a:rPr>
-              <a:t>1 upload</a:t>
-            </a:r>
-          </a:p>
-        </p:txBody>
-      </p:sp>
-      <p:sp>
-        <p:nvSpPr>
-          <p:cNvPr id="25" name="TextBox 24"/>
-          <p:cNvSpPr txBox="1"/>
-          <p:nvPr/>
-        </p:nvSpPr>
-        <p:spPr>
-          <a:xfrm>
-            <a:off x="5486400" y="3968496"/>
-            <a:ext cx="3017520" cy="658368"/>
-          </a:xfrm>
-          <a:prstGeom prst="rect">
-            <a:avLst/>
-          </a:prstGeom>
-          <a:noFill/>
-        </p:spPr>
-        <p:txBody>
-          <a:bodyPr wrap="square" lIns="25400" tIns="25400" rIns="25400" bIns="25400" anchor="ctr">
-            <a:spAutoFit/>
-          </a:bodyPr>
-          <a:lstStyle/>
-          <a:p>
-            <a:pPr algn="ctr">
-              <a:lnSpc>
-                <a:spcPct val="100000"/>
-              </a:lnSpc>
-              <a:spcBef>
-                <a:spcPts val="0"/>
-              </a:spcBef>
-              <a:spcAft>
-                <a:spcPts val="600"/>
-              </a:spcAft>
-            </a:pPr>
-            <a:r>
-              <a:rPr sz="1150" b="0">
-                <a:solidFill>
-                  <a:srgbClr val="9A9AA2"/>
-                </a:solidFill>
-                <a:latin typeface="Consolas"/>
-              </a:rPr>
-              <a:t>0 units (channelId in subtitles)</a:t>
-            </a:r>
-          </a:p>
-        </p:txBody>
-      </p:sp>
-      <p:sp>
-        <p:nvSpPr>
-          <p:cNvPr id="26" name="TextBox 25"/>
-          <p:cNvSpPr txBox="1"/>
-          <p:nvPr/>
-        </p:nvSpPr>
-        <p:spPr>
-          <a:xfrm>
-            <a:off x="8503920" y="3968496"/>
-            <a:ext cx="3154680" cy="658368"/>
-          </a:xfrm>
-          <a:prstGeom prst="rect">
-            <a:avLst/>
-          </a:prstGeom>
-          <a:noFill/>
-        </p:spPr>
-        <p:txBody>
-          <a:bodyPr wrap="square" lIns="25400" tIns="25400" rIns="25400" bIns="25400" anchor="ctr">
-            <a:spAutoFit/>
-          </a:bodyPr>
-          <a:lstStyle/>
-          <a:p>
-            <a:pPr algn="ctr">
-              <a:lnSpc>
-                <a:spcPct val="100000"/>
-              </a:lnSpc>
-              <a:spcBef>
-                <a:spcPts val="0"/>
-              </a:spcBef>
-              <a:spcAft>
-                <a:spcPts val="600"/>
-              </a:spcAft>
-            </a:pPr>
-            <a:r>
-              <a:rPr sz="1200" b="0">
-                <a:solidFill>
-                  <a:srgbClr val="F2F2F2"/>
-                </a:solidFill>
-                <a:latin typeface="Segoe UI"/>
-              </a:rPr>
-              <a:t>exact watch · approx comments</a:t>
-            </a:r>
-          </a:p>
-        </p:txBody>
-      </p:sp>
-      <p:sp>
-        <p:nvSpPr>
-          <p:cNvPr id="27" name="Rectangle 26"/>
-          <p:cNvSpPr/>
-          <p:nvPr/>
-        </p:nvSpPr>
-        <p:spPr>
-          <a:xfrm>
-            <a:off x="502920" y="4681728"/>
-            <a:ext cx="11183112" cy="658368"/>
-          </a:xfrm>
-          <a:prstGeom prst="rect">
-            <a:avLst/>
-          </a:prstGeom>
-          <a:solidFill>
-            <a:srgbClr val="142218"/>
-          </a:solidFill>
-          <a:ln>
-            <a:noFill/>
-          </a:ln>
-          <a:effectLst/>
-        </p:spPr>
-        <p:style>
-          <a:lnRef idx="1">
-            <a:schemeClr val="accent1"/>
-          </a:lnRef>
-          <a:fillRef idx="3">
-            <a:schemeClr val="accent1"/>
-          </a:fillRef>
-          <a:effectRef idx="2">
-            <a:schemeClr val="accent1"/>
-          </a:effectRef>
-          <a:fontRef idx="minor">
-            <a:schemeClr val="lt1"/>
-          </a:fontRef>
-        </p:style>
-        <p:txBody>
-          <a:bodyPr rtlCol="0" anchor="ctr"/>
-          <a:lstStyle/>
-          <a:p>
-            <a:pPr algn="ctr"/>
-            <a:endParaRPr/>
-          </a:p>
-        </p:txBody>
-      </p:sp>
-      <p:sp>
-        <p:nvSpPr>
-          <p:cNvPr id="28" name="TextBox 27"/>
-          <p:cNvSpPr txBox="1"/>
-          <p:nvPr/>
-        </p:nvSpPr>
-        <p:spPr>
-          <a:xfrm>
-            <a:off x="502920" y="4681728"/>
-            <a:ext cx="2880360" cy="658368"/>
-          </a:xfrm>
-          <a:prstGeom prst="rect">
-            <a:avLst/>
-          </a:prstGeom>
-          <a:noFill/>
-        </p:spPr>
-        <p:txBody>
-          <a:bodyPr wrap="square" lIns="25400" tIns="25400" rIns="25400" bIns="25400" anchor="ctr">
-            <a:spAutoFit/>
-          </a:bodyPr>
-          <a:lstStyle/>
-          <a:p>
-            <a:pPr algn="l">
-              <a:lnSpc>
-                <a:spcPct val="100000"/>
-              </a:lnSpc>
-              <a:spcBef>
-                <a:spcPts val="0"/>
-              </a:spcBef>
-              <a:spcAft>
-                <a:spcPts val="600"/>
-              </a:spcAft>
-            </a:pPr>
-            <a:r>
-              <a:rPr sz="1400" b="1">
-                <a:solidFill>
-                  <a:srgbClr val="2ECC71"/>
-                </a:solidFill>
-                <a:latin typeface="Segoe UI"/>
-              </a:rPr>
-              <a:t>Both ⭐</a:t>
-            </a:r>
-          </a:p>
-        </p:txBody>
-      </p:sp>
-      <p:sp>
-        <p:nvSpPr>
-          <p:cNvPr id="29" name="TextBox 28"/>
-          <p:cNvSpPr txBox="1"/>
-          <p:nvPr/>
-        </p:nvSpPr>
-        <p:spPr>
-          <a:xfrm>
-            <a:off x="3383280" y="4681728"/>
-            <a:ext cx="2103120" cy="658368"/>
-          </a:xfrm>
-          <a:prstGeom prst="rect">
-            <a:avLst/>
-          </a:prstGeom>
-          <a:noFill/>
-        </p:spPr>
-        <p:txBody>
-          <a:bodyPr wrap="square" lIns="25400" tIns="25400" rIns="25400" bIns="25400" anchor="ctr">
-            <a:spAutoFit/>
-          </a:bodyPr>
-          <a:lstStyle/>
-          <a:p>
-            <a:pPr algn="ctr">
-              <a:lnSpc>
-                <a:spcPct val="100000"/>
-              </a:lnSpc>
-              <a:spcBef>
-                <a:spcPts val="0"/>
-              </a:spcBef>
-              <a:spcAft>
-                <a:spcPts val="600"/>
-              </a:spcAft>
-            </a:pPr>
-            <a:r>
-              <a:rPr sz="1200" b="0">
-                <a:solidFill>
-                  <a:srgbClr val="9A9AA2"/>
-                </a:solidFill>
-                <a:latin typeface="Segoe UI"/>
-              </a:rPr>
-              <a:t>2 uploads</a:t>
-            </a:r>
-          </a:p>
-        </p:txBody>
-      </p:sp>
-      <p:sp>
-        <p:nvSpPr>
-          <p:cNvPr id="30" name="TextBox 29"/>
-          <p:cNvSpPr txBox="1"/>
-          <p:nvPr/>
-        </p:nvSpPr>
-        <p:spPr>
-          <a:xfrm>
-            <a:off x="5486400" y="4681728"/>
-            <a:ext cx="3017520" cy="658368"/>
-          </a:xfrm>
-          <a:prstGeom prst="rect">
-            <a:avLst/>
-          </a:prstGeom>
-          <a:noFill/>
-        </p:spPr>
-        <p:txBody>
-          <a:bodyPr wrap="square" lIns="25400" tIns="25400" rIns="25400" bIns="25400" anchor="ctr">
-            <a:spAutoFit/>
-          </a:bodyPr>
-          <a:lstStyle/>
-          <a:p>
-            <a:pPr algn="ctr">
-              <a:lnSpc>
-                <a:spcPct val="100000"/>
-              </a:lnSpc>
-              <a:spcBef>
-                <a:spcPts val="0"/>
-              </a:spcBef>
-              <a:spcAft>
-                <a:spcPts val="600"/>
-              </a:spcAft>
-            </a:pPr>
-            <a:r>
-              <a:rPr sz="1150" b="0">
-                <a:solidFill>
-                  <a:srgbClr val="9A9AA2"/>
-                </a:solidFill>
-                <a:latin typeface="Consolas"/>
-              </a:rPr>
-              <a:t>comment video-resolve only</a:t>
-            </a:r>
-          </a:p>
-        </p:txBody>
-      </p:sp>
-      <p:sp>
-        <p:nvSpPr>
-          <p:cNvPr id="31" name="TextBox 30"/>
-          <p:cNvSpPr txBox="1"/>
-          <p:nvPr/>
-        </p:nvSpPr>
-        <p:spPr>
-          <a:xfrm>
-            <a:off x="8503920" y="4681728"/>
-            <a:ext cx="3154680" cy="658368"/>
-          </a:xfrm>
-          <a:prstGeom prst="rect">
-            <a:avLst/>
-          </a:prstGeom>
-          <a:noFill/>
-        </p:spPr>
-        <p:txBody>
-          <a:bodyPr wrap="square" lIns="25400" tIns="25400" rIns="25400" bIns="25400" anchor="ctr">
-            <a:spAutoFit/>
-          </a:bodyPr>
-          <a:lstStyle/>
-          <a:p>
-            <a:pPr algn="ctr">
-              <a:lnSpc>
-                <a:spcPct val="100000"/>
-              </a:lnSpc>
-              <a:spcBef>
-                <a:spcPts val="0"/>
-              </a:spcBef>
-              <a:spcAft>
-                <a:spcPts val="600"/>
-              </a:spcAft>
-            </a:pPr>
-            <a:r>
-              <a:rPr sz="1200" b="0">
-                <a:solidFill>
-                  <a:srgbClr val="2ECC71"/>
-                </a:solidFill>
-                <a:latin typeface="Segoe UI"/>
-              </a:rPr>
-              <a:t>all exact</a:t>
-            </a:r>
-          </a:p>
-        </p:txBody>
-      </p:sp>
-      <p:sp>
-        <p:nvSpPr>
-          <p:cNvPr id="32" name="TextBox 31"/>
-          <p:cNvSpPr txBox="1"/>
-          <p:nvPr/>
-        </p:nvSpPr>
-        <p:spPr>
-          <a:xfrm>
-            <a:off x="502920" y="5669280"/>
-            <a:ext cx="11155680" cy="822960"/>
-          </a:xfrm>
-          <a:prstGeom prst="rect">
-            <a:avLst/>
-          </a:prstGeom>
-          <a:noFill/>
-        </p:spPr>
-        <p:txBody>
-          <a:bodyPr wrap="square" lIns="25400" tIns="25400" rIns="25400" bIns="25400" anchor="t">
-            <a:spAutoFit/>
-          </a:bodyPr>
-          <a:lstStyle/>
-          <a:p>
-            <a:pPr algn="l">
-              <a:lnSpc>
-                <a:spcPct val="120000"/>
-              </a:lnSpc>
-              <a:spcBef>
-                <a:spcPts val="0"/>
-              </a:spcBef>
-              <a:spcAft>
-                <a:spcPts val="600"/>
-              </a:spcAft>
-            </a:pPr>
-            <a:r>
-              <a:rPr sz="1300" b="1">
-                <a:solidFill>
-                  <a:srgbClr val="F4A844"/>
-                </a:solidFill>
-                <a:latin typeface="Segoe UI"/>
-              </a:rPr>
-              <a:t>Auto file detection: </a:t>
-            </a:r>
-            <a:r>
-              <a:rPr sz="1300" b="0">
-                <a:solidFill>
-                  <a:srgbClr val="9A9AA2"/>
-                </a:solidFill>
-                <a:latin typeface="Segoe UI"/>
-              </a:rPr>
-              <a:t>filename (watch/comment) + first 4KB content (titleUrl·subtitles patterns) auto-routes the type</a:t>
-            </a:r>
-          </a:p>
-          <a:p>
-            <a:pPr algn="l">
-              <a:lnSpc>
-                <a:spcPct val="120000"/>
-              </a:lnSpc>
-              <a:spcBef>
-                <a:spcPts val="0"/>
-              </a:spcBef>
-              <a:spcAft>
-                <a:spcPts val="600"/>
-              </a:spcAft>
-            </a:pPr>
-            <a:r>
-              <a:rPr sz="1200" b="0">
-                <a:solidFill>
-                  <a:srgbClr val="9A9AA2"/>
-                </a:solidFill>
-                <a:latin typeface="Segoe UI"/>
-              </a:rPr>
-              <a:t>watch-history.json embeds channelId in subtitles[0].url → </a:t>
-            </a:r>
-            <a:r>
-              <a:rPr sz="1200" b="1">
-                <a:solidFill>
-                  <a:srgbClr val="2ECC71"/>
-                </a:solidFill>
-                <a:latin typeface="Segoe UI"/>
-              </a:rPr>
-              <a:t>0 API calls</a:t>
-            </a:r>
-            <a:r>
-              <a:rPr sz="1200" b="0">
-                <a:solidFill>
-                  <a:srgbClr val="9A9AA2"/>
-                </a:solidFill>
-                <a:latin typeface="Segoe UI"/>
-              </a:rPr>
-              <a:t> to extract watch count &amp; last-watch date</a:t>
+              <a:t>   shown together (LLM-name fallback if discovery fails / not logged in)</a:t>
             </a:r>
           </a:p>
         </p:txBody>
@@ -10683,7 +10151,7 @@
         <p:spPr>
           <a:xfrm>
             <a:off x="502920" y="320040"/>
-            <a:ext cx="11155680" cy="365760"/>
+            <a:ext cx="11155680" cy="251351"/>
           </a:xfrm>
           <a:prstGeom prst="rect">
             <a:avLst/>
@@ -10708,13 +10176,1527 @@
               </a:spcAft>
             </a:pPr>
             <a:r>
+              <a:rPr sz="1300" b="1" dirty="0">
+                <a:solidFill>
+                  <a:srgbClr val="FF3B3B"/>
+                </a:solidFill>
+                <a:latin typeface="Consolas"/>
+              </a:rPr>
+              <a:t>1</a:t>
+            </a:r>
+            <a:r>
+              <a:rPr lang="en-US" sz="1300" b="1" dirty="0">
+                <a:solidFill>
+                  <a:srgbClr val="FF3B3B"/>
+                </a:solidFill>
+                <a:latin typeface="Consolas"/>
+              </a:rPr>
+              <a:t>2</a:t>
+            </a:r>
+            <a:r>
+              <a:rPr sz="1300" b="1" dirty="0">
+                <a:solidFill>
+                  <a:srgbClr val="FF3B3B"/>
+                </a:solidFill>
+                <a:latin typeface="Consolas"/>
+              </a:rPr>
+              <a:t> · DATA STRATEGY</a:t>
+            </a:r>
+          </a:p>
+        </p:txBody>
+      </p:sp>
+      <p:sp>
+        <p:nvSpPr>
+          <p:cNvPr id="5" name="TextBox 4"/>
+          <p:cNvSpPr txBox="1"/>
+          <p:nvPr/>
+        </p:nvSpPr>
+        <p:spPr>
+          <a:xfrm>
+            <a:off x="502920" y="603504"/>
+            <a:ext cx="11155680" cy="640080"/>
+          </a:xfrm>
+          <a:prstGeom prst="rect">
+            <a:avLst/>
+          </a:prstGeom>
+          <a:noFill/>
+        </p:spPr>
+        <p:txBody>
+          <a:bodyPr wrap="square" lIns="25400" tIns="25400" rIns="25400" bIns="25400" anchor="t">
+            <a:spAutoFit/>
+          </a:bodyPr>
+          <a:lstStyle/>
+          <a:p>
+            <a:pPr algn="l">
+              <a:lnSpc>
+                <a:spcPct val="100000"/>
+              </a:lnSpc>
+              <a:spcBef>
+                <a:spcPts val="0"/>
+              </a:spcBef>
+              <a:spcAft>
+                <a:spcPts val="600"/>
+              </a:spcAft>
+            </a:pPr>
+            <a:r>
+              <a:rPr sz="3000" b="1">
+                <a:solidFill>
+                  <a:srgbClr val="F2F2F2"/>
+                </a:solidFill>
+                <a:latin typeface="Segoe UI"/>
+              </a:rPr>
+              <a:t>Takeout Hybrid — Cost vs Accuracy</a:t>
+            </a:r>
+          </a:p>
+        </p:txBody>
+      </p:sp>
+      <p:sp>
+        <p:nvSpPr>
+          <p:cNvPr id="6" name="Rectangle 5"/>
+          <p:cNvSpPr/>
+          <p:nvPr/>
+        </p:nvSpPr>
+        <p:spPr>
+          <a:xfrm>
+            <a:off x="521207" y="1207008"/>
+            <a:ext cx="1920240" cy="31750"/>
+          </a:xfrm>
+          <a:prstGeom prst="rect">
+            <a:avLst/>
+          </a:prstGeom>
+          <a:solidFill>
+            <a:srgbClr val="FF3B3B"/>
+          </a:solidFill>
+          <a:ln>
+            <a:noFill/>
+          </a:ln>
+          <a:effectLst/>
+        </p:spPr>
+        <p:style>
+          <a:lnRef idx="1">
+            <a:schemeClr val="accent1"/>
+          </a:lnRef>
+          <a:fillRef idx="3">
+            <a:schemeClr val="accent1"/>
+          </a:fillRef>
+          <a:effectRef idx="2">
+            <a:schemeClr val="accent1"/>
+          </a:effectRef>
+          <a:fontRef idx="minor">
+            <a:schemeClr val="lt1"/>
+          </a:fontRef>
+        </p:style>
+        <p:txBody>
+          <a:bodyPr rtlCol="0" anchor="ctr"/>
+          <a:lstStyle/>
+          <a:p>
+            <a:pPr algn="ctr"/>
+            <a:endParaRPr/>
+          </a:p>
+        </p:txBody>
+      </p:sp>
+      <p:sp>
+        <p:nvSpPr>
+          <p:cNvPr id="7" name="TextBox 6"/>
+          <p:cNvSpPr txBox="1"/>
+          <p:nvPr/>
+        </p:nvSpPr>
+        <p:spPr>
+          <a:xfrm>
+            <a:off x="502920" y="1371600"/>
+            <a:ext cx="11155680" cy="457200"/>
+          </a:xfrm>
+          <a:prstGeom prst="rect">
+            <a:avLst/>
+          </a:prstGeom>
+          <a:noFill/>
+        </p:spPr>
+        <p:txBody>
+          <a:bodyPr wrap="square" lIns="25400" tIns="25400" rIns="25400" bIns="25400" anchor="t">
+            <a:spAutoFit/>
+          </a:bodyPr>
+          <a:lstStyle/>
+          <a:p>
+            <a:pPr algn="l">
+              <a:lnSpc>
+                <a:spcPct val="100000"/>
+              </a:lnSpc>
+              <a:spcBef>
+                <a:spcPts val="0"/>
+              </a:spcBef>
+              <a:spcAft>
+                <a:spcPts val="600"/>
+              </a:spcAft>
+            </a:pPr>
+            <a:r>
+              <a:rPr sz="1400" b="0">
+                <a:solidFill>
+                  <a:srgbClr val="9A9AA2"/>
+                </a:solidFill>
+                <a:latin typeface="Segoe UI"/>
+              </a:rPr>
+              <a:t>YouTube API can't fetch your full comment/watch history → </a:t>
+            </a:r>
+            <a:r>
+              <a:rPr sz="1400" b="1">
+                <a:solidFill>
+                  <a:srgbClr val="F2F2F2"/>
+                </a:solidFill>
+                <a:latin typeface="Segoe UI"/>
+              </a:rPr>
+              <a:t>take Google Takeout files as auxiliary input to boost accuracy</a:t>
+            </a:r>
+          </a:p>
+        </p:txBody>
+      </p:sp>
+      <p:sp>
+        <p:nvSpPr>
+          <p:cNvPr id="8" name="Rectangle 7"/>
+          <p:cNvSpPr/>
+          <p:nvPr/>
+        </p:nvSpPr>
+        <p:spPr>
+          <a:xfrm>
+            <a:off x="502920" y="2011680"/>
+            <a:ext cx="11183112" cy="502920"/>
+          </a:xfrm>
+          <a:prstGeom prst="rect">
+            <a:avLst/>
+          </a:prstGeom>
+          <a:solidFill>
+            <a:srgbClr val="24242A"/>
+          </a:solidFill>
+          <a:ln>
+            <a:noFill/>
+          </a:ln>
+          <a:effectLst/>
+        </p:spPr>
+        <p:style>
+          <a:lnRef idx="1">
+            <a:schemeClr val="accent1"/>
+          </a:lnRef>
+          <a:fillRef idx="3">
+            <a:schemeClr val="accent1"/>
+          </a:fillRef>
+          <a:effectRef idx="2">
+            <a:schemeClr val="accent1"/>
+          </a:effectRef>
+          <a:fontRef idx="minor">
+            <a:schemeClr val="lt1"/>
+          </a:fontRef>
+        </p:style>
+        <p:txBody>
+          <a:bodyPr rtlCol="0" anchor="ctr"/>
+          <a:lstStyle/>
+          <a:p>
+            <a:pPr algn="ctr"/>
+            <a:endParaRPr/>
+          </a:p>
+        </p:txBody>
+      </p:sp>
+      <p:sp>
+        <p:nvSpPr>
+          <p:cNvPr id="9" name="TextBox 8"/>
+          <p:cNvSpPr txBox="1"/>
+          <p:nvPr/>
+        </p:nvSpPr>
+        <p:spPr>
+          <a:xfrm>
+            <a:off x="502920" y="2011680"/>
+            <a:ext cx="2880360" cy="502920"/>
+          </a:xfrm>
+          <a:prstGeom prst="rect">
+            <a:avLst/>
+          </a:prstGeom>
+          <a:noFill/>
+        </p:spPr>
+        <p:txBody>
+          <a:bodyPr wrap="square" lIns="25400" tIns="25400" rIns="25400" bIns="25400" anchor="ctr">
+            <a:spAutoFit/>
+          </a:bodyPr>
+          <a:lstStyle/>
+          <a:p>
+            <a:pPr algn="l">
+              <a:lnSpc>
+                <a:spcPct val="100000"/>
+              </a:lnSpc>
+              <a:spcBef>
+                <a:spcPts val="0"/>
+              </a:spcBef>
+              <a:spcAft>
+                <a:spcPts val="600"/>
+              </a:spcAft>
+            </a:pPr>
+            <a:r>
               <a:rPr sz="1300" b="1">
                 <a:solidFill>
                   <a:srgbClr val="FF3B3B"/>
                 </a:solidFill>
+                <a:latin typeface="Segoe UI"/>
+              </a:rPr>
+              <a:t>Mode</a:t>
+            </a:r>
+          </a:p>
+        </p:txBody>
+      </p:sp>
+      <p:sp>
+        <p:nvSpPr>
+          <p:cNvPr id="10" name="TextBox 9"/>
+          <p:cNvSpPr txBox="1"/>
+          <p:nvPr/>
+        </p:nvSpPr>
+        <p:spPr>
+          <a:xfrm>
+            <a:off x="3383280" y="2011680"/>
+            <a:ext cx="2103120" cy="502920"/>
+          </a:xfrm>
+          <a:prstGeom prst="rect">
+            <a:avLst/>
+          </a:prstGeom>
+          <a:noFill/>
+        </p:spPr>
+        <p:txBody>
+          <a:bodyPr wrap="square" lIns="25400" tIns="25400" rIns="25400" bIns="25400" anchor="ctr">
+            <a:spAutoFit/>
+          </a:bodyPr>
+          <a:lstStyle/>
+          <a:p>
+            <a:pPr algn="ctr">
+              <a:lnSpc>
+                <a:spcPct val="100000"/>
+              </a:lnSpc>
+              <a:spcBef>
+                <a:spcPts val="0"/>
+              </a:spcBef>
+              <a:spcAft>
+                <a:spcPts val="600"/>
+              </a:spcAft>
+            </a:pPr>
+            <a:r>
+              <a:rPr sz="1300" b="1">
+                <a:solidFill>
+                  <a:srgbClr val="FF3B3B"/>
+                </a:solidFill>
+                <a:latin typeface="Segoe UI"/>
+              </a:rPr>
+              <a:t>User Effort</a:t>
+            </a:r>
+          </a:p>
+        </p:txBody>
+      </p:sp>
+      <p:sp>
+        <p:nvSpPr>
+          <p:cNvPr id="11" name="TextBox 10"/>
+          <p:cNvSpPr txBox="1"/>
+          <p:nvPr/>
+        </p:nvSpPr>
+        <p:spPr>
+          <a:xfrm>
+            <a:off x="5486400" y="2011680"/>
+            <a:ext cx="3017520" cy="502920"/>
+          </a:xfrm>
+          <a:prstGeom prst="rect">
+            <a:avLst/>
+          </a:prstGeom>
+          <a:noFill/>
+        </p:spPr>
+        <p:txBody>
+          <a:bodyPr wrap="square" lIns="25400" tIns="25400" rIns="25400" bIns="25400" anchor="ctr">
+            <a:spAutoFit/>
+          </a:bodyPr>
+          <a:lstStyle/>
+          <a:p>
+            <a:pPr algn="ctr">
+              <a:lnSpc>
+                <a:spcPct val="100000"/>
+              </a:lnSpc>
+              <a:spcBef>
+                <a:spcPts val="0"/>
+              </a:spcBef>
+              <a:spcAft>
+                <a:spcPts val="600"/>
+              </a:spcAft>
+            </a:pPr>
+            <a:r>
+              <a:rPr sz="1300" b="1">
+                <a:solidFill>
+                  <a:srgbClr val="FF3B3B"/>
+                </a:solidFill>
+                <a:latin typeface="Segoe UI"/>
+              </a:rPr>
+              <a:t>API Cost</a:t>
+            </a:r>
+          </a:p>
+        </p:txBody>
+      </p:sp>
+      <p:sp>
+        <p:nvSpPr>
+          <p:cNvPr id="12" name="TextBox 11"/>
+          <p:cNvSpPr txBox="1"/>
+          <p:nvPr/>
+        </p:nvSpPr>
+        <p:spPr>
+          <a:xfrm>
+            <a:off x="8503920" y="2011680"/>
+            <a:ext cx="3154680" cy="502920"/>
+          </a:xfrm>
+          <a:prstGeom prst="rect">
+            <a:avLst/>
+          </a:prstGeom>
+          <a:noFill/>
+        </p:spPr>
+        <p:txBody>
+          <a:bodyPr wrap="square" lIns="25400" tIns="25400" rIns="25400" bIns="25400" anchor="ctr">
+            <a:spAutoFit/>
+          </a:bodyPr>
+          <a:lstStyle/>
+          <a:p>
+            <a:pPr algn="ctr">
+              <a:lnSpc>
+                <a:spcPct val="100000"/>
+              </a:lnSpc>
+              <a:spcBef>
+                <a:spcPts val="0"/>
+              </a:spcBef>
+              <a:spcAft>
+                <a:spcPts val="600"/>
+              </a:spcAft>
+            </a:pPr>
+            <a:r>
+              <a:rPr sz="1300" b="1">
+                <a:solidFill>
+                  <a:srgbClr val="FF3B3B"/>
+                </a:solidFill>
+                <a:latin typeface="Segoe UI"/>
+              </a:rPr>
+              <a:t>Accuracy</a:t>
+            </a:r>
+          </a:p>
+        </p:txBody>
+      </p:sp>
+      <p:sp>
+        <p:nvSpPr>
+          <p:cNvPr id="13" name="Rectangle 12"/>
+          <p:cNvSpPr/>
+          <p:nvPr/>
+        </p:nvSpPr>
+        <p:spPr>
+          <a:xfrm>
+            <a:off x="502920" y="2542032"/>
+            <a:ext cx="11183112" cy="658368"/>
+          </a:xfrm>
+          <a:prstGeom prst="rect">
+            <a:avLst/>
+          </a:prstGeom>
+          <a:solidFill>
+            <a:srgbClr val="16161A"/>
+          </a:solidFill>
+          <a:ln>
+            <a:noFill/>
+          </a:ln>
+          <a:effectLst/>
+        </p:spPr>
+        <p:style>
+          <a:lnRef idx="1">
+            <a:schemeClr val="accent1"/>
+          </a:lnRef>
+          <a:fillRef idx="3">
+            <a:schemeClr val="accent1"/>
+          </a:fillRef>
+          <a:effectRef idx="2">
+            <a:schemeClr val="accent1"/>
+          </a:effectRef>
+          <a:fontRef idx="minor">
+            <a:schemeClr val="lt1"/>
+          </a:fontRef>
+        </p:style>
+        <p:txBody>
+          <a:bodyPr rtlCol="0" anchor="ctr"/>
+          <a:lstStyle/>
+          <a:p>
+            <a:pPr algn="ctr"/>
+            <a:endParaRPr/>
+          </a:p>
+        </p:txBody>
+      </p:sp>
+      <p:sp>
+        <p:nvSpPr>
+          <p:cNvPr id="14" name="TextBox 13"/>
+          <p:cNvSpPr txBox="1"/>
+          <p:nvPr/>
+        </p:nvSpPr>
+        <p:spPr>
+          <a:xfrm>
+            <a:off x="502920" y="2542032"/>
+            <a:ext cx="2880360" cy="658368"/>
+          </a:xfrm>
+          <a:prstGeom prst="rect">
+            <a:avLst/>
+          </a:prstGeom>
+          <a:noFill/>
+        </p:spPr>
+        <p:txBody>
+          <a:bodyPr wrap="square" lIns="25400" tIns="25400" rIns="25400" bIns="25400" anchor="ctr">
+            <a:spAutoFit/>
+          </a:bodyPr>
+          <a:lstStyle/>
+          <a:p>
+            <a:pPr algn="l">
+              <a:lnSpc>
+                <a:spcPct val="100000"/>
+              </a:lnSpc>
+              <a:spcBef>
+                <a:spcPts val="0"/>
+              </a:spcBef>
+              <a:spcAft>
+                <a:spcPts val="600"/>
+              </a:spcAft>
+            </a:pPr>
+            <a:r>
+              <a:rPr sz="1400" b="0">
+                <a:solidFill>
+                  <a:srgbClr val="9A9AA2"/>
+                </a:solidFill>
+                <a:latin typeface="Segoe UI"/>
+              </a:rPr>
+              <a:t>Neither uploaded</a:t>
+            </a:r>
+          </a:p>
+        </p:txBody>
+      </p:sp>
+      <p:sp>
+        <p:nvSpPr>
+          <p:cNvPr id="15" name="TextBox 14"/>
+          <p:cNvSpPr txBox="1"/>
+          <p:nvPr/>
+        </p:nvSpPr>
+        <p:spPr>
+          <a:xfrm>
+            <a:off x="3383280" y="2542032"/>
+            <a:ext cx="2103120" cy="658368"/>
+          </a:xfrm>
+          <a:prstGeom prst="rect">
+            <a:avLst/>
+          </a:prstGeom>
+          <a:noFill/>
+        </p:spPr>
+        <p:txBody>
+          <a:bodyPr wrap="square" lIns="25400" tIns="25400" rIns="25400" bIns="25400" anchor="ctr">
+            <a:spAutoFit/>
+          </a:bodyPr>
+          <a:lstStyle/>
+          <a:p>
+            <a:pPr algn="ctr">
+              <a:lnSpc>
+                <a:spcPct val="100000"/>
+              </a:lnSpc>
+              <a:spcBef>
+                <a:spcPts val="0"/>
+              </a:spcBef>
+              <a:spcAft>
+                <a:spcPts val="600"/>
+              </a:spcAft>
+            </a:pPr>
+            <a:r>
+              <a:rPr sz="1200" b="0">
+                <a:solidFill>
+                  <a:srgbClr val="9A9AA2"/>
+                </a:solidFill>
+                <a:latin typeface="Segoe UI"/>
+              </a:rPr>
+              <a:t>none</a:t>
+            </a:r>
+          </a:p>
+        </p:txBody>
+      </p:sp>
+      <p:sp>
+        <p:nvSpPr>
+          <p:cNvPr id="16" name="TextBox 15"/>
+          <p:cNvSpPr txBox="1"/>
+          <p:nvPr/>
+        </p:nvSpPr>
+        <p:spPr>
+          <a:xfrm>
+            <a:off x="5486400" y="2542032"/>
+            <a:ext cx="3017520" cy="658368"/>
+          </a:xfrm>
+          <a:prstGeom prst="rect">
+            <a:avLst/>
+          </a:prstGeom>
+          <a:noFill/>
+        </p:spPr>
+        <p:txBody>
+          <a:bodyPr wrap="square" lIns="25400" tIns="25400" rIns="25400" bIns="25400" anchor="ctr">
+            <a:spAutoFit/>
+          </a:bodyPr>
+          <a:lstStyle/>
+          <a:p>
+            <a:pPr algn="ctr">
+              <a:lnSpc>
+                <a:spcPct val="100000"/>
+              </a:lnSpc>
+              <a:spcBef>
+                <a:spcPts val="0"/>
+              </a:spcBef>
+              <a:spcAft>
+                <a:spcPts val="600"/>
+              </a:spcAft>
+            </a:pPr>
+            <a:r>
+              <a:rPr sz="1150" b="0">
+                <a:solidFill>
+                  <a:srgbClr val="9A9AA2"/>
+                </a:solidFill>
                 <a:latin typeface="Consolas"/>
               </a:rPr>
-              <a:t>12 · LIMITS &amp; NEXT</a:t>
+              <a:t>commentThreads × #channels</a:t>
+            </a:r>
+          </a:p>
+        </p:txBody>
+      </p:sp>
+      <p:sp>
+        <p:nvSpPr>
+          <p:cNvPr id="17" name="TextBox 16"/>
+          <p:cNvSpPr txBox="1"/>
+          <p:nvPr/>
+        </p:nvSpPr>
+        <p:spPr>
+          <a:xfrm>
+            <a:off x="8503920" y="2542032"/>
+            <a:ext cx="3154680" cy="658368"/>
+          </a:xfrm>
+          <a:prstGeom prst="rect">
+            <a:avLst/>
+          </a:prstGeom>
+          <a:noFill/>
+        </p:spPr>
+        <p:txBody>
+          <a:bodyPr wrap="square" lIns="25400" tIns="25400" rIns="25400" bIns="25400" anchor="ctr">
+            <a:spAutoFit/>
+          </a:bodyPr>
+          <a:lstStyle/>
+          <a:p>
+            <a:pPr algn="ctr">
+              <a:lnSpc>
+                <a:spcPct val="100000"/>
+              </a:lnSpc>
+              <a:spcBef>
+                <a:spcPts val="0"/>
+              </a:spcBef>
+              <a:spcAft>
+                <a:spcPts val="600"/>
+              </a:spcAft>
+            </a:pPr>
+            <a:r>
+              <a:rPr sz="1200" b="0">
+                <a:solidFill>
+                  <a:srgbClr val="9A9AA2"/>
+                </a:solidFill>
+                <a:latin typeface="Segoe UI"/>
+              </a:rPr>
+              <a:t>approx comments · no watch</a:t>
+            </a:r>
+          </a:p>
+        </p:txBody>
+      </p:sp>
+      <p:sp>
+        <p:nvSpPr>
+          <p:cNvPr id="18" name="TextBox 17"/>
+          <p:cNvSpPr txBox="1"/>
+          <p:nvPr/>
+        </p:nvSpPr>
+        <p:spPr>
+          <a:xfrm>
+            <a:off x="502920" y="3255264"/>
+            <a:ext cx="2880360" cy="658368"/>
+          </a:xfrm>
+          <a:prstGeom prst="rect">
+            <a:avLst/>
+          </a:prstGeom>
+          <a:noFill/>
+        </p:spPr>
+        <p:txBody>
+          <a:bodyPr wrap="square" lIns="25400" tIns="25400" rIns="25400" bIns="25400" anchor="ctr">
+            <a:spAutoFit/>
+          </a:bodyPr>
+          <a:lstStyle/>
+          <a:p>
+            <a:pPr algn="l">
+              <a:lnSpc>
+                <a:spcPct val="100000"/>
+              </a:lnSpc>
+              <a:spcBef>
+                <a:spcPts val="0"/>
+              </a:spcBef>
+              <a:spcAft>
+                <a:spcPts val="600"/>
+              </a:spcAft>
+            </a:pPr>
+            <a:r>
+              <a:rPr sz="1400" b="1">
+                <a:solidFill>
+                  <a:srgbClr val="F2F2F2"/>
+                </a:solidFill>
+                <a:latin typeface="Segoe UI"/>
+              </a:rPr>
+              <a:t>comments.csv only</a:t>
+            </a:r>
+          </a:p>
+        </p:txBody>
+      </p:sp>
+      <p:sp>
+        <p:nvSpPr>
+          <p:cNvPr id="19" name="TextBox 18"/>
+          <p:cNvSpPr txBox="1"/>
+          <p:nvPr/>
+        </p:nvSpPr>
+        <p:spPr>
+          <a:xfrm>
+            <a:off x="3383280" y="3255264"/>
+            <a:ext cx="2103120" cy="658368"/>
+          </a:xfrm>
+          <a:prstGeom prst="rect">
+            <a:avLst/>
+          </a:prstGeom>
+          <a:noFill/>
+        </p:spPr>
+        <p:txBody>
+          <a:bodyPr wrap="square" lIns="25400" tIns="25400" rIns="25400" bIns="25400" anchor="ctr">
+            <a:spAutoFit/>
+          </a:bodyPr>
+          <a:lstStyle/>
+          <a:p>
+            <a:pPr algn="ctr">
+              <a:lnSpc>
+                <a:spcPct val="100000"/>
+              </a:lnSpc>
+              <a:spcBef>
+                <a:spcPts val="0"/>
+              </a:spcBef>
+              <a:spcAft>
+                <a:spcPts val="600"/>
+              </a:spcAft>
+            </a:pPr>
+            <a:r>
+              <a:rPr sz="1200" b="0">
+                <a:solidFill>
+                  <a:srgbClr val="9A9AA2"/>
+                </a:solidFill>
+                <a:latin typeface="Segoe UI"/>
+              </a:rPr>
+              <a:t>1 upload</a:t>
+            </a:r>
+          </a:p>
+        </p:txBody>
+      </p:sp>
+      <p:sp>
+        <p:nvSpPr>
+          <p:cNvPr id="20" name="TextBox 19"/>
+          <p:cNvSpPr txBox="1"/>
+          <p:nvPr/>
+        </p:nvSpPr>
+        <p:spPr>
+          <a:xfrm>
+            <a:off x="5486400" y="3255264"/>
+            <a:ext cx="3017520" cy="658368"/>
+          </a:xfrm>
+          <a:prstGeom prst="rect">
+            <a:avLst/>
+          </a:prstGeom>
+          <a:noFill/>
+        </p:spPr>
+        <p:txBody>
+          <a:bodyPr wrap="square" lIns="25400" tIns="25400" rIns="25400" bIns="25400" anchor="ctr">
+            <a:spAutoFit/>
+          </a:bodyPr>
+          <a:lstStyle/>
+          <a:p>
+            <a:pPr algn="ctr">
+              <a:lnSpc>
+                <a:spcPct val="100000"/>
+              </a:lnSpc>
+              <a:spcBef>
+                <a:spcPts val="0"/>
+              </a:spcBef>
+              <a:spcAft>
+                <a:spcPts val="600"/>
+              </a:spcAft>
+            </a:pPr>
+            <a:r>
+              <a:rPr sz="1150" b="0">
+                <a:solidFill>
+                  <a:srgbClr val="9A9AA2"/>
+                </a:solidFill>
+                <a:latin typeface="Consolas"/>
+              </a:rPr>
+              <a:t>videos.list × #videos/50</a:t>
+            </a:r>
+          </a:p>
+        </p:txBody>
+      </p:sp>
+      <p:sp>
+        <p:nvSpPr>
+          <p:cNvPr id="21" name="TextBox 20"/>
+          <p:cNvSpPr txBox="1"/>
+          <p:nvPr/>
+        </p:nvSpPr>
+        <p:spPr>
+          <a:xfrm>
+            <a:off x="8503920" y="3255264"/>
+            <a:ext cx="3154680" cy="658368"/>
+          </a:xfrm>
+          <a:prstGeom prst="rect">
+            <a:avLst/>
+          </a:prstGeom>
+          <a:noFill/>
+        </p:spPr>
+        <p:txBody>
+          <a:bodyPr wrap="square" lIns="25400" tIns="25400" rIns="25400" bIns="25400" anchor="ctr">
+            <a:spAutoFit/>
+          </a:bodyPr>
+          <a:lstStyle/>
+          <a:p>
+            <a:pPr algn="ctr">
+              <a:lnSpc>
+                <a:spcPct val="100000"/>
+              </a:lnSpc>
+              <a:spcBef>
+                <a:spcPts val="0"/>
+              </a:spcBef>
+              <a:spcAft>
+                <a:spcPts val="600"/>
+              </a:spcAft>
+            </a:pPr>
+            <a:r>
+              <a:rPr sz="1200" b="0">
+                <a:solidFill>
+                  <a:srgbClr val="F2F2F2"/>
+                </a:solidFill>
+                <a:latin typeface="Segoe UI"/>
+              </a:rPr>
+              <a:t>exact comments · no watch</a:t>
+            </a:r>
+          </a:p>
+        </p:txBody>
+      </p:sp>
+      <p:sp>
+        <p:nvSpPr>
+          <p:cNvPr id="22" name="Rectangle 21"/>
+          <p:cNvSpPr/>
+          <p:nvPr/>
+        </p:nvSpPr>
+        <p:spPr>
+          <a:xfrm>
+            <a:off x="502920" y="3968496"/>
+            <a:ext cx="11183112" cy="658368"/>
+          </a:xfrm>
+          <a:prstGeom prst="rect">
+            <a:avLst/>
+          </a:prstGeom>
+          <a:solidFill>
+            <a:srgbClr val="16161A"/>
+          </a:solidFill>
+          <a:ln>
+            <a:noFill/>
+          </a:ln>
+          <a:effectLst/>
+        </p:spPr>
+        <p:style>
+          <a:lnRef idx="1">
+            <a:schemeClr val="accent1"/>
+          </a:lnRef>
+          <a:fillRef idx="3">
+            <a:schemeClr val="accent1"/>
+          </a:fillRef>
+          <a:effectRef idx="2">
+            <a:schemeClr val="accent1"/>
+          </a:effectRef>
+          <a:fontRef idx="minor">
+            <a:schemeClr val="lt1"/>
+          </a:fontRef>
+        </p:style>
+        <p:txBody>
+          <a:bodyPr rtlCol="0" anchor="ctr"/>
+          <a:lstStyle/>
+          <a:p>
+            <a:pPr algn="ctr"/>
+            <a:endParaRPr/>
+          </a:p>
+        </p:txBody>
+      </p:sp>
+      <p:sp>
+        <p:nvSpPr>
+          <p:cNvPr id="23" name="TextBox 22"/>
+          <p:cNvSpPr txBox="1"/>
+          <p:nvPr/>
+        </p:nvSpPr>
+        <p:spPr>
+          <a:xfrm>
+            <a:off x="502920" y="3968496"/>
+            <a:ext cx="2880360" cy="658368"/>
+          </a:xfrm>
+          <a:prstGeom prst="rect">
+            <a:avLst/>
+          </a:prstGeom>
+          <a:noFill/>
+        </p:spPr>
+        <p:txBody>
+          <a:bodyPr wrap="square" lIns="25400" tIns="25400" rIns="25400" bIns="25400" anchor="ctr">
+            <a:spAutoFit/>
+          </a:bodyPr>
+          <a:lstStyle/>
+          <a:p>
+            <a:pPr algn="l">
+              <a:lnSpc>
+                <a:spcPct val="100000"/>
+              </a:lnSpc>
+              <a:spcBef>
+                <a:spcPts val="0"/>
+              </a:spcBef>
+              <a:spcAft>
+                <a:spcPts val="600"/>
+              </a:spcAft>
+            </a:pPr>
+            <a:r>
+              <a:rPr sz="1400" b="1">
+                <a:solidFill>
+                  <a:srgbClr val="F2F2F2"/>
+                </a:solidFill>
+                <a:latin typeface="Segoe UI"/>
+              </a:rPr>
+              <a:t>watch-history.json only</a:t>
+            </a:r>
+          </a:p>
+        </p:txBody>
+      </p:sp>
+      <p:sp>
+        <p:nvSpPr>
+          <p:cNvPr id="24" name="TextBox 23"/>
+          <p:cNvSpPr txBox="1"/>
+          <p:nvPr/>
+        </p:nvSpPr>
+        <p:spPr>
+          <a:xfrm>
+            <a:off x="3383280" y="3968496"/>
+            <a:ext cx="2103120" cy="658368"/>
+          </a:xfrm>
+          <a:prstGeom prst="rect">
+            <a:avLst/>
+          </a:prstGeom>
+          <a:noFill/>
+        </p:spPr>
+        <p:txBody>
+          <a:bodyPr wrap="square" lIns="25400" tIns="25400" rIns="25400" bIns="25400" anchor="ctr">
+            <a:spAutoFit/>
+          </a:bodyPr>
+          <a:lstStyle/>
+          <a:p>
+            <a:pPr algn="ctr">
+              <a:lnSpc>
+                <a:spcPct val="100000"/>
+              </a:lnSpc>
+              <a:spcBef>
+                <a:spcPts val="0"/>
+              </a:spcBef>
+              <a:spcAft>
+                <a:spcPts val="600"/>
+              </a:spcAft>
+            </a:pPr>
+            <a:r>
+              <a:rPr sz="1200" b="0">
+                <a:solidFill>
+                  <a:srgbClr val="9A9AA2"/>
+                </a:solidFill>
+                <a:latin typeface="Segoe UI"/>
+              </a:rPr>
+              <a:t>1 upload</a:t>
+            </a:r>
+          </a:p>
+        </p:txBody>
+      </p:sp>
+      <p:sp>
+        <p:nvSpPr>
+          <p:cNvPr id="25" name="TextBox 24"/>
+          <p:cNvSpPr txBox="1"/>
+          <p:nvPr/>
+        </p:nvSpPr>
+        <p:spPr>
+          <a:xfrm>
+            <a:off x="5486400" y="3968496"/>
+            <a:ext cx="3017520" cy="658368"/>
+          </a:xfrm>
+          <a:prstGeom prst="rect">
+            <a:avLst/>
+          </a:prstGeom>
+          <a:noFill/>
+        </p:spPr>
+        <p:txBody>
+          <a:bodyPr wrap="square" lIns="25400" tIns="25400" rIns="25400" bIns="25400" anchor="ctr">
+            <a:spAutoFit/>
+          </a:bodyPr>
+          <a:lstStyle/>
+          <a:p>
+            <a:pPr algn="ctr">
+              <a:lnSpc>
+                <a:spcPct val="100000"/>
+              </a:lnSpc>
+              <a:spcBef>
+                <a:spcPts val="0"/>
+              </a:spcBef>
+              <a:spcAft>
+                <a:spcPts val="600"/>
+              </a:spcAft>
+            </a:pPr>
+            <a:r>
+              <a:rPr sz="1150" b="0">
+                <a:solidFill>
+                  <a:srgbClr val="9A9AA2"/>
+                </a:solidFill>
+                <a:latin typeface="Consolas"/>
+              </a:rPr>
+              <a:t>0 units (channelId in subtitles)</a:t>
+            </a:r>
+          </a:p>
+        </p:txBody>
+      </p:sp>
+      <p:sp>
+        <p:nvSpPr>
+          <p:cNvPr id="26" name="TextBox 25"/>
+          <p:cNvSpPr txBox="1"/>
+          <p:nvPr/>
+        </p:nvSpPr>
+        <p:spPr>
+          <a:xfrm>
+            <a:off x="8503920" y="3968496"/>
+            <a:ext cx="3154680" cy="658368"/>
+          </a:xfrm>
+          <a:prstGeom prst="rect">
+            <a:avLst/>
+          </a:prstGeom>
+          <a:noFill/>
+        </p:spPr>
+        <p:txBody>
+          <a:bodyPr wrap="square" lIns="25400" tIns="25400" rIns="25400" bIns="25400" anchor="ctr">
+            <a:spAutoFit/>
+          </a:bodyPr>
+          <a:lstStyle/>
+          <a:p>
+            <a:pPr algn="ctr">
+              <a:lnSpc>
+                <a:spcPct val="100000"/>
+              </a:lnSpc>
+              <a:spcBef>
+                <a:spcPts val="0"/>
+              </a:spcBef>
+              <a:spcAft>
+                <a:spcPts val="600"/>
+              </a:spcAft>
+            </a:pPr>
+            <a:r>
+              <a:rPr sz="1200" b="0">
+                <a:solidFill>
+                  <a:srgbClr val="F2F2F2"/>
+                </a:solidFill>
+                <a:latin typeface="Segoe UI"/>
+              </a:rPr>
+              <a:t>exact watch · approx comments</a:t>
+            </a:r>
+          </a:p>
+        </p:txBody>
+      </p:sp>
+      <p:sp>
+        <p:nvSpPr>
+          <p:cNvPr id="27" name="Rectangle 26"/>
+          <p:cNvSpPr/>
+          <p:nvPr/>
+        </p:nvSpPr>
+        <p:spPr>
+          <a:xfrm>
+            <a:off x="502920" y="4681728"/>
+            <a:ext cx="11183112" cy="658368"/>
+          </a:xfrm>
+          <a:prstGeom prst="rect">
+            <a:avLst/>
+          </a:prstGeom>
+          <a:solidFill>
+            <a:srgbClr val="142218"/>
+          </a:solidFill>
+          <a:ln>
+            <a:noFill/>
+          </a:ln>
+          <a:effectLst/>
+        </p:spPr>
+        <p:style>
+          <a:lnRef idx="1">
+            <a:schemeClr val="accent1"/>
+          </a:lnRef>
+          <a:fillRef idx="3">
+            <a:schemeClr val="accent1"/>
+          </a:fillRef>
+          <a:effectRef idx="2">
+            <a:schemeClr val="accent1"/>
+          </a:effectRef>
+          <a:fontRef idx="minor">
+            <a:schemeClr val="lt1"/>
+          </a:fontRef>
+        </p:style>
+        <p:txBody>
+          <a:bodyPr rtlCol="0" anchor="ctr"/>
+          <a:lstStyle/>
+          <a:p>
+            <a:pPr algn="ctr"/>
+            <a:endParaRPr/>
+          </a:p>
+        </p:txBody>
+      </p:sp>
+      <p:sp>
+        <p:nvSpPr>
+          <p:cNvPr id="28" name="TextBox 27"/>
+          <p:cNvSpPr txBox="1"/>
+          <p:nvPr/>
+        </p:nvSpPr>
+        <p:spPr>
+          <a:xfrm>
+            <a:off x="502920" y="4681728"/>
+            <a:ext cx="2880360" cy="658368"/>
+          </a:xfrm>
+          <a:prstGeom prst="rect">
+            <a:avLst/>
+          </a:prstGeom>
+          <a:noFill/>
+        </p:spPr>
+        <p:txBody>
+          <a:bodyPr wrap="square" lIns="25400" tIns="25400" rIns="25400" bIns="25400" anchor="ctr">
+            <a:spAutoFit/>
+          </a:bodyPr>
+          <a:lstStyle/>
+          <a:p>
+            <a:pPr algn="l">
+              <a:lnSpc>
+                <a:spcPct val="100000"/>
+              </a:lnSpc>
+              <a:spcBef>
+                <a:spcPts val="0"/>
+              </a:spcBef>
+              <a:spcAft>
+                <a:spcPts val="600"/>
+              </a:spcAft>
+            </a:pPr>
+            <a:r>
+              <a:rPr sz="1400" b="1">
+                <a:solidFill>
+                  <a:srgbClr val="2ECC71"/>
+                </a:solidFill>
+                <a:latin typeface="Segoe UI"/>
+              </a:rPr>
+              <a:t>Both ⭐</a:t>
+            </a:r>
+          </a:p>
+        </p:txBody>
+      </p:sp>
+      <p:sp>
+        <p:nvSpPr>
+          <p:cNvPr id="29" name="TextBox 28"/>
+          <p:cNvSpPr txBox="1"/>
+          <p:nvPr/>
+        </p:nvSpPr>
+        <p:spPr>
+          <a:xfrm>
+            <a:off x="3383280" y="4681728"/>
+            <a:ext cx="2103120" cy="658368"/>
+          </a:xfrm>
+          <a:prstGeom prst="rect">
+            <a:avLst/>
+          </a:prstGeom>
+          <a:noFill/>
+        </p:spPr>
+        <p:txBody>
+          <a:bodyPr wrap="square" lIns="25400" tIns="25400" rIns="25400" bIns="25400" anchor="ctr">
+            <a:spAutoFit/>
+          </a:bodyPr>
+          <a:lstStyle/>
+          <a:p>
+            <a:pPr algn="ctr">
+              <a:lnSpc>
+                <a:spcPct val="100000"/>
+              </a:lnSpc>
+              <a:spcBef>
+                <a:spcPts val="0"/>
+              </a:spcBef>
+              <a:spcAft>
+                <a:spcPts val="600"/>
+              </a:spcAft>
+            </a:pPr>
+            <a:r>
+              <a:rPr sz="1200" b="0">
+                <a:solidFill>
+                  <a:srgbClr val="9A9AA2"/>
+                </a:solidFill>
+                <a:latin typeface="Segoe UI"/>
+              </a:rPr>
+              <a:t>2 uploads</a:t>
+            </a:r>
+          </a:p>
+        </p:txBody>
+      </p:sp>
+      <p:sp>
+        <p:nvSpPr>
+          <p:cNvPr id="30" name="TextBox 29"/>
+          <p:cNvSpPr txBox="1"/>
+          <p:nvPr/>
+        </p:nvSpPr>
+        <p:spPr>
+          <a:xfrm>
+            <a:off x="5486400" y="4681728"/>
+            <a:ext cx="3017520" cy="658368"/>
+          </a:xfrm>
+          <a:prstGeom prst="rect">
+            <a:avLst/>
+          </a:prstGeom>
+          <a:noFill/>
+        </p:spPr>
+        <p:txBody>
+          <a:bodyPr wrap="square" lIns="25400" tIns="25400" rIns="25400" bIns="25400" anchor="ctr">
+            <a:spAutoFit/>
+          </a:bodyPr>
+          <a:lstStyle/>
+          <a:p>
+            <a:pPr algn="ctr">
+              <a:lnSpc>
+                <a:spcPct val="100000"/>
+              </a:lnSpc>
+              <a:spcBef>
+                <a:spcPts val="0"/>
+              </a:spcBef>
+              <a:spcAft>
+                <a:spcPts val="600"/>
+              </a:spcAft>
+            </a:pPr>
+            <a:r>
+              <a:rPr sz="1150" b="0">
+                <a:solidFill>
+                  <a:srgbClr val="9A9AA2"/>
+                </a:solidFill>
+                <a:latin typeface="Consolas"/>
+              </a:rPr>
+              <a:t>comment video-resolve only</a:t>
+            </a:r>
+          </a:p>
+        </p:txBody>
+      </p:sp>
+      <p:sp>
+        <p:nvSpPr>
+          <p:cNvPr id="31" name="TextBox 30"/>
+          <p:cNvSpPr txBox="1"/>
+          <p:nvPr/>
+        </p:nvSpPr>
+        <p:spPr>
+          <a:xfrm>
+            <a:off x="8503920" y="4681728"/>
+            <a:ext cx="3154680" cy="658368"/>
+          </a:xfrm>
+          <a:prstGeom prst="rect">
+            <a:avLst/>
+          </a:prstGeom>
+          <a:noFill/>
+        </p:spPr>
+        <p:txBody>
+          <a:bodyPr wrap="square" lIns="25400" tIns="25400" rIns="25400" bIns="25400" anchor="ctr">
+            <a:spAutoFit/>
+          </a:bodyPr>
+          <a:lstStyle/>
+          <a:p>
+            <a:pPr algn="ctr">
+              <a:lnSpc>
+                <a:spcPct val="100000"/>
+              </a:lnSpc>
+              <a:spcBef>
+                <a:spcPts val="0"/>
+              </a:spcBef>
+              <a:spcAft>
+                <a:spcPts val="600"/>
+              </a:spcAft>
+            </a:pPr>
+            <a:r>
+              <a:rPr sz="1200" b="0">
+                <a:solidFill>
+                  <a:srgbClr val="2ECC71"/>
+                </a:solidFill>
+                <a:latin typeface="Segoe UI"/>
+              </a:rPr>
+              <a:t>all exact</a:t>
+            </a:r>
+          </a:p>
+        </p:txBody>
+      </p:sp>
+      <p:sp>
+        <p:nvSpPr>
+          <p:cNvPr id="32" name="TextBox 31"/>
+          <p:cNvSpPr txBox="1"/>
+          <p:nvPr/>
+        </p:nvSpPr>
+        <p:spPr>
+          <a:xfrm>
+            <a:off x="502920" y="5669280"/>
+            <a:ext cx="11155680" cy="822960"/>
+          </a:xfrm>
+          <a:prstGeom prst="rect">
+            <a:avLst/>
+          </a:prstGeom>
+          <a:noFill/>
+        </p:spPr>
+        <p:txBody>
+          <a:bodyPr wrap="square" lIns="25400" tIns="25400" rIns="25400" bIns="25400" anchor="t">
+            <a:spAutoFit/>
+          </a:bodyPr>
+          <a:lstStyle/>
+          <a:p>
+            <a:pPr algn="l">
+              <a:lnSpc>
+                <a:spcPct val="120000"/>
+              </a:lnSpc>
+              <a:spcBef>
+                <a:spcPts val="0"/>
+              </a:spcBef>
+              <a:spcAft>
+                <a:spcPts val="600"/>
+              </a:spcAft>
+            </a:pPr>
+            <a:r>
+              <a:rPr sz="1300" b="1">
+                <a:solidFill>
+                  <a:srgbClr val="F4A844"/>
+                </a:solidFill>
+                <a:latin typeface="Segoe UI"/>
+              </a:rPr>
+              <a:t>Auto file detection: </a:t>
+            </a:r>
+            <a:r>
+              <a:rPr sz="1300" b="0">
+                <a:solidFill>
+                  <a:srgbClr val="9A9AA2"/>
+                </a:solidFill>
+                <a:latin typeface="Segoe UI"/>
+              </a:rPr>
+              <a:t>filename (watch/comment) + first 4KB content (titleUrl·subtitles patterns) auto-routes the type</a:t>
+            </a:r>
+          </a:p>
+          <a:p>
+            <a:pPr algn="l">
+              <a:lnSpc>
+                <a:spcPct val="120000"/>
+              </a:lnSpc>
+              <a:spcBef>
+                <a:spcPts val="0"/>
+              </a:spcBef>
+              <a:spcAft>
+                <a:spcPts val="600"/>
+              </a:spcAft>
+            </a:pPr>
+            <a:r>
+              <a:rPr sz="1200" b="0">
+                <a:solidFill>
+                  <a:srgbClr val="9A9AA2"/>
+                </a:solidFill>
+                <a:latin typeface="Segoe UI"/>
+              </a:rPr>
+              <a:t>watch-history.json embeds channelId in subtitles[0].url → </a:t>
+            </a:r>
+            <a:r>
+              <a:rPr sz="1200" b="1">
+                <a:solidFill>
+                  <a:srgbClr val="2ECC71"/>
+                </a:solidFill>
+                <a:latin typeface="Segoe UI"/>
+              </a:rPr>
+              <a:t>0 API calls</a:t>
+            </a:r>
+            <a:r>
+              <a:rPr sz="1200" b="0">
+                <a:solidFill>
+                  <a:srgbClr val="9A9AA2"/>
+                </a:solidFill>
+                <a:latin typeface="Segoe UI"/>
+              </a:rPr>
+              <a:t> to extract watch count &amp; last-watch date</a:t>
+            </a:r>
+          </a:p>
+        </p:txBody>
+      </p:sp>
+    </p:spTree>
+  </p:cSld>
+  <p:clrMapOvr>
+    <a:masterClrMapping/>
+  </p:clrMapOvr>
+</p:sld>
+</file>
+
+<file path=ppt/slides/slide17.xml><?xml version="1.0" encoding="utf-8"?>
+<p:sld xmlns:a="http://schemas.openxmlformats.org/drawingml/2006/main" xmlns:r="http://schemas.openxmlformats.org/officeDocument/2006/relationships" xmlns:p="http://schemas.openxmlformats.org/presentationml/2006/main">
+  <p:cSld>
+    <p:spTree>
+      <p:nvGrpSpPr>
+        <p:cNvPr id="1" name=""/>
+        <p:cNvGrpSpPr/>
+        <p:nvPr/>
+      </p:nvGrpSpPr>
+      <p:grpSpPr>
+        <a:xfrm>
+          <a:off x="0" y="0"/>
+          <a:ext cx="0" cy="0"/>
+          <a:chOff x="0" y="0"/>
+          <a:chExt cx="0" cy="0"/>
+        </a:xfrm>
+      </p:grpSpPr>
+      <p:sp>
+        <p:nvSpPr>
+          <p:cNvPr id="2" name="Rectangle 1"/>
+          <p:cNvSpPr/>
+          <p:nvPr/>
+        </p:nvSpPr>
+        <p:spPr>
+          <a:xfrm>
+            <a:off x="0" y="0"/>
+            <a:ext cx="12191695" cy="6858000"/>
+          </a:xfrm>
+          <a:prstGeom prst="rect">
+            <a:avLst/>
+          </a:prstGeom>
+          <a:solidFill>
+            <a:srgbClr val="0A0A0B"/>
+          </a:solidFill>
+          <a:ln>
+            <a:noFill/>
+          </a:ln>
+          <a:effectLst/>
+        </p:spPr>
+        <p:style>
+          <a:lnRef idx="1">
+            <a:schemeClr val="accent1"/>
+          </a:lnRef>
+          <a:fillRef idx="3">
+            <a:schemeClr val="accent1"/>
+          </a:fillRef>
+          <a:effectRef idx="2">
+            <a:schemeClr val="accent1"/>
+          </a:effectRef>
+          <a:fontRef idx="minor">
+            <a:schemeClr val="lt1"/>
+          </a:fontRef>
+        </p:style>
+        <p:txBody>
+          <a:bodyPr rtlCol="0" anchor="ctr"/>
+          <a:lstStyle/>
+          <a:p>
+            <a:pPr algn="ctr"/>
+            <a:endParaRPr/>
+          </a:p>
+        </p:txBody>
+      </p:sp>
+      <p:sp>
+        <p:nvSpPr>
+          <p:cNvPr id="3" name="Rectangle 2"/>
+          <p:cNvSpPr/>
+          <p:nvPr/>
+        </p:nvSpPr>
+        <p:spPr>
+          <a:xfrm>
+            <a:off x="0" y="0"/>
+            <a:ext cx="118872" cy="6858000"/>
+          </a:xfrm>
+          <a:prstGeom prst="rect">
+            <a:avLst/>
+          </a:prstGeom>
+          <a:solidFill>
+            <a:srgbClr val="FF3B3B"/>
+          </a:solidFill>
+          <a:ln>
+            <a:noFill/>
+          </a:ln>
+          <a:effectLst/>
+        </p:spPr>
+        <p:style>
+          <a:lnRef idx="1">
+            <a:schemeClr val="accent1"/>
+          </a:lnRef>
+          <a:fillRef idx="3">
+            <a:schemeClr val="accent1"/>
+          </a:fillRef>
+          <a:effectRef idx="2">
+            <a:schemeClr val="accent1"/>
+          </a:effectRef>
+          <a:fontRef idx="minor">
+            <a:schemeClr val="lt1"/>
+          </a:fontRef>
+        </p:style>
+        <p:txBody>
+          <a:bodyPr rtlCol="0" anchor="ctr"/>
+          <a:lstStyle/>
+          <a:p>
+            <a:pPr algn="ctr"/>
+            <a:endParaRPr/>
+          </a:p>
+        </p:txBody>
+      </p:sp>
+      <p:sp>
+        <p:nvSpPr>
+          <p:cNvPr id="4" name="TextBox 3"/>
+          <p:cNvSpPr txBox="1"/>
+          <p:nvPr/>
+        </p:nvSpPr>
+        <p:spPr>
+          <a:xfrm>
+            <a:off x="502920" y="320040"/>
+            <a:ext cx="11155680" cy="251351"/>
+          </a:xfrm>
+          <a:prstGeom prst="rect">
+            <a:avLst/>
+          </a:prstGeom>
+          <a:noFill/>
+        </p:spPr>
+        <p:txBody>
+          <a:bodyPr wrap="square" lIns="25400" tIns="25400" rIns="25400" bIns="25400" anchor="t">
+            <a:spAutoFit/>
+          </a:bodyPr>
+          <a:lstStyle/>
+          <a:p>
+            <a:pPr algn="l">
+              <a:lnSpc>
+                <a:spcPct val="100000"/>
+              </a:lnSpc>
+              <a:spcBef>
+                <a:spcPts val="0"/>
+              </a:spcBef>
+              <a:spcAft>
+                <a:spcPts val="600"/>
+              </a:spcAft>
+            </a:pPr>
+            <a:r>
+              <a:rPr sz="1300" b="1" dirty="0">
+                <a:solidFill>
+                  <a:srgbClr val="FF3B3B"/>
+                </a:solidFill>
+                <a:latin typeface="Consolas"/>
+              </a:rPr>
+              <a:t>1</a:t>
+            </a:r>
+            <a:r>
+              <a:rPr lang="en-US" sz="1300" b="1" dirty="0">
+                <a:solidFill>
+                  <a:srgbClr val="FF3B3B"/>
+                </a:solidFill>
+                <a:latin typeface="Consolas"/>
+              </a:rPr>
+              <a:t>3</a:t>
+            </a:r>
+            <a:r>
+              <a:rPr sz="1300" b="1" dirty="0">
+                <a:solidFill>
+                  <a:srgbClr val="FF3B3B"/>
+                </a:solidFill>
+                <a:latin typeface="Consolas"/>
+              </a:rPr>
+              <a:t> · LIMITS &amp; NEXT</a:t>
             </a:r>
           </a:p>
         </p:txBody>
@@ -15196,7 +16178,7 @@
         <p:spPr>
           <a:xfrm>
             <a:off x="502920" y="1371600"/>
-            <a:ext cx="11155680" cy="365760"/>
+            <a:ext cx="11155680" cy="282129"/>
           </a:xfrm>
           <a:prstGeom prst="rect">
             <a:avLst/>
@@ -15221,13 +16203,13 @@
               </a:spcAft>
             </a:pPr>
             <a:r>
-              <a:rPr sz="1500" b="1">
+              <a:rPr sz="1500" b="1" dirty="0">
                 <a:solidFill>
                   <a:srgbClr val="2ECC71"/>
                 </a:solidFill>
                 <a:latin typeface="Consolas"/>
               </a:rPr>
-              <a:t>Setup  →  Google Login  →  Data Collection  →  Analysis Done</a:t>
+              <a:t>Google Login  →  Data Collection  →  Analysis Done</a:t>
             </a:r>
           </a:p>
         </p:txBody>
@@ -15299,7 +16281,7 @@
         <p:spPr>
           <a:xfrm>
             <a:off x="502920" y="6035040"/>
-            <a:ext cx="5486400" cy="457200"/>
+            <a:ext cx="5486400" cy="235962"/>
           </a:xfrm>
           <a:prstGeom prst="rect">
             <a:avLst/>
@@ -15324,58 +16306,112 @@
               </a:spcAft>
             </a:pPr>
             <a:r>
+              <a:rPr sz="1200" b="0" dirty="0">
+                <a:solidFill>
+                  <a:srgbClr val="9A9AA2"/>
+                </a:solidFill>
+                <a:latin typeface="Segoe UI"/>
+              </a:rPr>
+              <a:t>① </a:t>
+            </a:r>
+            <a:r>
+              <a:rPr lang="en-US" sz="1200" dirty="0">
+                <a:solidFill>
+                  <a:srgbClr val="9A9AA2"/>
+                </a:solidFill>
+                <a:latin typeface="Segoe UI"/>
+              </a:rPr>
+              <a:t>L</a:t>
+            </a:r>
+            <a:r>
+              <a:rPr sz="1200" b="0" dirty="0">
+                <a:solidFill>
+                  <a:srgbClr val="9A9AA2"/>
+                </a:solidFill>
+                <a:latin typeface="Segoe UI"/>
+              </a:rPr>
+              <a:t>og in with Google (</a:t>
+            </a:r>
+            <a:r>
+              <a:rPr sz="1200" b="0" dirty="0" err="1">
+                <a:solidFill>
+                  <a:srgbClr val="9A9AA2"/>
+                </a:solidFill>
+                <a:latin typeface="Segoe UI"/>
+              </a:rPr>
+              <a:t>youtube.readonly</a:t>
+            </a:r>
+            <a:r>
+              <a:rPr sz="1200" b="0" dirty="0">
+                <a:solidFill>
+                  <a:srgbClr val="9A9AA2"/>
+                </a:solidFill>
+                <a:latin typeface="Segoe UI"/>
+              </a:rPr>
+              <a:t>)</a:t>
+            </a:r>
+          </a:p>
+        </p:txBody>
+      </p:sp>
+      <p:sp>
+        <p:nvSpPr>
+          <p:cNvPr id="11" name="TextBox 10"/>
+          <p:cNvSpPr txBox="1"/>
+          <p:nvPr/>
+        </p:nvSpPr>
+        <p:spPr>
+          <a:xfrm>
+            <a:off x="6199632" y="6035040"/>
+            <a:ext cx="5486400" cy="420628"/>
+          </a:xfrm>
+          <a:prstGeom prst="rect">
+            <a:avLst/>
+          </a:prstGeom>
+          <a:noFill/>
+        </p:spPr>
+        <p:txBody>
+          <a:bodyPr wrap="square" lIns="25400" tIns="25400" rIns="25400" bIns="25400" anchor="t">
+            <a:spAutoFit/>
+          </a:bodyPr>
+          <a:lstStyle/>
+          <a:p>
+            <a:pPr algn="ctr">
+              <a:lnSpc>
+                <a:spcPct val="100000"/>
+              </a:lnSpc>
+              <a:spcBef>
+                <a:spcPts val="0"/>
+              </a:spcBef>
+              <a:spcAft>
+                <a:spcPts val="600"/>
+              </a:spcAft>
+            </a:pPr>
+            <a:r>
+              <a:rPr sz="1200" b="0" dirty="0">
+                <a:solidFill>
+                  <a:srgbClr val="9A9AA2"/>
+                </a:solidFill>
+                <a:latin typeface="Segoe UI"/>
+              </a:rPr>
+              <a:t>② (Optional</a:t>
+            </a:r>
+            <a:r>
+              <a:rPr lang="en-US" sz="1200" b="0">
+                <a:solidFill>
+                  <a:srgbClr val="9A9AA2"/>
+                </a:solidFill>
+                <a:latin typeface="Segoe UI"/>
+              </a:rPr>
+              <a:t>, Recommended</a:t>
+            </a:r>
+            <a:r>
               <a:rPr sz="1200" b="0">
                 <a:solidFill>
                   <a:srgbClr val="9A9AA2"/>
                 </a:solidFill>
                 <a:latin typeface="Segoe UI"/>
               </a:rPr>
-              <a:t>① Set client ID, then log in with Google (youtube.readonly)</a:t>
-            </a:r>
-          </a:p>
-        </p:txBody>
-      </p:sp>
-      <p:sp>
-        <p:nvSpPr>
-          <p:cNvPr id="11" name="TextBox 10"/>
-          <p:cNvSpPr txBox="1"/>
-          <p:nvPr/>
-        </p:nvSpPr>
-        <p:spPr>
-          <a:xfrm>
-            <a:off x="6199632" y="6035040"/>
-            <a:ext cx="5486400" cy="457200"/>
-          </a:xfrm>
-          <a:prstGeom prst="rect">
-            <a:avLst/>
-          </a:prstGeom>
-          <a:noFill/>
-        </p:spPr>
-        <p:txBody>
-          <a:bodyPr wrap="square" lIns="25400" tIns="25400" rIns="25400" bIns="25400" anchor="t">
-            <a:spAutoFit/>
-          </a:bodyPr>
-          <a:lstStyle/>
-          <a:p>
-            <a:pPr algn="ctr">
-              <a:lnSpc>
-                <a:spcPct val="100000"/>
-              </a:lnSpc>
-              <a:spcBef>
-                <a:spcPts val="0"/>
-              </a:spcBef>
-              <a:spcAft>
-                <a:spcPts val="600"/>
-              </a:spcAft>
-            </a:pPr>
-            <a:r>
-              <a:rPr sz="1200" b="0">
-                <a:solidFill>
-                  <a:srgbClr val="9A9AA2"/>
-                </a:solidFill>
-                <a:latin typeface="Segoe UI"/>
-              </a:rPr>
-              <a:t>② (Optional) Upload Takeout → exact comments &amp; watch history</a:t>
+              <a:t>) Upload Takeout → exact comments &amp; watch history</a:t>
             </a:r>
           </a:p>
         </p:txBody>
@@ -23378,7 +24414,7 @@
         <p:spPr>
           <a:xfrm>
             <a:off x="0" y="0"/>
-            <a:ext cx="12191695" cy="6858000"/>
+            <a:ext cx="12192000" cy="6858000"/>
           </a:xfrm>
           <a:prstGeom prst="rect">
             <a:avLst/>
@@ -23468,7 +24504,7 @@
         <p:spPr>
           <a:xfrm>
             <a:off x="502920" y="320040"/>
-            <a:ext cx="11155680" cy="365760"/>
+            <a:ext cx="11155680" cy="251351"/>
           </a:xfrm>
           <a:prstGeom prst="rect">
             <a:avLst/>
@@ -23493,14 +24529,74 @@
               </a:spcAft>
             </a:pPr>
             <a:r>
-              <a:rPr sz="1300" b="1">
+              <a:rPr lang="en-US" sz="1300" b="1" dirty="0">
                 <a:solidFill>
                   <a:srgbClr val="FF3B3B"/>
                 </a:solidFill>
                 <a:latin typeface="Consolas"/>
               </a:rPr>
-              <a:t>07 · RESULT</a:t>
-            </a:r>
+              <a:t>07</a:t>
+            </a:r>
+            <a:r>
+              <a:rPr sz="1300" b="1" dirty="0">
+                <a:solidFill>
+                  <a:srgbClr val="FF3B3B"/>
+                </a:solidFill>
+                <a:latin typeface="Consolas"/>
+              </a:rPr>
+              <a:t> · </a:t>
+            </a:r>
+            <a:r>
+              <a:rPr lang="en-US" sz="1300" b="1" dirty="0">
+                <a:solidFill>
+                  <a:srgbClr val="FF3B3B"/>
+                </a:solidFill>
+                <a:latin typeface="Consolas"/>
+              </a:rPr>
+              <a:t>RESULT - </a:t>
+            </a:r>
+            <a:r>
+              <a:rPr sz="1300" b="1" dirty="0">
+                <a:solidFill>
+                  <a:srgbClr val="FF3B3B"/>
+                </a:solidFill>
+                <a:latin typeface="Consolas"/>
+              </a:rPr>
+              <a:t>T</a:t>
+            </a:r>
+            <a:r>
+              <a:rPr lang="en-US" sz="1300" b="1" dirty="0">
+                <a:solidFill>
+                  <a:srgbClr val="FF3B3B"/>
+                </a:solidFill>
+                <a:latin typeface="Consolas"/>
+              </a:rPr>
+              <a:t>aste</a:t>
+            </a:r>
+            <a:r>
+              <a:rPr sz="1300" b="1" dirty="0">
+                <a:solidFill>
+                  <a:srgbClr val="FF3B3B"/>
+                </a:solidFill>
+                <a:latin typeface="Consolas"/>
+              </a:rPr>
+              <a:t> G</a:t>
+            </a:r>
+            <a:r>
+              <a:rPr lang="en-US" sz="1300" b="1" dirty="0">
+                <a:solidFill>
+                  <a:srgbClr val="FF3B3B"/>
+                </a:solidFill>
+                <a:latin typeface="Consolas"/>
+              </a:rPr>
+              <a:t>raph</a:t>
+            </a:r>
+            <a:endParaRPr sz="1300" b="1" dirty="0">
+              <a:solidFill>
+                <a:srgbClr val="FF3B3B"/>
+              </a:solidFill>
+              <a:latin typeface="Consolas"/>
+            </a:endParaRPr>
           </a:p>
         </p:txBody>
       </p:sp>
@@ -23538,13 +24634,13 @@
               </a:spcAft>
             </a:pPr>
             <a:r>
-              <a:rPr sz="3000" b="1">
+              <a:rPr sz="2500" b="1">
                 <a:solidFill>
                   <a:srgbClr val="F2F2F2"/>
                 </a:solidFill>
                 <a:latin typeface="Segoe UI"/>
               </a:rPr>
-              <a:t>Result — Interest Ranking + AI Tools</a:t>
+              <a:t>Taste Communities &amp; Map — Union-Find + MST</a:t>
             </a:r>
           </a:p>
         </p:txBody>
@@ -23594,9 +24690,63 @@
           </a:p>
         </p:txBody>
       </p:sp>
+      <p:sp>
+        <p:nvSpPr>
+          <p:cNvPr id="7" name="TextBox 6"/>
+          <p:cNvSpPr txBox="1"/>
+          <p:nvPr/>
+        </p:nvSpPr>
+        <p:spPr>
+          <a:xfrm>
+            <a:off x="502920" y="1371600"/>
+            <a:ext cx="11155680" cy="411480"/>
+          </a:xfrm>
+          <a:prstGeom prst="rect">
+            <a:avLst/>
+          </a:prstGeom>
+          <a:noFill/>
+        </p:spPr>
+        <p:txBody>
+          <a:bodyPr wrap="square" lIns="25400" tIns="25400" rIns="25400" bIns="25400" anchor="t">
+            <a:spAutoFit/>
+          </a:bodyPr>
+          <a:lstStyle/>
+          <a:p>
+            <a:pPr algn="l">
+              <a:lnSpc>
+                <a:spcPct val="100000"/>
+              </a:lnSpc>
+              <a:spcBef>
+                <a:spcPts val="0"/>
+              </a:spcBef>
+              <a:spcAft>
+                <a:spcPts val="600"/>
+              </a:spcAft>
+            </a:pPr>
+            <a:r>
+              <a:rPr sz="1350" b="0">
+                <a:solidFill>
+                  <a:srgbClr val="9A9AA2"/>
+                </a:solidFill>
+                <a:latin typeface="Segoe UI"/>
+              </a:rPr>
+              <a:t>Build a weighted graph from channels — </a:t>
+            </a:r>
+            <a:r>
+              <a:rPr sz="1350" b="1">
+                <a:solidFill>
+                  <a:srgbClr val="F2F2F2"/>
+                </a:solidFill>
+                <a:latin typeface="Segoe UI"/>
+              </a:rPr>
+              <a:t>an edge connects two channels when category cosine similarity ≥ threshold.</a:t>
+            </a:r>
+          </a:p>
+        </p:txBody>
+      </p:sp>
       <p:pic>
         <p:nvPicPr>
-          <p:cNvPr id="7" name="Picture 6" descr="우하단.png"/>
+          <p:cNvPr id="8" name="Picture 7" descr="그래프 추가.png"/>
           <p:cNvPicPr>
             <a:picLocks noChangeAspect="1"/>
           </p:cNvPicPr>
@@ -23610,8 +24760,8 @@
         </p:blipFill>
         <p:spPr>
           <a:xfrm>
-            <a:off x="502920" y="1952889"/>
-            <a:ext cx="7406640" cy="3958061"/>
+            <a:off x="502920" y="2344003"/>
+            <a:ext cx="6720840" cy="3587312"/>
           </a:xfrm>
           <a:prstGeom prst="rect">
             <a:avLst/>
@@ -23625,20 +24775,425 @@
       </p:pic>
       <p:sp>
         <p:nvSpPr>
-          <p:cNvPr id="8" name="Rounded Rectangle 7"/>
+          <p:cNvPr id="9" name="Rounded Rectangle 8"/>
           <p:cNvSpPr/>
           <p:nvPr/>
         </p:nvSpPr>
         <p:spPr>
           <a:xfrm>
-            <a:off x="8092440" y="1463040"/>
-            <a:ext cx="3593592" cy="4937760"/>
+            <a:off x="7452360" y="1874519"/>
+            <a:ext cx="4233672" cy="4526280"/>
           </a:xfrm>
           <a:prstGeom prst="roundRect">
             <a:avLst/>
           </a:prstGeom>
           <a:solidFill>
             <a:srgbClr val="161619"/>
+          </a:solidFill>
+          <a:ln w="12700">
+            <a:solidFill>
+              <a:srgbClr val="2A2A30"/>
+            </a:solidFill>
+          </a:ln>
+          <a:effectLst/>
+        </p:spPr>
+        <p:style>
+          <a:lnRef idx="1">
+            <a:schemeClr val="accent1"/>
+          </a:lnRef>
+          <a:fillRef idx="3">
+            <a:schemeClr val="accent1"/>
+          </a:fillRef>
+          <a:effectRef idx="2">
+            <a:schemeClr val="accent1"/>
+          </a:effectRef>
+          <a:fontRef idx="minor">
+            <a:schemeClr val="lt1"/>
+          </a:fontRef>
+        </p:style>
+        <p:txBody>
+          <a:bodyPr rtlCol="0" anchor="ctr"/>
+          <a:lstStyle/>
+          <a:p>
+            <a:pPr algn="ctr"/>
+            <a:endParaRPr/>
+          </a:p>
+        </p:txBody>
+      </p:sp>
+      <p:sp>
+        <p:nvSpPr>
+          <p:cNvPr id="10" name="TextBox 9"/>
+          <p:cNvSpPr txBox="1"/>
+          <p:nvPr/>
+        </p:nvSpPr>
+        <p:spPr>
+          <a:xfrm>
+            <a:off x="7708392" y="2084831"/>
+            <a:ext cx="3749039" cy="365760"/>
+          </a:xfrm>
+          <a:prstGeom prst="rect">
+            <a:avLst/>
+          </a:prstGeom>
+          <a:noFill/>
+        </p:spPr>
+        <p:txBody>
+          <a:bodyPr wrap="square" lIns="25400" tIns="25400" rIns="25400" bIns="25400" anchor="t">
+            <a:spAutoFit/>
+          </a:bodyPr>
+          <a:lstStyle/>
+          <a:p>
+            <a:pPr algn="l">
+              <a:lnSpc>
+                <a:spcPct val="100000"/>
+              </a:lnSpc>
+              <a:spcBef>
+                <a:spcPts val="0"/>
+              </a:spcBef>
+              <a:spcAft>
+                <a:spcPts val="600"/>
+              </a:spcAft>
+            </a:pPr>
+            <a:r>
+              <a:rPr sz="1600" b="1">
+                <a:solidFill>
+                  <a:srgbClr val="2ECC71"/>
+                </a:solidFill>
+                <a:latin typeface="Segoe UI"/>
+              </a:rPr>
+              <a:t>🔗  Taste Communities</a:t>
+            </a:r>
+          </a:p>
+        </p:txBody>
+      </p:sp>
+      <p:sp>
+        <p:nvSpPr>
+          <p:cNvPr id="11" name="TextBox 10"/>
+          <p:cNvSpPr txBox="1"/>
+          <p:nvPr/>
+        </p:nvSpPr>
+        <p:spPr>
+          <a:xfrm>
+            <a:off x="7708392" y="2432304"/>
+            <a:ext cx="3749039" cy="292608"/>
+          </a:xfrm>
+          <a:prstGeom prst="rect">
+            <a:avLst/>
+          </a:prstGeom>
+          <a:noFill/>
+        </p:spPr>
+        <p:txBody>
+          <a:bodyPr wrap="square" lIns="25400" tIns="25400" rIns="25400" bIns="25400" anchor="t">
+            <a:spAutoFit/>
+          </a:bodyPr>
+          <a:lstStyle/>
+          <a:p>
+            <a:pPr algn="l">
+              <a:lnSpc>
+                <a:spcPct val="100000"/>
+              </a:lnSpc>
+              <a:spcBef>
+                <a:spcPts val="0"/>
+              </a:spcBef>
+              <a:spcAft>
+                <a:spcPts val="600"/>
+              </a:spcAft>
+            </a:pPr>
+            <a:r>
+              <a:rPr sz="1100" b="0">
+                <a:solidFill>
+                  <a:srgbClr val="6A6A72"/>
+                </a:solidFill>
+                <a:latin typeface="Consolas"/>
+              </a:rPr>
+              <a:t>Union-Find · connected components</a:t>
+            </a:r>
+          </a:p>
+        </p:txBody>
+      </p:sp>
+      <p:sp>
+        <p:nvSpPr>
+          <p:cNvPr id="12" name="TextBox 11"/>
+          <p:cNvSpPr txBox="1"/>
+          <p:nvPr/>
+        </p:nvSpPr>
+        <p:spPr>
+          <a:xfrm>
+            <a:off x="7708392" y="2743200"/>
+            <a:ext cx="3749039" cy="914400"/>
+          </a:xfrm>
+          <a:prstGeom prst="rect">
+            <a:avLst/>
+          </a:prstGeom>
+          <a:noFill/>
+        </p:spPr>
+        <p:txBody>
+          <a:bodyPr wrap="square" lIns="25400" tIns="25400" rIns="25400" bIns="25400" anchor="t">
+            <a:spAutoFit/>
+          </a:bodyPr>
+          <a:lstStyle/>
+          <a:p>
+            <a:pPr algn="l">
+              <a:lnSpc>
+                <a:spcPct val="116000"/>
+              </a:lnSpc>
+              <a:spcBef>
+                <a:spcPts val="0"/>
+              </a:spcBef>
+              <a:spcAft>
+                <a:spcPts val="600"/>
+              </a:spcAft>
+            </a:pPr>
+            <a:r>
+              <a:rPr sz="1200" b="0">
+                <a:solidFill>
+                  <a:srgbClr val="F2F2F2"/>
+                </a:solidFill>
+                <a:latin typeface="Segoe UI"/>
+              </a:rPr>
+              <a:t>• Group channels into taste clusters</a:t>
+            </a:r>
+          </a:p>
+          <a:p>
+            <a:pPr algn="l">
+              <a:lnSpc>
+                <a:spcPct val="116000"/>
+              </a:lnSpc>
+              <a:spcBef>
+                <a:spcPts val="0"/>
+              </a:spcBef>
+              <a:spcAft>
+                <a:spcPts val="600"/>
+              </a:spcAft>
+            </a:pPr>
+            <a:r>
+              <a:rPr sz="1200" b="0">
+                <a:solidFill>
+                  <a:srgbClr val="F2F2F2"/>
+                </a:solidFill>
+                <a:latin typeface="Segoe UI"/>
+              </a:rPr>
+              <a:t>• Each community labeled by its</a:t>
+            </a:r>
+          </a:p>
+          <a:p>
+            <a:pPr algn="l">
+              <a:lnSpc>
+                <a:spcPct val="116000"/>
+              </a:lnSpc>
+              <a:spcBef>
+                <a:spcPts val="0"/>
+              </a:spcBef>
+              <a:spcAft>
+                <a:spcPts val="600"/>
+              </a:spcAft>
+            </a:pPr>
+            <a:r>
+              <a:rPr sz="1200" b="0">
+                <a:solidFill>
+                  <a:srgbClr val="9A9AA2"/>
+                </a:solidFill>
+                <a:latin typeface="Segoe UI"/>
+              </a:rPr>
+              <a:t>  dominant category</a:t>
+            </a:r>
+          </a:p>
+        </p:txBody>
+      </p:sp>
+      <p:sp>
+        <p:nvSpPr>
+          <p:cNvPr id="13" name="TextBox 12"/>
+          <p:cNvSpPr txBox="1"/>
+          <p:nvPr/>
+        </p:nvSpPr>
+        <p:spPr>
+          <a:xfrm>
+            <a:off x="7708392" y="3794760"/>
+            <a:ext cx="3749039" cy="365760"/>
+          </a:xfrm>
+          <a:prstGeom prst="rect">
+            <a:avLst/>
+          </a:prstGeom>
+          <a:noFill/>
+        </p:spPr>
+        <p:txBody>
+          <a:bodyPr wrap="square" lIns="25400" tIns="25400" rIns="25400" bIns="25400" anchor="t">
+            <a:spAutoFit/>
+          </a:bodyPr>
+          <a:lstStyle/>
+          <a:p>
+            <a:pPr algn="l">
+              <a:lnSpc>
+                <a:spcPct val="100000"/>
+              </a:lnSpc>
+              <a:spcBef>
+                <a:spcPts val="0"/>
+              </a:spcBef>
+              <a:spcAft>
+                <a:spcPts val="600"/>
+              </a:spcAft>
+            </a:pPr>
+            <a:r>
+              <a:rPr sz="1600" b="1">
+                <a:solidFill>
+                  <a:srgbClr val="A97BE8"/>
+                </a:solidFill>
+                <a:latin typeface="Segoe UI"/>
+              </a:rPr>
+              <a:t>🗺️  Taste Map</a:t>
+            </a:r>
+          </a:p>
+        </p:txBody>
+      </p:sp>
+      <p:sp>
+        <p:nvSpPr>
+          <p:cNvPr id="14" name="TextBox 13"/>
+          <p:cNvSpPr txBox="1"/>
+          <p:nvPr/>
+        </p:nvSpPr>
+        <p:spPr>
+          <a:xfrm>
+            <a:off x="7708392" y="4142232"/>
+            <a:ext cx="3749039" cy="292608"/>
+          </a:xfrm>
+          <a:prstGeom prst="rect">
+            <a:avLst/>
+          </a:prstGeom>
+          <a:noFill/>
+        </p:spPr>
+        <p:txBody>
+          <a:bodyPr wrap="square" lIns="25400" tIns="25400" rIns="25400" bIns="25400" anchor="t">
+            <a:spAutoFit/>
+          </a:bodyPr>
+          <a:lstStyle/>
+          <a:p>
+            <a:pPr algn="l">
+              <a:lnSpc>
+                <a:spcPct val="100000"/>
+              </a:lnSpc>
+              <a:spcBef>
+                <a:spcPts val="0"/>
+              </a:spcBef>
+              <a:spcAft>
+                <a:spcPts val="600"/>
+              </a:spcAft>
+            </a:pPr>
+            <a:r>
+              <a:rPr sz="1100" b="0">
+                <a:solidFill>
+                  <a:srgbClr val="6A6A72"/>
+                </a:solidFill>
+                <a:latin typeface="Consolas"/>
+              </a:rPr>
+              <a:t>Kruskal · maximum spanning forest</a:t>
+            </a:r>
+          </a:p>
+        </p:txBody>
+      </p:sp>
+      <p:sp>
+        <p:nvSpPr>
+          <p:cNvPr id="15" name="TextBox 14"/>
+          <p:cNvSpPr txBox="1"/>
+          <p:nvPr/>
+        </p:nvSpPr>
+        <p:spPr>
+          <a:xfrm>
+            <a:off x="7708392" y="4453128"/>
+            <a:ext cx="3749039" cy="914400"/>
+          </a:xfrm>
+          <a:prstGeom prst="rect">
+            <a:avLst/>
+          </a:prstGeom>
+          <a:noFill/>
+        </p:spPr>
+        <p:txBody>
+          <a:bodyPr wrap="square" lIns="25400" tIns="25400" rIns="25400" bIns="25400" anchor="t">
+            <a:spAutoFit/>
+          </a:bodyPr>
+          <a:lstStyle/>
+          <a:p>
+            <a:pPr algn="l">
+              <a:lnSpc>
+                <a:spcPct val="116000"/>
+              </a:lnSpc>
+              <a:spcBef>
+                <a:spcPts val="0"/>
+              </a:spcBef>
+              <a:spcAft>
+                <a:spcPts val="600"/>
+              </a:spcAft>
+            </a:pPr>
+            <a:r>
+              <a:rPr sz="1200" b="0">
+                <a:solidFill>
+                  <a:srgbClr val="F2F2F2"/>
+                </a:solidFill>
+                <a:latin typeface="Segoe UI"/>
+              </a:rPr>
+              <a:t>• Minimal backbone linking your taste</a:t>
+            </a:r>
+          </a:p>
+          <a:p>
+            <a:pPr algn="l">
+              <a:lnSpc>
+                <a:spcPct val="116000"/>
+              </a:lnSpc>
+              <a:spcBef>
+                <a:spcPts val="0"/>
+              </a:spcBef>
+              <a:spcAft>
+                <a:spcPts val="600"/>
+              </a:spcAft>
+            </a:pPr>
+            <a:r>
+              <a:rPr sz="1200" b="0">
+                <a:solidFill>
+                  <a:srgbClr val="F2F2F2"/>
+                </a:solidFill>
+                <a:latin typeface="Segoe UI"/>
+              </a:rPr>
+              <a:t>• Rendered as a force-directed SVG</a:t>
+            </a:r>
+          </a:p>
+          <a:p>
+            <a:pPr algn="l">
+              <a:lnSpc>
+                <a:spcPct val="116000"/>
+              </a:lnSpc>
+              <a:spcBef>
+                <a:spcPts val="0"/>
+              </a:spcBef>
+              <a:spcAft>
+                <a:spcPts val="600"/>
+              </a:spcAft>
+            </a:pPr>
+            <a:r>
+              <a:rPr sz="1200" b="0">
+                <a:solidFill>
+                  <a:srgbClr val="9A9AA2"/>
+                </a:solidFill>
+                <a:latin typeface="Segoe UI"/>
+              </a:rPr>
+              <a:t>  (node size = interest score)</a:t>
+            </a:r>
+          </a:p>
+        </p:txBody>
+      </p:sp>
+      <p:sp>
+        <p:nvSpPr>
+          <p:cNvPr id="16" name="Rounded Rectangle 15"/>
+          <p:cNvSpPr/>
+          <p:nvPr/>
+        </p:nvSpPr>
+        <p:spPr>
+          <a:xfrm>
+            <a:off x="7708392" y="5532120"/>
+            <a:ext cx="3703320" cy="713232"/>
+          </a:xfrm>
+          <a:prstGeom prst="roundRect">
+            <a:avLst/>
+          </a:prstGeom>
+          <a:solidFill>
+            <a:srgbClr val="121215"/>
           </a:solidFill>
           <a:ln>
             <a:noFill/>
@@ -23670,14 +25225,14 @@
       </p:sp>
       <p:sp>
         <p:nvSpPr>
-          <p:cNvPr id="9" name="TextBox 8"/>
-          <p:cNvSpPr txBox="1"/>
-          <p:nvPr/>
-        </p:nvSpPr>
-        <p:spPr>
-          <a:xfrm>
-            <a:off x="8321040" y="1691640"/>
-            <a:ext cx="3200400" cy="457200"/>
+          <p:cNvPr id="17" name="TextBox 16"/>
+          <p:cNvSpPr txBox="1"/>
+          <p:nvPr/>
+        </p:nvSpPr>
+        <p:spPr>
+          <a:xfrm>
+            <a:off x="7845552" y="5614416"/>
+            <a:ext cx="3474720" cy="548640"/>
           </a:xfrm>
           <a:prstGeom prst="rect">
             <a:avLst/>
@@ -23692,91 +25247,24 @@
           <a:p>
             <a:pPr algn="l">
               <a:lnSpc>
-                <a:spcPct val="100000"/>
-              </a:lnSpc>
-              <a:spcBef>
-                <a:spcPts val="0"/>
-              </a:spcBef>
-              <a:spcAft>
-                <a:spcPts val="600"/>
-              </a:spcAft>
-            </a:pPr>
-            <a:r>
-              <a:rPr sz="1600" b="1">
+                <a:spcPct val="115000"/>
+              </a:lnSpc>
+              <a:spcBef>
+                <a:spcPts val="0"/>
+              </a:spcBef>
+              <a:spcAft>
+                <a:spcPts val="600"/>
+              </a:spcAft>
+            </a:pPr>
+            <a:r>
+              <a:rPr sz="1100" b="1">
                 <a:solidFill>
                   <a:srgbClr val="FF3B3B"/>
                 </a:solidFill>
-                <a:latin typeface="Segoe UI"/>
-              </a:rPr>
-              <a:t>Screen Layout</a:t>
-            </a:r>
-          </a:p>
-        </p:txBody>
-      </p:sp>
-      <p:sp>
-        <p:nvSpPr>
-          <p:cNvPr id="10" name="TextBox 9"/>
-          <p:cNvSpPr txBox="1"/>
-          <p:nvPr/>
-        </p:nvSpPr>
-        <p:spPr>
-          <a:xfrm>
-            <a:off x="8321040" y="2240280"/>
-            <a:ext cx="3246120" cy="4023360"/>
-          </a:xfrm>
-          <a:prstGeom prst="rect">
-            <a:avLst/>
-          </a:prstGeom>
-          <a:noFill/>
-        </p:spPr>
-        <p:txBody>
-          <a:bodyPr wrap="square" lIns="25400" tIns="25400" rIns="25400" bIns="25400" anchor="t">
-            <a:spAutoFit/>
-          </a:bodyPr>
-          <a:lstStyle/>
-          <a:p>
-            <a:pPr algn="l">
-              <a:lnSpc>
-                <a:spcPct val="112000"/>
-              </a:lnSpc>
-              <a:spcBef>
-                <a:spcPts val="0"/>
-              </a:spcBef>
-              <a:spcAft>
-                <a:spcPts val="600"/>
-              </a:spcAft>
-            </a:pPr>
-            <a:r>
-              <a:rPr sz="1300" b="0">
-                <a:solidFill>
-                  <a:srgbClr val="F2F2F2"/>
-                </a:solidFill>
-                <a:latin typeface="Segoe UI"/>
-              </a:rPr>
-              <a:t>• Per-channel </a:t>
-            </a:r>
-            <a:r>
-              <a:rPr sz="1300" b="1">
-                <a:solidFill>
-                  <a:srgbClr val="F2F2F2"/>
-                </a:solidFill>
-                <a:latin typeface="Segoe UI"/>
-              </a:rPr>
-              <a:t>Interest Score·rank</a:t>
-            </a:r>
-          </a:p>
-          <a:p>
-            <a:pPr algn="l">
-              <a:lnSpc>
-                <a:spcPct val="112000"/>
-              </a:lnSpc>
-              <a:spcBef>
-                <a:spcPts val="0"/>
-              </a:spcBef>
-              <a:spcAft>
-                <a:spcPts val="600"/>
-              </a:spcAft>
-            </a:pPr>
+                <a:latin typeface="Consolas"/>
+              </a:rPr>
+              <a:t>Algorithms</a:t>
+            </a:r>
             <a:r>
               <a:rPr sz="1100" b="0">
                 <a:solidFill>
@@ -23784,276 +25272,48 @@
                 </a:solidFill>
                 <a:latin typeface="Segoe UI"/>
               </a:rPr>
-              <a:t>  (#rank · cmt · likes · subs)</a:t>
-            </a:r>
-          </a:p>
-          <a:p>
-            <a:pPr algn="l">
-              <a:lnSpc>
-                <a:spcPct val="112000"/>
-              </a:lnSpc>
-              <a:spcBef>
-                <a:spcPts val="0"/>
-              </a:spcBef>
-              <a:spcAft>
-                <a:spcPts val="600"/>
-              </a:spcAft>
-            </a:pPr>
-            <a:endParaRPr sz="1100" b="0">
-              <a:solidFill>
-                <a:srgbClr val="9A9AA2"/>
-              </a:solidFill>
-              <a:latin typeface="Segoe UI"/>
-            </a:endParaRPr>
-          </a:p>
-          <a:p>
-            <a:pPr algn="l">
-              <a:lnSpc>
-                <a:spcPct val="112000"/>
-              </a:lnSpc>
-              <a:spcBef>
-                <a:spcPts val="0"/>
-              </a:spcBef>
-              <a:spcAft>
-                <a:spcPts val="600"/>
-              </a:spcAft>
-            </a:pPr>
-            <a:r>
-              <a:rPr sz="1300" b="0">
-                <a:solidFill>
-                  <a:srgbClr val="F2F2F2"/>
-                </a:solidFill>
-                <a:latin typeface="Segoe UI"/>
-              </a:rPr>
-              <a:t>• Zero-score channels sorted</a:t>
-            </a:r>
-          </a:p>
-          <a:p>
-            <a:pPr algn="l">
-              <a:lnSpc>
-                <a:spcPct val="112000"/>
-              </a:lnSpc>
-              <a:spcBef>
-                <a:spcPts val="0"/>
-              </a:spcBef>
-              <a:spcAft>
-                <a:spcPts val="600"/>
-              </a:spcAft>
-            </a:pPr>
-            <a:r>
-              <a:rPr sz="1300" b="0">
+              <a:t>  Union-Find · Kruskal MST</a:t>
+            </a:r>
+          </a:p>
+          <a:p>
+            <a:pPr algn="l">
+              <a:lnSpc>
+                <a:spcPct val="115000"/>
+              </a:lnSpc>
+              <a:spcBef>
+                <a:spcPts val="0"/>
+              </a:spcBef>
+              <a:spcAft>
+                <a:spcPts val="600"/>
+              </a:spcAft>
+            </a:pPr>
+            <a:r>
+              <a:rPr sz="1100" b="0">
                 <a:solidFill>
                   <a:srgbClr val="9A9AA2"/>
                 </a:solidFill>
                 <a:latin typeface="Segoe UI"/>
               </a:rPr>
-              <a:t>  to the bottom as dormant</a:t>
-            </a:r>
-          </a:p>
-          <a:p>
-            <a:pPr algn="l">
-              <a:lnSpc>
-                <a:spcPct val="112000"/>
-              </a:lnSpc>
-              <a:spcBef>
-                <a:spcPts val="0"/>
-              </a:spcBef>
-              <a:spcAft>
-                <a:spcPts val="600"/>
-              </a:spcAft>
-            </a:pPr>
-            <a:endParaRPr sz="1300" b="0">
-              <a:solidFill>
-                <a:srgbClr val="9A9AA2"/>
-              </a:solidFill>
-              <a:latin typeface="Segoe UI"/>
-            </a:endParaRPr>
-          </a:p>
-          <a:p>
-            <a:pPr algn="l">
-              <a:lnSpc>
-                <a:spcPct val="112000"/>
-              </a:lnSpc>
-              <a:spcBef>
-                <a:spcPts val="0"/>
-              </a:spcBef>
-              <a:spcAft>
-                <a:spcPts val="600"/>
-              </a:spcAft>
-            </a:pPr>
-            <a:r>
-              <a:rPr sz="1300" b="0">
-                <a:solidFill>
-                  <a:srgbClr val="F2F2F2"/>
-                </a:solidFill>
-                <a:latin typeface="Segoe UI"/>
-              </a:rPr>
-              <a:t>• Bottom </a:t>
-            </a:r>
-            <a:r>
-              <a:rPr sz="1300" b="1">
+              <a:t>Reuses categoryScores vectors → </a:t>
+            </a:r>
+            <a:r>
+              <a:rPr sz="1100" b="1">
                 <a:solidFill>
                   <a:srgbClr val="2ECC71"/>
                 </a:solidFill>
                 <a:latin typeface="Segoe UI"/>
               </a:rPr>
-              <a:t>🤖 AI Analysis Tools</a:t>
-            </a:r>
-          </a:p>
-          <a:p>
-            <a:pPr algn="l">
-              <a:lnSpc>
-                <a:spcPct val="112000"/>
-              </a:lnSpc>
-              <a:spcBef>
-                <a:spcPts val="0"/>
-              </a:spcBef>
-              <a:spcAft>
-                <a:spcPts val="600"/>
-              </a:spcAft>
-            </a:pPr>
-            <a:r>
-              <a:rPr sz="1300" b="0">
-                <a:solidFill>
-                  <a:srgbClr val="9A9AA2"/>
-                </a:solidFill>
-                <a:latin typeface="Segoe UI"/>
-              </a:rPr>
-              <a:t>  — 3 selectable modes</a:t>
-            </a:r>
-          </a:p>
-          <a:p>
-            <a:pPr algn="l">
-              <a:lnSpc>
-                <a:spcPct val="112000"/>
-              </a:lnSpc>
-              <a:spcBef>
-                <a:spcPts val="0"/>
-              </a:spcBef>
-              <a:spcAft>
-                <a:spcPts val="600"/>
-              </a:spcAft>
-            </a:pPr>
-            <a:r>
-              <a:rPr sz="1200" b="0">
-                <a:solidFill>
-                  <a:srgbClr val="9A9AA2"/>
-                </a:solidFill>
-                <a:latin typeface="Segoe UI"/>
-              </a:rPr>
-              <a:t>   - Viewing-Taste Persona</a:t>
-            </a:r>
-          </a:p>
-          <a:p>
-            <a:pPr algn="l">
-              <a:lnSpc>
-                <a:spcPct val="112000"/>
-              </a:lnSpc>
-              <a:spcBef>
-                <a:spcPts val="0"/>
-              </a:spcBef>
-              <a:spcAft>
-                <a:spcPts val="600"/>
-              </a:spcAft>
-            </a:pPr>
-            <a:r>
-              <a:rPr sz="1200" b="0">
-                <a:solidFill>
-                  <a:srgbClr val="9A9AA2"/>
-                </a:solidFill>
-                <a:latin typeface="Segoe UI"/>
-              </a:rPr>
-              <a:t>   - Subscription Cleanup Coach</a:t>
-            </a:r>
-          </a:p>
-          <a:p>
-            <a:pPr algn="l">
-              <a:lnSpc>
-                <a:spcPct val="112000"/>
-              </a:lnSpc>
-              <a:spcBef>
-                <a:spcPts val="0"/>
-              </a:spcBef>
-              <a:spcAft>
-                <a:spcPts val="600"/>
-              </a:spcAft>
-            </a:pPr>
-            <a:r>
-              <a:rPr sz="1200" b="0">
-                <a:solidFill>
-                  <a:srgbClr val="9A9AA2"/>
-                </a:solidFill>
-                <a:latin typeface="Segoe UI"/>
-              </a:rPr>
-              <a:t>   - New Channel Recommendation</a:t>
-            </a:r>
-          </a:p>
-          <a:p>
-            <a:pPr algn="l">
-              <a:lnSpc>
-                <a:spcPct val="112000"/>
-              </a:lnSpc>
-              <a:spcBef>
-                <a:spcPts val="0"/>
-              </a:spcBef>
-              <a:spcAft>
-                <a:spcPts val="600"/>
-              </a:spcAft>
-            </a:pPr>
-            <a:endParaRPr sz="1200" b="0">
-              <a:solidFill>
-                <a:srgbClr val="9A9AA2"/>
-              </a:solidFill>
-              <a:latin typeface="Segoe UI"/>
-            </a:endParaRPr>
-          </a:p>
-          <a:p>
-            <a:pPr algn="l">
-              <a:lnSpc>
-                <a:spcPct val="112000"/>
-              </a:lnSpc>
-              <a:spcBef>
-                <a:spcPts val="0"/>
-              </a:spcBef>
-              <a:spcAft>
-                <a:spcPts val="600"/>
-              </a:spcAft>
-            </a:pPr>
-            <a:r>
-              <a:rPr sz="1300" b="0">
-                <a:solidFill>
-                  <a:srgbClr val="F2F2F2"/>
-                </a:solidFill>
-                <a:latin typeface="Segoe UI"/>
-              </a:rPr>
-              <a:t>• Floating button re-opens</a:t>
-            </a:r>
-          </a:p>
-          <a:p>
-            <a:pPr algn="l">
-              <a:lnSpc>
-                <a:spcPct val="112000"/>
-              </a:lnSpc>
-              <a:spcBef>
-                <a:spcPts val="0"/>
-              </a:spcBef>
-              <a:spcAft>
-                <a:spcPts val="600"/>
-              </a:spcAft>
-            </a:pPr>
-            <a:r>
-              <a:rPr sz="1300" b="0">
-                <a:solidFill>
-                  <a:srgbClr val="9A9AA2"/>
-                </a:solidFill>
-                <a:latin typeface="Segoe UI"/>
-              </a:rPr>
-              <a:t>  the tools anytime</a:t>
+              <a:t>0 extra API</a:t>
             </a:r>
           </a:p>
         </p:txBody>
       </p:sp>
     </p:spTree>
+    <p:extLst>
+      <p:ext uri="{BB962C8B-B14F-4D97-AF65-F5344CB8AC3E}">
+        <p14:creationId xmlns:p14="http://schemas.microsoft.com/office/powerpoint/2010/main" val="259452641"/>
+      </p:ext>
+    </p:extLst>
   </p:cSld>
   <p:clrMapOvr>
     <a:masterClrMapping/>

--- a/구독채널_관심도_분석기_발표.pptx
+++ b/구독채널_관심도_분석기_발표.pptx
@@ -7762,7 +7762,7 @@
                 </a:solidFill>
                 <a:latin typeface="Segoe UI"/>
               </a:rPr>
-              <a:t>Zero extra API/LLM calls.</a:t>
+              <a:t>Rule-based core (0 LLM) + optional Solar LLM refinement.</a:t>
             </a:r>
           </a:p>
         </p:txBody>
@@ -8613,7 +8613,7 @@
         <p:spPr>
           <a:xfrm>
             <a:off x="502920" y="5257800"/>
-            <a:ext cx="11183112" cy="1005840"/>
+            <a:ext cx="11183112" cy="1481328"/>
           </a:xfrm>
           <a:prstGeom prst="roundRect">
             <a:avLst/>
@@ -8711,57 +8711,110 @@
         </p:nvSpPr>
         <p:spPr>
           <a:xfrm>
+            <a:off x="731520" y="6199632"/>
+            <a:ext cx="10881360" cy="457200"/>
+          </a:xfrm>
+          <a:prstGeom prst="rect">
+            <a:avLst/>
+          </a:prstGeom>
+          <a:noFill/>
+        </p:spPr>
+        <p:txBody>
+          <a:bodyPr wrap="square" lIns="25400" tIns="25400" rIns="25400" bIns="25400" anchor="t">
+            <a:spAutoFit/>
+          </a:bodyPr>
+          <a:lstStyle/>
+          <a:p>
+            <a:pPr algn="l">
+              <a:lnSpc>
+                <a:spcPct val="100000"/>
+              </a:lnSpc>
+              <a:spcBef>
+                <a:spcPts val="0"/>
+              </a:spcBef>
+              <a:spcAft>
+                <a:spcPts val="600"/>
+              </a:spcAft>
+            </a:pPr>
+            <a:r>
+              <a:rPr sz="1300" b="0">
+                <a:solidFill>
+                  <a:srgbClr val="F2F2F2"/>
+                </a:solidFill>
+                <a:latin typeface="Segoe UI"/>
+              </a:rPr>
+              <a:t>→ This classification directly enables the next step's </a:t>
+            </a:r>
+            <a:r>
+              <a:rPr sz="1300" b="1">
+                <a:solidFill>
+                  <a:srgbClr val="F4A844"/>
+                </a:solidFill>
+                <a:latin typeface="Segoe UI"/>
+              </a:rPr>
+              <a:t>category diversity</a:t>
+            </a:r>
+            <a:r>
+              <a:rPr sz="1300" b="0">
+                <a:solidFill>
+                  <a:srgbClr val="9A9AA2"/>
+                </a:solidFill>
+                <a:latin typeface="Segoe UI"/>
+              </a:rPr>
+              <a:t> in recommendations (≥1 each for cooking·economy·gaming).</a:t>
+            </a:r>
+          </a:p>
+        </p:txBody>
+      </p:sp>
+      <p:sp>
+        <p:nvSpPr>
+          <p:cNvPr id="23" name="TextBox 22"/>
+          <p:cNvSpPr txBox="1"/>
+          <p:nvPr/>
+        </p:nvSpPr>
+        <p:spPr>
+          <a:xfrm>
             <a:off x="731520" y="5742432"/>
-            <a:ext cx="10881360" cy="457200"/>
-          </a:xfrm>
-          <a:prstGeom prst="rect">
-            <a:avLst/>
-          </a:prstGeom>
-          <a:noFill/>
-        </p:spPr>
-        <p:txBody>
-          <a:bodyPr wrap="square" lIns="25400" tIns="25400" rIns="25400" bIns="25400" anchor="t">
-            <a:spAutoFit/>
-          </a:bodyPr>
-          <a:lstStyle/>
-          <a:p>
-            <a:pPr algn="l">
-              <a:lnSpc>
-                <a:spcPct val="100000"/>
-              </a:lnSpc>
-              <a:spcBef>
-                <a:spcPts val="0"/>
-              </a:spcBef>
-              <a:spcAft>
-                <a:spcPts val="600"/>
-              </a:spcAft>
-            </a:pPr>
-            <a:r>
-              <a:rPr sz="1300" b="0">
+            <a:ext cx="10881360" cy="411480"/>
+          </a:xfrm>
+          <a:prstGeom prst="rect">
+            <a:avLst/>
+          </a:prstGeom>
+          <a:noFill/>
+        </p:spPr>
+        <p:txBody>
+          <a:bodyPr wrap="square" lIns="25400" rIns="25400" tIns="25400" bIns="25400">
+            <a:spAutoFit/>
+          </a:bodyPr>
+          <a:lstStyle/>
+          <a:p>
+            <a:pPr algn="l"/>
+            <a:r>
+              <a:rPr sz="1200" b="1">
+                <a:solidFill>
+                  <a:srgbClr val="FF3B3B"/>
+                </a:solidFill>
+                <a:latin typeface="Consolas"/>
+              </a:rPr>
+              <a:t>Accuracy pipeline</a:t>
+            </a:r>
+            <a:r>
+              <a:rPr sz="1200" b="0">
                 <a:solidFill>
                   <a:srgbClr val="F2F2F2"/>
                 </a:solidFill>
                 <a:latin typeface="Segoe UI"/>
               </a:rPr>
-              <a:t>→ This classification directly enables the next step's </a:t>
-            </a:r>
-            <a:r>
-              <a:rPr sz="1300" b="1">
-                <a:solidFill>
-                  <a:srgbClr val="F4A844"/>
-                </a:solidFill>
-                <a:latin typeface="Segoe UI"/>
-              </a:rPr>
-              <a:t>category diversity</a:t>
-            </a:r>
-            <a:r>
-              <a:rPr sz="1300" b="0">
+              <a:t>   Rule-based classify → Video-title 2-pass → Solar LLM correction</a:t>
+            </a:r>
+            <a:r>
+              <a:rPr sz="1150" b="0">
                 <a:solidFill>
                   <a:srgbClr val="9A9AA2"/>
                 </a:solidFill>
                 <a:latin typeface="Segoe UI"/>
               </a:rPr>
-              <a:t> in recommendations (≥1 each for cooking·economy·gaming).</a:t>
+              <a:t>   (fills unclassified · fixes mis-tags)</a:t>
             </a:r>
           </a:p>
         </p:txBody>
